--- a/templates/slide/Midnight_Executive_30_Template.pptx
+++ b/templates/slide/Midnight_Executive_30_Template.pptx
@@ -237,7 +237,15 @@
         </p:spPr>
         <p:txBody>
           <a:bodyPr wrap="square" anchor="t" anchorCtr="0"/>
-          <a:lstStyle/>
+          <a:lstStyle>
+            <a:defPPr>
+              <a:defRPr>
+                <a:solidFill>
+                  <a:srgbClr val="FFFFFF"/>
+                </a:solidFill>
+              </a:defRPr>
+            </a:defPPr>
+          </a:lstStyle>
           <a:p>
             <a:pPr algn="l">
               <a:buNone/>
@@ -267,7 +275,15 @@
         </p:spPr>
         <p:txBody>
           <a:bodyPr wrap="square" anchor="t" anchorCtr="0"/>
-          <a:lstStyle/>
+          <a:lstStyle>
+            <a:defPPr>
+              <a:defRPr>
+                <a:solidFill>
+                  <a:srgbClr val="FFFFFF"/>
+                </a:solidFill>
+              </a:defRPr>
+            </a:defPPr>
+          </a:lstStyle>
           <a:p>
             <a:pPr algn="l">
               <a:buNone/>
@@ -297,7 +313,15 @@
         </p:spPr>
         <p:txBody>
           <a:bodyPr wrap="square" anchor="t" anchorCtr="0"/>
-          <a:lstStyle/>
+          <a:lstStyle>
+            <a:defPPr>
+              <a:defRPr>
+                <a:solidFill>
+                  <a:srgbClr val="CADCFC"/>
+                </a:solidFill>
+              </a:defRPr>
+            </a:defPPr>
+          </a:lstStyle>
           <a:p>
             <a:pPr algn="l">
               <a:buNone/>
@@ -327,7 +351,15 @@
         </p:spPr>
         <p:txBody>
           <a:bodyPr wrap="square" anchor="t" anchorCtr="0"/>
-          <a:lstStyle/>
+          <a:lstStyle>
+            <a:defPPr>
+              <a:defRPr>
+                <a:solidFill>
+                  <a:srgbClr val="CADCFC"/>
+                </a:solidFill>
+              </a:defRPr>
+            </a:defPPr>
+          </a:lstStyle>
           <a:p>
             <a:pPr algn="l">
               <a:buNone/>
@@ -357,7 +389,15 @@
         </p:spPr>
         <p:txBody>
           <a:bodyPr wrap="square" anchor="t" anchorCtr="0"/>
-          <a:lstStyle/>
+          <a:lstStyle>
+            <a:defPPr>
+              <a:defRPr>
+                <a:solidFill>
+                  <a:srgbClr val="CADCFC"/>
+                </a:solidFill>
+              </a:defRPr>
+            </a:defPPr>
+          </a:lstStyle>
           <a:p>
             <a:pPr algn="l">
               <a:buNone/>
@@ -432,7 +472,15 @@
         </p:spPr>
         <p:txBody>
           <a:bodyPr wrap="square" anchor="t" anchorCtr="0"/>
-          <a:lstStyle/>
+          <a:lstStyle>
+            <a:defPPr>
+              <a:defRPr>
+                <a:solidFill>
+                  <a:srgbClr val="FFFFFF"/>
+                </a:solidFill>
+              </a:defRPr>
+            </a:defPPr>
+          </a:lstStyle>
           <a:p>
             <a:pPr algn="l">
               <a:buNone/>
@@ -462,7 +510,15 @@
         </p:spPr>
         <p:txBody>
           <a:bodyPr wrap="square" anchor="t" anchorCtr="0"/>
-          <a:lstStyle/>
+          <a:lstStyle>
+            <a:defPPr>
+              <a:defRPr>
+                <a:solidFill>
+                  <a:srgbClr val="CADCFC"/>
+                </a:solidFill>
+              </a:defRPr>
+            </a:defPPr>
+          </a:lstStyle>
           <a:p>
             <a:pPr algn="l">
               <a:buNone/>
@@ -540,7 +596,15 @@
         </p:spPr>
         <p:txBody>
           <a:bodyPr wrap="square" anchor="t" anchorCtr="0"/>
-          <a:lstStyle/>
+          <a:lstStyle>
+            <a:defPPr>
+              <a:defRPr>
+                <a:solidFill>
+                  <a:srgbClr val="1E293B"/>
+                </a:solidFill>
+              </a:defRPr>
+            </a:defPPr>
+          </a:lstStyle>
           <a:p>
             <a:pPr algn="l">
               <a:buNone/>
@@ -570,7 +634,15 @@
         </p:spPr>
         <p:txBody>
           <a:bodyPr wrap="square" anchor="t" anchorCtr="0"/>
-          <a:lstStyle/>
+          <a:lstStyle>
+            <a:defPPr>
+              <a:defRPr>
+                <a:solidFill>
+                  <a:srgbClr val="1E293B"/>
+                </a:solidFill>
+              </a:defRPr>
+            </a:defPPr>
+          </a:lstStyle>
           <a:p>
             <a:pPr algn="l">
               <a:buNone/>
@@ -600,7 +672,15 @@
         </p:spPr>
         <p:txBody>
           <a:bodyPr wrap="square" anchor="t" anchorCtr="0"/>
-          <a:lstStyle/>
+          <a:lstStyle>
+            <a:defPPr>
+              <a:defRPr>
+                <a:solidFill>
+                  <a:srgbClr val="94A3B8"/>
+                </a:solidFill>
+              </a:defRPr>
+            </a:defPPr>
+          </a:lstStyle>
           <a:p>
             <a:pPr algn="r">
               <a:buNone/>
@@ -675,7 +755,15 @@
         </p:spPr>
         <p:txBody>
           <a:bodyPr wrap="square" anchor="t" anchorCtr="0"/>
-          <a:lstStyle/>
+          <a:lstStyle>
+            <a:defPPr>
+              <a:defRPr>
+                <a:solidFill>
+                  <a:srgbClr val="FFFFFF"/>
+                </a:solidFill>
+              </a:defRPr>
+            </a:defPPr>
+          </a:lstStyle>
           <a:p>
             <a:pPr algn="l">
               <a:buNone/>
@@ -705,7 +793,15 @@
         </p:spPr>
         <p:txBody>
           <a:bodyPr wrap="square" anchor="t" anchorCtr="0"/>
-          <a:lstStyle/>
+          <a:lstStyle>
+            <a:defPPr>
+              <a:defRPr>
+                <a:solidFill>
+                  <a:srgbClr val="CADCFC"/>
+                </a:solidFill>
+              </a:defRPr>
+            </a:defPPr>
+          </a:lstStyle>
           <a:p>
             <a:pPr algn="l">
               <a:buNone/>
@@ -735,7 +831,15 @@
         </p:spPr>
         <p:txBody>
           <a:bodyPr wrap="square" anchor="t" anchorCtr="0"/>
-          <a:lstStyle/>
+          <a:lstStyle>
+            <a:defPPr>
+              <a:defRPr>
+                <a:solidFill>
+                  <a:srgbClr val="1E293B"/>
+                </a:solidFill>
+              </a:defRPr>
+            </a:defPPr>
+          </a:lstStyle>
           <a:p>
             <a:pPr algn="l">
               <a:buNone/>
@@ -765,7 +869,15 @@
         </p:spPr>
         <p:txBody>
           <a:bodyPr wrap="square" anchor="t" anchorCtr="0"/>
-          <a:lstStyle/>
+          <a:lstStyle>
+            <a:defPPr>
+              <a:defRPr>
+                <a:solidFill>
+                  <a:srgbClr val="1E293B"/>
+                </a:solidFill>
+              </a:defRPr>
+            </a:defPPr>
+          </a:lstStyle>
           <a:p>
             <a:pPr algn="l">
               <a:buNone/>
@@ -795,7 +907,15 @@
         </p:spPr>
         <p:txBody>
           <a:bodyPr wrap="square" anchor="t" anchorCtr="0"/>
-          <a:lstStyle/>
+          <a:lstStyle>
+            <a:defPPr>
+              <a:defRPr>
+                <a:solidFill>
+                  <a:srgbClr val="94A3B8"/>
+                </a:solidFill>
+              </a:defRPr>
+            </a:defPPr>
+          </a:lstStyle>
           <a:p>
             <a:pPr algn="r">
               <a:buNone/>
@@ -960,7 +1080,15 @@
         </p:spPr>
         <p:txBody>
           <a:bodyPr wrap="square" anchor="t" anchorCtr="0"/>
-          <a:lstStyle/>
+          <a:lstStyle>
+            <a:defPPr>
+              <a:defRPr>
+                <a:solidFill>
+                  <a:srgbClr val="FFFFFF"/>
+                </a:solidFill>
+              </a:defRPr>
+            </a:defPPr>
+          </a:lstStyle>
           <a:p>
             <a:pPr algn="l">
               <a:buNone/>
@@ -990,7 +1118,15 @@
         </p:spPr>
         <p:txBody>
           <a:bodyPr wrap="square" anchor="t" anchorCtr="0"/>
-          <a:lstStyle/>
+          <a:lstStyle>
+            <a:defPPr>
+              <a:defRPr>
+                <a:solidFill>
+                  <a:srgbClr val="FFFFFF"/>
+                </a:solidFill>
+              </a:defRPr>
+            </a:defPPr>
+          </a:lstStyle>
           <a:p>
             <a:pPr algn="l">
               <a:buNone/>
@@ -1020,7 +1156,15 @@
         </p:spPr>
         <p:txBody>
           <a:bodyPr wrap="square" anchor="t" anchorCtr="0"/>
-          <a:lstStyle/>
+          <a:lstStyle>
+            <a:defPPr>
+              <a:defRPr>
+                <a:solidFill>
+                  <a:srgbClr val="CADCFC"/>
+                </a:solidFill>
+              </a:defRPr>
+            </a:defPPr>
+          </a:lstStyle>
           <a:p>
             <a:pPr algn="l">
               <a:buNone/>
@@ -1050,7 +1194,15 @@
         </p:spPr>
         <p:txBody>
           <a:bodyPr wrap="square" anchor="t" anchorCtr="0"/>
-          <a:lstStyle/>
+          <a:lstStyle>
+            <a:defPPr>
+              <a:defRPr>
+                <a:solidFill>
+                  <a:srgbClr val="CADCFC"/>
+                </a:solidFill>
+              </a:defRPr>
+            </a:defPPr>
+          </a:lstStyle>
           <a:p>
             <a:pPr algn="l">
               <a:buNone/>
@@ -1084,7 +1236,15 @@
         </p:spPr>
         <p:txBody>
           <a:bodyPr wrap="square" anchor="t" anchorCtr="0"/>
-          <a:lstStyle/>
+          <a:lstStyle>
+            <a:defPPr>
+              <a:defRPr>
+                <a:solidFill>
+                  <a:srgbClr val="CADCFC"/>
+                </a:solidFill>
+              </a:defRPr>
+            </a:defPPr>
+          </a:lstStyle>
           <a:p>
             <a:pPr algn="l">
               <a:buNone/>
@@ -1287,7 +1447,15 @@
         </p:spPr>
         <p:txBody>
           <a:bodyPr wrap="square" anchor="t" anchorCtr="0"/>
-          <a:lstStyle/>
+          <a:lstStyle>
+            <a:defPPr>
+              <a:defRPr>
+                <a:solidFill>
+                  <a:srgbClr val="FFFFFF"/>
+                </a:solidFill>
+              </a:defRPr>
+            </a:defPPr>
+          </a:lstStyle>
           <a:p>
             <a:pPr algn="l">
               <a:buNone/>
@@ -1317,7 +1485,15 @@
         </p:spPr>
         <p:txBody>
           <a:bodyPr wrap="square" anchor="t" anchorCtr="0"/>
-          <a:lstStyle/>
+          <a:lstStyle>
+            <a:defPPr>
+              <a:defRPr>
+                <a:solidFill>
+                  <a:srgbClr val="FFFFFF"/>
+                </a:solidFill>
+              </a:defRPr>
+            </a:defPPr>
+          </a:lstStyle>
           <a:p>
             <a:pPr algn="l">
               <a:buNone/>
@@ -1347,7 +1523,15 @@
         </p:spPr>
         <p:txBody>
           <a:bodyPr wrap="square" anchor="t" anchorCtr="0"/>
-          <a:lstStyle/>
+          <a:lstStyle>
+            <a:defPPr>
+              <a:defRPr>
+                <a:solidFill>
+                  <a:srgbClr val="CADCFC"/>
+                </a:solidFill>
+              </a:defRPr>
+            </a:defPPr>
+          </a:lstStyle>
           <a:p>
             <a:pPr algn="l">
               <a:buNone/>
@@ -1377,7 +1561,15 @@
         </p:spPr>
         <p:txBody>
           <a:bodyPr wrap="square" anchor="t" anchorCtr="0"/>
-          <a:lstStyle/>
+          <a:lstStyle>
+            <a:defPPr>
+              <a:defRPr>
+                <a:solidFill>
+                  <a:srgbClr val="CADCFC"/>
+                </a:solidFill>
+              </a:defRPr>
+            </a:defPPr>
+          </a:lstStyle>
           <a:p>
             <a:pPr algn="l">
               <a:buNone/>
@@ -1408,7 +1600,15 @@
         </p:spPr>
         <p:txBody>
           <a:bodyPr wrap="square" anchor="t" anchorCtr="0"/>
-          <a:lstStyle/>
+          <a:lstStyle>
+            <a:defPPr>
+              <a:defRPr>
+                <a:solidFill>
+                  <a:srgbClr val="CADCFC"/>
+                </a:solidFill>
+              </a:defRPr>
+            </a:defPPr>
+          </a:lstStyle>
           <a:p>
             <a:pPr algn="l">
               <a:buNone/>
@@ -1541,7 +1741,15 @@
         </p:spPr>
         <p:txBody>
           <a:bodyPr wrap="square" anchor="t" anchorCtr="0"/>
-          <a:lstStyle/>
+          <a:lstStyle>
+            <a:defPPr>
+              <a:defRPr>
+                <a:solidFill>
+                  <a:srgbClr val="3B82F6"/>
+                </a:solidFill>
+              </a:defRPr>
+            </a:defPPr>
+          </a:lstStyle>
           <a:p>
             <a:pPr algn="l">
               <a:buNone/>
@@ -1571,7 +1779,15 @@
         </p:spPr>
         <p:txBody>
           <a:bodyPr wrap="square" anchor="t" anchorCtr="0"/>
-          <a:lstStyle/>
+          <a:lstStyle>
+            <a:defPPr>
+              <a:defRPr>
+                <a:solidFill>
+                  <a:srgbClr val="FFFFFF"/>
+                </a:solidFill>
+              </a:defRPr>
+            </a:defPPr>
+          </a:lstStyle>
           <a:p>
             <a:pPr algn="l">
               <a:buNone/>
@@ -1601,7 +1817,15 @@
         </p:spPr>
         <p:txBody>
           <a:bodyPr wrap="square" anchor="t" anchorCtr="0"/>
-          <a:lstStyle/>
+          <a:lstStyle>
+            <a:defPPr>
+              <a:defRPr>
+                <a:solidFill>
+                  <a:srgbClr val="CADCFC"/>
+                </a:solidFill>
+              </a:defRPr>
+            </a:defPPr>
+          </a:lstStyle>
           <a:p>
             <a:pPr algn="l">
               <a:buNone/>
@@ -1702,7 +1926,15 @@
         </p:spPr>
         <p:txBody>
           <a:bodyPr wrap="square" anchor="t" anchorCtr="0"/>
-          <a:lstStyle/>
+          <a:lstStyle>
+            <a:defPPr>
+              <a:defRPr>
+                <a:solidFill>
+                  <a:srgbClr val="3B82F6"/>
+                </a:solidFill>
+              </a:defRPr>
+            </a:defPPr>
+          </a:lstStyle>
           <a:p>
             <a:pPr algn="ctr">
               <a:buNone/>
@@ -1732,7 +1964,15 @@
         </p:spPr>
         <p:txBody>
           <a:bodyPr wrap="square" anchor="t" anchorCtr="0"/>
-          <a:lstStyle/>
+          <a:lstStyle>
+            <a:defPPr>
+              <a:defRPr>
+                <a:solidFill>
+                  <a:srgbClr val="CADCFC"/>
+                </a:solidFill>
+              </a:defRPr>
+            </a:defPPr>
+          </a:lstStyle>
           <a:p>
             <a:pPr algn="ctr">
               <a:buNone/>
@@ -1762,7 +2002,15 @@
         </p:spPr>
         <p:txBody>
           <a:bodyPr wrap="square" anchor="t" anchorCtr="0"/>
-          <a:lstStyle/>
+          <a:lstStyle>
+            <a:defPPr>
+              <a:defRPr>
+                <a:solidFill>
+                  <a:srgbClr val="FFFFFF"/>
+                </a:solidFill>
+              </a:defRPr>
+            </a:defPPr>
+          </a:lstStyle>
           <a:p>
             <a:pPr algn="l">
               <a:buNone/>
@@ -1792,7 +2040,15 @@
         </p:spPr>
         <p:txBody>
           <a:bodyPr wrap="square" anchor="t" anchorCtr="0"/>
-          <a:lstStyle/>
+          <a:lstStyle>
+            <a:defPPr>
+              <a:defRPr>
+                <a:solidFill>
+                  <a:srgbClr val="CADCFC"/>
+                </a:solidFill>
+              </a:defRPr>
+            </a:defPPr>
+          </a:lstStyle>
           <a:p>
             <a:pPr algn="l">
               <a:buNone/>
@@ -1955,7 +2211,15 @@
         </p:spPr>
         <p:txBody>
           <a:bodyPr wrap="square" anchor="t" anchorCtr="0"/>
-          <a:lstStyle/>
+          <a:lstStyle>
+            <a:defPPr>
+              <a:defRPr>
+                <a:solidFill>
+                  <a:srgbClr val="3B82F6"/>
+                </a:solidFill>
+              </a:defRPr>
+            </a:defPPr>
+          </a:lstStyle>
           <a:p>
             <a:pPr algn="l">
               <a:buNone/>
@@ -1985,7 +2249,15 @@
         </p:spPr>
         <p:txBody>
           <a:bodyPr wrap="square" anchor="t" anchorCtr="0"/>
-          <a:lstStyle/>
+          <a:lstStyle>
+            <a:defPPr>
+              <a:defRPr>
+                <a:solidFill>
+                  <a:srgbClr val="FFFFFF"/>
+                </a:solidFill>
+              </a:defRPr>
+            </a:defPPr>
+          </a:lstStyle>
           <a:p>
             <a:pPr algn="l">
               <a:buNone/>
@@ -2015,7 +2287,15 @@
         </p:spPr>
         <p:txBody>
           <a:bodyPr wrap="square" anchor="t" anchorCtr="0"/>
-          <a:lstStyle/>
+          <a:lstStyle>
+            <a:defPPr>
+              <a:defRPr>
+                <a:solidFill>
+                  <a:srgbClr val="CADCFC"/>
+                </a:solidFill>
+              </a:defRPr>
+            </a:defPPr>
+          </a:lstStyle>
           <a:p>
             <a:pPr algn="l">
               <a:buNone/>
@@ -2090,7 +2370,15 @@
         </p:spPr>
         <p:txBody>
           <a:bodyPr wrap="square" anchor="t" anchorCtr="0"/>
-          <a:lstStyle/>
+          <a:lstStyle>
+            <a:defPPr>
+              <a:defRPr>
+                <a:solidFill>
+                  <a:srgbClr val="FFFFFF"/>
+                </a:solidFill>
+              </a:defRPr>
+            </a:defPPr>
+          </a:lstStyle>
           <a:p>
             <a:pPr algn="l">
               <a:buNone/>
@@ -2120,7 +2408,15 @@
         </p:spPr>
         <p:txBody>
           <a:bodyPr wrap="square" anchor="t" anchorCtr="0"/>
-          <a:lstStyle/>
+          <a:lstStyle>
+            <a:defPPr>
+              <a:defRPr>
+                <a:solidFill>
+                  <a:srgbClr val="CADCFC"/>
+                </a:solidFill>
+              </a:defRPr>
+            </a:defPPr>
+          </a:lstStyle>
           <a:p>
             <a:pPr algn="l">
               <a:buNone/>
@@ -2150,7 +2446,15 @@
         </p:spPr>
         <p:txBody>
           <a:bodyPr wrap="square" anchor="t" anchorCtr="0"/>
-          <a:lstStyle/>
+          <a:lstStyle>
+            <a:defPPr>
+              <a:defRPr>
+                <a:solidFill>
+                  <a:srgbClr val="1E293B"/>
+                </a:solidFill>
+              </a:defRPr>
+            </a:defPPr>
+          </a:lstStyle>
           <a:p>
             <a:pPr algn="l">
               <a:buNone/>
@@ -2180,7 +2484,15 @@
         </p:spPr>
         <p:txBody>
           <a:bodyPr wrap="square" anchor="t" anchorCtr="0"/>
-          <a:lstStyle/>
+          <a:lstStyle>
+            <a:defPPr>
+              <a:defRPr>
+                <a:solidFill>
+                  <a:srgbClr val="94A3B8"/>
+                </a:solidFill>
+              </a:defRPr>
+            </a:defPPr>
+          </a:lstStyle>
           <a:p>
             <a:pPr algn="r">
               <a:buNone/>
@@ -2255,7 +2567,15 @@
         </p:spPr>
         <p:txBody>
           <a:bodyPr wrap="square" anchor="t" anchorCtr="0"/>
-          <a:lstStyle/>
+          <a:lstStyle>
+            <a:defPPr>
+              <a:defRPr>
+                <a:solidFill>
+                  <a:srgbClr val="FFFFFF"/>
+                </a:solidFill>
+              </a:defRPr>
+            </a:defPPr>
+          </a:lstStyle>
           <a:p>
             <a:pPr algn="l">
               <a:buNone/>
@@ -2285,7 +2605,15 @@
         </p:spPr>
         <p:txBody>
           <a:bodyPr wrap="square" anchor="t" anchorCtr="0"/>
-          <a:lstStyle/>
+          <a:lstStyle>
+            <a:defPPr>
+              <a:defRPr>
+                <a:solidFill>
+                  <a:srgbClr val="CADCFC"/>
+                </a:solidFill>
+              </a:defRPr>
+            </a:defPPr>
+          </a:lstStyle>
           <a:p>
             <a:pPr algn="l">
               <a:buNone/>
@@ -2341,7 +2669,15 @@
         </p:spPr>
         <p:txBody>
           <a:bodyPr wrap="square" anchor="t" anchorCtr="0"/>
-          <a:lstStyle/>
+          <a:lstStyle>
+            <a:defPPr>
+              <a:defRPr>
+                <a:solidFill>
+                  <a:srgbClr val="1E293B"/>
+                </a:solidFill>
+              </a:defRPr>
+            </a:defPPr>
+          </a:lstStyle>
           <a:p>
             <a:pPr algn="l">
               <a:buNone/>
@@ -2371,7 +2707,15 @@
         </p:spPr>
         <p:txBody>
           <a:bodyPr wrap="square" anchor="t" anchorCtr="0"/>
-          <a:lstStyle/>
+          <a:lstStyle>
+            <a:defPPr>
+              <a:defRPr>
+                <a:solidFill>
+                  <a:srgbClr val="1E293B"/>
+                </a:solidFill>
+              </a:defRPr>
+            </a:defPPr>
+          </a:lstStyle>
           <a:p>
             <a:pPr algn="l">
               <a:buNone/>
@@ -2403,7 +2747,15 @@
         </p:spPr>
         <p:txBody>
           <a:bodyPr wrap="square" anchor="t" anchorCtr="0"/>
-          <a:lstStyle/>
+          <a:lstStyle>
+            <a:defPPr>
+              <a:defRPr>
+                <a:solidFill>
+                  <a:srgbClr val="94A3B8"/>
+                </a:solidFill>
+              </a:defRPr>
+            </a:defPPr>
+          </a:lstStyle>
           <a:p>
             <a:pPr algn="r">
               <a:buNone/>
@@ -2478,7 +2830,15 @@
         </p:spPr>
         <p:txBody>
           <a:bodyPr wrap="square" anchor="t" anchorCtr="0"/>
-          <a:lstStyle/>
+          <a:lstStyle>
+            <a:defPPr>
+              <a:defRPr>
+                <a:solidFill>
+                  <a:srgbClr val="FFFFFF"/>
+                </a:solidFill>
+              </a:defRPr>
+            </a:defPPr>
+          </a:lstStyle>
           <a:p>
             <a:pPr algn="l">
               <a:buNone/>
@@ -2508,7 +2868,15 @@
         </p:spPr>
         <p:txBody>
           <a:bodyPr wrap="square" anchor="t" anchorCtr="0"/>
-          <a:lstStyle/>
+          <a:lstStyle>
+            <a:defPPr>
+              <a:defRPr>
+                <a:solidFill>
+                  <a:srgbClr val="CADCFC"/>
+                </a:solidFill>
+              </a:defRPr>
+            </a:defPPr>
+          </a:lstStyle>
           <a:p>
             <a:pPr algn="l">
               <a:buNone/>
@@ -2560,7 +2928,15 @@
         </p:spPr>
         <p:txBody>
           <a:bodyPr wrap="square" anchor="t" anchorCtr="0"/>
-          <a:lstStyle/>
+          <a:lstStyle>
+            <a:defPPr>
+              <a:defRPr>
+                <a:solidFill>
+                  <a:srgbClr val="1E293B"/>
+                </a:solidFill>
+              </a:defRPr>
+            </a:defPPr>
+          </a:lstStyle>
           <a:p>
             <a:pPr algn="l">
               <a:buNone/>
@@ -2590,7 +2966,15 @@
         </p:spPr>
         <p:txBody>
           <a:bodyPr wrap="square" anchor="t" anchorCtr="0"/>
-          <a:lstStyle/>
+          <a:lstStyle>
+            <a:defPPr>
+              <a:defRPr>
+                <a:solidFill>
+                  <a:srgbClr val="1E293B"/>
+                </a:solidFill>
+              </a:defRPr>
+            </a:defPPr>
+          </a:lstStyle>
           <a:p>
             <a:pPr algn="l">
               <a:buNone/>
@@ -2620,7 +3004,15 @@
         </p:spPr>
         <p:txBody>
           <a:bodyPr wrap="square" anchor="t" anchorCtr="0"/>
-          <a:lstStyle/>
+          <a:lstStyle>
+            <a:defPPr>
+              <a:defRPr>
+                <a:solidFill>
+                  <a:srgbClr val="94A3B8"/>
+                </a:solidFill>
+              </a:defRPr>
+            </a:defPPr>
+          </a:lstStyle>
           <a:p>
             <a:pPr algn="r">
               <a:buNone/>

--- a/templates/slide/Midnight_Executive_30_Template.pptx
+++ b/templates/slide/Midnight_Executive_30_Template.pptx
@@ -239,9 +239,9 @@
           <a:bodyPr wrap="square" anchor="t" anchorCtr="0"/>
           <a:lstStyle>
             <a:defPPr>
-              <a:defRPr>
+              <a:defRPr sz="1500" b="1">
                 <a:solidFill>
-                  <a:srgbClr val="FFFFFF"/>
+                  <a:srgbClr val="3B82F6"/>
                 </a:solidFill>
               </a:defRPr>
             </a:defPPr>
@@ -277,9 +277,43 @@
           <a:bodyPr wrap="square" anchor="t" anchorCtr="0"/>
           <a:lstStyle>
             <a:defPPr>
-              <a:defRPr>
+              <a:defRPr sz="4800"/>
+            </a:defPPr>
+          </a:lstStyle>
+          <a:p>
+            <a:pPr algn="l">
+              <a:buNone/>
+            </a:pPr>
+            <a:r>
+              <a:rPr lang="ja-JP"/>
+              <a:t>プレゼンテーションタイトル</a:t>
+            </a:r>
+          </a:p>
+        </p:txBody>
+      </p:sp>
+      <p:sp>
+        <p:nvSpPr>
+          <p:cNvPr id="12" name="Subtitle.Center"/>
+          <p:cNvSpPr>
+            <a:spLocks noGrp="1"/>
+          </p:cNvSpPr>
+          <p:nvPr>
+            <p:ph idx="1" type="subTitle"/>
+          </p:nvPr>
+        </p:nvSpPr>
+        <p:spPr>
+          <a:xfrm>
+            <a:off x="1097280" y="3383280"/>
+            <a:ext cx="8229600" cy="640080"/>
+          </a:xfrm>
+        </p:spPr>
+        <p:txBody>
+          <a:bodyPr wrap="square" anchor="t" anchorCtr="0"/>
+          <a:lstStyle>
+            <a:defPPr>
+              <a:defRPr sz="2000">
                 <a:solidFill>
-                  <a:srgbClr val="FFFFFF"/>
+                  <a:srgbClr val="CADCFC"/>
                 </a:solidFill>
               </a:defRPr>
             </a:defPPr>
@@ -290,25 +324,25 @@
             </a:pPr>
             <a:r>
               <a:rPr lang="ja-JP"/>
-              <a:t>プレゼンテーションタイトル</a:t>
-            </a:r>
-          </a:p>
-        </p:txBody>
-      </p:sp>
-      <p:sp>
-        <p:nvSpPr>
-          <p:cNvPr id="12" name="Subtitle.Center"/>
-          <p:cNvSpPr>
-            <a:spLocks noGrp="1"/>
-          </p:cNvSpPr>
-          <p:nvPr>
-            <p:ph idx="1" type="subTitle"/>
+              <a:t>サブタイトル・説明文</a:t>
+            </a:r>
+          </a:p>
+        </p:txBody>
+      </p:sp>
+      <p:sp>
+        <p:nvSpPr>
+          <p:cNvPr id="13" name="Date.Bottom"/>
+          <p:cNvSpPr>
+            <a:spLocks noGrp="1"/>
+          </p:cNvSpPr>
+          <p:nvPr>
+            <p:ph idx="11" type="body"/>
           </p:nvPr>
         </p:nvSpPr>
         <p:spPr>
           <a:xfrm>
-            <a:off x="1097280" y="3383280"/>
-            <a:ext cx="8229600" cy="640080"/>
+            <a:off x="1097280" y="5120640"/>
+            <a:ext cx="7315200" cy="365760"/>
           </a:xfrm>
         </p:spPr>
         <p:txBody>
@@ -328,44 +362,6 @@
             </a:pPr>
             <a:r>
               <a:rPr lang="ja-JP"/>
-              <a:t>サブタイトル・説明文</a:t>
-            </a:r>
-          </a:p>
-        </p:txBody>
-      </p:sp>
-      <p:sp>
-        <p:nvSpPr>
-          <p:cNvPr id="13" name="Date.Bottom"/>
-          <p:cNvSpPr>
-            <a:spLocks noGrp="1"/>
-          </p:cNvSpPr>
-          <p:nvPr>
-            <p:ph idx="11" type="body"/>
-          </p:nvPr>
-        </p:nvSpPr>
-        <p:spPr>
-          <a:xfrm>
-            <a:off x="1097280" y="5120640"/>
-            <a:ext cx="7315200" cy="365760"/>
-          </a:xfrm>
-        </p:spPr>
-        <p:txBody>
-          <a:bodyPr wrap="square" anchor="t" anchorCtr="0"/>
-          <a:lstStyle>
-            <a:defPPr>
-              <a:defRPr>
-                <a:solidFill>
-                  <a:srgbClr val="CADCFC"/>
-                </a:solidFill>
-              </a:defRPr>
-            </a:defPPr>
-          </a:lstStyle>
-          <a:p>
-            <a:pPr algn="l">
-              <a:buNone/>
-            </a:pPr>
-            <a:r>
-              <a:rPr lang="ja-JP"/>
               <a:t>日付  |  組織名  |  部門名</a:t>
             </a:r>
           </a:p>
@@ -391,7 +387,7 @@
           <a:bodyPr wrap="square" anchor="t" anchorCtr="0"/>
           <a:lstStyle>
             <a:defPPr>
-              <a:defRPr>
+              <a:defRPr sz="1100">
                 <a:solidFill>
                   <a:srgbClr val="CADCFC"/>
                 </a:solidFill>
@@ -474,7 +470,7 @@
           <a:bodyPr wrap="square" anchor="t" anchorCtr="0"/>
           <a:lstStyle>
             <a:defPPr>
-              <a:defRPr>
+              <a:defRPr sz="2800" b="1">
                 <a:solidFill>
                   <a:srgbClr val="FFFFFF"/>
                 </a:solidFill>
@@ -512,7 +508,7 @@
           <a:bodyPr wrap="square" anchor="t" anchorCtr="0"/>
           <a:lstStyle>
             <a:defPPr>
-              <a:defRPr>
+              <a:defRPr sz="1200">
                 <a:solidFill>
                   <a:srgbClr val="CADCFC"/>
                 </a:solidFill>
@@ -598,9 +594,9 @@
           <a:bodyPr wrap="square" anchor="t" anchorCtr="0"/>
           <a:lstStyle>
             <a:defPPr>
-              <a:defRPr>
+              <a:defRPr sz="1300">
                 <a:solidFill>
-                  <a:srgbClr val="1E293B"/>
+                  <a:srgbClr val="1E2761"/>
                 </a:solidFill>
               </a:defRPr>
             </a:defPPr>
@@ -634,15 +630,7 @@
         </p:spPr>
         <p:txBody>
           <a:bodyPr wrap="square" anchor="t" anchorCtr="0"/>
-          <a:lstStyle>
-            <a:defPPr>
-              <a:defRPr>
-                <a:solidFill>
-                  <a:srgbClr val="1E293B"/>
-                </a:solidFill>
-              </a:defRPr>
-            </a:defPPr>
-          </a:lstStyle>
+          <a:lstStyle/>
           <a:p>
             <a:pPr algn="l">
               <a:buNone/>
@@ -673,8 +661,8 @@
         <p:txBody>
           <a:bodyPr wrap="square" anchor="t" anchorCtr="0"/>
           <a:lstStyle>
-            <a:defPPr>
-              <a:defRPr>
+            <a:defPPr algn="r">
+              <a:defRPr sz="1000">
                 <a:solidFill>
                   <a:srgbClr val="94A3B8"/>
                 </a:solidFill>
@@ -757,7 +745,7 @@
           <a:bodyPr wrap="square" anchor="t" anchorCtr="0"/>
           <a:lstStyle>
             <a:defPPr>
-              <a:defRPr>
+              <a:defRPr sz="2800" b="1">
                 <a:solidFill>
                   <a:srgbClr val="FFFFFF"/>
                 </a:solidFill>
@@ -795,7 +783,7 @@
           <a:bodyPr wrap="square" anchor="t" anchorCtr="0"/>
           <a:lstStyle>
             <a:defPPr>
-              <a:defRPr>
+              <a:defRPr sz="1200">
                 <a:solidFill>
                   <a:srgbClr val="CADCFC"/>
                 </a:solidFill>
@@ -831,15 +819,7 @@
         </p:spPr>
         <p:txBody>
           <a:bodyPr wrap="square" anchor="t" anchorCtr="0"/>
-          <a:lstStyle>
-            <a:defPPr>
-              <a:defRPr>
-                <a:solidFill>
-                  <a:srgbClr val="1E293B"/>
-                </a:solidFill>
-              </a:defRPr>
-            </a:defPPr>
-          </a:lstStyle>
+          <a:lstStyle/>
           <a:p>
             <a:pPr algn="l">
               <a:buNone/>
@@ -869,15 +849,7 @@
         </p:spPr>
         <p:txBody>
           <a:bodyPr wrap="square" anchor="t" anchorCtr="0"/>
-          <a:lstStyle>
-            <a:defPPr>
-              <a:defRPr>
-                <a:solidFill>
-                  <a:srgbClr val="1E293B"/>
-                </a:solidFill>
-              </a:defRPr>
-            </a:defPPr>
-          </a:lstStyle>
+          <a:lstStyle/>
           <a:p>
             <a:pPr algn="l">
               <a:buNone/>
@@ -908,8 +880,8 @@
         <p:txBody>
           <a:bodyPr wrap="square" anchor="t" anchorCtr="0"/>
           <a:lstStyle>
-            <a:defPPr>
-              <a:defRPr>
+            <a:defPPr algn="r">
+              <a:defRPr sz="1000">
                 <a:solidFill>
                   <a:srgbClr val="94A3B8"/>
                 </a:solidFill>
@@ -934,45 +906,45 @@
 </file>
 
 <file path=ppt/slideLayouts/slideLayout12.xml><?xml version='1.0' encoding='UTF-8' standalone='yes'?>
-<ns0:sldLayout xmlns:ns0="http://schemas.openxmlformats.org/presentationml/2006/main" type="twoObj" preserve="1"><ns0:cSld name="Column.2Body.MainSub"><ns0:spTree><ns0:nvGrpSpPr><ns0:cNvPr id="1" name=""/><ns0:cNvGrpSpPr/><ns0:nvPr/></ns0:nvGrpSpPr><ns0:grpSpPr><ns1:xfrm xmlns:ns1="http://schemas.openxmlformats.org/drawingml/2006/main"><ns1:off x="0" y="0"/><ns1:ext cx="0" cy="0"/><ns1:chOff x="0" y="0"/><ns1:chExt cx="0" cy="0"/></ns1:xfrm></ns0:grpSpPr><ns0:sp><ns0:nvSpPr><ns0:cNvPr id="2" name="HeaderBar"/><ns0:cNvSpPr><ns1:spLocks xmlns:ns1="http://schemas.openxmlformats.org/drawingml/2006/main" noGrp="1" noSelect="0" noRot="1" noMove="1"/></ns0:cNvSpPr><ns0:nvPr/></ns0:nvSpPr><ns0:spPr><ns2:xfrm xmlns:ns2="http://schemas.openxmlformats.org/drawingml/2006/main"><ns2:off x="0" y="0"/><ns2:ext cx="12192000" cy="1051560"/></ns2:xfrm><ns3:prstGeom xmlns:ns3="http://schemas.openxmlformats.org/drawingml/2006/main" prst="rect"/><ns4:solidFill xmlns:ns4="http://schemas.openxmlformats.org/drawingml/2006/main"><ns4:srgbClr val="1E2761"/></ns4:solidFill><ns5:ln xmlns:ns5="http://schemas.openxmlformats.org/drawingml/2006/main"><ns5:noFill/></ns5:ln></ns0:spPr></ns0:sp><ns0:sp><ns0:nvSpPr><ns0:cNvPr id="10" name="SlideTitle.Header"/><ns0:cNvSpPr><ns1:spLocks xmlns:ns1="http://schemas.openxmlformats.org/drawingml/2006/main" noGrp="1"/></ns0:cNvSpPr><ns0:nvPr><ns0:ph idx="15" type="body"/></ns0:nvPr></ns0:nvSpPr><ns0:spPr><ns2:xfrm xmlns:ns2="http://schemas.openxmlformats.org/drawingml/2006/main"><ns2:off x="731520" y="91440"/><ns2:ext cx="9144000" cy="475488"/></ns2:xfrm></ns0:spPr><ns0:txBody><ns3:bodyPr xmlns:ns3="http://schemas.openxmlformats.org/drawingml/2006/main" wrap="square" anchor="t" anchorCtr="0"/><ns4:lstStyle xmlns:ns4="http://schemas.openxmlformats.org/drawingml/2006/main"><ns4:defPPr algn="l"><ns4:buNone/><ns4:defRPr sz="2800" dirty="0" b="1"><ns4:solidFill><ns4:srgbClr val="FFFFFF"/></ns4:solidFill><ns4:latin typeface="Georgia"/><ns4:ea typeface="Georgia"/></ns4:defRPr></ns4:defPPr><ns4:lvl1pPr algn="l"><ns4:buNone/><ns4:defRPr sz="2800" dirty="0" b="1"><ns4:solidFill><ns4:srgbClr val="FFFFFF"/></ns4:solidFill><ns4:latin typeface="Georgia"/><ns4:ea typeface="Georgia"/></ns4:defRPr></ns4:lvl1pPr><ns4:lvl2pPr algn="l"><ns4:buNone/><ns4:defRPr sz="2800" dirty="0" b="1"><ns4:solidFill><ns4:srgbClr val="FFFFFF"/></ns4:solidFill><ns4:latin typeface="Georgia"/><ns4:ea typeface="Georgia"/></ns4:defRPr></ns4:lvl2pPr><ns4:lvl3pPr algn="l"><ns4:buNone/><ns4:defRPr sz="2800" dirty="0" b="1"><ns4:solidFill><ns4:srgbClr val="FFFFFF"/></ns4:solidFill><ns4:latin typeface="Georgia"/><ns4:ea typeface="Georgia"/></ns4:defRPr></ns4:lvl3pPr><ns4:lvl4pPr algn="l"><ns4:buNone/><ns4:defRPr sz="2800" dirty="0" b="1"><ns4:solidFill><ns4:srgbClr val="FFFFFF"/></ns4:solidFill><ns4:latin typeface="Georgia"/><ns4:ea typeface="Georgia"/></ns4:defRPr></ns4:lvl4pPr><ns4:lvl5pPr algn="l"><ns4:buNone/><ns4:defRPr sz="2800" dirty="0" b="1"><ns4:solidFill><ns4:srgbClr val="FFFFFF"/></ns4:solidFill><ns4:latin typeface="Georgia"/><ns4:ea typeface="Georgia"/></ns4:defRPr></ns4:lvl5pPr><ns4:lvl6pPr algn="l"><ns4:buNone/><ns4:defRPr sz="2800" dirty="0" b="1"><ns4:solidFill><ns4:srgbClr val="FFFFFF"/></ns4:solidFill><ns4:latin typeface="Georgia"/><ns4:ea typeface="Georgia"/></ns4:defRPr></ns4:lvl6pPr><ns4:lvl7pPr algn="l"><ns4:buNone/><ns4:defRPr sz="2800" dirty="0" b="1"><ns4:solidFill><ns4:srgbClr val="FFFFFF"/></ns4:solidFill><ns4:latin typeface="Georgia"/><ns4:ea typeface="Georgia"/></ns4:defRPr></ns4:lvl7pPr><ns4:lvl8pPr algn="l"><ns4:buNone/><ns4:defRPr sz="2800" dirty="0" b="1"><ns4:solidFill><ns4:srgbClr val="FFFFFF"/></ns4:solidFill><ns4:latin typeface="Georgia"/><ns4:ea typeface="Georgia"/></ns4:defRPr></ns4:lvl8pPr><ns4:lvl9pPr algn="l"><ns4:buNone/><ns4:defRPr sz="2800" dirty="0" b="1"><ns4:solidFill><ns4:srgbClr val="FFFFFF"/></ns4:solidFill><ns4:latin typeface="Georgia"/><ns4:ea typeface="Georgia"/></ns4:defRPr></ns4:lvl9pPr></ns4:lstStyle/><ns5:p xmlns:ns5="http://schemas.openxmlformats.org/drawingml/2006/main"><ns5:pPr algn="l"><ns5:buNone/></ns5:pPr><ns5:r><ns5:rPr lang="ja-JP"/><ns5:t>サブタイトル</ns5:t></ns5:r></ns5:p></ns0:txBody></ns0:sp><ns0:sp><ns0:nvSpPr><ns0:cNvPr id="20" name="Body1.Left"/><ns0:cNvSpPr><ns1:spLocks xmlns:ns1="http://schemas.openxmlformats.org/drawingml/2006/main" noGrp="1"/></ns0:cNvSpPr><ns0:nvPr><ns0:ph idx="1" type="body"/></ns0:nvPr></ns0:nvSpPr><ns0:spPr><ns2:xfrm xmlns:ns2="http://schemas.openxmlformats.org/drawingml/2006/main"><ns2:off x="731520" y="1325880"/><ns2:ext cx="6766560" cy="4937760"/></ns2:xfrm></ns0:spPr><ns0:txBody><ns3:bodyPr xmlns:ns3="http://schemas.openxmlformats.org/drawingml/2006/main" wrap="square" anchor="t" anchorCtr="0"/><ns4:lstStyle xmlns:ns4="http://schemas.openxmlformats.org/drawingml/2006/main"><ns4:defPPr algn="l"><ns4:buNone/><ns4:defRPr sz="1400" dirty="0"><ns4:solidFill><ns4:srgbClr val="1E293B"/></ns4:solidFill><ns4:latin typeface="Calibri"/><ns4:ea typeface="Calibri"/></ns4:defRPr></ns4:defPPr><ns4:lvl1pPr algn="l"><ns4:buNone/><ns4:defRPr sz="1400" dirty="0"><ns4:solidFill><ns4:srgbClr val="1E293B"/></ns4:solidFill><ns4:latin typeface="Calibri"/><ns4:ea typeface="Calibri"/></ns4:defRPr></ns4:lvl1pPr><ns4:lvl2pPr algn="l"><ns4:buNone/><ns4:defRPr sz="1400" dirty="0"><ns4:solidFill><ns4:srgbClr val="1E293B"/></ns4:solidFill><ns4:latin typeface="Calibri"/><ns4:ea typeface="Calibri"/></ns4:defRPr></ns4:lvl2pPr><ns4:lvl3pPr algn="l"><ns4:buNone/><ns4:defRPr sz="1400" dirty="0"><ns4:solidFill><ns4:srgbClr val="1E293B"/></ns4:solidFill><ns4:latin typeface="Calibri"/><ns4:ea typeface="Calibri"/></ns4:defRPr></ns4:lvl3pPr><ns4:lvl4pPr algn="l"><ns4:buNone/><ns4:defRPr sz="1400" dirty="0"><ns4:solidFill><ns4:srgbClr val="1E293B"/></ns4:solidFill><ns4:latin typeface="Calibri"/><ns4:ea typeface="Calibri"/></ns4:defRPr></ns4:lvl4pPr><ns4:lvl5pPr algn="l"><ns4:buNone/><ns4:defRPr sz="1400" dirty="0"><ns4:solidFill><ns4:srgbClr val="1E293B"/></ns4:solidFill><ns4:latin typeface="Calibri"/><ns4:ea typeface="Calibri"/></ns4:defRPr></ns4:lvl5pPr><ns4:lvl6pPr algn="l"><ns4:buNone/><ns4:defRPr sz="1400" dirty="0"><ns4:solidFill><ns4:srgbClr val="1E293B"/></ns4:solidFill><ns4:latin typeface="Calibri"/><ns4:ea typeface="Calibri"/></ns4:defRPr></ns4:lvl6pPr><ns4:lvl7pPr algn="l"><ns4:buNone/><ns4:defRPr sz="1400" dirty="0"><ns4:solidFill><ns4:srgbClr val="1E293B"/></ns4:solidFill><ns4:latin typeface="Calibri"/><ns4:ea typeface="Calibri"/></ns4:defRPr></ns4:lvl7pPr><ns4:lvl8pPr algn="l"><ns4:buNone/><ns4:defRPr sz="1400" dirty="0"><ns4:solidFill><ns4:srgbClr val="1E293B"/></ns4:solidFill><ns4:latin typeface="Calibri"/><ns4:ea typeface="Calibri"/></ns4:defRPr></ns4:lvl8pPr><ns4:lvl9pPr algn="l"><ns4:buNone/><ns4:defRPr sz="1400" dirty="0"><ns4:solidFill><ns4:srgbClr val="1E293B"/></ns4:solidFill><ns4:latin typeface="Calibri"/><ns4:ea typeface="Calibri"/></ns4:defRPr></ns4:lvl9pPr></ns4:lstStyle/><ns5:p xmlns:ns5="http://schemas.openxmlformats.org/drawingml/2006/main"><ns5:pPr algn="l"><ns5:buNone/></ns5:pPr><ns5:r><ns5:rPr lang="ja-JP"/><ns5:t>サブカラム</ns5:t></ns5:r></ns5:p></ns0:txBody></ns0:sp><ns0:sp><ns0:nvSpPr><ns0:cNvPr id="30" name="SlideNum.Footer"/><ns0:cNvSpPr><ns1:spLocks xmlns:ns1="http://schemas.openxmlformats.org/drawingml/2006/main" noGrp="1"/></ns0:cNvSpPr><ns0:nvPr><ns0:ph idx="50" type="sldNum"/></ns0:nvPr></ns0:nvSpPr><ns0:spPr><ns2:xfrm xmlns:ns2="http://schemas.openxmlformats.org/drawingml/2006/main"><ns2:off x="10972800" y="6446520"/><ns2:ext cx="1097280" cy="274320"/></ns2:xfrm></ns0:spPr><ns0:txBody><ns3:bodyPr xmlns:ns3="http://schemas.openxmlformats.org/drawingml/2006/main" wrap="square" anchor="t" anchorCtr="0"/><ns4:lstStyle xmlns:ns4="http://schemas.openxmlformats.org/drawingml/2006/main"><ns4:defPPr algn="r"><ns4:buNone/><ns4:defRPr sz="1000" dirty="0"><ns4:solidFill><ns4:srgbClr val="94A3B8"/></ns4:solidFill><ns4:latin typeface="Calibri"/><ns4:ea typeface="Calibri"/></ns4:defRPr></ns4:defPPr><ns4:lvl1pPr algn="r"><ns4:buNone/><ns4:defRPr sz="1000" dirty="0"><ns4:solidFill><ns4:srgbClr val="94A3B8"/></ns4:solidFill><ns4:latin typeface="Calibri"/><ns4:ea typeface="Calibri"/></ns4:defRPr></ns4:lvl1pPr><ns4:lvl2pPr algn="r"><ns4:buNone/><ns4:defRPr sz="1000" dirty="0"><ns4:solidFill><ns4:srgbClr val="94A3B8"/></ns4:solidFill><ns4:latin typeface="Calibri"/><ns4:ea typeface="Calibri"/></ns4:defRPr></ns4:lvl2pPr><ns4:lvl3pPr algn="r"><ns4:buNone/><ns4:defRPr sz="1000" dirty="0"><ns4:solidFill><ns4:srgbClr val="94A3B8"/></ns4:solidFill><ns4:latin typeface="Calibri"/><ns4:ea typeface="Calibri"/></ns4:defRPr></ns4:lvl3pPr><ns4:lvl4pPr algn="r"><ns4:buNone/><ns4:defRPr sz="1000" dirty="0"><ns4:solidFill><ns4:srgbClr val="94A3B8"/></ns4:solidFill><ns4:latin typeface="Calibri"/><ns4:ea typeface="Calibri"/></ns4:defRPr></ns4:lvl4pPr><ns4:lvl5pPr algn="r"><ns4:buNone/><ns4:defRPr sz="1000" dirty="0"><ns4:solidFill><ns4:srgbClr val="94A3B8"/></ns4:solidFill><ns4:latin typeface="Calibri"/><ns4:ea typeface="Calibri"/></ns4:defRPr></ns4:lvl5pPr><ns4:lvl6pPr algn="r"><ns4:buNone/><ns4:defRPr sz="1000" dirty="0"><ns4:solidFill><ns4:srgbClr val="94A3B8"/></ns4:solidFill><ns4:latin typeface="Calibri"/><ns4:ea typeface="Calibri"/></ns4:defRPr></ns4:lvl6pPr><ns4:lvl7pPr algn="r"><ns4:buNone/><ns4:defRPr sz="1000" dirty="0"><ns4:solidFill><ns4:srgbClr val="94A3B8"/></ns4:solidFill><ns4:latin typeface="Calibri"/><ns4:ea typeface="Calibri"/></ns4:defRPr></ns4:lvl7pPr><ns4:lvl8pPr algn="r"><ns4:buNone/><ns4:defRPr sz="1000" dirty="0"><ns4:solidFill><ns4:srgbClr val="94A3B8"/></ns4:solidFill><ns4:latin typeface="Calibri"/><ns4:ea typeface="Calibri"/></ns4:defRPr></ns4:lvl8pPr><ns4:lvl9pPr algn="r"><ns4:buNone/><ns4:defRPr sz="1000" dirty="0"><ns4:solidFill><ns4:srgbClr val="94A3B8"/></ns4:solidFill><ns4:latin typeface="Calibri"/><ns4:ea typeface="Calibri"/></ns4:defRPr></ns4:lvl9pPr></ns4:lstStyle><ns5:p xmlns:ns5="http://schemas.openxmlformats.org/drawingml/2006/main"><ns5:pPr algn="r"><ns5:buNone/></ns5:pPr><ns5:r><ns5:rPr lang="ja-JP"/><ns5:t>&lt;#&gt;</ns5:t></ns5:r></ns5:p></ns0:txBody></ns0:sp></ns0:spTree></ns0:cSld><ns0:clrMapOvr/></ns0:sldLayout>
+<ns0:sldLayout xmlns:ns0="http://schemas.openxmlformats.org/presentationml/2006/main" type="twoObj" preserve="1"><ns0:cSld name="Column.2Body.MainSub"><ns0:spTree><ns0:nvGrpSpPr><ns0:cNvPr id="1" name=""/><ns0:cNvGrpSpPr/><ns0:nvPr/></ns0:nvGrpSpPr><ns0:grpSpPr><ns1:xfrm xmlns:ns1="http://schemas.openxmlformats.org/drawingml/2006/main"><ns1:off x="0" y="0"/><ns1:ext cx="0" cy="0"/><ns1:chOff x="0" y="0"/><ns1:chExt cx="0" cy="0"/></ns1:xfrm></ns0:grpSpPr><ns0:sp><ns0:nvSpPr><ns0:cNvPr id="2" name="HeaderBar"/><ns0:cNvSpPr><ns1:spLocks xmlns:ns1="http://schemas.openxmlformats.org/drawingml/2006/main" noGrp="1" noSelect="0" noRot="1" noMove="1"/></ns0:cNvSpPr><ns0:nvPr/></ns0:nvSpPr><ns0:spPr><ns2:xfrm xmlns:ns2="http://schemas.openxmlformats.org/drawingml/2006/main"><ns2:off x="0" y="0"/><ns2:ext cx="12192000" cy="1051560"/></ns2:xfrm><ns3:prstGeom xmlns:ns3="http://schemas.openxmlformats.org/drawingml/2006/main" prst="rect"/><ns4:solidFill xmlns:ns4="http://schemas.openxmlformats.org/drawingml/2006/main"><ns4:srgbClr val="1E2761"/></ns4:solidFill><ns5:ln xmlns:ns5="http://schemas.openxmlformats.org/drawingml/2006/main"><ns5:noFill/></ns5:ln></ns0:spPr></ns0:sp><ns0:sp><ns0:nvSpPr><ns0:cNvPr id="10" name="SlideTitle.Header"/><ns0:cNvSpPr><ns1:spLocks xmlns:ns1="http://schemas.openxmlformats.org/drawingml/2006/main" noGrp="1"/></ns0:cNvSpPr><ns0:nvPr><ns0:ph idx="15" type="body"/></ns0:nvPr></ns0:nvSpPr><ns0:spPr><ns2:xfrm xmlns:ns2="http://schemas.openxmlformats.org/drawingml/2006/main"><ns2:off x="731520" y="91440"/><ns2:ext cx="9144000" cy="475488"/></ns2:xfrm></ns0:spPr><ns0:txBody><ns3:bodyPr xmlns:ns3="http://schemas.openxmlformats.org/drawingml/2006/main" wrap="square" anchor="t" anchorCtr="0"/><ns4:lstStyle><ns4:defPPr><ns4:defRPr sz="2800" b="1"><ns4:solidFill><ns4:srgbClr val="FFFFFF"/></ns4:solidFill></ns4:defRPr></ns4:defPPr></ns4:lstStyle><ns4:defPPr algn="l"><ns4:buNone/><ns4:defRPr sz="2800" dirty="0" b="1"><ns4:solidFill><ns4:srgbClr val="FFFFFF"/></ns4:solidFill><ns4:latin typeface="Georgia"/><ns4:ea typeface="Georgia"/></ns4:defRPr></ns4:defPPr><ns4:lvl1pPr algn="l"><ns4:buNone/><ns4:defRPr sz="2800" dirty="0" b="1"><ns4:solidFill><ns4:srgbClr val="FFFFFF"/></ns4:solidFill><ns4:latin typeface="Georgia"/><ns4:ea typeface="Georgia"/></ns4:defRPr></ns4:lvl1pPr><ns4:lvl2pPr algn="l"><ns4:buNone/><ns4:defRPr sz="2800" dirty="0" b="1"><ns4:solidFill><ns4:srgbClr val="FFFFFF"/></ns4:solidFill><ns4:latin typeface="Georgia"/><ns4:ea typeface="Georgia"/></ns4:defRPr></ns4:lvl2pPr><ns4:lvl3pPr algn="l"><ns4:buNone/><ns4:defRPr sz="2800" dirty="0" b="1"><ns4:solidFill><ns4:srgbClr val="FFFFFF"/></ns4:solidFill><ns4:latin typeface="Georgia"/><ns4:ea typeface="Georgia"/></ns4:defRPr></ns4:lvl3pPr><ns4:lvl4pPr algn="l"><ns4:buNone/><ns4:defRPr sz="2800" dirty="0" b="1"><ns4:solidFill><ns4:srgbClr val="FFFFFF"/></ns4:solidFill><ns4:latin typeface="Georgia"/><ns4:ea typeface="Georgia"/></ns4:defRPr></ns4:lvl4pPr><ns4:lvl5pPr algn="l"><ns4:buNone/><ns4:defRPr sz="2800" dirty="0" b="1"><ns4:solidFill><ns4:srgbClr val="FFFFFF"/></ns4:solidFill><ns4:latin typeface="Georgia"/><ns4:ea typeface="Georgia"/></ns4:defRPr></ns4:lvl5pPr><ns4:lvl6pPr algn="l"><ns4:buNone/><ns4:defRPr sz="2800" dirty="0" b="1"><ns4:solidFill><ns4:srgbClr val="FFFFFF"/></ns4:solidFill><ns4:latin typeface="Georgia"/><ns4:ea typeface="Georgia"/></ns4:defRPr></ns4:lvl6pPr><ns4:lvl7pPr algn="l"><ns4:buNone/><ns4:defRPr sz="2800" dirty="0" b="1"><ns4:solidFill><ns4:srgbClr val="FFFFFF"/></ns4:solidFill><ns4:latin typeface="Georgia"/><ns4:ea typeface="Georgia"/></ns4:defRPr></ns4:lvl7pPr><ns4:lvl8pPr algn="l"><ns4:buNone/><ns4:defRPr sz="2800" dirty="0" b="1"><ns4:solidFill><ns4:srgbClr val="FFFFFF"/></ns4:solidFill><ns4:latin typeface="Georgia"/><ns4:ea typeface="Georgia"/></ns4:defRPr></ns4:lvl8pPr><ns4:lvl9pPr algn="l"><ns4:buNone/><ns4:defRPr sz="2800" dirty="0" b="1"><ns4:solidFill><ns4:srgbClr val="FFFFFF"/></ns4:solidFill><ns4:latin typeface="Georgia"/><ns4:ea typeface="Georgia"/></ns4:defRPr></ns4:lvl9pPr></ns4:lstStyle/><ns5:p xmlns:ns5="http://schemas.openxmlformats.org/drawingml/2006/main"><ns5:pPr algn="l"><ns5:buNone/></ns5:pPr><ns5:r><ns5:rPr lang="ja-JP"/><ns5:t>サブタイトル</ns5:t></ns5:r></ns5:p></ns0:txBody></ns0:sp><ns0:sp><ns0:nvSpPr><ns0:cNvPr id="20" name="Body1.Left"/><ns0:cNvSpPr><ns1:spLocks xmlns:ns1="http://schemas.openxmlformats.org/drawingml/2006/main" noGrp="1"/></ns0:cNvSpPr><ns0:nvPr><ns0:ph idx="1" type="body"/></ns0:nvPr></ns0:nvSpPr><ns0:spPr><ns2:xfrm xmlns:ns2="http://schemas.openxmlformats.org/drawingml/2006/main"><ns2:off x="731520" y="1325880"/><ns2:ext cx="6766560" cy="4937760"/></ns2:xfrm></ns0:spPr><ns0:txBody><ns3:bodyPr xmlns:ns3="http://schemas.openxmlformats.org/drawingml/2006/main" wrap="square" anchor="t" anchorCtr="0"/><ns4:lstStyle/><ns4:defPPr algn="l"><ns4:buNone/><ns4:defRPr sz="1400" dirty="0"><ns4:solidFill><ns4:srgbClr val="1E293B"/></ns4:solidFill><ns4:latin typeface="Calibri"/><ns4:ea typeface="Calibri"/></ns4:defRPr></ns4:defPPr><ns4:lvl1pPr algn="l"><ns4:buNone/><ns4:defRPr sz="1400" dirty="0"><ns4:solidFill><ns4:srgbClr val="1E293B"/></ns4:solidFill><ns4:latin typeface="Calibri"/><ns4:ea typeface="Calibri"/></ns4:defRPr></ns4:lvl1pPr><ns4:lvl2pPr algn="l"><ns4:buNone/><ns4:defRPr sz="1400" dirty="0"><ns4:solidFill><ns4:srgbClr val="1E293B"/></ns4:solidFill><ns4:latin typeface="Calibri"/><ns4:ea typeface="Calibri"/></ns4:defRPr></ns4:lvl2pPr><ns4:lvl3pPr algn="l"><ns4:buNone/><ns4:defRPr sz="1400" dirty="0"><ns4:solidFill><ns4:srgbClr val="1E293B"/></ns4:solidFill><ns4:latin typeface="Calibri"/><ns4:ea typeface="Calibri"/></ns4:defRPr></ns4:lvl3pPr><ns4:lvl4pPr algn="l"><ns4:buNone/><ns4:defRPr sz="1400" dirty="0"><ns4:solidFill><ns4:srgbClr val="1E293B"/></ns4:solidFill><ns4:latin typeface="Calibri"/><ns4:ea typeface="Calibri"/></ns4:defRPr></ns4:lvl4pPr><ns4:lvl5pPr algn="l"><ns4:buNone/><ns4:defRPr sz="1400" dirty="0"><ns4:solidFill><ns4:srgbClr val="1E293B"/></ns4:solidFill><ns4:latin typeface="Calibri"/><ns4:ea typeface="Calibri"/></ns4:defRPr></ns4:lvl5pPr><ns4:lvl6pPr algn="l"><ns4:buNone/><ns4:defRPr sz="1400" dirty="0"><ns4:solidFill><ns4:srgbClr val="1E293B"/></ns4:solidFill><ns4:latin typeface="Calibri"/><ns4:ea typeface="Calibri"/></ns4:defRPr></ns4:lvl6pPr><ns4:lvl7pPr algn="l"><ns4:buNone/><ns4:defRPr sz="1400" dirty="0"><ns4:solidFill><ns4:srgbClr val="1E293B"/></ns4:solidFill><ns4:latin typeface="Calibri"/><ns4:ea typeface="Calibri"/></ns4:defRPr></ns4:lvl7pPr><ns4:lvl8pPr algn="l"><ns4:buNone/><ns4:defRPr sz="1400" dirty="0"><ns4:solidFill><ns4:srgbClr val="1E293B"/></ns4:solidFill><ns4:latin typeface="Calibri"/><ns4:ea typeface="Calibri"/></ns4:defRPr></ns4:lvl8pPr><ns4:lvl9pPr algn="l"><ns4:buNone/><ns4:defRPr sz="1400" dirty="0"><ns4:solidFill><ns4:srgbClr val="1E293B"/></ns4:solidFill><ns4:latin typeface="Calibri"/><ns4:ea typeface="Calibri"/></ns4:defRPr></ns4:lvl9pPr></ns4:lstStyle/><ns5:p xmlns:ns5="http://schemas.openxmlformats.org/drawingml/2006/main"><ns5:pPr algn="l"><ns5:buNone/></ns5:pPr><ns5:r><ns5:rPr lang="ja-JP"/><ns5:t>サブカラム</ns5:t></ns5:r></ns5:p></ns0:txBody></ns0:sp><ns0:sp><ns0:nvSpPr><ns0:cNvPr id="30" name="SlideNum.Footer"/><ns0:cNvSpPr><ns1:spLocks xmlns:ns1="http://schemas.openxmlformats.org/drawingml/2006/main" noGrp="1"/></ns0:cNvSpPr><ns0:nvPr><ns0:ph idx="50" type="sldNum"/></ns0:nvPr></ns0:nvSpPr><ns0:spPr><ns2:xfrm xmlns:ns2="http://schemas.openxmlformats.org/drawingml/2006/main"><ns2:off x="10972800" y="6446520"/><ns2:ext cx="1097280" cy="274320"/></ns2:xfrm></ns0:spPr><ns0:txBody><ns3:bodyPr xmlns:ns3="http://schemas.openxmlformats.org/drawingml/2006/main" wrap="square" anchor="t" anchorCtr="0"/><ns4:lstStyle><ns4:defPPr algn="r"><ns4:defRPr sz="1000"><ns4:solidFill><ns4:srgbClr val="94A3B8"/></ns4:solidFill></ns4:defRPr></ns4:defPPr></ns4:lstStyle><ns4:defPPr algn="r"><ns4:buNone/><ns4:defRPr sz="1000" dirty="0"><ns4:solidFill><ns4:srgbClr val="94A3B8"/></ns4:solidFill><ns4:latin typeface="Calibri"/><ns4:ea typeface="Calibri"/></ns4:defRPr></ns4:defPPr><ns4:lvl1pPr algn="r"><ns4:buNone/><ns4:defRPr sz="1000" dirty="0"><ns4:solidFill><ns4:srgbClr val="94A3B8"/></ns4:solidFill><ns4:latin typeface="Calibri"/><ns4:ea typeface="Calibri"/></ns4:defRPr></ns4:lvl1pPr><ns4:lvl2pPr algn="r"><ns4:buNone/><ns4:defRPr sz="1000" dirty="0"><ns4:solidFill><ns4:srgbClr val="94A3B8"/></ns4:solidFill><ns4:latin typeface="Calibri"/><ns4:ea typeface="Calibri"/></ns4:defRPr></ns4:lvl2pPr><ns4:lvl3pPr algn="r"><ns4:buNone/><ns4:defRPr sz="1000" dirty="0"><ns4:solidFill><ns4:srgbClr val="94A3B8"/></ns4:solidFill><ns4:latin typeface="Calibri"/><ns4:ea typeface="Calibri"/></ns4:defRPr></ns4:lvl3pPr><ns4:lvl4pPr algn="r"><ns4:buNone/><ns4:defRPr sz="1000" dirty="0"><ns4:solidFill><ns4:srgbClr val="94A3B8"/></ns4:solidFill><ns4:latin typeface="Calibri"/><ns4:ea typeface="Calibri"/></ns4:defRPr></ns4:lvl4pPr><ns4:lvl5pPr algn="r"><ns4:buNone/><ns4:defRPr sz="1000" dirty="0"><ns4:solidFill><ns4:srgbClr val="94A3B8"/></ns4:solidFill><ns4:latin typeface="Calibri"/><ns4:ea typeface="Calibri"/></ns4:defRPr></ns4:lvl5pPr><ns4:lvl6pPr algn="r"><ns4:buNone/><ns4:defRPr sz="1000" dirty="0"><ns4:solidFill><ns4:srgbClr val="94A3B8"/></ns4:solidFill><ns4:latin typeface="Calibri"/><ns4:ea typeface="Calibri"/></ns4:defRPr></ns4:lvl6pPr><ns4:lvl7pPr algn="r"><ns4:buNone/><ns4:defRPr sz="1000" dirty="0"><ns4:solidFill><ns4:srgbClr val="94A3B8"/></ns4:solidFill><ns4:latin typeface="Calibri"/><ns4:ea typeface="Calibri"/></ns4:defRPr></ns4:lvl7pPr><ns4:lvl8pPr algn="r"><ns4:buNone/><ns4:defRPr sz="1000" dirty="0"><ns4:solidFill><ns4:srgbClr val="94A3B8"/></ns4:solidFill><ns4:latin typeface="Calibri"/><ns4:ea typeface="Calibri"/></ns4:defRPr></ns4:lvl8pPr><ns4:lvl9pPr algn="r"><ns4:buNone/><ns4:defRPr sz="1000" dirty="0"><ns4:solidFill><ns4:srgbClr val="94A3B8"/></ns4:solidFill><ns4:latin typeface="Calibri"/><ns4:ea typeface="Calibri"/></ns4:defRPr></ns4:lvl9pPr></ns4:lstStyle><ns5:p xmlns:ns5="http://schemas.openxmlformats.org/drawingml/2006/main"><ns5:pPr algn="r"><ns5:buNone/></ns5:pPr><ns5:r><ns5:rPr lang="ja-JP"/><ns5:t>&lt;#&gt;</ns5:t></ns5:r></ns5:p></ns0:txBody></ns0:sp></ns0:spTree></ns0:cSld><ns0:clrMapOvr/></ns0:sldLayout>
 </file>
 
 <file path=ppt/slideLayouts/slideLayout13.xml><?xml version='1.0' encoding='UTF-8' standalone='yes'?>
-<ns0:sldLayout xmlns:ns0="http://schemas.openxmlformats.org/presentationml/2006/main" type="threeObj" preserve="1"><ns0:cSld name="Column.3Body.Equal"><ns0:spTree><ns0:nvGrpSpPr><ns0:cNvPr id="1" name=""/><ns0:cNvGrpSpPr/><ns0:nvPr/></ns0:nvGrpSpPr><ns0:grpSpPr><ns1:xfrm xmlns:ns1="http://schemas.openxmlformats.org/drawingml/2006/main"><ns1:off x="0" y="0"/><ns1:ext cx="0" cy="0"/><ns1:chOff x="0" y="0"/><ns1:chExt cx="0" cy="0"/></ns1:xfrm></ns0:grpSpPr><ns0:sp><ns0:nvSpPr><ns0:cNvPr id="2" name="HeaderBar"/><ns0:cNvSpPr><ns1:spLocks xmlns:ns1="http://schemas.openxmlformats.org/drawingml/2006/main" noGrp="1" noSelect="0" noRot="1" noMove="1"/></ns0:cNvSpPr><ns0:nvPr/></ns0:nvSpPr><ns0:spPr><ns2:xfrm xmlns:ns2="http://schemas.openxmlformats.org/drawingml/2006/main"><ns2:off x="0" y="0"/><ns2:ext cx="12192000" cy="1051560"/></ns2:xfrm><ns3:prstGeom xmlns:ns3="http://schemas.openxmlformats.org/drawingml/2006/main" prst="rect"/><ns4:solidFill xmlns:ns4="http://schemas.openxmlformats.org/drawingml/2006/main"><ns4:srgbClr val="1E2761"/></ns4:solidFill><ns5:ln xmlns:ns5="http://schemas.openxmlformats.org/drawingml/2006/main"><ns5:noFill/></ns5:ln></ns0:spPr></ns0:sp><ns0:sp><ns0:nvSpPr><ns0:cNvPr id="10" name="SlideTitle.Header"/><ns0:cNvSpPr><ns1:spLocks xmlns:ns1="http://schemas.openxmlformats.org/drawingml/2006/main" noGrp="1"/></ns0:cNvSpPr><ns0:nvPr><ns0:ph idx="15" type="body"/></ns0:nvPr></ns0:nvSpPr><ns0:spPr><ns2:xfrm xmlns:ns2="http://schemas.openxmlformats.org/drawingml/2006/main"><ns2:off x="731520" y="91440"/><ns2:ext cx="9144000" cy="475488"/></ns2:xfrm></ns0:spPr><ns0:txBody><ns3:bodyPr xmlns:ns3="http://schemas.openxmlformats.org/drawingml/2006/main" wrap="square" anchor="t" anchorCtr="0"/><ns4:lstStyle xmlns:ns4="http://schemas.openxmlformats.org/drawingml/2006/main"><ns4:defPPr algn="l"><ns4:buNone/><ns4:defRPr sz="2800" dirty="0" b="1"><ns4:solidFill><ns4:srgbClr val="FFFFFF"/></ns4:solidFill><ns4:latin typeface="Georgia"/><ns4:ea typeface="Georgia"/></ns4:defRPr></ns4:defPPr><ns4:lvl1pPr algn="l"><ns4:buNone/><ns4:defRPr sz="2800" dirty="0" b="1"><ns4:solidFill><ns4:srgbClr val="FFFFFF"/></ns4:solidFill><ns4:latin typeface="Georgia"/><ns4:ea typeface="Georgia"/></ns4:defRPr></ns4:lvl1pPr><ns4:lvl2pPr algn="l"><ns4:buNone/><ns4:defRPr sz="2800" dirty="0" b="1"><ns4:solidFill><ns4:srgbClr val="FFFFFF"/></ns4:solidFill><ns4:latin typeface="Georgia"/><ns4:ea typeface="Georgia"/></ns4:defRPr></ns4:lvl2pPr><ns4:lvl3pPr algn="l"><ns4:buNone/><ns4:defRPr sz="2800" dirty="0" b="1"><ns4:solidFill><ns4:srgbClr val="FFFFFF"/></ns4:solidFill><ns4:latin typeface="Georgia"/><ns4:ea typeface="Georgia"/></ns4:defRPr></ns4:lvl3pPr><ns4:lvl4pPr algn="l"><ns4:buNone/><ns4:defRPr sz="2800" dirty="0" b="1"><ns4:solidFill><ns4:srgbClr val="FFFFFF"/></ns4:solidFill><ns4:latin typeface="Georgia"/><ns4:ea typeface="Georgia"/></ns4:defRPr></ns4:lvl4pPr><ns4:lvl5pPr algn="l"><ns4:buNone/><ns4:defRPr sz="2800" dirty="0" b="1"><ns4:solidFill><ns4:srgbClr val="FFFFFF"/></ns4:solidFill><ns4:latin typeface="Georgia"/><ns4:ea typeface="Georgia"/></ns4:defRPr></ns4:lvl5pPr><ns4:lvl6pPr algn="l"><ns4:buNone/><ns4:defRPr sz="2800" dirty="0" b="1"><ns4:solidFill><ns4:srgbClr val="FFFFFF"/></ns4:solidFill><ns4:latin typeface="Georgia"/><ns4:ea typeface="Georgia"/></ns4:defRPr></ns4:lvl6pPr><ns4:lvl7pPr algn="l"><ns4:buNone/><ns4:defRPr sz="2800" dirty="0" b="1"><ns4:solidFill><ns4:srgbClr val="FFFFFF"/></ns4:solidFill><ns4:latin typeface="Georgia"/><ns4:ea typeface="Georgia"/></ns4:defRPr></ns4:lvl7pPr><ns4:lvl8pPr algn="l"><ns4:buNone/><ns4:defRPr sz="2800" dirty="0" b="1"><ns4:solidFill><ns4:srgbClr val="FFFFFF"/></ns4:solidFill><ns4:latin typeface="Georgia"/><ns4:ea typeface="Georgia"/></ns4:defRPr></ns4:lvl8pPr><ns4:lvl9pPr algn="l"><ns4:buNone/><ns4:defRPr sz="2800" dirty="0" b="1"><ns4:solidFill><ns4:srgbClr val="FFFFFF"/></ns4:solidFill><ns4:latin typeface="Georgia"/><ns4:ea typeface="Georgia"/></ns4:defRPr></ns4:lvl9pPr></ns4:lstStyle/><ns5:p xmlns:ns5="http://schemas.openxmlformats.org/drawingml/2006/main"><ns5:pPr algn="l"><ns5:buNone/></ns5:pPr><ns5:r><ns5:rPr lang="ja-JP"/><ns5:t>サブタイトル</ns5:t></ns5:r></ns5:p></ns0:txBody></ns0:sp><ns0:sp><ns0:nvSpPr><ns0:cNvPr id="20" name="Body1.Left"/><ns0:cNvSpPr><ns1:spLocks xmlns:ns1="http://schemas.openxmlformats.org/drawingml/2006/main" noGrp="1"/></ns0:cNvSpPr><ns0:nvPr><ns0:ph idx="1" type="body"/></ns0:nvPr></ns0:nvSpPr><ns0:spPr><ns2:xfrm xmlns:ns2="http://schemas.openxmlformats.org/drawingml/2006/main"><ns2:off x="731520" y="1325880"/><ns2:ext cx="3200400" cy="4937760"/></ns2:xfrm></ns0:spPr><ns0:txBody><ns3:bodyPr xmlns:ns3="http://schemas.openxmlformats.org/drawingml/2006/main" wrap="square" anchor="t" anchorCtr="0"/><ns4:lstStyle xmlns:ns4="http://schemas.openxmlformats.org/drawingml/2006/main"><ns4:defPPr algn="l"><ns4:buNone/><ns4:defRPr sz="1400" dirty="0"><ns4:solidFill><ns4:srgbClr val="1E293B"/></ns4:solidFill><ns4:latin typeface="Calibri"/><ns4:ea typeface="Calibri"/></ns4:defRPr></ns4:defPPr><ns4:lvl1pPr algn="l"><ns4:buNone/><ns4:defRPr sz="1400" dirty="0"><ns4:solidFill><ns4:srgbClr val="1E293B"/></ns4:solidFill><ns4:latin typeface="Calibri"/><ns4:ea typeface="Calibri"/></ns4:defRPr></ns4:lvl1pPr><ns4:lvl2pPr algn="l"><ns4:buNone/><ns4:defRPr sz="1400" dirty="0"><ns4:solidFill><ns4:srgbClr val="1E293B"/></ns4:solidFill><ns4:latin typeface="Calibri"/><ns4:ea typeface="Calibri"/></ns4:defRPr></ns4:lvl2pPr><ns4:lvl3pPr algn="l"><ns4:buNone/><ns4:defRPr sz="1400" dirty="0"><ns4:solidFill><ns4:srgbClr val="1E293B"/></ns4:solidFill><ns4:latin typeface="Calibri"/><ns4:ea typeface="Calibri"/></ns4:defRPr></ns4:lvl3pPr><ns4:lvl4pPr algn="l"><ns4:buNone/><ns4:defRPr sz="1400" dirty="0"><ns4:solidFill><ns4:srgbClr val="1E293B"/></ns4:solidFill><ns4:latin typeface="Calibri"/><ns4:ea typeface="Calibri"/></ns4:defRPr></ns4:lvl4pPr><ns4:lvl5pPr algn="l"><ns4:buNone/><ns4:defRPr sz="1400" dirty="0"><ns4:solidFill><ns4:srgbClr val="1E293B"/></ns4:solidFill><ns4:latin typeface="Calibri"/><ns4:ea typeface="Calibri"/></ns4:defRPr></ns4:lvl5pPr><ns4:lvl6pPr algn="l"><ns4:buNone/><ns4:defRPr sz="1400" dirty="0"><ns4:solidFill><ns4:srgbClr val="1E293B"/></ns4:solidFill><ns4:latin typeface="Calibri"/><ns4:ea typeface="Calibri"/></ns4:defRPr></ns4:lvl6pPr><ns4:lvl7pPr algn="l"><ns4:buNone/><ns4:defRPr sz="1400" dirty="0"><ns4:solidFill><ns4:srgbClr val="1E293B"/></ns4:solidFill><ns4:latin typeface="Calibri"/><ns4:ea typeface="Calibri"/></ns4:defRPr></ns4:lvl7pPr><ns4:lvl8pPr algn="l"><ns4:buNone/><ns4:defRPr sz="1400" dirty="0"><ns4:solidFill><ns4:srgbClr val="1E293B"/></ns4:solidFill><ns4:latin typeface="Calibri"/><ns4:ea typeface="Calibri"/></ns4:defRPr></ns4:lvl8pPr><ns4:lvl9pPr algn="l"><ns4:buNone/><ns4:defRPr sz="1400" dirty="0"><ns4:solidFill><ns4:srgbClr val="1E293B"/></ns4:solidFill><ns4:latin typeface="Calibri"/><ns4:ea typeface="Calibri"/></ns4:defRPr></ns4:lvl9pPr></ns4:lstStyle/><ns5:p xmlns:ns5="http://schemas.openxmlformats.org/drawingml/2006/main"><ns5:pPr algn="l"><ns5:buNone/></ns5:pPr><ns5:r><ns5:rPr lang="ja-JP"/><ns5:t>カラム 2</ns5:t></ns5:r></ns5:p></ns0:txBody></ns0:sp><ns0:sp><ns0:nvSpPr><ns0:cNvPr id="22" name="Body3.Right"/><ns0:cNvSpPr><ns1:spLocks xmlns:ns1="http://schemas.openxmlformats.org/drawingml/2006/main" noGrp="1"/></ns0:cNvSpPr><ns0:nvPr><ns0:ph idx="3" type="body"/></ns0:nvPr></ns0:nvSpPr><ns0:spPr><ns2:xfrm xmlns:ns2="http://schemas.openxmlformats.org/drawingml/2006/main"><ns2:off x="7863840" y="1325880"/><ns2:ext cx="3566160" cy="4937760"/></ns2:xfrm></ns0:spPr><ns0:txBody><ns3:bodyPr xmlns:ns3="http://schemas.openxmlformats.org/drawingml/2006/main" wrap="square" anchor="t" anchorCtr="0"/><ns4:lstStyle xmlns:ns4="http://schemas.openxmlformats.org/drawingml/2006/main"><ns4:defPPr algn="l"><ns4:buNone/><ns4:defRPr sz="1400" dirty="0"><ns4:solidFill><ns4:srgbClr val="1E293B"/></ns4:solidFill><ns4:latin typeface="Calibri"/><ns4:ea typeface="Calibri"/></ns4:defRPr></ns4:defPPr><ns4:lvl1pPr algn="l"><ns4:buNone/><ns4:defRPr sz="1400" dirty="0"><ns4:solidFill><ns4:srgbClr val="1E293B"/></ns4:solidFill><ns4:latin typeface="Calibri"/><ns4:ea typeface="Calibri"/></ns4:defRPr></ns4:lvl1pPr><ns4:lvl2pPr algn="l"><ns4:buNone/><ns4:defRPr sz="1400" dirty="0"><ns4:solidFill><ns4:srgbClr val="1E293B"/></ns4:solidFill><ns4:latin typeface="Calibri"/><ns4:ea typeface="Calibri"/></ns4:defRPr></ns4:lvl2pPr><ns4:lvl3pPr algn="l"><ns4:buNone/><ns4:defRPr sz="1400" dirty="0"><ns4:solidFill><ns4:srgbClr val="1E293B"/></ns4:solidFill><ns4:latin typeface="Calibri"/><ns4:ea typeface="Calibri"/></ns4:defRPr></ns4:lvl3pPr><ns4:lvl4pPr algn="l"><ns4:buNone/><ns4:defRPr sz="1400" dirty="0"><ns4:solidFill><ns4:srgbClr val="1E293B"/></ns4:solidFill><ns4:latin typeface="Calibri"/><ns4:ea typeface="Calibri"/></ns4:defRPr></ns4:lvl4pPr><ns4:lvl5pPr algn="l"><ns4:buNone/><ns4:defRPr sz="1400" dirty="0"><ns4:solidFill><ns4:srgbClr val="1E293B"/></ns4:solidFill><ns4:latin typeface="Calibri"/><ns4:ea typeface="Calibri"/></ns4:defRPr></ns4:lvl5pPr><ns4:lvl6pPr algn="l"><ns4:buNone/><ns4:defRPr sz="1400" dirty="0"><ns4:solidFill><ns4:srgbClr val="1E293B"/></ns4:solidFill><ns4:latin typeface="Calibri"/><ns4:ea typeface="Calibri"/></ns4:defRPr></ns4:lvl6pPr><ns4:lvl7pPr algn="l"><ns4:buNone/><ns4:defRPr sz="1400" dirty="0"><ns4:solidFill><ns4:srgbClr val="1E293B"/></ns4:solidFill><ns4:latin typeface="Calibri"/><ns4:ea typeface="Calibri"/></ns4:defRPr></ns4:lvl7pPr><ns4:lvl8pPr algn="l"><ns4:buNone/><ns4:defRPr sz="1400" dirty="0"><ns4:solidFill><ns4:srgbClr val="1E293B"/></ns4:solidFill><ns4:latin typeface="Calibri"/><ns4:ea typeface="Calibri"/></ns4:defRPr></ns4:lvl8pPr><ns4:lvl9pPr algn="l"><ns4:buNone/><ns4:defRPr sz="1400" dirty="0"><ns4:solidFill><ns4:srgbClr val="1E293B"/></ns4:solidFill><ns4:latin typeface="Calibri"/><ns4:ea typeface="Calibri"/></ns4:defRPr></ns4:lvl9pPr></ns4:lstStyle/><ns5:p xmlns:ns5="http://schemas.openxmlformats.org/drawingml/2006/main"><ns5:pPr algn="r"><ns5:buNone/></ns5:pPr><ns5:r><ns5:rPr lang="ja-JP"/><ns5:t>&lt;#&gt;</ns5:t></ns5:r></ns5:p></ns0:txBody></ns0:sp></ns0:spTree></ns0:cSld><ns0:clrMapOvr/></ns0:sldLayout>
+<ns0:sldLayout xmlns:ns0="http://schemas.openxmlformats.org/presentationml/2006/main" type="threeObj" preserve="1"><ns0:cSld name="Column.3Body.Equal"><ns0:spTree><ns0:nvGrpSpPr><ns0:cNvPr id="1" name=""/><ns0:cNvGrpSpPr/><ns0:nvPr/></ns0:nvGrpSpPr><ns0:grpSpPr><ns1:xfrm xmlns:ns1="http://schemas.openxmlformats.org/drawingml/2006/main"><ns1:off x="0" y="0"/><ns1:ext cx="0" cy="0"/><ns1:chOff x="0" y="0"/><ns1:chExt cx="0" cy="0"/></ns1:xfrm></ns0:grpSpPr><ns0:sp><ns0:nvSpPr><ns0:cNvPr id="2" name="HeaderBar"/><ns0:cNvSpPr><ns1:spLocks xmlns:ns1="http://schemas.openxmlformats.org/drawingml/2006/main" noGrp="1" noSelect="0" noRot="1" noMove="1"/></ns0:cNvSpPr><ns0:nvPr/></ns0:nvSpPr><ns0:spPr><ns2:xfrm xmlns:ns2="http://schemas.openxmlformats.org/drawingml/2006/main"><ns2:off x="0" y="0"/><ns2:ext cx="12192000" cy="1051560"/></ns2:xfrm><ns3:prstGeom xmlns:ns3="http://schemas.openxmlformats.org/drawingml/2006/main" prst="rect"/><ns4:solidFill xmlns:ns4="http://schemas.openxmlformats.org/drawingml/2006/main"><ns4:srgbClr val="1E2761"/></ns4:solidFill><ns5:ln xmlns:ns5="http://schemas.openxmlformats.org/drawingml/2006/main"><ns5:noFill/></ns5:ln></ns0:spPr></ns0:sp><ns0:sp><ns0:nvSpPr><ns0:cNvPr id="10" name="SlideTitle.Header"/><ns0:cNvSpPr><ns1:spLocks xmlns:ns1="http://schemas.openxmlformats.org/drawingml/2006/main" noGrp="1"/></ns0:cNvSpPr><ns0:nvPr><ns0:ph idx="15" type="body"/></ns0:nvPr></ns0:nvSpPr><ns0:spPr><ns2:xfrm xmlns:ns2="http://schemas.openxmlformats.org/drawingml/2006/main"><ns2:off x="731520" y="91440"/><ns2:ext cx="9144000" cy="475488"/></ns2:xfrm></ns0:spPr><ns0:txBody><ns3:bodyPr xmlns:ns3="http://schemas.openxmlformats.org/drawingml/2006/main" wrap="square" anchor="t" anchorCtr="0"/><ns4:lstStyle><ns4:defPPr><ns4:defRPr sz="2800" b="1"><ns4:solidFill><ns4:srgbClr val="FFFFFF"/></ns4:solidFill></ns4:defRPr></ns4:defPPr></ns4:lstStyle><ns4:defPPr algn="l"><ns4:buNone/><ns4:defRPr sz="2800" dirty="0" b="1"><ns4:solidFill><ns4:srgbClr val="FFFFFF"/></ns4:solidFill><ns4:latin typeface="Georgia"/><ns4:ea typeface="Georgia"/></ns4:defRPr></ns4:defPPr><ns4:lvl1pPr algn="l"><ns4:buNone/><ns4:defRPr sz="2800" dirty="0" b="1"><ns4:solidFill><ns4:srgbClr val="FFFFFF"/></ns4:solidFill><ns4:latin typeface="Georgia"/><ns4:ea typeface="Georgia"/></ns4:defRPr></ns4:lvl1pPr><ns4:lvl2pPr algn="l"><ns4:buNone/><ns4:defRPr sz="2800" dirty="0" b="1"><ns4:solidFill><ns4:srgbClr val="FFFFFF"/></ns4:solidFill><ns4:latin typeface="Georgia"/><ns4:ea typeface="Georgia"/></ns4:defRPr></ns4:lvl2pPr><ns4:lvl3pPr algn="l"><ns4:buNone/><ns4:defRPr sz="2800" dirty="0" b="1"><ns4:solidFill><ns4:srgbClr val="FFFFFF"/></ns4:solidFill><ns4:latin typeface="Georgia"/><ns4:ea typeface="Georgia"/></ns4:defRPr></ns4:lvl3pPr><ns4:lvl4pPr algn="l"><ns4:buNone/><ns4:defRPr sz="2800" dirty="0" b="1"><ns4:solidFill><ns4:srgbClr val="FFFFFF"/></ns4:solidFill><ns4:latin typeface="Georgia"/><ns4:ea typeface="Georgia"/></ns4:defRPr></ns4:lvl4pPr><ns4:lvl5pPr algn="l"><ns4:buNone/><ns4:defRPr sz="2800" dirty="0" b="1"><ns4:solidFill><ns4:srgbClr val="FFFFFF"/></ns4:solidFill><ns4:latin typeface="Georgia"/><ns4:ea typeface="Georgia"/></ns4:defRPr></ns4:lvl5pPr><ns4:lvl6pPr algn="l"><ns4:buNone/><ns4:defRPr sz="2800" dirty="0" b="1"><ns4:solidFill><ns4:srgbClr val="FFFFFF"/></ns4:solidFill><ns4:latin typeface="Georgia"/><ns4:ea typeface="Georgia"/></ns4:defRPr></ns4:lvl6pPr><ns4:lvl7pPr algn="l"><ns4:buNone/><ns4:defRPr sz="2800" dirty="0" b="1"><ns4:solidFill><ns4:srgbClr val="FFFFFF"/></ns4:solidFill><ns4:latin typeface="Georgia"/><ns4:ea typeface="Georgia"/></ns4:defRPr></ns4:lvl7pPr><ns4:lvl8pPr algn="l"><ns4:buNone/><ns4:defRPr sz="2800" dirty="0" b="1"><ns4:solidFill><ns4:srgbClr val="FFFFFF"/></ns4:solidFill><ns4:latin typeface="Georgia"/><ns4:ea typeface="Georgia"/></ns4:defRPr></ns4:lvl8pPr><ns4:lvl9pPr algn="l"><ns4:buNone/><ns4:defRPr sz="2800" dirty="0" b="1"><ns4:solidFill><ns4:srgbClr val="FFFFFF"/></ns4:solidFill><ns4:latin typeface="Georgia"/><ns4:ea typeface="Georgia"/></ns4:defRPr></ns4:lvl9pPr></ns4:lstStyle/><ns5:p xmlns:ns5="http://schemas.openxmlformats.org/drawingml/2006/main"><ns5:pPr algn="l"><ns5:buNone/></ns5:pPr><ns5:r><ns5:rPr lang="ja-JP"/><ns5:t>サブタイトル</ns5:t></ns5:r></ns5:p></ns0:txBody></ns0:sp><ns0:sp><ns0:nvSpPr><ns0:cNvPr id="20" name="Body1.Left"/><ns0:cNvSpPr><ns1:spLocks xmlns:ns1="http://schemas.openxmlformats.org/drawingml/2006/main" noGrp="1"/></ns0:cNvSpPr><ns0:nvPr><ns0:ph idx="1" type="body"/></ns0:nvPr></ns0:nvSpPr><ns0:spPr><ns2:xfrm xmlns:ns2="http://schemas.openxmlformats.org/drawingml/2006/main"><ns2:off x="731520" y="1325880"/><ns2:ext cx="3200400" cy="4937760"/></ns2:xfrm></ns0:spPr><ns0:txBody><ns3:bodyPr xmlns:ns3="http://schemas.openxmlformats.org/drawingml/2006/main" wrap="square" anchor="t" anchorCtr="0"/><ns4:lstStyle/><ns4:defPPr algn="l"><ns4:buNone/><ns4:defRPr sz="1400" dirty="0"><ns4:solidFill><ns4:srgbClr val="1E293B"/></ns4:solidFill><ns4:latin typeface="Calibri"/><ns4:ea typeface="Calibri"/></ns4:defRPr></ns4:defPPr><ns4:lvl1pPr algn="l"><ns4:buNone/><ns4:defRPr sz="1400" dirty="0"><ns4:solidFill><ns4:srgbClr val="1E293B"/></ns4:solidFill><ns4:latin typeface="Calibri"/><ns4:ea typeface="Calibri"/></ns4:defRPr></ns4:lvl1pPr><ns4:lvl2pPr algn="l"><ns4:buNone/><ns4:defRPr sz="1400" dirty="0"><ns4:solidFill><ns4:srgbClr val="1E293B"/></ns4:solidFill><ns4:latin typeface="Calibri"/><ns4:ea typeface="Calibri"/></ns4:defRPr></ns4:lvl2pPr><ns4:lvl3pPr algn="l"><ns4:buNone/><ns4:defRPr sz="1400" dirty="0"><ns4:solidFill><ns4:srgbClr val="1E293B"/></ns4:solidFill><ns4:latin typeface="Calibri"/><ns4:ea typeface="Calibri"/></ns4:defRPr></ns4:lvl3pPr><ns4:lvl4pPr algn="l"><ns4:buNone/><ns4:defRPr sz="1400" dirty="0"><ns4:solidFill><ns4:srgbClr val="1E293B"/></ns4:solidFill><ns4:latin typeface="Calibri"/><ns4:ea typeface="Calibri"/></ns4:defRPr></ns4:lvl4pPr><ns4:lvl5pPr algn="l"><ns4:buNone/><ns4:defRPr sz="1400" dirty="0"><ns4:solidFill><ns4:srgbClr val="1E293B"/></ns4:solidFill><ns4:latin typeface="Calibri"/><ns4:ea typeface="Calibri"/></ns4:defRPr></ns4:lvl5pPr><ns4:lvl6pPr algn="l"><ns4:buNone/><ns4:defRPr sz="1400" dirty="0"><ns4:solidFill><ns4:srgbClr val="1E293B"/></ns4:solidFill><ns4:latin typeface="Calibri"/><ns4:ea typeface="Calibri"/></ns4:defRPr></ns4:lvl6pPr><ns4:lvl7pPr algn="l"><ns4:buNone/><ns4:defRPr sz="1400" dirty="0"><ns4:solidFill><ns4:srgbClr val="1E293B"/></ns4:solidFill><ns4:latin typeface="Calibri"/><ns4:ea typeface="Calibri"/></ns4:defRPr></ns4:lvl7pPr><ns4:lvl8pPr algn="l"><ns4:buNone/><ns4:defRPr sz="1400" dirty="0"><ns4:solidFill><ns4:srgbClr val="1E293B"/></ns4:solidFill><ns4:latin typeface="Calibri"/><ns4:ea typeface="Calibri"/></ns4:defRPr></ns4:lvl8pPr><ns4:lvl9pPr algn="l"><ns4:buNone/><ns4:defRPr sz="1400" dirty="0"><ns4:solidFill><ns4:srgbClr val="1E293B"/></ns4:solidFill><ns4:latin typeface="Calibri"/><ns4:ea typeface="Calibri"/></ns4:defRPr></ns4:lvl9pPr></ns4:lstStyle/><ns5:p xmlns:ns5="http://schemas.openxmlformats.org/drawingml/2006/main"><ns5:pPr algn="l"><ns5:buNone/></ns5:pPr><ns5:r><ns5:rPr lang="ja-JP"/><ns5:t>カラム 2</ns5:t></ns5:r></ns5:p></ns0:txBody></ns0:sp><ns0:sp><ns0:nvSpPr><ns0:cNvPr id="22" name="Body3.Right"/><ns0:cNvSpPr><ns1:spLocks xmlns:ns1="http://schemas.openxmlformats.org/drawingml/2006/main" noGrp="1"/></ns0:cNvSpPr><ns0:nvPr><ns0:ph idx="3" type="body"/></ns0:nvPr></ns0:nvSpPr><ns0:spPr><ns2:xfrm xmlns:ns2="http://schemas.openxmlformats.org/drawingml/2006/main"><ns2:off x="7863840" y="1325880"/><ns2:ext cx="3566160" cy="4937760"/></ns2:xfrm></ns0:spPr><ns0:txBody><ns3:bodyPr xmlns:ns3="http://schemas.openxmlformats.org/drawingml/2006/main" wrap="square" anchor="t" anchorCtr="0"/><ns4:lstStyle/><ns4:defPPr algn="l"><ns4:buNone/><ns4:defRPr sz="1400" dirty="0"><ns4:solidFill><ns4:srgbClr val="1E293B"/></ns4:solidFill><ns4:latin typeface="Calibri"/><ns4:ea typeface="Calibri"/></ns4:defRPr></ns4:defPPr><ns4:lvl1pPr algn="l"><ns4:buNone/><ns4:defRPr sz="1400" dirty="0"><ns4:solidFill><ns4:srgbClr val="1E293B"/></ns4:solidFill><ns4:latin typeface="Calibri"/><ns4:ea typeface="Calibri"/></ns4:defRPr></ns4:lvl1pPr><ns4:lvl2pPr algn="l"><ns4:buNone/><ns4:defRPr sz="1400" dirty="0"><ns4:solidFill><ns4:srgbClr val="1E293B"/></ns4:solidFill><ns4:latin typeface="Calibri"/><ns4:ea typeface="Calibri"/></ns4:defRPr></ns4:lvl2pPr><ns4:lvl3pPr algn="l"><ns4:buNone/><ns4:defRPr sz="1400" dirty="0"><ns4:solidFill><ns4:srgbClr val="1E293B"/></ns4:solidFill><ns4:latin typeface="Calibri"/><ns4:ea typeface="Calibri"/></ns4:defRPr></ns4:lvl3pPr><ns4:lvl4pPr algn="l"><ns4:buNone/><ns4:defRPr sz="1400" dirty="0"><ns4:solidFill><ns4:srgbClr val="1E293B"/></ns4:solidFill><ns4:latin typeface="Calibri"/><ns4:ea typeface="Calibri"/></ns4:defRPr></ns4:lvl4pPr><ns4:lvl5pPr algn="l"><ns4:buNone/><ns4:defRPr sz="1400" dirty="0"><ns4:solidFill><ns4:srgbClr val="1E293B"/></ns4:solidFill><ns4:latin typeface="Calibri"/><ns4:ea typeface="Calibri"/></ns4:defRPr></ns4:lvl5pPr><ns4:lvl6pPr algn="l"><ns4:buNone/><ns4:defRPr sz="1400" dirty="0"><ns4:solidFill><ns4:srgbClr val="1E293B"/></ns4:solidFill><ns4:latin typeface="Calibri"/><ns4:ea typeface="Calibri"/></ns4:defRPr></ns4:lvl6pPr><ns4:lvl7pPr algn="l"><ns4:buNone/><ns4:defRPr sz="1400" dirty="0"><ns4:solidFill><ns4:srgbClr val="1E293B"/></ns4:solidFill><ns4:latin typeface="Calibri"/><ns4:ea typeface="Calibri"/></ns4:defRPr></ns4:lvl7pPr><ns4:lvl8pPr algn="l"><ns4:buNone/><ns4:defRPr sz="1400" dirty="0"><ns4:solidFill><ns4:srgbClr val="1E293B"/></ns4:solidFill><ns4:latin typeface="Calibri"/><ns4:ea typeface="Calibri"/></ns4:defRPr></ns4:lvl8pPr><ns4:lvl9pPr algn="l"><ns4:buNone/><ns4:defRPr sz="1400" dirty="0"><ns4:solidFill><ns4:srgbClr val="1E293B"/></ns4:solidFill><ns4:latin typeface="Calibri"/><ns4:ea typeface="Calibri"/></ns4:defRPr></ns4:lvl9pPr></ns4:lstStyle/><ns5:p xmlns:ns5="http://schemas.openxmlformats.org/drawingml/2006/main"><ns5:pPr algn="r"><ns5:buNone/></ns5:pPr><ns5:r><ns5:rPr lang="ja-JP"/><ns5:t>&lt;#&gt;</ns5:t></ns5:r></ns5:p></ns0:txBody></ns0:sp></ns0:spTree></ns0:cSld><ns0:clrMapOvr/></ns0:sldLayout>
 </file>
 
 <file path=ppt/slideLayouts/slideLayout14.xml><?xml version='1.0' encoding='UTF-8' standalone='yes'?>
-<ns0:sldLayout xmlns:ns0="http://schemas.openxmlformats.org/presentationml/2006/main" type="blank" preserve="1"><ns0:cSld name="KPI.1Value.Single"><ns0:spTree><ns0:nvGrpSpPr><ns0:cNvPr id="1" name=""/><ns0:cNvGrpSpPr/><ns0:nvPr/></ns0:nvGrpSpPr><ns0:grpSpPr><ns1:xfrm xmlns:ns1="http://schemas.openxmlformats.org/drawingml/2006/main"><ns1:off x="0" y="0"/><ns1:ext cx="0" cy="0"/><ns1:chOff x="0" y="0"/><ns1:chExt cx="0" cy="0"/></ns1:xfrm></ns0:grpSpPr><ns0:sp><ns0:nvSpPr><ns0:cNvPr id="2" name="HeaderBar"/><ns0:cNvSpPr><ns1:spLocks xmlns:ns1="http://schemas.openxmlformats.org/drawingml/2006/main" noGrp="1" noSelect="0" noRot="1" noMove="1"/></ns0:cNvSpPr><ns0:nvPr/></ns0:nvSpPr><ns0:spPr><ns2:xfrm xmlns:ns2="http://schemas.openxmlformats.org/drawingml/2006/main"><ns2:off x="0" y="0"/><ns2:ext cx="12192000" cy="1051560"/></ns2:xfrm><ns3:prstGeom xmlns:ns3="http://schemas.openxmlformats.org/drawingml/2006/main" prst="rect"/><ns4:solidFill xmlns:ns4="http://schemas.openxmlformats.org/drawingml/2006/main"><ns4:srgbClr val="1E2761"/></ns4:solidFill><ns5:ln xmlns:ns5="http://schemas.openxmlformats.org/drawingml/2006/main"><ns5:noFill/></ns5:ln></ns0:spPr></ns0:sp><ns0:sp><ns0:nvSpPr><ns0:cNvPr id="10" name="SlideTitle.Header"/><ns0:cNvSpPr><ns1:spLocks xmlns:ns1="http://schemas.openxmlformats.org/drawingml/2006/main" noGrp="1"/></ns0:cNvSpPr><ns0:nvPr><ns0:ph idx="15" type="body"/></ns0:nvPr></ns0:nvSpPr><ns0:spPr><ns2:xfrm xmlns:ns2="http://schemas.openxmlformats.org/drawingml/2006/main"><ns2:off x="731520" y="91440"/><ns2:ext cx="9144000" cy="475488"/></ns2:xfrm></ns0:spPr><ns0:txBody><ns3:bodyPr xmlns:ns3="http://schemas.openxmlformats.org/drawingml/2006/main" wrap="square" anchor="t" anchorCtr="0"/><ns4:lstStyle xmlns:ns4="http://schemas.openxmlformats.org/drawingml/2006/main"><ns4:defPPr algn="l"><ns4:buNone/><ns4:defRPr sz="2800" dirty="0" b="1"><ns4:solidFill><ns4:srgbClr val="FFFFFF"/></ns4:solidFill><ns4:latin typeface="Georgia"/><ns4:ea typeface="Georgia"/></ns4:defRPr></ns4:defPPr><ns4:lvl1pPr algn="l"><ns4:buNone/><ns4:defRPr sz="2800" dirty="0" b="1"><ns4:solidFill><ns4:srgbClr val="FFFFFF"/></ns4:solidFill><ns4:latin typeface="Georgia"/><ns4:ea typeface="Georgia"/></ns4:defRPr></ns4:lvl1pPr><ns4:lvl2pPr algn="l"><ns4:buNone/><ns4:defRPr sz="2800" dirty="0" b="1"><ns4:solidFill><ns4:srgbClr val="FFFFFF"/></ns4:solidFill><ns4:latin typeface="Georgia"/><ns4:ea typeface="Georgia"/></ns4:defRPr></ns4:lvl2pPr><ns4:lvl3pPr algn="l"><ns4:buNone/><ns4:defRPr sz="2800" dirty="0" b="1"><ns4:solidFill><ns4:srgbClr val="FFFFFF"/></ns4:solidFill><ns4:latin typeface="Georgia"/><ns4:ea typeface="Georgia"/></ns4:defRPr></ns4:lvl3pPr><ns4:lvl4pPr algn="l"><ns4:buNone/><ns4:defRPr sz="2800" dirty="0" b="1"><ns4:solidFill><ns4:srgbClr val="FFFFFF"/></ns4:solidFill><ns4:latin typeface="Georgia"/><ns4:ea typeface="Georgia"/></ns4:defRPr></ns4:lvl4pPr><ns4:lvl5pPr algn="l"><ns4:buNone/><ns4:defRPr sz="2800" dirty="0" b="1"><ns4:solidFill><ns4:srgbClr val="FFFFFF"/></ns4:solidFill><ns4:latin typeface="Georgia"/><ns4:ea typeface="Georgia"/></ns4:defRPr></ns4:lvl5pPr><ns4:lvl6pPr algn="l"><ns4:buNone/><ns4:defRPr sz="2800" dirty="0" b="1"><ns4:solidFill><ns4:srgbClr val="FFFFFF"/></ns4:solidFill><ns4:latin typeface="Georgia"/><ns4:ea typeface="Georgia"/></ns4:defRPr></ns4:lvl6pPr><ns4:lvl7pPr algn="l"><ns4:buNone/><ns4:defRPr sz="2800" dirty="0" b="1"><ns4:solidFill><ns4:srgbClr val="FFFFFF"/></ns4:solidFill><ns4:latin typeface="Georgia"/><ns4:ea typeface="Georgia"/></ns4:defRPr></ns4:lvl7pPr><ns4:lvl8pPr algn="l"><ns4:buNone/><ns4:defRPr sz="2800" dirty="0" b="1"><ns4:solidFill><ns4:srgbClr val="FFFFFF"/></ns4:solidFill><ns4:latin typeface="Georgia"/><ns4:ea typeface="Georgia"/></ns4:defRPr></ns4:lvl8pPr><ns4:lvl9pPr algn="l"><ns4:buNone/><ns4:defRPr sz="2800" dirty="0" b="1"><ns4:solidFill><ns4:srgbClr val="FFFFFF"/></ns4:solidFill><ns4:latin typeface="Georgia"/><ns4:ea typeface="Georgia"/></ns4:defRPr></ns4:lvl9pPr></ns4:lstStyle/><ns5:p xmlns:ns5="http://schemas.openxmlformats.org/drawingml/2006/main"><ns5:pPr algn="l"><ns5:buNone/></ns5:pPr><ns5:r><ns5:rPr lang="ja-JP"/><ns5:t>サブタイトル</ns5:t></ns5:r></ns5:p></ns0:txBody></ns0:sp><ns0:sp><ns0:nvSpPr><ns0:cNvPr id="5" name="StatPanel"/><ns0:cNvSpPr><ns1:spLocks xmlns:ns1="http://schemas.openxmlformats.org/drawingml/2006/main" noGrp="1" noSelect="0" noRot="1" noMove="1"/></ns0:cNvSpPr><ns0:nvPr/></ns0:nvSpPr><ns0:spPr><ns2:xfrm xmlns:ns2="http://schemas.openxmlformats.org/drawingml/2006/main"><ns2:off x="2743200" y="1645920"/><ns2:ext cx="6675120" cy="4114800"/></ns2:xfrm><ns3:prstGeom xmlns:ns3="http://schemas.openxmlformats.org/drawingml/2006/main" prst="roundRect"><ns3:avLst><ns3:gd name="adj" fmla="val 10000"/></ns3:avLst></ns3:prstGeom><ns4:solidFill xmlns:ns4="http://schemas.openxmlformats.org/drawingml/2006/main"><ns4:srgbClr val="EDF0F7"/></ns4:solidFill><ns5:ln xmlns:ns5="http://schemas.openxmlformats.org/drawingml/2006/main"><ns5:noFill/></ns5:ln></ns0:spPr></ns0:sp><ns0:sp><ns0:nvSpPr><ns0:cNvPr id="6" name="AccentDot"/><ns0:cNvSpPr><ns1:spLocks xmlns:ns1="http://schemas.openxmlformats.org/drawingml/2006/main" noGrp="1"/></ns0:cNvSpPr><ns0:nvPr/></ns0:nvSpPr><ns0:spPr><ns2:xfrm xmlns:ns2="http://schemas.openxmlformats.org/drawingml/2006/main"><ns2:off x="3154680" y="2057400"/><ns2:ext cx="274320" cy="274320"/></ns2:xfrm><ns3:prstGeom xmlns:ns3="http://schemas.openxmlformats.org/drawingml/2006/main" prst="ellipse"/><ns4:solidFill xmlns:ns4="http://schemas.openxmlformats.org/drawingml/2006/main"><ns4:srgbClr val="3B82F6"/></ns4:solidFill><ns5:ln xmlns:ns5="http://schemas.openxmlformats.org/drawingml/2006/main"><ns5:noFill/></ns5:ln></ns0:spPr></ns0:sp><ns0:sp><ns0:nvSpPr><ns0:cNvPr id="20" name="Value.Center"/><ns0:cNvSpPr><ns1:spLocks xmlns:ns1="http://schemas.openxmlformats.org/drawingml/2006/main" noGrp="1"/></ns0:cNvSpPr><ns0:nvPr><ns0:ph idx="1" type="body"/></ns0:nvPr></ns0:nvSpPr><ns0:spPr><ns2:xfrm xmlns:ns2="http://schemas.openxmlformats.org/drawingml/2006/main"><ns2:off x="3200400" y="2011680"/><ns2:ext cx="5943600" cy="1828800"/></ns2:xfrm></ns0:spPr><ns0:txBody><ns3:bodyPr xmlns:ns3="http://schemas.openxmlformats.org/drawingml/2006/main" wrap="square" anchor="t" anchorCtr="0"/><ns4:lstStyle xmlns:ns4="http://schemas.openxmlformats.org/drawingml/2006/main"><ns4:defPPr algn="ctr"><ns4:buNone/><ns4:defRPr sz="7200" dirty="0" b="1"><ns4:solidFill><ns4:srgbClr val="1E2761"/></ns4:solidFill><ns4:latin typeface="Georgia"/><ns4:ea typeface="Georgia"/></ns4:defRPr></ns4:defPPr><ns4:lvl1pPr algn="ctr"><ns4:buNone/><ns4:defRPr sz="7200" dirty="0" b="1"><ns4:solidFill><ns4:srgbClr val="1E2761"/></ns4:solidFill><ns4:latin typeface="Georgia"/><ns4:ea typeface="Georgia"/></ns4:defRPr></ns4:lvl1pPr><ns4:lvl2pPr algn="ctr"><ns4:buNone/><ns4:defRPr sz="7200" dirty="0" b="1"><ns4:solidFill><ns4:srgbClr val="1E2761"/></ns4:solidFill><ns4:latin typeface="Georgia"/><ns4:ea typeface="Georgia"/></ns4:defRPr></ns4:lvl2pPr><ns4:lvl3pPr algn="ctr"><ns4:buNone/><ns4:defRPr sz="7200" dirty="0" b="1"><ns4:solidFill><ns4:srgbClr val="1E2761"/></ns4:solidFill><ns4:latin typeface="Georgia"/><ns4:ea typeface="Georgia"/></ns4:defRPr></ns4:lvl3pPr><ns4:lvl4pPr algn="ctr"><ns4:buNone/><ns4:defRPr sz="7200" dirty="0" b="1"><ns4:solidFill><ns4:srgbClr val="1E2761"/></ns4:solidFill><ns4:latin typeface="Georgia"/><ns4:ea typeface="Georgia"/></ns4:defRPr></ns4:lvl4pPr><ns4:lvl5pPr algn="ctr"><ns4:buNone/><ns4:defRPr sz="7200" dirty="0" b="1"><ns4:solidFill><ns4:srgbClr val="1E2761"/></ns4:solidFill><ns4:latin typeface="Georgia"/><ns4:ea typeface="Georgia"/></ns4:defRPr></ns4:lvl5pPr><ns4:lvl6pPr algn="ctr"><ns4:buNone/><ns4:defRPr sz="7200" dirty="0" b="1"><ns4:solidFill><ns4:srgbClr val="1E2761"/></ns4:solidFill><ns4:latin typeface="Georgia"/><ns4:ea typeface="Georgia"/></ns4:defRPr></ns4:lvl6pPr><ns4:lvl7pPr algn="ctr"><ns4:buNone/><ns4:defRPr sz="7200" dirty="0" b="1"><ns4:solidFill><ns4:srgbClr val="1E2761"/></ns4:solidFill><ns4:latin typeface="Georgia"/><ns4:ea typeface="Georgia"/></ns4:defRPr></ns4:lvl7pPr><ns4:lvl8pPr algn="ctr"><ns4:buNone/><ns4:defRPr sz="7200" dirty="0" b="1"><ns4:solidFill><ns4:srgbClr val="1E2761"/></ns4:solidFill><ns4:latin typeface="Georgia"/><ns4:ea typeface="Georgia"/></ns4:defRPr></ns4:lvl8pPr><ns4:lvl9pPr algn="ctr"><ns4:buNone/><ns4:defRPr sz="7200" dirty="0" b="1"><ns4:solidFill><ns4:srgbClr val="1E2761"/></ns4:solidFill><ns4:latin typeface="Georgia"/><ns4:ea typeface="Georgia"/></ns4:defRPr></ns4:lvl9pPr></ns4:lstStyle/><ns5:p xmlns:ns5="http://schemas.openxmlformats.org/drawingml/2006/main"><ns5:pPr algn="ctr"><ns5:buNone/></ns5:pPr><ns5:r><ns5:rPr lang="ja-JP"/><ns5:t>指標名</ns5:t></ns5:r></ns5:p></ns0:txBody></ns0:sp><ns0:sp><ns0:nvSpPr><ns0:cNvPr id="22" name="ValueDesc.Center"/><ns0:cNvSpPr><ns1:spLocks xmlns:ns1="http://schemas.openxmlformats.org/drawingml/2006/main" noGrp="1"/></ns0:cNvSpPr><ns0:nvPr><ns0:ph idx="3" type="body"/></ns0:nvPr></ns0:nvSpPr><ns0:spPr><ns2:xfrm xmlns:ns2="http://schemas.openxmlformats.org/drawingml/2006/main"><ns2:off x="3200400" y="4389120"/><ns2:ext cx="5943600" cy="914400"/></ns2:xfrm></ns0:spPr><ns0:txBody><ns3:bodyPr xmlns:ns3="http://schemas.openxmlformats.org/drawingml/2006/main" wrap="square" anchor="t" anchorCtr="0"/><ns4:lstStyle xmlns:ns4="http://schemas.openxmlformats.org/drawingml/2006/main"><ns4:defPPr algn="ctr"><ns4:buNone/><ns4:defRPr sz="1300" dirty="0"><ns4:solidFill><ns4:srgbClr val="94A3B8"/></ns4:solidFill><ns4:latin typeface="Calibri"/><ns4:ea typeface="Calibri"/></ns4:defRPr></ns4:defPPr><ns4:lvl1pPr algn="ctr"><ns4:buNone/><ns4:defRPr sz="1300" dirty="0"><ns4:solidFill><ns4:srgbClr val="94A3B8"/></ns4:solidFill><ns4:latin typeface="Calibri"/><ns4:ea typeface="Calibri"/></ns4:defRPr></ns4:lvl1pPr><ns4:lvl2pPr algn="ctr"><ns4:buNone/><ns4:defRPr sz="1300" dirty="0"><ns4:solidFill><ns4:srgbClr val="94A3B8"/></ns4:solidFill><ns4:latin typeface="Calibri"/><ns4:ea typeface="Calibri"/></ns4:defRPr></ns4:lvl2pPr><ns4:lvl3pPr algn="ctr"><ns4:buNone/><ns4:defRPr sz="1300" dirty="0"><ns4:solidFill><ns4:srgbClr val="94A3B8"/></ns4:solidFill><ns4:latin typeface="Calibri"/><ns4:ea typeface="Calibri"/></ns4:defRPr></ns4:lvl3pPr><ns4:lvl4pPr algn="ctr"><ns4:buNone/><ns4:defRPr sz="1300" dirty="0"><ns4:solidFill><ns4:srgbClr val="94A3B8"/></ns4:solidFill><ns4:latin typeface="Calibri"/><ns4:ea typeface="Calibri"/></ns4:defRPr></ns4:lvl4pPr><ns4:lvl5pPr algn="ctr"><ns4:buNone/><ns4:defRPr sz="1300" dirty="0"><ns4:solidFill><ns4:srgbClr val="94A3B8"/></ns4:solidFill><ns4:latin typeface="Calibri"/><ns4:ea typeface="Calibri"/></ns4:defRPr></ns4:lvl5pPr><ns4:lvl6pPr algn="ctr"><ns4:buNone/><ns4:defRPr sz="1300" dirty="0"><ns4:solidFill><ns4:srgbClr val="94A3B8"/></ns4:solidFill><ns4:latin typeface="Calibri"/><ns4:ea typeface="Calibri"/></ns4:defRPr></ns4:lvl6pPr><ns4:lvl7pPr algn="ctr"><ns4:buNone/><ns4:defRPr sz="1300" dirty="0"><ns4:solidFill><ns4:srgbClr val="94A3B8"/></ns4:solidFill><ns4:latin typeface="Calibri"/><ns4:ea typeface="Calibri"/></ns4:defRPr></ns4:lvl7pPr><ns4:lvl8pPr algn="ctr"><ns4:buNone/><ns4:defRPr sz="1300" dirty="0"><ns4:solidFill><ns4:srgbClr val="94A3B8"/></ns4:solidFill><ns4:latin typeface="Calibri"/><ns4:ea typeface="Calibri"/></ns4:defRPr></ns4:lvl8pPr><ns4:lvl9pPr algn="ctr"><ns4:buNone/><ns4:defRPr sz="1300" dirty="0"><ns4:solidFill><ns4:srgbClr val="94A3B8"/></ns4:solidFill><ns4:latin typeface="Calibri"/><ns4:ea typeface="Calibri"/></ns4:defRPr></ns4:lvl9pPr></ns4:lstStyle/><ns5:p xmlns:ns5="http://schemas.openxmlformats.org/drawingml/2006/main"><ns5:pPr algn="r"><ns5:buNone/></ns5:pPr><ns5:r><ns5:rPr lang="ja-JP"/><ns5:t>&lt;#&gt;</ns5:t></ns5:r></ns5:p></ns0:txBody></ns0:sp></ns0:spTree></ns0:cSld><ns0:clrMapOvr/></ns0:sldLayout>
+<ns0:sldLayout xmlns:ns0="http://schemas.openxmlformats.org/presentationml/2006/main" type="blank" preserve="1"><ns0:cSld name="KPI.1Value.Single"><ns0:spTree><ns0:nvGrpSpPr><ns0:cNvPr id="1" name=""/><ns0:cNvGrpSpPr/><ns0:nvPr/></ns0:nvGrpSpPr><ns0:grpSpPr><ns1:xfrm xmlns:ns1="http://schemas.openxmlformats.org/drawingml/2006/main"><ns1:off x="0" y="0"/><ns1:ext cx="0" cy="0"/><ns1:chOff x="0" y="0"/><ns1:chExt cx="0" cy="0"/></ns1:xfrm></ns0:grpSpPr><ns0:sp><ns0:nvSpPr><ns0:cNvPr id="2" name="HeaderBar"/><ns0:cNvSpPr><ns1:spLocks xmlns:ns1="http://schemas.openxmlformats.org/drawingml/2006/main" noGrp="1" noSelect="0" noRot="1" noMove="1"/></ns0:cNvSpPr><ns0:nvPr/></ns0:nvSpPr><ns0:spPr><ns2:xfrm xmlns:ns2="http://schemas.openxmlformats.org/drawingml/2006/main"><ns2:off x="0" y="0"/><ns2:ext cx="12192000" cy="1051560"/></ns2:xfrm><ns3:prstGeom xmlns:ns3="http://schemas.openxmlformats.org/drawingml/2006/main" prst="rect"/><ns4:solidFill xmlns:ns4="http://schemas.openxmlformats.org/drawingml/2006/main"><ns4:srgbClr val="1E2761"/></ns4:solidFill><ns5:ln xmlns:ns5="http://schemas.openxmlformats.org/drawingml/2006/main"><ns5:noFill/></ns5:ln></ns0:spPr></ns0:sp><ns0:sp><ns0:nvSpPr><ns0:cNvPr id="10" name="SlideTitle.Header"/><ns0:cNvSpPr><ns1:spLocks xmlns:ns1="http://schemas.openxmlformats.org/drawingml/2006/main" noGrp="1"/></ns0:cNvSpPr><ns0:nvPr><ns0:ph idx="15" type="body"/></ns0:nvPr></ns0:nvSpPr><ns0:spPr><ns2:xfrm xmlns:ns2="http://schemas.openxmlformats.org/drawingml/2006/main"><ns2:off x="731520" y="91440"/><ns2:ext cx="9144000" cy="475488"/></ns2:xfrm></ns0:spPr><ns0:txBody><ns3:bodyPr xmlns:ns3="http://schemas.openxmlformats.org/drawingml/2006/main" wrap="square" anchor="t" anchorCtr="0"/><ns4:lstStyle><ns4:defPPr><ns4:defRPr sz="2800" b="1"><ns4:solidFill><ns4:srgbClr val="FFFFFF"/></ns4:solidFill></ns4:defRPr></ns4:defPPr></ns4:lstStyle><ns4:defPPr algn="l"><ns4:buNone/><ns4:defRPr sz="2800" dirty="0" b="1"><ns4:solidFill><ns4:srgbClr val="FFFFFF"/></ns4:solidFill><ns4:latin typeface="Georgia"/><ns4:ea typeface="Georgia"/></ns4:defRPr></ns4:defPPr><ns4:lvl1pPr algn="l"><ns4:buNone/><ns4:defRPr sz="2800" dirty="0" b="1"><ns4:solidFill><ns4:srgbClr val="FFFFFF"/></ns4:solidFill><ns4:latin typeface="Georgia"/><ns4:ea typeface="Georgia"/></ns4:defRPr></ns4:lvl1pPr><ns4:lvl2pPr algn="l"><ns4:buNone/><ns4:defRPr sz="2800" dirty="0" b="1"><ns4:solidFill><ns4:srgbClr val="FFFFFF"/></ns4:solidFill><ns4:latin typeface="Georgia"/><ns4:ea typeface="Georgia"/></ns4:defRPr></ns4:lvl2pPr><ns4:lvl3pPr algn="l"><ns4:buNone/><ns4:defRPr sz="2800" dirty="0" b="1"><ns4:solidFill><ns4:srgbClr val="FFFFFF"/></ns4:solidFill><ns4:latin typeface="Georgia"/><ns4:ea typeface="Georgia"/></ns4:defRPr></ns4:lvl3pPr><ns4:lvl4pPr algn="l"><ns4:buNone/><ns4:defRPr sz="2800" dirty="0" b="1"><ns4:solidFill><ns4:srgbClr val="FFFFFF"/></ns4:solidFill><ns4:latin typeface="Georgia"/><ns4:ea typeface="Georgia"/></ns4:defRPr></ns4:lvl4pPr><ns4:lvl5pPr algn="l"><ns4:buNone/><ns4:defRPr sz="2800" dirty="0" b="1"><ns4:solidFill><ns4:srgbClr val="FFFFFF"/></ns4:solidFill><ns4:latin typeface="Georgia"/><ns4:ea typeface="Georgia"/></ns4:defRPr></ns4:lvl5pPr><ns4:lvl6pPr algn="l"><ns4:buNone/><ns4:defRPr sz="2800" dirty="0" b="1"><ns4:solidFill><ns4:srgbClr val="FFFFFF"/></ns4:solidFill><ns4:latin typeface="Georgia"/><ns4:ea typeface="Georgia"/></ns4:defRPr></ns4:lvl6pPr><ns4:lvl7pPr algn="l"><ns4:buNone/><ns4:defRPr sz="2800" dirty="0" b="1"><ns4:solidFill><ns4:srgbClr val="FFFFFF"/></ns4:solidFill><ns4:latin typeface="Georgia"/><ns4:ea typeface="Georgia"/></ns4:defRPr></ns4:lvl7pPr><ns4:lvl8pPr algn="l"><ns4:buNone/><ns4:defRPr sz="2800" dirty="0" b="1"><ns4:solidFill><ns4:srgbClr val="FFFFFF"/></ns4:solidFill><ns4:latin typeface="Georgia"/><ns4:ea typeface="Georgia"/></ns4:defRPr></ns4:lvl8pPr><ns4:lvl9pPr algn="l"><ns4:buNone/><ns4:defRPr sz="2800" dirty="0" b="1"><ns4:solidFill><ns4:srgbClr val="FFFFFF"/></ns4:solidFill><ns4:latin typeface="Georgia"/><ns4:ea typeface="Georgia"/></ns4:defRPr></ns4:lvl9pPr></ns4:lstStyle/><ns5:p xmlns:ns5="http://schemas.openxmlformats.org/drawingml/2006/main"><ns5:pPr algn="l"><ns5:buNone/></ns5:pPr><ns5:r><ns5:rPr lang="ja-JP"/><ns5:t>サブタイトル</ns5:t></ns5:r></ns5:p></ns0:txBody></ns0:sp><ns0:sp><ns0:nvSpPr><ns0:cNvPr id="5" name="StatPanel"/><ns0:cNvSpPr><ns1:spLocks xmlns:ns1="http://schemas.openxmlformats.org/drawingml/2006/main" noGrp="1" noSelect="0" noRot="1" noMove="1"/></ns0:cNvSpPr><ns0:nvPr/></ns0:nvSpPr><ns0:spPr><ns2:xfrm xmlns:ns2="http://schemas.openxmlformats.org/drawingml/2006/main"><ns2:off x="2743200" y="1645920"/><ns2:ext cx="6675120" cy="4114800"/></ns2:xfrm><ns3:prstGeom xmlns:ns3="http://schemas.openxmlformats.org/drawingml/2006/main" prst="roundRect"><ns3:avLst><ns3:gd name="adj" fmla="val 10000"/></ns3:avLst></ns3:prstGeom><ns4:solidFill xmlns:ns4="http://schemas.openxmlformats.org/drawingml/2006/main"><ns4:srgbClr val="EDF0F7"/></ns4:solidFill><ns5:ln xmlns:ns5="http://schemas.openxmlformats.org/drawingml/2006/main"><ns5:noFill/></ns5:ln></ns0:spPr></ns0:sp><ns0:sp><ns0:nvSpPr><ns0:cNvPr id="6" name="AccentDot"/><ns0:cNvSpPr><ns1:spLocks xmlns:ns1="http://schemas.openxmlformats.org/drawingml/2006/main" noGrp="1"/></ns0:cNvSpPr><ns0:nvPr/></ns0:nvSpPr><ns0:spPr><ns2:xfrm xmlns:ns2="http://schemas.openxmlformats.org/drawingml/2006/main"><ns2:off x="3154680" y="2057400"/><ns2:ext cx="274320" cy="274320"/></ns2:xfrm><ns3:prstGeom xmlns:ns3="http://schemas.openxmlformats.org/drawingml/2006/main" prst="ellipse"/><ns4:solidFill xmlns:ns4="http://schemas.openxmlformats.org/drawingml/2006/main"><ns4:srgbClr val="3B82F6"/></ns4:solidFill><ns5:ln xmlns:ns5="http://schemas.openxmlformats.org/drawingml/2006/main"><ns5:noFill/></ns5:ln></ns0:spPr></ns0:sp><ns0:sp><ns0:nvSpPr><ns0:cNvPr id="20" name="Value.Center"/><ns0:cNvSpPr><ns1:spLocks xmlns:ns1="http://schemas.openxmlformats.org/drawingml/2006/main" noGrp="1"/></ns0:cNvSpPr><ns0:nvPr><ns0:ph idx="1" type="body"/></ns0:nvPr></ns0:nvSpPr><ns0:spPr><ns2:xfrm xmlns:ns2="http://schemas.openxmlformats.org/drawingml/2006/main"><ns2:off x="3200400" y="2011680"/><ns2:ext cx="5943600" cy="1828800"/></ns2:xfrm></ns0:spPr><ns0:txBody><ns3:bodyPr xmlns:ns3="http://schemas.openxmlformats.org/drawingml/2006/main" wrap="square" anchor="t" anchorCtr="0"/><ns4:lstStyle><ns4:defPPr algn="ctr"><ns4:defRPr sz="7200" b="1"><ns4:solidFill><ns4:srgbClr val="1E2761"/></ns4:solidFill></ns4:defRPr></ns4:defPPr></ns4:lstStyle><ns4:defPPr algn="ctr"><ns4:buNone/><ns4:defRPr sz="7200" dirty="0" b="1"><ns4:solidFill><ns4:srgbClr val="1E2761"/></ns4:solidFill><ns4:latin typeface="Georgia"/><ns4:ea typeface="Georgia"/></ns4:defRPr></ns4:defPPr><ns4:lvl1pPr algn="ctr"><ns4:buNone/><ns4:defRPr sz="7200" dirty="0" b="1"><ns4:solidFill><ns4:srgbClr val="1E2761"/></ns4:solidFill><ns4:latin typeface="Georgia"/><ns4:ea typeface="Georgia"/></ns4:defRPr></ns4:lvl1pPr><ns4:lvl2pPr algn="ctr"><ns4:buNone/><ns4:defRPr sz="7200" dirty="0" b="1"><ns4:solidFill><ns4:srgbClr val="1E2761"/></ns4:solidFill><ns4:latin typeface="Georgia"/><ns4:ea typeface="Georgia"/></ns4:defRPr></ns4:lvl2pPr><ns4:lvl3pPr algn="ctr"><ns4:buNone/><ns4:defRPr sz="7200" dirty="0" b="1"><ns4:solidFill><ns4:srgbClr val="1E2761"/></ns4:solidFill><ns4:latin typeface="Georgia"/><ns4:ea typeface="Georgia"/></ns4:defRPr></ns4:lvl3pPr><ns4:lvl4pPr algn="ctr"><ns4:buNone/><ns4:defRPr sz="7200" dirty="0" b="1"><ns4:solidFill><ns4:srgbClr val="1E2761"/></ns4:solidFill><ns4:latin typeface="Georgia"/><ns4:ea typeface="Georgia"/></ns4:defRPr></ns4:lvl4pPr><ns4:lvl5pPr algn="ctr"><ns4:buNone/><ns4:defRPr sz="7200" dirty="0" b="1"><ns4:solidFill><ns4:srgbClr val="1E2761"/></ns4:solidFill><ns4:latin typeface="Georgia"/><ns4:ea typeface="Georgia"/></ns4:defRPr></ns4:lvl5pPr><ns4:lvl6pPr algn="ctr"><ns4:buNone/><ns4:defRPr sz="7200" dirty="0" b="1"><ns4:solidFill><ns4:srgbClr val="1E2761"/></ns4:solidFill><ns4:latin typeface="Georgia"/><ns4:ea typeface="Georgia"/></ns4:defRPr></ns4:lvl6pPr><ns4:lvl7pPr algn="ctr"><ns4:buNone/><ns4:defRPr sz="7200" dirty="0" b="1"><ns4:solidFill><ns4:srgbClr val="1E2761"/></ns4:solidFill><ns4:latin typeface="Georgia"/><ns4:ea typeface="Georgia"/></ns4:defRPr></ns4:lvl7pPr><ns4:lvl8pPr algn="ctr"><ns4:buNone/><ns4:defRPr sz="7200" dirty="0" b="1"><ns4:solidFill><ns4:srgbClr val="1E2761"/></ns4:solidFill><ns4:latin typeface="Georgia"/><ns4:ea typeface="Georgia"/></ns4:defRPr></ns4:lvl8pPr><ns4:lvl9pPr algn="ctr"><ns4:buNone/><ns4:defRPr sz="7200" dirty="0" b="1"><ns4:solidFill><ns4:srgbClr val="1E2761"/></ns4:solidFill><ns4:latin typeface="Georgia"/><ns4:ea typeface="Georgia"/></ns4:defRPr></ns4:lvl9pPr></ns4:lstStyle/><ns5:p xmlns:ns5="http://schemas.openxmlformats.org/drawingml/2006/main"><ns5:pPr algn="ctr"><ns5:buNone/></ns5:pPr><ns5:r><ns5:rPr lang="ja-JP"/><ns5:t>指標名</ns5:t></ns5:r></ns5:p></ns0:txBody></ns0:sp><ns0:sp><ns0:nvSpPr><ns0:cNvPr id="22" name="ValueDesc.Center"/><ns0:cNvSpPr><ns1:spLocks xmlns:ns1="http://schemas.openxmlformats.org/drawingml/2006/main" noGrp="1"/></ns0:cNvSpPr><ns0:nvPr><ns0:ph idx="3" type="body"/></ns0:nvPr></ns0:nvSpPr><ns0:spPr><ns2:xfrm xmlns:ns2="http://schemas.openxmlformats.org/drawingml/2006/main"><ns2:off x="3200400" y="4389120"/><ns2:ext cx="5943600" cy="914400"/></ns2:xfrm></ns0:spPr><ns0:txBody><ns3:bodyPr xmlns:ns3="http://schemas.openxmlformats.org/drawingml/2006/main" wrap="square" anchor="t" anchorCtr="0"/><ns4:lstStyle><ns4:defPPr algn="ctr"><ns4:defRPr sz="1300"><ns4:solidFill><ns4:srgbClr val="94A3B8"/></ns4:solidFill></ns4:defRPr></ns4:defPPr></ns4:lstStyle><ns4:defPPr algn="ctr"><ns4:buNone/><ns4:defRPr sz="1300" dirty="0"><ns4:solidFill><ns4:srgbClr val="94A3B8"/></ns4:solidFill><ns4:latin typeface="Calibri"/><ns4:ea typeface="Calibri"/></ns4:defRPr></ns4:defPPr><ns4:lvl1pPr algn="ctr"><ns4:buNone/><ns4:defRPr sz="1300" dirty="0"><ns4:solidFill><ns4:srgbClr val="94A3B8"/></ns4:solidFill><ns4:latin typeface="Calibri"/><ns4:ea typeface="Calibri"/></ns4:defRPr></ns4:lvl1pPr><ns4:lvl2pPr algn="ctr"><ns4:buNone/><ns4:defRPr sz="1300" dirty="0"><ns4:solidFill><ns4:srgbClr val="94A3B8"/></ns4:solidFill><ns4:latin typeface="Calibri"/><ns4:ea typeface="Calibri"/></ns4:defRPr></ns4:lvl2pPr><ns4:lvl3pPr algn="ctr"><ns4:buNone/><ns4:defRPr sz="1300" dirty="0"><ns4:solidFill><ns4:srgbClr val="94A3B8"/></ns4:solidFill><ns4:latin typeface="Calibri"/><ns4:ea typeface="Calibri"/></ns4:defRPr></ns4:lvl3pPr><ns4:lvl4pPr algn="ctr"><ns4:buNone/><ns4:defRPr sz="1300" dirty="0"><ns4:solidFill><ns4:srgbClr val="94A3B8"/></ns4:solidFill><ns4:latin typeface="Calibri"/><ns4:ea typeface="Calibri"/></ns4:defRPr></ns4:lvl4pPr><ns4:lvl5pPr algn="ctr"><ns4:buNone/><ns4:defRPr sz="1300" dirty="0"><ns4:solidFill><ns4:srgbClr val="94A3B8"/></ns4:solidFill><ns4:latin typeface="Calibri"/><ns4:ea typeface="Calibri"/></ns4:defRPr></ns4:lvl5pPr><ns4:lvl6pPr algn="ctr"><ns4:buNone/><ns4:defRPr sz="1300" dirty="0"><ns4:solidFill><ns4:srgbClr val="94A3B8"/></ns4:solidFill><ns4:latin typeface="Calibri"/><ns4:ea typeface="Calibri"/></ns4:defRPr></ns4:lvl6pPr><ns4:lvl7pPr algn="ctr"><ns4:buNone/><ns4:defRPr sz="1300" dirty="0"><ns4:solidFill><ns4:srgbClr val="94A3B8"/></ns4:solidFill><ns4:latin typeface="Calibri"/><ns4:ea typeface="Calibri"/></ns4:defRPr></ns4:lvl7pPr><ns4:lvl8pPr algn="ctr"><ns4:buNone/><ns4:defRPr sz="1300" dirty="0"><ns4:solidFill><ns4:srgbClr val="94A3B8"/></ns4:solidFill><ns4:latin typeface="Calibri"/><ns4:ea typeface="Calibri"/></ns4:defRPr></ns4:lvl8pPr><ns4:lvl9pPr algn="ctr"><ns4:buNone/><ns4:defRPr sz="1300" dirty="0"><ns4:solidFill><ns4:srgbClr val="94A3B8"/></ns4:solidFill><ns4:latin typeface="Calibri"/><ns4:ea typeface="Calibri"/></ns4:defRPr></ns4:lvl9pPr></ns4:lstStyle/><ns5:p xmlns:ns5="http://schemas.openxmlformats.org/drawingml/2006/main"><ns5:pPr algn="r"><ns5:buNone/></ns5:pPr><ns5:r><ns5:rPr lang="ja-JP"/><ns5:t>&lt;#&gt;</ns5:t></ns5:r></ns5:p></ns0:txBody></ns0:sp></ns0:spTree></ns0:cSld><ns0:clrMapOvr/></ns0:sldLayout>
 </file>
 
 <file path=ppt/slideLayouts/slideLayout15.xml><?xml version='1.0' encoding='UTF-8' standalone='yes'?>
-<ns0:sldLayout xmlns:ns0="http://schemas.openxmlformats.org/presentationml/2006/main" type="blank" preserve="1"><ns0:cSld name="KPI.2Value.Equal"><ns0:spTree><ns0:nvGrpSpPr><ns0:cNvPr id="1" name=""/><ns0:cNvGrpSpPr/><ns0:nvPr/></ns0:nvGrpSpPr><ns0:grpSpPr><ns1:xfrm xmlns:ns1="http://schemas.openxmlformats.org/drawingml/2006/main"><ns1:off x="0" y="0"/><ns1:ext cx="0" cy="0"/><ns1:chOff x="0" y="0"/><ns1:chExt cx="0" cy="0"/></ns1:xfrm></ns0:grpSpPr><ns0:sp><ns0:nvSpPr><ns0:cNvPr id="2" name="HeaderBar"/><ns0:cNvSpPr><ns1:spLocks xmlns:ns1="http://schemas.openxmlformats.org/drawingml/2006/main" noGrp="1" noSelect="0" noRot="1" noMove="1"/></ns0:cNvSpPr><ns0:nvPr/></ns0:nvSpPr><ns0:spPr><ns2:xfrm xmlns:ns2="http://schemas.openxmlformats.org/drawingml/2006/main"><ns2:off x="0" y="0"/><ns2:ext cx="12192000" cy="1051560"/></ns2:xfrm><ns3:prstGeom xmlns:ns3="http://schemas.openxmlformats.org/drawingml/2006/main" prst="rect"/><ns4:solidFill xmlns:ns4="http://schemas.openxmlformats.org/drawingml/2006/main"><ns4:srgbClr val="1E2761"/></ns4:solidFill><ns5:ln xmlns:ns5="http://schemas.openxmlformats.org/drawingml/2006/main"><ns5:noFill/></ns5:ln></ns0:spPr></ns0:sp><ns0:sp><ns0:nvSpPr><ns0:cNvPr id="10" name="SlideTitle.Header"/><ns0:cNvSpPr><ns1:spLocks xmlns:ns1="http://schemas.openxmlformats.org/drawingml/2006/main" noGrp="1"/></ns0:cNvSpPr><ns0:nvPr><ns0:ph idx="15" type="body"/></ns0:nvPr></ns0:nvSpPr><ns0:spPr><ns2:xfrm xmlns:ns2="http://schemas.openxmlformats.org/drawingml/2006/main"><ns2:off x="731520" y="91440"/><ns2:ext cx="9144000" cy="475488"/></ns2:xfrm></ns0:spPr><ns0:txBody><ns3:bodyPr xmlns:ns3="http://schemas.openxmlformats.org/drawingml/2006/main" wrap="square" anchor="t" anchorCtr="0"/><ns4:lstStyle xmlns:ns4="http://schemas.openxmlformats.org/drawingml/2006/main"><ns4:defPPr algn="l"><ns4:buNone/><ns4:defRPr sz="2800" dirty="0" b="1"><ns4:solidFill><ns4:srgbClr val="FFFFFF"/></ns4:solidFill><ns4:latin typeface="Georgia"/><ns4:ea typeface="Georgia"/></ns4:defRPr></ns4:defPPr><ns4:lvl1pPr algn="l"><ns4:buNone/><ns4:defRPr sz="2800" dirty="0" b="1"><ns4:solidFill><ns4:srgbClr val="FFFFFF"/></ns4:solidFill><ns4:latin typeface="Georgia"/><ns4:ea typeface="Georgia"/></ns4:defRPr></ns4:lvl1pPr><ns4:lvl2pPr algn="l"><ns4:buNone/><ns4:defRPr sz="2800" dirty="0" b="1"><ns4:solidFill><ns4:srgbClr val="FFFFFF"/></ns4:solidFill><ns4:latin typeface="Georgia"/><ns4:ea typeface="Georgia"/></ns4:defRPr></ns4:lvl2pPr><ns4:lvl3pPr algn="l"><ns4:buNone/><ns4:defRPr sz="2800" dirty="0" b="1"><ns4:solidFill><ns4:srgbClr val="FFFFFF"/></ns4:solidFill><ns4:latin typeface="Georgia"/><ns4:ea typeface="Georgia"/></ns4:defRPr></ns4:lvl3pPr><ns4:lvl4pPr algn="l"><ns4:buNone/><ns4:defRPr sz="2800" dirty="0" b="1"><ns4:solidFill><ns4:srgbClr val="FFFFFF"/></ns4:solidFill><ns4:latin typeface="Georgia"/><ns4:ea typeface="Georgia"/></ns4:defRPr></ns4:lvl4pPr><ns4:lvl5pPr algn="l"><ns4:buNone/><ns4:defRPr sz="2800" dirty="0" b="1"><ns4:solidFill><ns4:srgbClr val="FFFFFF"/></ns4:solidFill><ns4:latin typeface="Georgia"/><ns4:ea typeface="Georgia"/></ns4:defRPr></ns4:lvl5pPr><ns4:lvl6pPr algn="l"><ns4:buNone/><ns4:defRPr sz="2800" dirty="0" b="1"><ns4:solidFill><ns4:srgbClr val="FFFFFF"/></ns4:solidFill><ns4:latin typeface="Georgia"/><ns4:ea typeface="Georgia"/></ns4:defRPr></ns4:lvl6pPr><ns4:lvl7pPr algn="l"><ns4:buNone/><ns4:defRPr sz="2800" dirty="0" b="1"><ns4:solidFill><ns4:srgbClr val="FFFFFF"/></ns4:solidFill><ns4:latin typeface="Georgia"/><ns4:ea typeface="Georgia"/></ns4:defRPr></ns4:lvl7pPr><ns4:lvl8pPr algn="l"><ns4:buNone/><ns4:defRPr sz="2800" dirty="0" b="1"><ns4:solidFill><ns4:srgbClr val="FFFFFF"/></ns4:solidFill><ns4:latin typeface="Georgia"/><ns4:ea typeface="Georgia"/></ns4:defRPr></ns4:lvl8pPr><ns4:lvl9pPr algn="l"><ns4:buNone/><ns4:defRPr sz="2800" dirty="0" b="1"><ns4:solidFill><ns4:srgbClr val="FFFFFF"/></ns4:solidFill><ns4:latin typeface="Georgia"/><ns4:ea typeface="Georgia"/></ns4:defRPr></ns4:lvl9pPr></ns4:lstStyle/><ns5:p xmlns:ns5="http://schemas.openxmlformats.org/drawingml/2006/main"><ns5:pPr algn="l"><ns5:buNone/></ns5:pPr><ns5:r><ns5:rPr lang="ja-JP"/><ns5:t>サブタイトル</ns5:t></ns5:r></ns5:p></ns0:txBody></ns0:sp><ns0:sp><ns0:nvSpPr><ns0:cNvPr id="5" name="Card1"/><ns0:cNvSpPr><ns1:spLocks xmlns:ns1="http://schemas.openxmlformats.org/drawingml/2006/main" noGrp="1" noSelect="0" noRot="1" noMove="1"/></ns0:cNvSpPr><ns0:nvPr/></ns0:nvSpPr><ns0:spPr><ns2:xfrm xmlns:ns2="http://schemas.openxmlformats.org/drawingml/2006/main"><ns2:off x="640080" y="1371600"/><ns2:ext cx="5120640" cy="4754880"/></ns2:xfrm><ns3:prstGeom xmlns:ns3="http://schemas.openxmlformats.org/drawingml/2006/main" prst="roundRect"><ns3:avLst><ns3:gd name="adj" fmla="val 10000"/></ns3:avLst></ns3:prstGeom><ns4:solidFill xmlns:ns4="http://schemas.openxmlformats.org/drawingml/2006/main"><ns4:srgbClr val="EDF0F7"/></ns4:solidFill><ns5:ln xmlns:ns5="http://schemas.openxmlformats.org/drawingml/2006/main"><ns5:noFill/></ns5:ln></ns0:spPr></ns0:sp><ns0:sp><ns0:nvSpPr><ns0:cNvPr id="6" name="Card2"/><ns0:cNvSpPr><ns1:spLocks xmlns:ns1="http://schemas.openxmlformats.org/drawingml/2006/main" noGrp="1" noSelect="0" noRot="1" noMove="1"/></ns0:cNvSpPr><ns0:nvPr/></ns0:nvSpPr><ns0:spPr><ns2:xfrm xmlns:ns2="http://schemas.openxmlformats.org/drawingml/2006/main"><ns2:off x="6126480" y="1371600"/><ns2:ext cx="5303520" cy="4754880"/></ns2:xfrm><ns3:prstGeom xmlns:ns3="http://schemas.openxmlformats.org/drawingml/2006/main" prst="roundRect"><ns3:avLst><ns3:gd name="adj" fmla="val 10000"/></ns3:avLst></ns3:prstGeom><ns4:solidFill xmlns:ns4="http://schemas.openxmlformats.org/drawingml/2006/main"><ns4:srgbClr val="EDF0F7"/></ns4:solidFill><ns5:ln xmlns:ns5="http://schemas.openxmlformats.org/drawingml/2006/main"><ns5:noFill/></ns5:ln></ns0:spPr></ns0:sp><ns0:sp><ns0:nvSpPr><ns0:cNvPr id="7" name="Accent1"/><ns0:cNvSpPr><ns1:spLocks xmlns:ns1="http://schemas.openxmlformats.org/drawingml/2006/main" noGrp="1" noSelect="0" noRot="1" noMove="1"/></ns0:cNvSpPr><ns0:nvPr/></ns0:nvSpPr><ns0:spPr><ns2:xfrm xmlns:ns2="http://schemas.openxmlformats.org/drawingml/2006/main"><ns2:off x="640080" y="1371600"/><ns2:ext cx="5120640" cy="73152"/></ns2:xfrm><ns3:prstGeom xmlns:ns3="http://schemas.openxmlformats.org/drawingml/2006/main" prst="rect"/><ns4:solidFill xmlns:ns4="http://schemas.openxmlformats.org/drawingml/2006/main"><ns4:srgbClr val="3B82F6"/></ns4:solidFill><ns5:ln xmlns:ns5="http://schemas.openxmlformats.org/drawingml/2006/main"><ns5:noFill/></ns5:ln></ns0:spPr></ns0:sp><ns0:sp><ns0:nvSpPr><ns0:cNvPr id="8" name="Accent2"/><ns0:cNvSpPr><ns1:spLocks xmlns:ns1="http://schemas.openxmlformats.org/drawingml/2006/main" noGrp="1" noSelect="0" noRot="1" noMove="1"/></ns0:cNvSpPr><ns0:nvPr/></ns0:nvSpPr><ns0:spPr><ns2:xfrm xmlns:ns2="http://schemas.openxmlformats.org/drawingml/2006/main"><ns2:off x="6126480" y="1371600"/><ns2:ext cx="5303520" cy="73152"/></ns2:xfrm><ns3:prstGeom xmlns:ns3="http://schemas.openxmlformats.org/drawingml/2006/main" prst="rect"/><ns4:solidFill xmlns:ns4="http://schemas.openxmlformats.org/drawingml/2006/main"><ns4:srgbClr val="06B6D4"/></ns4:solidFill><ns5:ln xmlns:ns5="http://schemas.openxmlformats.org/drawingml/2006/main"><ns5:noFill/></ns5:ln></ns0:spPr></ns0:sp><ns0:sp><ns0:nvSpPr><ns0:cNvPr id="20" name="Value1.Left"/><ns0:cNvSpPr><ns1:spLocks xmlns:ns1="http://schemas.openxmlformats.org/drawingml/2006/main" noGrp="1"/></ns0:cNvSpPr><ns0:nvPr><ns0:ph idx="1" type="body"/></ns0:nvPr></ns0:nvSpPr><ns0:spPr><ns2:xfrm xmlns:ns2="http://schemas.openxmlformats.org/drawingml/2006/main"><ns2:off x="1097280" y="1828800"/><ns2:ext cx="4206240" cy="1645920"/></ns2:xfrm></ns0:spPr><ns0:txBody><ns3:bodyPr xmlns:ns3="http://schemas.openxmlformats.org/drawingml/2006/main" wrap="square" anchor="t" anchorCtr="0"/><ns4:lstStyle xmlns:ns4="http://schemas.openxmlformats.org/drawingml/2006/main"><ns4:defPPr algn="ctr"><ns4:buNone/><ns4:defRPr sz="6000" dirty="0" b="1"><ns4:solidFill><ns4:srgbClr val="1E2761"/></ns4:solidFill><ns4:latin typeface="Georgia"/><ns4:ea typeface="Georgia"/></ns4:defRPr></ns4:defPPr><ns4:lvl1pPr algn="ctr"><ns4:buNone/><ns4:defRPr sz="6000" dirty="0" b="1"><ns4:solidFill><ns4:srgbClr val="1E2761"/></ns4:solidFill><ns4:latin typeface="Georgia"/><ns4:ea typeface="Georgia"/></ns4:defRPr></ns4:lvl1pPr><ns4:lvl2pPr algn="ctr"><ns4:buNone/><ns4:defRPr sz="6000" dirty="0" b="1"><ns4:solidFill><ns4:srgbClr val="1E2761"/></ns4:solidFill><ns4:latin typeface="Georgia"/><ns4:ea typeface="Georgia"/></ns4:defRPr></ns4:lvl2pPr><ns4:lvl3pPr algn="ctr"><ns4:buNone/><ns4:defRPr sz="6000" dirty="0" b="1"><ns4:solidFill><ns4:srgbClr val="1E2761"/></ns4:solidFill><ns4:latin typeface="Georgia"/><ns4:ea typeface="Georgia"/></ns4:defRPr></ns4:lvl3pPr><ns4:lvl4pPr algn="ctr"><ns4:buNone/><ns4:defRPr sz="6000" dirty="0" b="1"><ns4:solidFill><ns4:srgbClr val="1E2761"/></ns4:solidFill><ns4:latin typeface="Georgia"/><ns4:ea typeface="Georgia"/></ns4:defRPr></ns4:lvl4pPr><ns4:lvl5pPr algn="ctr"><ns4:buNone/><ns4:defRPr sz="6000" dirty="0" b="1"><ns4:solidFill><ns4:srgbClr val="1E2761"/></ns4:solidFill><ns4:latin typeface="Georgia"/><ns4:ea typeface="Georgia"/></ns4:defRPr></ns4:lvl5pPr><ns4:lvl6pPr algn="ctr"><ns4:buNone/><ns4:defRPr sz="6000" dirty="0" b="1"><ns4:solidFill><ns4:srgbClr val="1E2761"/></ns4:solidFill><ns4:latin typeface="Georgia"/><ns4:ea typeface="Georgia"/></ns4:defRPr></ns4:lvl6pPr><ns4:lvl7pPr algn="ctr"><ns4:buNone/><ns4:defRPr sz="6000" dirty="0" b="1"><ns4:solidFill><ns4:srgbClr val="1E2761"/></ns4:solidFill><ns4:latin typeface="Georgia"/><ns4:ea typeface="Georgia"/></ns4:defRPr></ns4:lvl7pPr><ns4:lvl8pPr algn="ctr"><ns4:buNone/><ns4:defRPr sz="6000" dirty="0" b="1"><ns4:solidFill><ns4:srgbClr val="1E2761"/></ns4:solidFill><ns4:latin typeface="Georgia"/><ns4:ea typeface="Georgia"/></ns4:defRPr></ns4:lvl8pPr><ns4:lvl9pPr algn="ctr"><ns4:buNone/><ns4:defRPr sz="6000" dirty="0" b="1"><ns4:solidFill><ns4:srgbClr val="1E2761"/></ns4:solidFill><ns4:latin typeface="Georgia"/><ns4:ea typeface="Georgia"/></ns4:defRPr></ns4:lvl9pPr></ns4:lstStyle/><ns5:p xmlns:ns5="http://schemas.openxmlformats.org/drawingml/2006/main"><ns5:pPr algn="ctr"><ns5:buNone/></ns5:pPr><ns5:r><ns5:rPr lang="ja-JP"/><ns5:t>指標名
-説明テキスト</ns5:t></ns5:r></ns5:p></ns0:txBody></ns0:sp><ns0:sp><ns0:nvSpPr><ns0:cNvPr id="22" name="Value2.Right"/><ns0:cNvSpPr><ns1:spLocks xmlns:ns1="http://schemas.openxmlformats.org/drawingml/2006/main" noGrp="1"/></ns0:cNvSpPr><ns0:nvPr><ns0:ph idx="3" type="body"/></ns0:nvPr></ns0:nvSpPr><ns0:spPr><ns2:xfrm xmlns:ns2="http://schemas.openxmlformats.org/drawingml/2006/main"><ns2:off x="6583680" y="1828800"/><ns2:ext cx="4389120" cy="1645920"/></ns2:xfrm></ns0:spPr><ns0:txBody><ns3:bodyPr xmlns:ns3="http://schemas.openxmlformats.org/drawingml/2006/main" wrap="square" anchor="t" anchorCtr="0"/><ns4:lstStyle xmlns:ns4="http://schemas.openxmlformats.org/drawingml/2006/main"><ns4:defPPr algn="ctr"><ns4:buNone/><ns4:defRPr sz="6000" dirty="0" b="1"><ns4:solidFill><ns4:srgbClr val="1E2761"/></ns4:solidFill><ns4:latin typeface="Georgia"/><ns4:ea typeface="Georgia"/></ns4:defRPr></ns4:defPPr><ns4:lvl1pPr algn="ctr"><ns4:buNone/><ns4:defRPr sz="6000" dirty="0" b="1"><ns4:solidFill><ns4:srgbClr val="1E2761"/></ns4:solidFill><ns4:latin typeface="Georgia"/><ns4:ea typeface="Georgia"/></ns4:defRPr></ns4:lvl1pPr><ns4:lvl2pPr algn="ctr"><ns4:buNone/><ns4:defRPr sz="6000" dirty="0" b="1"><ns4:solidFill><ns4:srgbClr val="1E2761"/></ns4:solidFill><ns4:latin typeface="Georgia"/><ns4:ea typeface="Georgia"/></ns4:defRPr></ns4:lvl2pPr><ns4:lvl3pPr algn="ctr"><ns4:buNone/><ns4:defRPr sz="6000" dirty="0" b="1"><ns4:solidFill><ns4:srgbClr val="1E2761"/></ns4:solidFill><ns4:latin typeface="Georgia"/><ns4:ea typeface="Georgia"/></ns4:defRPr></ns4:lvl3pPr><ns4:lvl4pPr algn="ctr"><ns4:buNone/><ns4:defRPr sz="6000" dirty="0" b="1"><ns4:solidFill><ns4:srgbClr val="1E2761"/></ns4:solidFill><ns4:latin typeface="Georgia"/><ns4:ea typeface="Georgia"/></ns4:defRPr></ns4:lvl4pPr><ns4:lvl5pPr algn="ctr"><ns4:buNone/><ns4:defRPr sz="6000" dirty="0" b="1"><ns4:solidFill><ns4:srgbClr val="1E2761"/></ns4:solidFill><ns4:latin typeface="Georgia"/><ns4:ea typeface="Georgia"/></ns4:defRPr></ns4:lvl5pPr><ns4:lvl6pPr algn="ctr"><ns4:buNone/><ns4:defRPr sz="6000" dirty="0" b="1"><ns4:solidFill><ns4:srgbClr val="1E2761"/></ns4:solidFill><ns4:latin typeface="Georgia"/><ns4:ea typeface="Georgia"/></ns4:defRPr></ns4:lvl6pPr><ns4:lvl7pPr algn="ctr"><ns4:buNone/><ns4:defRPr sz="6000" dirty="0" b="1"><ns4:solidFill><ns4:srgbClr val="1E2761"/></ns4:solidFill><ns4:latin typeface="Georgia"/><ns4:ea typeface="Georgia"/></ns4:defRPr></ns4:lvl7pPr><ns4:lvl8pPr algn="ctr"><ns4:buNone/><ns4:defRPr sz="6000" dirty="0" b="1"><ns4:solidFill><ns4:srgbClr val="1E2761"/></ns4:solidFill><ns4:latin typeface="Georgia"/><ns4:ea typeface="Georgia"/></ns4:defRPr></ns4:lvl8pPr><ns4:lvl9pPr algn="ctr"><ns4:buNone/><ns4:defRPr sz="6000" dirty="0" b="1"><ns4:solidFill><ns4:srgbClr val="1E2761"/></ns4:solidFill><ns4:latin typeface="Georgia"/><ns4:ea typeface="Georgia"/></ns4:defRPr></ns4:lvl9pPr></ns4:lstStyle/><ns5:p xmlns:ns5="http://schemas.openxmlformats.org/drawingml/2006/main"><ns5:pPr algn="ctr"><ns5:buNone/></ns5:pPr><ns5:r><ns5:rPr lang="ja-JP"/><ns5:t>指標名
-説明テキスト</ns5:t></ns5:r></ns5:p></ns0:txBody></ns0:sp><ns0:sp><ns0:nvSpPr><ns0:cNvPr id="30" name="SlideNum.Footer"/><ns0:cNvSpPr><ns1:spLocks xmlns:ns1="http://schemas.openxmlformats.org/drawingml/2006/main" noGrp="1"/></ns0:cNvSpPr><ns0:nvPr><ns0:ph idx="50" type="sldNum"/></ns0:nvPr></ns0:nvSpPr><ns0:spPr><ns2:xfrm xmlns:ns2="http://schemas.openxmlformats.org/drawingml/2006/main"><ns2:off x="10972800" y="6446520"/><ns2:ext cx="1097280" cy="274320"/></ns2:xfrm></ns0:spPr><ns0:txBody><ns3:bodyPr xmlns:ns3="http://schemas.openxmlformats.org/drawingml/2006/main" wrap="square" anchor="t" anchorCtr="0"/><ns4:lstStyle xmlns:ns4="http://schemas.openxmlformats.org/drawingml/2006/main"><ns4:defPPr algn="r"><ns4:buNone/><ns4:defRPr sz="1000" dirty="0"><ns4:solidFill><ns4:srgbClr val="94A3B8"/></ns4:solidFill><ns4:latin typeface="Calibri"/><ns4:ea typeface="Calibri"/></ns4:defRPr></ns4:defPPr><ns4:lvl1pPr algn="r"><ns4:buNone/><ns4:defRPr sz="1000" dirty="0"><ns4:solidFill><ns4:srgbClr val="94A3B8"/></ns4:solidFill><ns4:latin typeface="Calibri"/><ns4:ea typeface="Calibri"/></ns4:defRPr></ns4:lvl1pPr><ns4:lvl2pPr algn="r"><ns4:buNone/><ns4:defRPr sz="1000" dirty="0"><ns4:solidFill><ns4:srgbClr val="94A3B8"/></ns4:solidFill><ns4:latin typeface="Calibri"/><ns4:ea typeface="Calibri"/></ns4:defRPr></ns4:lvl2pPr><ns4:lvl3pPr algn="r"><ns4:buNone/><ns4:defRPr sz="1000" dirty="0"><ns4:solidFill><ns4:srgbClr val="94A3B8"/></ns4:solidFill><ns4:latin typeface="Calibri"/><ns4:ea typeface="Calibri"/></ns4:defRPr></ns4:lvl3pPr><ns4:lvl4pPr algn="r"><ns4:buNone/><ns4:defRPr sz="1000" dirty="0"><ns4:solidFill><ns4:srgbClr val="94A3B8"/></ns4:solidFill><ns4:latin typeface="Calibri"/><ns4:ea typeface="Calibri"/></ns4:defRPr></ns4:lvl4pPr><ns4:lvl5pPr algn="r"><ns4:buNone/><ns4:defRPr sz="1000" dirty="0"><ns4:solidFill><ns4:srgbClr val="94A3B8"/></ns4:solidFill><ns4:latin typeface="Calibri"/><ns4:ea typeface="Calibri"/></ns4:defRPr></ns4:lvl5pPr><ns4:lvl6pPr algn="r"><ns4:buNone/><ns4:defRPr sz="1000" dirty="0"><ns4:solidFill><ns4:srgbClr val="94A3B8"/></ns4:solidFill><ns4:latin typeface="Calibri"/><ns4:ea typeface="Calibri"/></ns4:defRPr></ns4:lvl6pPr><ns4:lvl7pPr algn="r"><ns4:buNone/><ns4:defRPr sz="1000" dirty="0"><ns4:solidFill><ns4:srgbClr val="94A3B8"/></ns4:solidFill><ns4:latin typeface="Calibri"/><ns4:ea typeface="Calibri"/></ns4:defRPr></ns4:lvl7pPr><ns4:lvl8pPr algn="r"><ns4:buNone/><ns4:defRPr sz="1000" dirty="0"><ns4:solidFill><ns4:srgbClr val="94A3B8"/></ns4:solidFill><ns4:latin typeface="Calibri"/><ns4:ea typeface="Calibri"/></ns4:defRPr></ns4:lvl8pPr><ns4:lvl9pPr algn="r"><ns4:buNone/><ns4:defRPr sz="1000" dirty="0"><ns4:solidFill><ns4:srgbClr val="94A3B8"/></ns4:solidFill><ns4:latin typeface="Calibri"/><ns4:ea typeface="Calibri"/></ns4:defRPr></ns4:lvl9pPr></ns4:lstStyle><ns5:p xmlns:ns5="http://schemas.openxmlformats.org/drawingml/2006/main"><ns5:pPr algn="r"><ns5:buNone/></ns5:pPr><ns5:r><ns5:rPr lang="ja-JP"/><ns5:t>&lt;#&gt;</ns5:t></ns5:r></ns5:p></ns0:txBody></ns0:sp></ns0:spTree></ns0:cSld><ns0:clrMapOvr/></ns0:sldLayout>
+<ns0:sldLayout xmlns:ns0="http://schemas.openxmlformats.org/presentationml/2006/main" type="blank" preserve="1"><ns0:cSld name="KPI.2Value.Equal"><ns0:spTree><ns0:nvGrpSpPr><ns0:cNvPr id="1" name=""/><ns0:cNvGrpSpPr/><ns0:nvPr/></ns0:nvGrpSpPr><ns0:grpSpPr><ns1:xfrm xmlns:ns1="http://schemas.openxmlformats.org/drawingml/2006/main"><ns1:off x="0" y="0"/><ns1:ext cx="0" cy="0"/><ns1:chOff x="0" y="0"/><ns1:chExt cx="0" cy="0"/></ns1:xfrm></ns0:grpSpPr><ns0:sp><ns0:nvSpPr><ns0:cNvPr id="2" name="HeaderBar"/><ns0:cNvSpPr><ns1:spLocks xmlns:ns1="http://schemas.openxmlformats.org/drawingml/2006/main" noGrp="1" noSelect="0" noRot="1" noMove="1"/></ns0:cNvSpPr><ns0:nvPr/></ns0:nvSpPr><ns0:spPr><ns2:xfrm xmlns:ns2="http://schemas.openxmlformats.org/drawingml/2006/main"><ns2:off x="0" y="0"/><ns2:ext cx="12192000" cy="1051560"/></ns2:xfrm><ns3:prstGeom xmlns:ns3="http://schemas.openxmlformats.org/drawingml/2006/main" prst="rect"/><ns4:solidFill xmlns:ns4="http://schemas.openxmlformats.org/drawingml/2006/main"><ns4:srgbClr val="1E2761"/></ns4:solidFill><ns5:ln xmlns:ns5="http://schemas.openxmlformats.org/drawingml/2006/main"><ns5:noFill/></ns5:ln></ns0:spPr></ns0:sp><ns0:sp><ns0:nvSpPr><ns0:cNvPr id="10" name="SlideTitle.Header"/><ns0:cNvSpPr><ns1:spLocks xmlns:ns1="http://schemas.openxmlformats.org/drawingml/2006/main" noGrp="1"/></ns0:cNvSpPr><ns0:nvPr><ns0:ph idx="15" type="body"/></ns0:nvPr></ns0:nvSpPr><ns0:spPr><ns2:xfrm xmlns:ns2="http://schemas.openxmlformats.org/drawingml/2006/main"><ns2:off x="731520" y="91440"/><ns2:ext cx="9144000" cy="475488"/></ns2:xfrm></ns0:spPr><ns0:txBody><ns3:bodyPr xmlns:ns3="http://schemas.openxmlformats.org/drawingml/2006/main" wrap="square" anchor="t" anchorCtr="0"/><ns4:lstStyle><ns4:defPPr><ns4:defRPr sz="2800" b="1"><ns4:solidFill><ns4:srgbClr val="FFFFFF"/></ns4:solidFill></ns4:defRPr></ns4:defPPr></ns4:lstStyle><ns4:defPPr algn="l"><ns4:buNone/><ns4:defRPr sz="2800" dirty="0" b="1"><ns4:solidFill><ns4:srgbClr val="FFFFFF"/></ns4:solidFill><ns4:latin typeface="Georgia"/><ns4:ea typeface="Georgia"/></ns4:defRPr></ns4:defPPr><ns4:lvl1pPr algn="l"><ns4:buNone/><ns4:defRPr sz="2800" dirty="0" b="1"><ns4:solidFill><ns4:srgbClr val="FFFFFF"/></ns4:solidFill><ns4:latin typeface="Georgia"/><ns4:ea typeface="Georgia"/></ns4:defRPr></ns4:lvl1pPr><ns4:lvl2pPr algn="l"><ns4:buNone/><ns4:defRPr sz="2800" dirty="0" b="1"><ns4:solidFill><ns4:srgbClr val="FFFFFF"/></ns4:solidFill><ns4:latin typeface="Georgia"/><ns4:ea typeface="Georgia"/></ns4:defRPr></ns4:lvl2pPr><ns4:lvl3pPr algn="l"><ns4:buNone/><ns4:defRPr sz="2800" dirty="0" b="1"><ns4:solidFill><ns4:srgbClr val="FFFFFF"/></ns4:solidFill><ns4:latin typeface="Georgia"/><ns4:ea typeface="Georgia"/></ns4:defRPr></ns4:lvl3pPr><ns4:lvl4pPr algn="l"><ns4:buNone/><ns4:defRPr sz="2800" dirty="0" b="1"><ns4:solidFill><ns4:srgbClr val="FFFFFF"/></ns4:solidFill><ns4:latin typeface="Georgia"/><ns4:ea typeface="Georgia"/></ns4:defRPr></ns4:lvl4pPr><ns4:lvl5pPr algn="l"><ns4:buNone/><ns4:defRPr sz="2800" dirty="0" b="1"><ns4:solidFill><ns4:srgbClr val="FFFFFF"/></ns4:solidFill><ns4:latin typeface="Georgia"/><ns4:ea typeface="Georgia"/></ns4:defRPr></ns4:lvl5pPr><ns4:lvl6pPr algn="l"><ns4:buNone/><ns4:defRPr sz="2800" dirty="0" b="1"><ns4:solidFill><ns4:srgbClr val="FFFFFF"/></ns4:solidFill><ns4:latin typeface="Georgia"/><ns4:ea typeface="Georgia"/></ns4:defRPr></ns4:lvl6pPr><ns4:lvl7pPr algn="l"><ns4:buNone/><ns4:defRPr sz="2800" dirty="0" b="1"><ns4:solidFill><ns4:srgbClr val="FFFFFF"/></ns4:solidFill><ns4:latin typeface="Georgia"/><ns4:ea typeface="Georgia"/></ns4:defRPr></ns4:lvl7pPr><ns4:lvl8pPr algn="l"><ns4:buNone/><ns4:defRPr sz="2800" dirty="0" b="1"><ns4:solidFill><ns4:srgbClr val="FFFFFF"/></ns4:solidFill><ns4:latin typeface="Georgia"/><ns4:ea typeface="Georgia"/></ns4:defRPr></ns4:lvl8pPr><ns4:lvl9pPr algn="l"><ns4:buNone/><ns4:defRPr sz="2800" dirty="0" b="1"><ns4:solidFill><ns4:srgbClr val="FFFFFF"/></ns4:solidFill><ns4:latin typeface="Georgia"/><ns4:ea typeface="Georgia"/></ns4:defRPr></ns4:lvl9pPr></ns4:lstStyle/><ns5:p xmlns:ns5="http://schemas.openxmlformats.org/drawingml/2006/main"><ns5:pPr algn="l"><ns5:buNone/></ns5:pPr><ns5:r><ns5:rPr lang="ja-JP"/><ns5:t>サブタイトル</ns5:t></ns5:r></ns5:p></ns0:txBody></ns0:sp><ns0:sp><ns0:nvSpPr><ns0:cNvPr id="5" name="Card1"/><ns0:cNvSpPr><ns1:spLocks xmlns:ns1="http://schemas.openxmlformats.org/drawingml/2006/main" noGrp="1" noSelect="0" noRot="1" noMove="1"/></ns0:cNvSpPr><ns0:nvPr/></ns0:nvSpPr><ns0:spPr><ns2:xfrm xmlns:ns2="http://schemas.openxmlformats.org/drawingml/2006/main"><ns2:off x="640080" y="1371600"/><ns2:ext cx="5120640" cy="4754880"/></ns2:xfrm><ns3:prstGeom xmlns:ns3="http://schemas.openxmlformats.org/drawingml/2006/main" prst="roundRect"><ns3:avLst><ns3:gd name="adj" fmla="val 10000"/></ns3:avLst></ns3:prstGeom><ns4:solidFill xmlns:ns4="http://schemas.openxmlformats.org/drawingml/2006/main"><ns4:srgbClr val="EDF0F7"/></ns4:solidFill><ns5:ln xmlns:ns5="http://schemas.openxmlformats.org/drawingml/2006/main"><ns5:noFill/></ns5:ln></ns0:spPr></ns0:sp><ns0:sp><ns0:nvSpPr><ns0:cNvPr id="6" name="Card2"/><ns0:cNvSpPr><ns1:spLocks xmlns:ns1="http://schemas.openxmlformats.org/drawingml/2006/main" noGrp="1" noSelect="0" noRot="1" noMove="1"/></ns0:cNvSpPr><ns0:nvPr/></ns0:nvSpPr><ns0:spPr><ns2:xfrm xmlns:ns2="http://schemas.openxmlformats.org/drawingml/2006/main"><ns2:off x="6126480" y="1371600"/><ns2:ext cx="5303520" cy="4754880"/></ns2:xfrm><ns3:prstGeom xmlns:ns3="http://schemas.openxmlformats.org/drawingml/2006/main" prst="roundRect"><ns3:avLst><ns3:gd name="adj" fmla="val 10000"/></ns3:avLst></ns3:prstGeom><ns4:solidFill xmlns:ns4="http://schemas.openxmlformats.org/drawingml/2006/main"><ns4:srgbClr val="EDF0F7"/></ns4:solidFill><ns5:ln xmlns:ns5="http://schemas.openxmlformats.org/drawingml/2006/main"><ns5:noFill/></ns5:ln></ns0:spPr></ns0:sp><ns0:sp><ns0:nvSpPr><ns0:cNvPr id="7" name="Accent1"/><ns0:cNvSpPr><ns1:spLocks xmlns:ns1="http://schemas.openxmlformats.org/drawingml/2006/main" noGrp="1" noSelect="0" noRot="1" noMove="1"/></ns0:cNvSpPr><ns0:nvPr/></ns0:nvSpPr><ns0:spPr><ns2:xfrm xmlns:ns2="http://schemas.openxmlformats.org/drawingml/2006/main"><ns2:off x="640080" y="1371600"/><ns2:ext cx="5120640" cy="73152"/></ns2:xfrm><ns3:prstGeom xmlns:ns3="http://schemas.openxmlformats.org/drawingml/2006/main" prst="rect"/><ns4:solidFill xmlns:ns4="http://schemas.openxmlformats.org/drawingml/2006/main"><ns4:srgbClr val="3B82F6"/></ns4:solidFill><ns5:ln xmlns:ns5="http://schemas.openxmlformats.org/drawingml/2006/main"><ns5:noFill/></ns5:ln></ns0:spPr></ns0:sp><ns0:sp><ns0:nvSpPr><ns0:cNvPr id="8" name="Accent2"/><ns0:cNvSpPr><ns1:spLocks xmlns:ns1="http://schemas.openxmlformats.org/drawingml/2006/main" noGrp="1" noSelect="0" noRot="1" noMove="1"/></ns0:cNvSpPr><ns0:nvPr/></ns0:nvSpPr><ns0:spPr><ns2:xfrm xmlns:ns2="http://schemas.openxmlformats.org/drawingml/2006/main"><ns2:off x="6126480" y="1371600"/><ns2:ext cx="5303520" cy="73152"/></ns2:xfrm><ns3:prstGeom xmlns:ns3="http://schemas.openxmlformats.org/drawingml/2006/main" prst="rect"/><ns4:solidFill xmlns:ns4="http://schemas.openxmlformats.org/drawingml/2006/main"><ns4:srgbClr val="06B6D4"/></ns4:solidFill><ns5:ln xmlns:ns5="http://schemas.openxmlformats.org/drawingml/2006/main"><ns5:noFill/></ns5:ln></ns0:spPr></ns0:sp><ns0:sp><ns0:nvSpPr><ns0:cNvPr id="20" name="Value1.Left"/><ns0:cNvSpPr><ns1:spLocks xmlns:ns1="http://schemas.openxmlformats.org/drawingml/2006/main" noGrp="1"/></ns0:cNvSpPr><ns0:nvPr><ns0:ph idx="1" type="body"/></ns0:nvPr></ns0:nvSpPr><ns0:spPr><ns2:xfrm xmlns:ns2="http://schemas.openxmlformats.org/drawingml/2006/main"><ns2:off x="1097280" y="1828800"/><ns2:ext cx="4206240" cy="1645920"/></ns2:xfrm></ns0:spPr><ns0:txBody><ns3:bodyPr xmlns:ns3="http://schemas.openxmlformats.org/drawingml/2006/main" wrap="square" anchor="t" anchorCtr="0"/><ns4:lstStyle><ns4:defPPr algn="ctr"><ns4:defRPr sz="6000" b="1"><ns4:solidFill><ns4:srgbClr val="1E2761"/></ns4:solidFill></ns4:defRPr></ns4:defPPr></ns4:lstStyle><ns4:defPPr algn="ctr"><ns4:buNone/><ns4:defRPr sz="6000" dirty="0" b="1"><ns4:solidFill><ns4:srgbClr val="1E2761"/></ns4:solidFill><ns4:latin typeface="Georgia"/><ns4:ea typeface="Georgia"/></ns4:defRPr></ns4:defPPr><ns4:lvl1pPr algn="ctr"><ns4:buNone/><ns4:defRPr sz="6000" dirty="0" b="1"><ns4:solidFill><ns4:srgbClr val="1E2761"/></ns4:solidFill><ns4:latin typeface="Georgia"/><ns4:ea typeface="Georgia"/></ns4:defRPr></ns4:lvl1pPr><ns4:lvl2pPr algn="ctr"><ns4:buNone/><ns4:defRPr sz="6000" dirty="0" b="1"><ns4:solidFill><ns4:srgbClr val="1E2761"/></ns4:solidFill><ns4:latin typeface="Georgia"/><ns4:ea typeface="Georgia"/></ns4:defRPr></ns4:lvl2pPr><ns4:lvl3pPr algn="ctr"><ns4:buNone/><ns4:defRPr sz="6000" dirty="0" b="1"><ns4:solidFill><ns4:srgbClr val="1E2761"/></ns4:solidFill><ns4:latin typeface="Georgia"/><ns4:ea typeface="Georgia"/></ns4:defRPr></ns4:lvl3pPr><ns4:lvl4pPr algn="ctr"><ns4:buNone/><ns4:defRPr sz="6000" dirty="0" b="1"><ns4:solidFill><ns4:srgbClr val="1E2761"/></ns4:solidFill><ns4:latin typeface="Georgia"/><ns4:ea typeface="Georgia"/></ns4:defRPr></ns4:lvl4pPr><ns4:lvl5pPr algn="ctr"><ns4:buNone/><ns4:defRPr sz="6000" dirty="0" b="1"><ns4:solidFill><ns4:srgbClr val="1E2761"/></ns4:solidFill><ns4:latin typeface="Georgia"/><ns4:ea typeface="Georgia"/></ns4:defRPr></ns4:lvl5pPr><ns4:lvl6pPr algn="ctr"><ns4:buNone/><ns4:defRPr sz="6000" dirty="0" b="1"><ns4:solidFill><ns4:srgbClr val="1E2761"/></ns4:solidFill><ns4:latin typeface="Georgia"/><ns4:ea typeface="Georgia"/></ns4:defRPr></ns4:lvl6pPr><ns4:lvl7pPr algn="ctr"><ns4:buNone/><ns4:defRPr sz="6000" dirty="0" b="1"><ns4:solidFill><ns4:srgbClr val="1E2761"/></ns4:solidFill><ns4:latin typeface="Georgia"/><ns4:ea typeface="Georgia"/></ns4:defRPr></ns4:lvl7pPr><ns4:lvl8pPr algn="ctr"><ns4:buNone/><ns4:defRPr sz="6000" dirty="0" b="1"><ns4:solidFill><ns4:srgbClr val="1E2761"/></ns4:solidFill><ns4:latin typeface="Georgia"/><ns4:ea typeface="Georgia"/></ns4:defRPr></ns4:lvl8pPr><ns4:lvl9pPr algn="ctr"><ns4:buNone/><ns4:defRPr sz="6000" dirty="0" b="1"><ns4:solidFill><ns4:srgbClr val="1E2761"/></ns4:solidFill><ns4:latin typeface="Georgia"/><ns4:ea typeface="Georgia"/></ns4:defRPr></ns4:lvl9pPr></ns4:lstStyle/><ns5:p xmlns:ns5="http://schemas.openxmlformats.org/drawingml/2006/main"><ns5:pPr algn="ctr"><ns5:buNone/></ns5:pPr><ns5:r><ns5:rPr lang="ja-JP"/><ns5:t>指標名
+説明テキスト</ns5:t></ns5:r></ns5:p></ns0:txBody></ns0:sp><ns0:sp><ns0:nvSpPr><ns0:cNvPr id="22" name="Value2.Right"/><ns0:cNvSpPr><ns1:spLocks xmlns:ns1="http://schemas.openxmlformats.org/drawingml/2006/main" noGrp="1"/></ns0:cNvSpPr><ns0:nvPr><ns0:ph idx="3" type="body"/></ns0:nvPr></ns0:nvSpPr><ns0:spPr><ns2:xfrm xmlns:ns2="http://schemas.openxmlformats.org/drawingml/2006/main"><ns2:off x="6583680" y="1828800"/><ns2:ext cx="4389120" cy="1645920"/></ns2:xfrm></ns0:spPr><ns0:txBody><ns3:bodyPr xmlns:ns3="http://schemas.openxmlformats.org/drawingml/2006/main" wrap="square" anchor="t" anchorCtr="0"/><ns4:lstStyle><ns4:defPPr algn="ctr"><ns4:defRPr sz="6000" b="1"><ns4:solidFill><ns4:srgbClr val="1E2761"/></ns4:solidFill></ns4:defRPr></ns4:defPPr></ns4:lstStyle><ns4:defPPr algn="ctr"><ns4:buNone/><ns4:defRPr sz="6000" dirty="0" b="1"><ns4:solidFill><ns4:srgbClr val="1E2761"/></ns4:solidFill><ns4:latin typeface="Georgia"/><ns4:ea typeface="Georgia"/></ns4:defRPr></ns4:defPPr><ns4:lvl1pPr algn="ctr"><ns4:buNone/><ns4:defRPr sz="6000" dirty="0" b="1"><ns4:solidFill><ns4:srgbClr val="1E2761"/></ns4:solidFill><ns4:latin typeface="Georgia"/><ns4:ea typeface="Georgia"/></ns4:defRPr></ns4:lvl1pPr><ns4:lvl2pPr algn="ctr"><ns4:buNone/><ns4:defRPr sz="6000" dirty="0" b="1"><ns4:solidFill><ns4:srgbClr val="1E2761"/></ns4:solidFill><ns4:latin typeface="Georgia"/><ns4:ea typeface="Georgia"/></ns4:defRPr></ns4:lvl2pPr><ns4:lvl3pPr algn="ctr"><ns4:buNone/><ns4:defRPr sz="6000" dirty="0" b="1"><ns4:solidFill><ns4:srgbClr val="1E2761"/></ns4:solidFill><ns4:latin typeface="Georgia"/><ns4:ea typeface="Georgia"/></ns4:defRPr></ns4:lvl3pPr><ns4:lvl4pPr algn="ctr"><ns4:buNone/><ns4:defRPr sz="6000" dirty="0" b="1"><ns4:solidFill><ns4:srgbClr val="1E2761"/></ns4:solidFill><ns4:latin typeface="Georgia"/><ns4:ea typeface="Georgia"/></ns4:defRPr></ns4:lvl4pPr><ns4:lvl5pPr algn="ctr"><ns4:buNone/><ns4:defRPr sz="6000" dirty="0" b="1"><ns4:solidFill><ns4:srgbClr val="1E2761"/></ns4:solidFill><ns4:latin typeface="Georgia"/><ns4:ea typeface="Georgia"/></ns4:defRPr></ns4:lvl5pPr><ns4:lvl6pPr algn="ctr"><ns4:buNone/><ns4:defRPr sz="6000" dirty="0" b="1"><ns4:solidFill><ns4:srgbClr val="1E2761"/></ns4:solidFill><ns4:latin typeface="Georgia"/><ns4:ea typeface="Georgia"/></ns4:defRPr></ns4:lvl6pPr><ns4:lvl7pPr algn="ctr"><ns4:buNone/><ns4:defRPr sz="6000" dirty="0" b="1"><ns4:solidFill><ns4:srgbClr val="1E2761"/></ns4:solidFill><ns4:latin typeface="Georgia"/><ns4:ea typeface="Georgia"/></ns4:defRPr></ns4:lvl7pPr><ns4:lvl8pPr algn="ctr"><ns4:buNone/><ns4:defRPr sz="6000" dirty="0" b="1"><ns4:solidFill><ns4:srgbClr val="1E2761"/></ns4:solidFill><ns4:latin typeface="Georgia"/><ns4:ea typeface="Georgia"/></ns4:defRPr></ns4:lvl8pPr><ns4:lvl9pPr algn="ctr"><ns4:buNone/><ns4:defRPr sz="6000" dirty="0" b="1"><ns4:solidFill><ns4:srgbClr val="1E2761"/></ns4:solidFill><ns4:latin typeface="Georgia"/><ns4:ea typeface="Georgia"/></ns4:defRPr></ns4:lvl9pPr></ns4:lstStyle/><ns5:p xmlns:ns5="http://schemas.openxmlformats.org/drawingml/2006/main"><ns5:pPr algn="ctr"><ns5:buNone/></ns5:pPr><ns5:r><ns5:rPr lang="ja-JP"/><ns5:t>指標名
+説明テキスト</ns5:t></ns5:r></ns5:p></ns0:txBody></ns0:sp><ns0:sp><ns0:nvSpPr><ns0:cNvPr id="30" name="SlideNum.Footer"/><ns0:cNvSpPr><ns1:spLocks xmlns:ns1="http://schemas.openxmlformats.org/drawingml/2006/main" noGrp="1"/></ns0:cNvSpPr><ns0:nvPr><ns0:ph idx="50" type="sldNum"/></ns0:nvPr></ns0:nvSpPr><ns0:spPr><ns2:xfrm xmlns:ns2="http://schemas.openxmlformats.org/drawingml/2006/main"><ns2:off x="10972800" y="6446520"/><ns2:ext cx="1097280" cy="274320"/></ns2:xfrm></ns0:spPr><ns0:txBody><ns3:bodyPr xmlns:ns3="http://schemas.openxmlformats.org/drawingml/2006/main" wrap="square" anchor="t" anchorCtr="0"/><ns4:lstStyle><ns4:defPPr algn="r"><ns4:defRPr sz="1000"><ns4:solidFill><ns4:srgbClr val="94A3B8"/></ns4:solidFill></ns4:defRPr></ns4:defPPr></ns4:lstStyle><ns4:defPPr algn="r"><ns4:buNone/><ns4:defRPr sz="1000" dirty="0"><ns4:solidFill><ns4:srgbClr val="94A3B8"/></ns4:solidFill><ns4:latin typeface="Calibri"/><ns4:ea typeface="Calibri"/></ns4:defRPr></ns4:defPPr><ns4:lvl1pPr algn="r"><ns4:buNone/><ns4:defRPr sz="1000" dirty="0"><ns4:solidFill><ns4:srgbClr val="94A3B8"/></ns4:solidFill><ns4:latin typeface="Calibri"/><ns4:ea typeface="Calibri"/></ns4:defRPr></ns4:lvl1pPr><ns4:lvl2pPr algn="r"><ns4:buNone/><ns4:defRPr sz="1000" dirty="0"><ns4:solidFill><ns4:srgbClr val="94A3B8"/></ns4:solidFill><ns4:latin typeface="Calibri"/><ns4:ea typeface="Calibri"/></ns4:defRPr></ns4:lvl2pPr><ns4:lvl3pPr algn="r"><ns4:buNone/><ns4:defRPr sz="1000" dirty="0"><ns4:solidFill><ns4:srgbClr val="94A3B8"/></ns4:solidFill><ns4:latin typeface="Calibri"/><ns4:ea typeface="Calibri"/></ns4:defRPr></ns4:lvl3pPr><ns4:lvl4pPr algn="r"><ns4:buNone/><ns4:defRPr sz="1000" dirty="0"><ns4:solidFill><ns4:srgbClr val="94A3B8"/></ns4:solidFill><ns4:latin typeface="Calibri"/><ns4:ea typeface="Calibri"/></ns4:defRPr></ns4:lvl4pPr><ns4:lvl5pPr algn="r"><ns4:buNone/><ns4:defRPr sz="1000" dirty="0"><ns4:solidFill><ns4:srgbClr val="94A3B8"/></ns4:solidFill><ns4:latin typeface="Calibri"/><ns4:ea typeface="Calibri"/></ns4:defRPr></ns4:lvl5pPr><ns4:lvl6pPr algn="r"><ns4:buNone/><ns4:defRPr sz="1000" dirty="0"><ns4:solidFill><ns4:srgbClr val="94A3B8"/></ns4:solidFill><ns4:latin typeface="Calibri"/><ns4:ea typeface="Calibri"/></ns4:defRPr></ns4:lvl6pPr><ns4:lvl7pPr algn="r"><ns4:buNone/><ns4:defRPr sz="1000" dirty="0"><ns4:solidFill><ns4:srgbClr val="94A3B8"/></ns4:solidFill><ns4:latin typeface="Calibri"/><ns4:ea typeface="Calibri"/></ns4:defRPr></ns4:lvl7pPr><ns4:lvl8pPr algn="r"><ns4:buNone/><ns4:defRPr sz="1000" dirty="0"><ns4:solidFill><ns4:srgbClr val="94A3B8"/></ns4:solidFill><ns4:latin typeface="Calibri"/><ns4:ea typeface="Calibri"/></ns4:defRPr></ns4:lvl8pPr><ns4:lvl9pPr algn="r"><ns4:buNone/><ns4:defRPr sz="1000" dirty="0"><ns4:solidFill><ns4:srgbClr val="94A3B8"/></ns4:solidFill><ns4:latin typeface="Calibri"/><ns4:ea typeface="Calibri"/></ns4:defRPr></ns4:lvl9pPr></ns4:lstStyle><ns5:p xmlns:ns5="http://schemas.openxmlformats.org/drawingml/2006/main"><ns5:pPr algn="r"><ns5:buNone/></ns5:pPr><ns5:r><ns5:rPr lang="ja-JP"/><ns5:t>&lt;#&gt;</ns5:t></ns5:r></ns5:p></ns0:txBody></ns0:sp></ns0:spTree></ns0:cSld><ns0:clrMapOvr/></ns0:sldLayout>
 </file>
 
 <file path=ppt/slideLayouts/slideLayout16.xml><?xml version='1.0' encoding='UTF-8' standalone='yes'?>
-<ns0:sldLayout xmlns:ns0="http://schemas.openxmlformats.org/presentationml/2006/main" type="blank" preserve="1"><ns0:cSld name="KPI.3Value.Equal"><ns0:spTree><ns0:nvGrpSpPr><ns0:cNvPr id="1" name=""/><ns0:cNvGrpSpPr/><ns0:nvPr/></ns0:nvGrpSpPr><ns0:grpSpPr><ns1:xfrm xmlns:ns1="http://schemas.openxmlformats.org/drawingml/2006/main"><ns1:off x="0" y="0"/><ns1:ext cx="0" cy="0"/><ns1:chOff x="0" y="0"/><ns1:chExt cx="0" cy="0"/></ns1:xfrm></ns0:grpSpPr><ns0:sp><ns0:nvSpPr><ns0:cNvPr id="2" name="HeaderBar"/><ns0:cNvSpPr><ns1:spLocks xmlns:ns1="http://schemas.openxmlformats.org/drawingml/2006/main" noGrp="1" noSelect="0" noRot="1" noMove="1"/></ns0:cNvSpPr><ns0:nvPr/></ns0:nvSpPr><ns0:spPr><ns2:xfrm xmlns:ns2="http://schemas.openxmlformats.org/drawingml/2006/main"><ns2:off x="0" y="0"/><ns2:ext cx="12192000" cy="1051560"/></ns2:xfrm><ns3:prstGeom xmlns:ns3="http://schemas.openxmlformats.org/drawingml/2006/main" prst="rect"/><ns4:solidFill xmlns:ns4="http://schemas.openxmlformats.org/drawingml/2006/main"><ns4:srgbClr val="1E2761"/></ns4:solidFill><ns5:ln xmlns:ns5="http://schemas.openxmlformats.org/drawingml/2006/main"><ns5:noFill/></ns5:ln></ns0:spPr></ns0:sp><ns0:sp><ns0:nvSpPr><ns0:cNvPr id="10" name="SlideTitle.Header"/><ns0:cNvSpPr><ns1:spLocks xmlns:ns1="http://schemas.openxmlformats.org/drawingml/2006/main" noGrp="1"/></ns0:cNvSpPr><ns0:nvPr><ns0:ph idx="15" type="body"/></ns0:nvPr></ns0:nvSpPr><ns0:spPr><ns2:xfrm xmlns:ns2="http://schemas.openxmlformats.org/drawingml/2006/main"><ns2:off x="731520" y="91440"/><ns2:ext cx="9144000" cy="475488"/></ns2:xfrm></ns0:spPr><ns0:txBody><ns3:bodyPr xmlns:ns3="http://schemas.openxmlformats.org/drawingml/2006/main" wrap="square" anchor="t" anchorCtr="0"/><ns4:lstStyle xmlns:ns4="http://schemas.openxmlformats.org/drawingml/2006/main"><ns4:defPPr algn="l"><ns4:buNone/><ns4:defRPr sz="2800" dirty="0" b="1"><ns4:solidFill><ns4:srgbClr val="FFFFFF"/></ns4:solidFill><ns4:latin typeface="Georgia"/><ns4:ea typeface="Georgia"/></ns4:defRPr></ns4:defPPr><ns4:lvl1pPr algn="l"><ns4:buNone/><ns4:defRPr sz="2800" dirty="0" b="1"><ns4:solidFill><ns4:srgbClr val="FFFFFF"/></ns4:solidFill><ns4:latin typeface="Georgia"/><ns4:ea typeface="Georgia"/></ns4:defRPr></ns4:lvl1pPr><ns4:lvl2pPr algn="l"><ns4:buNone/><ns4:defRPr sz="2800" dirty="0" b="1"><ns4:solidFill><ns4:srgbClr val="FFFFFF"/></ns4:solidFill><ns4:latin typeface="Georgia"/><ns4:ea typeface="Georgia"/></ns4:defRPr></ns4:lvl2pPr><ns4:lvl3pPr algn="l"><ns4:buNone/><ns4:defRPr sz="2800" dirty="0" b="1"><ns4:solidFill><ns4:srgbClr val="FFFFFF"/></ns4:solidFill><ns4:latin typeface="Georgia"/><ns4:ea typeface="Georgia"/></ns4:defRPr></ns4:lvl3pPr><ns4:lvl4pPr algn="l"><ns4:buNone/><ns4:defRPr sz="2800" dirty="0" b="1"><ns4:solidFill><ns4:srgbClr val="FFFFFF"/></ns4:solidFill><ns4:latin typeface="Georgia"/><ns4:ea typeface="Georgia"/></ns4:defRPr></ns4:lvl4pPr><ns4:lvl5pPr algn="l"><ns4:buNone/><ns4:defRPr sz="2800" dirty="0" b="1"><ns4:solidFill><ns4:srgbClr val="FFFFFF"/></ns4:solidFill><ns4:latin typeface="Georgia"/><ns4:ea typeface="Georgia"/></ns4:defRPr></ns4:lvl5pPr><ns4:lvl6pPr algn="l"><ns4:buNone/><ns4:defRPr sz="2800" dirty="0" b="1"><ns4:solidFill><ns4:srgbClr val="FFFFFF"/></ns4:solidFill><ns4:latin typeface="Georgia"/><ns4:ea typeface="Georgia"/></ns4:defRPr></ns4:lvl6pPr><ns4:lvl7pPr algn="l"><ns4:buNone/><ns4:defRPr sz="2800" dirty="0" b="1"><ns4:solidFill><ns4:srgbClr val="FFFFFF"/></ns4:solidFill><ns4:latin typeface="Georgia"/><ns4:ea typeface="Georgia"/></ns4:defRPr></ns4:lvl7pPr><ns4:lvl8pPr algn="l"><ns4:buNone/><ns4:defRPr sz="2800" dirty="0" b="1"><ns4:solidFill><ns4:srgbClr val="FFFFFF"/></ns4:solidFill><ns4:latin typeface="Georgia"/><ns4:ea typeface="Georgia"/></ns4:defRPr></ns4:lvl8pPr><ns4:lvl9pPr algn="l"><ns4:buNone/><ns4:defRPr sz="2800" dirty="0" b="1"><ns4:solidFill><ns4:srgbClr val="FFFFFF"/></ns4:solidFill><ns4:latin typeface="Georgia"/><ns4:ea typeface="Georgia"/></ns4:defRPr></ns4:lvl9pPr></ns4:lstStyle/><ns5:p xmlns:ns5="http://schemas.openxmlformats.org/drawingml/2006/main"><ns5:pPr algn="l"><ns5:buNone/></ns5:pPr><ns5:r><ns5:rPr lang="ja-JP"/><ns5:t>サブタイトル</ns5:t></ns5:r></ns5:p></ns0:txBody></ns0:sp><ns0:sp><ns0:nvSpPr><ns0:cNvPr id="5" name="Card1"/><ns0:cNvSpPr><ns1:spLocks xmlns:ns1="http://schemas.openxmlformats.org/drawingml/2006/main" noGrp="1" noSelect="0" noRot="1" noMove="1"/></ns0:cNvSpPr><ns0:nvPr/></ns0:nvSpPr><ns0:spPr><ns2:xfrm xmlns:ns2="http://schemas.openxmlformats.org/drawingml/2006/main"><ns2:off x="457200" y="1371600"/><ns2:ext cx="3474720" cy="4754880"/></ns2:xfrm><ns3:prstGeom xmlns:ns3="http://schemas.openxmlformats.org/drawingml/2006/main" prst="roundRect"><ns3:avLst><ns3:gd name="adj" fmla="val 10000"/></ns3:avLst></ns3:prstGeom><ns4:solidFill xmlns:ns4="http://schemas.openxmlformats.org/drawingml/2006/main"><ns4:srgbClr val="EDF0F7"/></ns4:solidFill><ns5:ln xmlns:ns5="http://schemas.openxmlformats.org/drawingml/2006/main"><ns5:noFill/></ns5:ln></ns0:spPr></ns0:sp><ns0:sp><ns0:nvSpPr><ns0:cNvPr id="6" name="Card2"/><ns0:cNvSpPr><ns1:spLocks xmlns:ns1="http://schemas.openxmlformats.org/drawingml/2006/main" noGrp="1" noSelect="0" noRot="1" noMove="1"/></ns0:cNvSpPr><ns0:nvPr/></ns0:nvSpPr><ns0:spPr><ns2:xfrm xmlns:ns2="http://schemas.openxmlformats.org/drawingml/2006/main"><ns2:off x="4206240" y="1371600"/><ns2:ext cx="3657600" cy="4754880"/></ns2:xfrm><ns3:prstGeom xmlns:ns3="http://schemas.openxmlformats.org/drawingml/2006/main" prst="roundRect"><ns3:avLst><ns3:gd name="adj" fmla="val 10000"/></ns3:avLst></ns3:prstGeom><ns4:solidFill xmlns:ns4="http://schemas.openxmlformats.org/drawingml/2006/main"><ns4:srgbClr val="EDF0F7"/></ns4:solidFill><ns5:ln xmlns:ns5="http://schemas.openxmlformats.org/drawingml/2006/main"><ns5:noFill/></ns5:ln></ns0:spPr></ns0:sp><ns0:sp><ns0:nvSpPr><ns0:cNvPr id="7" name="Card3"/><ns0:cNvSpPr><ns1:spLocks xmlns:ns1="http://schemas.openxmlformats.org/drawingml/2006/main" noGrp="1" noSelect="0" noRot="1" noMove="1"/></ns0:cNvSpPr><ns0:nvPr/></ns0:nvSpPr><ns0:spPr><ns2:xfrm xmlns:ns2="http://schemas.openxmlformats.org/drawingml/2006/main"><ns2:off x="8138160" y="1371600"/><ns2:ext cx="3566160" cy="4754880"/></ns2:xfrm><ns3:prstGeom xmlns:ns3="http://schemas.openxmlformats.org/drawingml/2006/main" prst="roundRect"><ns3:avLst><ns3:gd name="adj" fmla="val 10000"/></ns3:avLst></ns3:prstGeom><ns4:solidFill xmlns:ns4="http://schemas.openxmlformats.org/drawingml/2006/main"><ns4:srgbClr val="EDF0F7"/></ns4:solidFill><ns5:ln xmlns:ns5="http://schemas.openxmlformats.org/drawingml/2006/main"><ns5:noFill/></ns5:ln></ns0:spPr></ns0:sp><ns0:sp><ns0:nvSpPr><ns0:cNvPr id="8" name="A1"/><ns0:cNvSpPr><ns1:spLocks xmlns:ns1="http://schemas.openxmlformats.org/drawingml/2006/main" noGrp="1" noSelect="0" noRot="1" noMove="1"/></ns0:cNvSpPr><ns0:nvPr/></ns0:nvSpPr><ns0:spPr><ns2:xfrm xmlns:ns2="http://schemas.openxmlformats.org/drawingml/2006/main"><ns2:off x="457200" y="1371600"/><ns2:ext cx="3474720" cy="54864"/></ns2:xfrm><ns3:prstGeom xmlns:ns3="http://schemas.openxmlformats.org/drawingml/2006/main" prst="rect"/><ns4:solidFill xmlns:ns4="http://schemas.openxmlformats.org/drawingml/2006/main"><ns4:srgbClr val="3B82F6"/></ns4:solidFill><ns5:ln xmlns:ns5="http://schemas.openxmlformats.org/drawingml/2006/main"><ns5:noFill/></ns5:ln></ns0:spPr></ns0:sp><ns0:sp><ns0:nvSpPr><ns0:cNvPr id="9" name="A2"/><ns0:cNvSpPr><ns1:spLocks xmlns:ns1="http://schemas.openxmlformats.org/drawingml/2006/main" noGrp="1" noSelect="0" noRot="1" noMove="1"/></ns0:cNvSpPr><ns0:nvPr/></ns0:nvSpPr><ns0:spPr><ns2:xfrm xmlns:ns2="http://schemas.openxmlformats.org/drawingml/2006/main"><ns2:off x="4206240" y="1371600"/><ns2:ext cx="3657600" cy="54864"/></ns2:xfrm><ns3:prstGeom xmlns:ns3="http://schemas.openxmlformats.org/drawingml/2006/main" prst="rect"/><ns4:solidFill xmlns:ns4="http://schemas.openxmlformats.org/drawingml/2006/main"><ns4:srgbClr val="06B6D4"/></ns4:solidFill><ns5:ln xmlns:ns5="http://schemas.openxmlformats.org/drawingml/2006/main"><ns5:noFill/></ns5:ln></ns0:spPr></ns0:sp><ns0:sp><ns0:nvSpPr><ns0:cNvPr id="10" name="A3"/><ns0:cNvSpPr><ns1:spLocks xmlns:ns1="http://schemas.openxmlformats.org/drawingml/2006/main" noGrp="1" noSelect="0" noRot="1" noMove="1"/></ns0:cNvSpPr><ns0:nvPr/></ns0:nvSpPr><ns0:spPr><ns2:xfrm xmlns:ns2="http://schemas.openxmlformats.org/drawingml/2006/main"><ns2:off x="8138160" y="1371600"/><ns2:ext cx="3566160" cy="54864"/></ns2:xfrm><ns3:prstGeom xmlns:ns3="http://schemas.openxmlformats.org/drawingml/2006/main" prst="rect"/><ns4:solidFill xmlns:ns4="http://schemas.openxmlformats.org/drawingml/2006/main"><ns4:srgbClr val="F59E0B"/></ns4:solidFill><ns5:ln xmlns:ns5="http://schemas.openxmlformats.org/drawingml/2006/main"><ns5:noFill/></ns5:ln></ns0:spPr></ns0:sp><ns0:sp><ns0:nvSpPr><ns0:cNvPr id="20" name="Value1.Left"/><ns0:cNvSpPr><ns1:spLocks xmlns:ns1="http://schemas.openxmlformats.org/drawingml/2006/main" noGrp="1"/></ns0:cNvSpPr><ns0:nvPr><ns0:ph idx="1" type="body"/></ns0:nvPr></ns0:nvSpPr><ns0:spPr><ns2:xfrm xmlns:ns2="http://schemas.openxmlformats.org/drawingml/2006/main"><ns2:off x="731520" y="1828800"/><ns2:ext cx="2926080" cy="1371600"/></ns2:xfrm></ns0:spPr><ns0:txBody><ns3:bodyPr xmlns:ns3="http://schemas.openxmlformats.org/drawingml/2006/main" wrap="square" anchor="t" anchorCtr="0"/><ns4:lstStyle xmlns:ns4="http://schemas.openxmlformats.org/drawingml/2006/main"><ns4:defPPr algn="ctr"><ns4:buNone/><ns4:defRPr sz="5200" dirty="0" b="1"><ns4:solidFill><ns4:srgbClr val="1E2761"/></ns4:solidFill><ns4:latin typeface="Georgia"/><ns4:ea typeface="Georgia"/></ns4:defRPr></ns4:defPPr><ns4:lvl1pPr algn="ctr"><ns4:buNone/><ns4:defRPr sz="5200" dirty="0" b="1"><ns4:solidFill><ns4:srgbClr val="1E2761"/></ns4:solidFill><ns4:latin typeface="Georgia"/><ns4:ea typeface="Georgia"/></ns4:defRPr></ns4:lvl1pPr><ns4:lvl2pPr algn="ctr"><ns4:buNone/><ns4:defRPr sz="5200" dirty="0" b="1"><ns4:solidFill><ns4:srgbClr val="1E2761"/></ns4:solidFill><ns4:latin typeface="Georgia"/><ns4:ea typeface="Georgia"/></ns4:defRPr></ns4:lvl2pPr><ns4:lvl3pPr algn="ctr"><ns4:buNone/><ns4:defRPr sz="5200" dirty="0" b="1"><ns4:solidFill><ns4:srgbClr val="1E2761"/></ns4:solidFill><ns4:latin typeface="Georgia"/><ns4:ea typeface="Georgia"/></ns4:defRPr></ns4:lvl3pPr><ns4:lvl4pPr algn="ctr"><ns4:buNone/><ns4:defRPr sz="5200" dirty="0" b="1"><ns4:solidFill><ns4:srgbClr val="1E2761"/></ns4:solidFill><ns4:latin typeface="Georgia"/><ns4:ea typeface="Georgia"/></ns4:defRPr></ns4:lvl4pPr><ns4:lvl5pPr algn="ctr"><ns4:buNone/><ns4:defRPr sz="5200" dirty="0" b="1"><ns4:solidFill><ns4:srgbClr val="1E2761"/></ns4:solidFill><ns4:latin typeface="Georgia"/><ns4:ea typeface="Georgia"/></ns4:defRPr></ns4:lvl5pPr><ns4:lvl6pPr algn="ctr"><ns4:buNone/><ns4:defRPr sz="5200" dirty="0" b="1"><ns4:solidFill><ns4:srgbClr val="1E2761"/></ns4:solidFill><ns4:latin typeface="Georgia"/><ns4:ea typeface="Georgia"/></ns4:defRPr></ns4:lvl6pPr><ns4:lvl7pPr algn="ctr"><ns4:buNone/><ns4:defRPr sz="5200" dirty="0" b="1"><ns4:solidFill><ns4:srgbClr val="1E2761"/></ns4:solidFill><ns4:latin typeface="Georgia"/><ns4:ea typeface="Georgia"/></ns4:defRPr></ns4:lvl7pPr><ns4:lvl8pPr algn="ctr"><ns4:buNone/><ns4:defRPr sz="5200" dirty="0" b="1"><ns4:solidFill><ns4:srgbClr val="1E2761"/></ns4:solidFill><ns4:latin typeface="Georgia"/><ns4:ea typeface="Georgia"/></ns4:defRPr></ns4:lvl8pPr><ns4:lvl9pPr algn="ctr"><ns4:buNone/><ns4:defRPr sz="5200" dirty="0" b="1"><ns4:solidFill><ns4:srgbClr val="1E2761"/></ns4:solidFill><ns4:latin typeface="Georgia"/><ns4:ea typeface="Georgia"/></ns4:defRPr></ns4:lvl9pPr></ns4:lstStyle/><ns5:p xmlns:ns5="http://schemas.openxmlformats.org/drawingml/2006/main"><ns5:pPr algn="ctr"><ns5:buNone/></ns5:pPr><ns5:r><ns5:rPr lang="ja-JP"/><ns5:t>指標名
-説明</ns5:t></ns5:r></ns5:p></ns0:txBody></ns0:sp><ns0:sp><ns0:nvSpPr><ns0:cNvPr id="22" name="Value2.Center"/><ns0:cNvSpPr><ns1:spLocks xmlns:ns1="http://schemas.openxmlformats.org/drawingml/2006/main" noGrp="1"/></ns0:cNvSpPr><ns0:nvPr><ns0:ph idx="3" type="body"/></ns0:nvPr></ns0:nvSpPr><ns0:spPr><ns2:xfrm xmlns:ns2="http://schemas.openxmlformats.org/drawingml/2006/main"><ns2:off x="4480560" y="1828800"/><ns2:ext cx="3108960" cy="1371600"/></ns2:xfrm></ns0:spPr><ns0:txBody><ns3:bodyPr xmlns:ns3="http://schemas.openxmlformats.org/drawingml/2006/main" wrap="square" anchor="t" anchorCtr="0"/><ns4:lstStyle xmlns:ns4="http://schemas.openxmlformats.org/drawingml/2006/main"><ns4:defPPr algn="ctr"><ns4:buNone/><ns4:defRPr sz="5200" dirty="0" b="1"><ns4:solidFill><ns4:srgbClr val="1E2761"/></ns4:solidFill><ns4:latin typeface="Georgia"/><ns4:ea typeface="Georgia"/></ns4:defRPr></ns4:defPPr><ns4:lvl1pPr algn="ctr"><ns4:buNone/><ns4:defRPr sz="5200" dirty="0" b="1"><ns4:solidFill><ns4:srgbClr val="1E2761"/></ns4:solidFill><ns4:latin typeface="Georgia"/><ns4:ea typeface="Georgia"/></ns4:defRPr></ns4:lvl1pPr><ns4:lvl2pPr algn="ctr"><ns4:buNone/><ns4:defRPr sz="5200" dirty="0" b="1"><ns4:solidFill><ns4:srgbClr val="1E2761"/></ns4:solidFill><ns4:latin typeface="Georgia"/><ns4:ea typeface="Georgia"/></ns4:defRPr></ns4:lvl2pPr><ns4:lvl3pPr algn="ctr"><ns4:buNone/><ns4:defRPr sz="5200" dirty="0" b="1"><ns4:solidFill><ns4:srgbClr val="1E2761"/></ns4:solidFill><ns4:latin typeface="Georgia"/><ns4:ea typeface="Georgia"/></ns4:defRPr></ns4:lvl3pPr><ns4:lvl4pPr algn="ctr"><ns4:buNone/><ns4:defRPr sz="5200" dirty="0" b="1"><ns4:solidFill><ns4:srgbClr val="1E2761"/></ns4:solidFill><ns4:latin typeface="Georgia"/><ns4:ea typeface="Georgia"/></ns4:defRPr></ns4:lvl4pPr><ns4:lvl5pPr algn="ctr"><ns4:buNone/><ns4:defRPr sz="5200" dirty="0" b="1"><ns4:solidFill><ns4:srgbClr val="1E2761"/></ns4:solidFill><ns4:latin typeface="Georgia"/><ns4:ea typeface="Georgia"/></ns4:defRPr></ns4:lvl5pPr><ns4:lvl6pPr algn="ctr"><ns4:buNone/><ns4:defRPr sz="5200" dirty="0" b="1"><ns4:solidFill><ns4:srgbClr val="1E2761"/></ns4:solidFill><ns4:latin typeface="Georgia"/><ns4:ea typeface="Georgia"/></ns4:defRPr></ns4:lvl6pPr><ns4:lvl7pPr algn="ctr"><ns4:buNone/><ns4:defRPr sz="5200" dirty="0" b="1"><ns4:solidFill><ns4:srgbClr val="1E2761"/></ns4:solidFill><ns4:latin typeface="Georgia"/><ns4:ea typeface="Georgia"/></ns4:defRPr></ns4:lvl7pPr><ns4:lvl8pPr algn="ctr"><ns4:buNone/><ns4:defRPr sz="5200" dirty="0" b="1"><ns4:solidFill><ns4:srgbClr val="1E2761"/></ns4:solidFill><ns4:latin typeface="Georgia"/><ns4:ea typeface="Georgia"/></ns4:defRPr></ns4:lvl8pPr><ns4:lvl9pPr algn="ctr"><ns4:buNone/><ns4:defRPr sz="5200" dirty="0" b="1"><ns4:solidFill><ns4:srgbClr val="1E2761"/></ns4:solidFill><ns4:latin typeface="Georgia"/><ns4:ea typeface="Georgia"/></ns4:defRPr></ns4:lvl9pPr></ns4:lstStyle/><ns5:p xmlns:ns5="http://schemas.openxmlformats.org/drawingml/2006/main"><ns5:pPr algn="ctr"><ns5:buNone/></ns5:pPr><ns5:r><ns5:rPr lang="ja-JP"/><ns5:t>指標名
-説明</ns5:t></ns5:r></ns5:p></ns0:txBody></ns0:sp><ns0:sp><ns0:nvSpPr><ns0:cNvPr id="24" name="Value3.Right"/><ns0:cNvSpPr><ns1:spLocks xmlns:ns1="http://schemas.openxmlformats.org/drawingml/2006/main" noGrp="1"/></ns0:cNvSpPr><ns0:nvPr><ns0:ph idx="5" type="body"/></ns0:nvPr></ns0:nvSpPr><ns0:spPr><ns2:xfrm xmlns:ns2="http://schemas.openxmlformats.org/drawingml/2006/main"><ns2:off x="8412480" y="1828800"/><ns2:ext cx="3017520" cy="1371600"/></ns2:xfrm></ns0:spPr><ns0:txBody><ns3:bodyPr xmlns:ns3="http://schemas.openxmlformats.org/drawingml/2006/main" wrap="square" anchor="t" anchorCtr="0"/><ns4:lstStyle xmlns:ns4="http://schemas.openxmlformats.org/drawingml/2006/main"><ns4:defPPr algn="ctr"><ns4:buNone/><ns4:defRPr sz="5200" dirty="0" b="1"><ns4:solidFill><ns4:srgbClr val="1E2761"/></ns4:solidFill><ns4:latin typeface="Georgia"/><ns4:ea typeface="Georgia"/></ns4:defRPr></ns4:defPPr><ns4:lvl1pPr algn="ctr"><ns4:buNone/><ns4:defRPr sz="5200" dirty="0" b="1"><ns4:solidFill><ns4:srgbClr val="1E2761"/></ns4:solidFill><ns4:latin typeface="Georgia"/><ns4:ea typeface="Georgia"/></ns4:defRPr></ns4:lvl1pPr><ns4:lvl2pPr algn="ctr"><ns4:buNone/><ns4:defRPr sz="5200" dirty="0" b="1"><ns4:solidFill><ns4:srgbClr val="1E2761"/></ns4:solidFill><ns4:latin typeface="Georgia"/><ns4:ea typeface="Georgia"/></ns4:defRPr></ns4:lvl2pPr><ns4:lvl3pPr algn="ctr"><ns4:buNone/><ns4:defRPr sz="5200" dirty="0" b="1"><ns4:solidFill><ns4:srgbClr val="1E2761"/></ns4:solidFill><ns4:latin typeface="Georgia"/><ns4:ea typeface="Georgia"/></ns4:defRPr></ns4:lvl3pPr><ns4:lvl4pPr algn="ctr"><ns4:buNone/><ns4:defRPr sz="5200" dirty="0" b="1"><ns4:solidFill><ns4:srgbClr val="1E2761"/></ns4:solidFill><ns4:latin typeface="Georgia"/><ns4:ea typeface="Georgia"/></ns4:defRPr></ns4:lvl4pPr><ns4:lvl5pPr algn="ctr"><ns4:buNone/><ns4:defRPr sz="5200" dirty="0" b="1"><ns4:solidFill><ns4:srgbClr val="1E2761"/></ns4:solidFill><ns4:latin typeface="Georgia"/><ns4:ea typeface="Georgia"/></ns4:defRPr></ns4:lvl5pPr><ns4:lvl6pPr algn="ctr"><ns4:buNone/><ns4:defRPr sz="5200" dirty="0" b="1"><ns4:solidFill><ns4:srgbClr val="1E2761"/></ns4:solidFill><ns4:latin typeface="Georgia"/><ns4:ea typeface="Georgia"/></ns4:defRPr></ns4:lvl6pPr><ns4:lvl7pPr algn="ctr"><ns4:buNone/><ns4:defRPr sz="5200" dirty="0" b="1"><ns4:solidFill><ns4:srgbClr val="1E2761"/></ns4:solidFill><ns4:latin typeface="Georgia"/><ns4:ea typeface="Georgia"/></ns4:defRPr></ns4:lvl7pPr><ns4:lvl8pPr algn="ctr"><ns4:buNone/><ns4:defRPr sz="5200" dirty="0" b="1"><ns4:solidFill><ns4:srgbClr val="1E2761"/></ns4:solidFill><ns4:latin typeface="Georgia"/><ns4:ea typeface="Georgia"/></ns4:defRPr></ns4:lvl8pPr><ns4:lvl9pPr algn="ctr"><ns4:buNone/><ns4:defRPr sz="5200" dirty="0" b="1"><ns4:solidFill><ns4:srgbClr val="1E2761"/></ns4:solidFill><ns4:latin typeface="Georgia"/><ns4:ea typeface="Georgia"/></ns4:defRPr></ns4:lvl9pPr></ns4:lstStyle/><ns5:p xmlns:ns5="http://schemas.openxmlformats.org/drawingml/2006/main"><ns5:pPr algn="ctr"><ns5:buNone/></ns5:pPr><ns5:r><ns5:rPr lang="ja-JP"/><ns5:t>指標名
-説明</ns5:t></ns5:r></ns5:p></ns0:txBody></ns0:sp><ns0:sp><ns0:nvSpPr><ns0:cNvPr id="31" name="SlideNum.Footer"/><ns0:cNvSpPr><ns1:spLocks xmlns:ns1="http://schemas.openxmlformats.org/drawingml/2006/main" noGrp="1"/></ns0:cNvSpPr><ns0:nvPr><ns0:ph idx="50" type="sldNum"/></ns0:nvPr></ns0:nvSpPr><ns0:spPr><ns2:xfrm xmlns:ns2="http://schemas.openxmlformats.org/drawingml/2006/main"><ns2:off x="10972800" y="6446520"/><ns2:ext cx="1097280" cy="274320"/></ns2:xfrm></ns0:spPr><ns0:txBody><ns3:bodyPr xmlns:ns3="http://schemas.openxmlformats.org/drawingml/2006/main" wrap="square" anchor="t" anchorCtr="0"/><ns4:lstStyle xmlns:ns4="http://schemas.openxmlformats.org/drawingml/2006/main"><ns4:defPPr algn="r"><ns4:buNone/><ns4:defRPr sz="1000" dirty="0"><ns4:solidFill><ns4:srgbClr val="94A3B8"/></ns4:solidFill><ns4:latin typeface="Calibri"/><ns4:ea typeface="Calibri"/></ns4:defRPr></ns4:defPPr><ns4:lvl1pPr algn="r"><ns4:buNone/><ns4:defRPr sz="1000" dirty="0"><ns4:solidFill><ns4:srgbClr val="94A3B8"/></ns4:solidFill><ns4:latin typeface="Calibri"/><ns4:ea typeface="Calibri"/></ns4:defRPr></ns4:lvl1pPr><ns4:lvl2pPr algn="r"><ns4:buNone/><ns4:defRPr sz="1000" dirty="0"><ns4:solidFill><ns4:srgbClr val="94A3B8"/></ns4:solidFill><ns4:latin typeface="Calibri"/><ns4:ea typeface="Calibri"/></ns4:defRPr></ns4:lvl2pPr><ns4:lvl3pPr algn="r"><ns4:buNone/><ns4:defRPr sz="1000" dirty="0"><ns4:solidFill><ns4:srgbClr val="94A3B8"/></ns4:solidFill><ns4:latin typeface="Calibri"/><ns4:ea typeface="Calibri"/></ns4:defRPr></ns4:lvl3pPr><ns4:lvl4pPr algn="r"><ns4:buNone/><ns4:defRPr sz="1000" dirty="0"><ns4:solidFill><ns4:srgbClr val="94A3B8"/></ns4:solidFill><ns4:latin typeface="Calibri"/><ns4:ea typeface="Calibri"/></ns4:defRPr></ns4:lvl4pPr><ns4:lvl5pPr algn="r"><ns4:buNone/><ns4:defRPr sz="1000" dirty="0"><ns4:solidFill><ns4:srgbClr val="94A3B8"/></ns4:solidFill><ns4:latin typeface="Calibri"/><ns4:ea typeface="Calibri"/></ns4:defRPr></ns4:lvl5pPr><ns4:lvl6pPr algn="r"><ns4:buNone/><ns4:defRPr sz="1000" dirty="0"><ns4:solidFill><ns4:srgbClr val="94A3B8"/></ns4:solidFill><ns4:latin typeface="Calibri"/><ns4:ea typeface="Calibri"/></ns4:defRPr></ns4:lvl6pPr><ns4:lvl7pPr algn="r"><ns4:buNone/><ns4:defRPr sz="1000" dirty="0"><ns4:solidFill><ns4:srgbClr val="94A3B8"/></ns4:solidFill><ns4:latin typeface="Calibri"/><ns4:ea typeface="Calibri"/></ns4:defRPr></ns4:lvl7pPr><ns4:lvl8pPr algn="r"><ns4:buNone/><ns4:defRPr sz="1000" dirty="0"><ns4:solidFill><ns4:srgbClr val="94A3B8"/></ns4:solidFill><ns4:latin typeface="Calibri"/><ns4:ea typeface="Calibri"/></ns4:defRPr></ns4:lvl8pPr><ns4:lvl9pPr algn="r"><ns4:buNone/><ns4:defRPr sz="1000" dirty="0"><ns4:solidFill><ns4:srgbClr val="94A3B8"/></ns4:solidFill><ns4:latin typeface="Calibri"/><ns4:ea typeface="Calibri"/></ns4:defRPr></ns4:lvl9pPr></ns4:lstStyle><ns5:p xmlns:ns5="http://schemas.openxmlformats.org/drawingml/2006/main"><ns5:pPr algn="r"><ns5:buNone/></ns5:pPr><ns5:r><ns5:rPr lang="ja-JP"/><ns5:t>&lt;#&gt;</ns5:t></ns5:r></ns5:p></ns0:txBody></ns0:sp></ns0:spTree></ns0:cSld><ns0:clrMapOvr/></ns0:sldLayout>
+<ns0:sldLayout xmlns:ns0="http://schemas.openxmlformats.org/presentationml/2006/main" type="blank" preserve="1"><ns0:cSld name="KPI.3Value.Equal"><ns0:spTree><ns0:nvGrpSpPr><ns0:cNvPr id="1" name=""/><ns0:cNvGrpSpPr/><ns0:nvPr/></ns0:nvGrpSpPr><ns0:grpSpPr><ns1:xfrm xmlns:ns1="http://schemas.openxmlformats.org/drawingml/2006/main"><ns1:off x="0" y="0"/><ns1:ext cx="0" cy="0"/><ns1:chOff x="0" y="0"/><ns1:chExt cx="0" cy="0"/></ns1:xfrm></ns0:grpSpPr><ns0:sp><ns0:nvSpPr><ns0:cNvPr id="2" name="HeaderBar"/><ns0:cNvSpPr><ns1:spLocks xmlns:ns1="http://schemas.openxmlformats.org/drawingml/2006/main" noGrp="1" noSelect="0" noRot="1" noMove="1"/></ns0:cNvSpPr><ns0:nvPr/></ns0:nvSpPr><ns0:spPr><ns2:xfrm xmlns:ns2="http://schemas.openxmlformats.org/drawingml/2006/main"><ns2:off x="0" y="0"/><ns2:ext cx="12192000" cy="1051560"/></ns2:xfrm><ns3:prstGeom xmlns:ns3="http://schemas.openxmlformats.org/drawingml/2006/main" prst="rect"/><ns4:solidFill xmlns:ns4="http://schemas.openxmlformats.org/drawingml/2006/main"><ns4:srgbClr val="1E2761"/></ns4:solidFill><ns5:ln xmlns:ns5="http://schemas.openxmlformats.org/drawingml/2006/main"><ns5:noFill/></ns5:ln></ns0:spPr></ns0:sp><ns0:sp><ns0:nvSpPr><ns0:cNvPr id="10" name="SlideTitle.Header"/><ns0:cNvSpPr><ns1:spLocks xmlns:ns1="http://schemas.openxmlformats.org/drawingml/2006/main" noGrp="1"/></ns0:cNvSpPr><ns0:nvPr><ns0:ph idx="15" type="body"/></ns0:nvPr></ns0:nvSpPr><ns0:spPr><ns2:xfrm xmlns:ns2="http://schemas.openxmlformats.org/drawingml/2006/main"><ns2:off x="731520" y="91440"/><ns2:ext cx="9144000" cy="475488"/></ns2:xfrm></ns0:spPr><ns0:txBody><ns3:bodyPr xmlns:ns3="http://schemas.openxmlformats.org/drawingml/2006/main" wrap="square" anchor="t" anchorCtr="0"/><ns4:lstStyle><ns4:defPPr><ns4:defRPr sz="2800" b="1"><ns4:solidFill><ns4:srgbClr val="FFFFFF"/></ns4:solidFill></ns4:defRPr></ns4:defPPr></ns4:lstStyle><ns4:defPPr algn="l"><ns4:buNone/><ns4:defRPr sz="2800" dirty="0" b="1"><ns4:solidFill><ns4:srgbClr val="FFFFFF"/></ns4:solidFill><ns4:latin typeface="Georgia"/><ns4:ea typeface="Georgia"/></ns4:defRPr></ns4:defPPr><ns4:lvl1pPr algn="l"><ns4:buNone/><ns4:defRPr sz="2800" dirty="0" b="1"><ns4:solidFill><ns4:srgbClr val="FFFFFF"/></ns4:solidFill><ns4:latin typeface="Georgia"/><ns4:ea typeface="Georgia"/></ns4:defRPr></ns4:lvl1pPr><ns4:lvl2pPr algn="l"><ns4:buNone/><ns4:defRPr sz="2800" dirty="0" b="1"><ns4:solidFill><ns4:srgbClr val="FFFFFF"/></ns4:solidFill><ns4:latin typeface="Georgia"/><ns4:ea typeface="Georgia"/></ns4:defRPr></ns4:lvl2pPr><ns4:lvl3pPr algn="l"><ns4:buNone/><ns4:defRPr sz="2800" dirty="0" b="1"><ns4:solidFill><ns4:srgbClr val="FFFFFF"/></ns4:solidFill><ns4:latin typeface="Georgia"/><ns4:ea typeface="Georgia"/></ns4:defRPr></ns4:lvl3pPr><ns4:lvl4pPr algn="l"><ns4:buNone/><ns4:defRPr sz="2800" dirty="0" b="1"><ns4:solidFill><ns4:srgbClr val="FFFFFF"/></ns4:solidFill><ns4:latin typeface="Georgia"/><ns4:ea typeface="Georgia"/></ns4:defRPr></ns4:lvl4pPr><ns4:lvl5pPr algn="l"><ns4:buNone/><ns4:defRPr sz="2800" dirty="0" b="1"><ns4:solidFill><ns4:srgbClr val="FFFFFF"/></ns4:solidFill><ns4:latin typeface="Georgia"/><ns4:ea typeface="Georgia"/></ns4:defRPr></ns4:lvl5pPr><ns4:lvl6pPr algn="l"><ns4:buNone/><ns4:defRPr sz="2800" dirty="0" b="1"><ns4:solidFill><ns4:srgbClr val="FFFFFF"/></ns4:solidFill><ns4:latin typeface="Georgia"/><ns4:ea typeface="Georgia"/></ns4:defRPr></ns4:lvl6pPr><ns4:lvl7pPr algn="l"><ns4:buNone/><ns4:defRPr sz="2800" dirty="0" b="1"><ns4:solidFill><ns4:srgbClr val="FFFFFF"/></ns4:solidFill><ns4:latin typeface="Georgia"/><ns4:ea typeface="Georgia"/></ns4:defRPr></ns4:lvl7pPr><ns4:lvl8pPr algn="l"><ns4:buNone/><ns4:defRPr sz="2800" dirty="0" b="1"><ns4:solidFill><ns4:srgbClr val="FFFFFF"/></ns4:solidFill><ns4:latin typeface="Georgia"/><ns4:ea typeface="Georgia"/></ns4:defRPr></ns4:lvl8pPr><ns4:lvl9pPr algn="l"><ns4:buNone/><ns4:defRPr sz="2800" dirty="0" b="1"><ns4:solidFill><ns4:srgbClr val="FFFFFF"/></ns4:solidFill><ns4:latin typeface="Georgia"/><ns4:ea typeface="Georgia"/></ns4:defRPr></ns4:lvl9pPr></ns4:lstStyle/><ns5:p xmlns:ns5="http://schemas.openxmlformats.org/drawingml/2006/main"><ns5:pPr algn="l"><ns5:buNone/></ns5:pPr><ns5:r><ns5:rPr lang="ja-JP"/><ns5:t>サブタイトル</ns5:t></ns5:r></ns5:p></ns0:txBody></ns0:sp><ns0:sp><ns0:nvSpPr><ns0:cNvPr id="5" name="Card1"/><ns0:cNvSpPr><ns1:spLocks xmlns:ns1="http://schemas.openxmlformats.org/drawingml/2006/main" noGrp="1" noSelect="0" noRot="1" noMove="1"/></ns0:cNvSpPr><ns0:nvPr/></ns0:nvSpPr><ns0:spPr><ns2:xfrm xmlns:ns2="http://schemas.openxmlformats.org/drawingml/2006/main"><ns2:off x="457200" y="1371600"/><ns2:ext cx="3474720" cy="4754880"/></ns2:xfrm><ns3:prstGeom xmlns:ns3="http://schemas.openxmlformats.org/drawingml/2006/main" prst="roundRect"><ns3:avLst><ns3:gd name="adj" fmla="val 10000"/></ns3:avLst></ns3:prstGeom><ns4:solidFill xmlns:ns4="http://schemas.openxmlformats.org/drawingml/2006/main"><ns4:srgbClr val="EDF0F7"/></ns4:solidFill><ns5:ln xmlns:ns5="http://schemas.openxmlformats.org/drawingml/2006/main"><ns5:noFill/></ns5:ln></ns0:spPr></ns0:sp><ns0:sp><ns0:nvSpPr><ns0:cNvPr id="6" name="Card2"/><ns0:cNvSpPr><ns1:spLocks xmlns:ns1="http://schemas.openxmlformats.org/drawingml/2006/main" noGrp="1" noSelect="0" noRot="1" noMove="1"/></ns0:cNvSpPr><ns0:nvPr/></ns0:nvSpPr><ns0:spPr><ns2:xfrm xmlns:ns2="http://schemas.openxmlformats.org/drawingml/2006/main"><ns2:off x="4206240" y="1371600"/><ns2:ext cx="3657600" cy="4754880"/></ns2:xfrm><ns3:prstGeom xmlns:ns3="http://schemas.openxmlformats.org/drawingml/2006/main" prst="roundRect"><ns3:avLst><ns3:gd name="adj" fmla="val 10000"/></ns3:avLst></ns3:prstGeom><ns4:solidFill xmlns:ns4="http://schemas.openxmlformats.org/drawingml/2006/main"><ns4:srgbClr val="EDF0F7"/></ns4:solidFill><ns5:ln xmlns:ns5="http://schemas.openxmlformats.org/drawingml/2006/main"><ns5:noFill/></ns5:ln></ns0:spPr></ns0:sp><ns0:sp><ns0:nvSpPr><ns0:cNvPr id="7" name="Card3"/><ns0:cNvSpPr><ns1:spLocks xmlns:ns1="http://schemas.openxmlformats.org/drawingml/2006/main" noGrp="1" noSelect="0" noRot="1" noMove="1"/></ns0:cNvSpPr><ns0:nvPr/></ns0:nvSpPr><ns0:spPr><ns2:xfrm xmlns:ns2="http://schemas.openxmlformats.org/drawingml/2006/main"><ns2:off x="8138160" y="1371600"/><ns2:ext cx="3566160" cy="4754880"/></ns2:xfrm><ns3:prstGeom xmlns:ns3="http://schemas.openxmlformats.org/drawingml/2006/main" prst="roundRect"><ns3:avLst><ns3:gd name="adj" fmla="val 10000"/></ns3:avLst></ns3:prstGeom><ns4:solidFill xmlns:ns4="http://schemas.openxmlformats.org/drawingml/2006/main"><ns4:srgbClr val="EDF0F7"/></ns4:solidFill><ns5:ln xmlns:ns5="http://schemas.openxmlformats.org/drawingml/2006/main"><ns5:noFill/></ns5:ln></ns0:spPr></ns0:sp><ns0:sp><ns0:nvSpPr><ns0:cNvPr id="8" name="A1"/><ns0:cNvSpPr><ns1:spLocks xmlns:ns1="http://schemas.openxmlformats.org/drawingml/2006/main" noGrp="1" noSelect="0" noRot="1" noMove="1"/></ns0:cNvSpPr><ns0:nvPr/></ns0:nvSpPr><ns0:spPr><ns2:xfrm xmlns:ns2="http://schemas.openxmlformats.org/drawingml/2006/main"><ns2:off x="457200" y="1371600"/><ns2:ext cx="3474720" cy="54864"/></ns2:xfrm><ns3:prstGeom xmlns:ns3="http://schemas.openxmlformats.org/drawingml/2006/main" prst="rect"/><ns4:solidFill xmlns:ns4="http://schemas.openxmlformats.org/drawingml/2006/main"><ns4:srgbClr val="3B82F6"/></ns4:solidFill><ns5:ln xmlns:ns5="http://schemas.openxmlformats.org/drawingml/2006/main"><ns5:noFill/></ns5:ln></ns0:spPr></ns0:sp><ns0:sp><ns0:nvSpPr><ns0:cNvPr id="9" name="A2"/><ns0:cNvSpPr><ns1:spLocks xmlns:ns1="http://schemas.openxmlformats.org/drawingml/2006/main" noGrp="1" noSelect="0" noRot="1" noMove="1"/></ns0:cNvSpPr><ns0:nvPr/></ns0:nvSpPr><ns0:spPr><ns2:xfrm xmlns:ns2="http://schemas.openxmlformats.org/drawingml/2006/main"><ns2:off x="4206240" y="1371600"/><ns2:ext cx="3657600" cy="54864"/></ns2:xfrm><ns3:prstGeom xmlns:ns3="http://schemas.openxmlformats.org/drawingml/2006/main" prst="rect"/><ns4:solidFill xmlns:ns4="http://schemas.openxmlformats.org/drawingml/2006/main"><ns4:srgbClr val="06B6D4"/></ns4:solidFill><ns5:ln xmlns:ns5="http://schemas.openxmlformats.org/drawingml/2006/main"><ns5:noFill/></ns5:ln></ns0:spPr></ns0:sp><ns0:sp><ns0:nvSpPr><ns0:cNvPr id="10" name="A3"/><ns0:cNvSpPr><ns1:spLocks xmlns:ns1="http://schemas.openxmlformats.org/drawingml/2006/main" noGrp="1" noSelect="0" noRot="1" noMove="1"/></ns0:cNvSpPr><ns0:nvPr/></ns0:nvSpPr><ns0:spPr><ns2:xfrm xmlns:ns2="http://schemas.openxmlformats.org/drawingml/2006/main"><ns2:off x="8138160" y="1371600"/><ns2:ext cx="3566160" cy="54864"/></ns2:xfrm><ns3:prstGeom xmlns:ns3="http://schemas.openxmlformats.org/drawingml/2006/main" prst="rect"/><ns4:solidFill xmlns:ns4="http://schemas.openxmlformats.org/drawingml/2006/main"><ns4:srgbClr val="F59E0B"/></ns4:solidFill><ns5:ln xmlns:ns5="http://schemas.openxmlformats.org/drawingml/2006/main"><ns5:noFill/></ns5:ln></ns0:spPr></ns0:sp><ns0:sp><ns0:nvSpPr><ns0:cNvPr id="20" name="Value1.Left"/><ns0:cNvSpPr><ns1:spLocks xmlns:ns1="http://schemas.openxmlformats.org/drawingml/2006/main" noGrp="1"/></ns0:cNvSpPr><ns0:nvPr><ns0:ph idx="1" type="body"/></ns0:nvPr></ns0:nvSpPr><ns0:spPr><ns2:xfrm xmlns:ns2="http://schemas.openxmlformats.org/drawingml/2006/main"><ns2:off x="731520" y="1828800"/><ns2:ext cx="2926080" cy="1371600"/></ns2:xfrm></ns0:spPr><ns0:txBody><ns3:bodyPr xmlns:ns3="http://schemas.openxmlformats.org/drawingml/2006/main" wrap="square" anchor="t" anchorCtr="0"/><ns4:lstStyle><ns4:defPPr algn="ctr"><ns4:defRPr sz="5200" b="1"><ns4:solidFill><ns4:srgbClr val="1E2761"/></ns4:solidFill></ns4:defRPr></ns4:defPPr></ns4:lstStyle><ns4:defPPr algn="ctr"><ns4:buNone/><ns4:defRPr sz="5200" dirty="0" b="1"><ns4:solidFill><ns4:srgbClr val="1E2761"/></ns4:solidFill><ns4:latin typeface="Georgia"/><ns4:ea typeface="Georgia"/></ns4:defRPr></ns4:defPPr><ns4:lvl1pPr algn="ctr"><ns4:buNone/><ns4:defRPr sz="5200" dirty="0" b="1"><ns4:solidFill><ns4:srgbClr val="1E2761"/></ns4:solidFill><ns4:latin typeface="Georgia"/><ns4:ea typeface="Georgia"/></ns4:defRPr></ns4:lvl1pPr><ns4:lvl2pPr algn="ctr"><ns4:buNone/><ns4:defRPr sz="5200" dirty="0" b="1"><ns4:solidFill><ns4:srgbClr val="1E2761"/></ns4:solidFill><ns4:latin typeface="Georgia"/><ns4:ea typeface="Georgia"/></ns4:defRPr></ns4:lvl2pPr><ns4:lvl3pPr algn="ctr"><ns4:buNone/><ns4:defRPr sz="5200" dirty="0" b="1"><ns4:solidFill><ns4:srgbClr val="1E2761"/></ns4:solidFill><ns4:latin typeface="Georgia"/><ns4:ea typeface="Georgia"/></ns4:defRPr></ns4:lvl3pPr><ns4:lvl4pPr algn="ctr"><ns4:buNone/><ns4:defRPr sz="5200" dirty="0" b="1"><ns4:solidFill><ns4:srgbClr val="1E2761"/></ns4:solidFill><ns4:latin typeface="Georgia"/><ns4:ea typeface="Georgia"/></ns4:defRPr></ns4:lvl4pPr><ns4:lvl5pPr algn="ctr"><ns4:buNone/><ns4:defRPr sz="5200" dirty="0" b="1"><ns4:solidFill><ns4:srgbClr val="1E2761"/></ns4:solidFill><ns4:latin typeface="Georgia"/><ns4:ea typeface="Georgia"/></ns4:defRPr></ns4:lvl5pPr><ns4:lvl6pPr algn="ctr"><ns4:buNone/><ns4:defRPr sz="5200" dirty="0" b="1"><ns4:solidFill><ns4:srgbClr val="1E2761"/></ns4:solidFill><ns4:latin typeface="Georgia"/><ns4:ea typeface="Georgia"/></ns4:defRPr></ns4:lvl6pPr><ns4:lvl7pPr algn="ctr"><ns4:buNone/><ns4:defRPr sz="5200" dirty="0" b="1"><ns4:solidFill><ns4:srgbClr val="1E2761"/></ns4:solidFill><ns4:latin typeface="Georgia"/><ns4:ea typeface="Georgia"/></ns4:defRPr></ns4:lvl7pPr><ns4:lvl8pPr algn="ctr"><ns4:buNone/><ns4:defRPr sz="5200" dirty="0" b="1"><ns4:solidFill><ns4:srgbClr val="1E2761"/></ns4:solidFill><ns4:latin typeface="Georgia"/><ns4:ea typeface="Georgia"/></ns4:defRPr></ns4:lvl8pPr><ns4:lvl9pPr algn="ctr"><ns4:buNone/><ns4:defRPr sz="5200" dirty="0" b="1"><ns4:solidFill><ns4:srgbClr val="1E2761"/></ns4:solidFill><ns4:latin typeface="Georgia"/><ns4:ea typeface="Georgia"/></ns4:defRPr></ns4:lvl9pPr></ns4:lstStyle/><ns5:p xmlns:ns5="http://schemas.openxmlformats.org/drawingml/2006/main"><ns5:pPr algn="ctr"><ns5:buNone/></ns5:pPr><ns5:r><ns5:rPr lang="ja-JP"/><ns5:t>指標名
+説明</ns5:t></ns5:r></ns5:p></ns0:txBody></ns0:sp><ns0:sp><ns0:nvSpPr><ns0:cNvPr id="22" name="Value2.Center"/><ns0:cNvSpPr><ns1:spLocks xmlns:ns1="http://schemas.openxmlformats.org/drawingml/2006/main" noGrp="1"/></ns0:cNvSpPr><ns0:nvPr><ns0:ph idx="3" type="body"/></ns0:nvPr></ns0:nvSpPr><ns0:spPr><ns2:xfrm xmlns:ns2="http://schemas.openxmlformats.org/drawingml/2006/main"><ns2:off x="4480560" y="1828800"/><ns2:ext cx="3108960" cy="1371600"/></ns2:xfrm></ns0:spPr><ns0:txBody><ns3:bodyPr xmlns:ns3="http://schemas.openxmlformats.org/drawingml/2006/main" wrap="square" anchor="t" anchorCtr="0"/><ns4:lstStyle><ns4:defPPr algn="ctr"><ns4:defRPr sz="5200" b="1"><ns4:solidFill><ns4:srgbClr val="1E2761"/></ns4:solidFill></ns4:defRPr></ns4:defPPr></ns4:lstStyle><ns4:defPPr algn="ctr"><ns4:buNone/><ns4:defRPr sz="5200" dirty="0" b="1"><ns4:solidFill><ns4:srgbClr val="1E2761"/></ns4:solidFill><ns4:latin typeface="Georgia"/><ns4:ea typeface="Georgia"/></ns4:defRPr></ns4:defPPr><ns4:lvl1pPr algn="ctr"><ns4:buNone/><ns4:defRPr sz="5200" dirty="0" b="1"><ns4:solidFill><ns4:srgbClr val="1E2761"/></ns4:solidFill><ns4:latin typeface="Georgia"/><ns4:ea typeface="Georgia"/></ns4:defRPr></ns4:lvl1pPr><ns4:lvl2pPr algn="ctr"><ns4:buNone/><ns4:defRPr sz="5200" dirty="0" b="1"><ns4:solidFill><ns4:srgbClr val="1E2761"/></ns4:solidFill><ns4:latin typeface="Georgia"/><ns4:ea typeface="Georgia"/></ns4:defRPr></ns4:lvl2pPr><ns4:lvl3pPr algn="ctr"><ns4:buNone/><ns4:defRPr sz="5200" dirty="0" b="1"><ns4:solidFill><ns4:srgbClr val="1E2761"/></ns4:solidFill><ns4:latin typeface="Georgia"/><ns4:ea typeface="Georgia"/></ns4:defRPr></ns4:lvl3pPr><ns4:lvl4pPr algn="ctr"><ns4:buNone/><ns4:defRPr sz="5200" dirty="0" b="1"><ns4:solidFill><ns4:srgbClr val="1E2761"/></ns4:solidFill><ns4:latin typeface="Georgia"/><ns4:ea typeface="Georgia"/></ns4:defRPr></ns4:lvl4pPr><ns4:lvl5pPr algn="ctr"><ns4:buNone/><ns4:defRPr sz="5200" dirty="0" b="1"><ns4:solidFill><ns4:srgbClr val="1E2761"/></ns4:solidFill><ns4:latin typeface="Georgia"/><ns4:ea typeface="Georgia"/></ns4:defRPr></ns4:lvl5pPr><ns4:lvl6pPr algn="ctr"><ns4:buNone/><ns4:defRPr sz="5200" dirty="0" b="1"><ns4:solidFill><ns4:srgbClr val="1E2761"/></ns4:solidFill><ns4:latin typeface="Georgia"/><ns4:ea typeface="Georgia"/></ns4:defRPr></ns4:lvl6pPr><ns4:lvl7pPr algn="ctr"><ns4:buNone/><ns4:defRPr sz="5200" dirty="0" b="1"><ns4:solidFill><ns4:srgbClr val="1E2761"/></ns4:solidFill><ns4:latin typeface="Georgia"/><ns4:ea typeface="Georgia"/></ns4:defRPr></ns4:lvl7pPr><ns4:lvl8pPr algn="ctr"><ns4:buNone/><ns4:defRPr sz="5200" dirty="0" b="1"><ns4:solidFill><ns4:srgbClr val="1E2761"/></ns4:solidFill><ns4:latin typeface="Georgia"/><ns4:ea typeface="Georgia"/></ns4:defRPr></ns4:lvl8pPr><ns4:lvl9pPr algn="ctr"><ns4:buNone/><ns4:defRPr sz="5200" dirty="0" b="1"><ns4:solidFill><ns4:srgbClr val="1E2761"/></ns4:solidFill><ns4:latin typeface="Georgia"/><ns4:ea typeface="Georgia"/></ns4:defRPr></ns4:lvl9pPr></ns4:lstStyle/><ns5:p xmlns:ns5="http://schemas.openxmlformats.org/drawingml/2006/main"><ns5:pPr algn="ctr"><ns5:buNone/></ns5:pPr><ns5:r><ns5:rPr lang="ja-JP"/><ns5:t>指標名
+説明</ns5:t></ns5:r></ns5:p></ns0:txBody></ns0:sp><ns0:sp><ns0:nvSpPr><ns0:cNvPr id="24" name="Value3.Right"/><ns0:cNvSpPr><ns1:spLocks xmlns:ns1="http://schemas.openxmlformats.org/drawingml/2006/main" noGrp="1"/></ns0:cNvSpPr><ns0:nvPr><ns0:ph idx="5" type="body"/></ns0:nvPr></ns0:nvSpPr><ns0:spPr><ns2:xfrm xmlns:ns2="http://schemas.openxmlformats.org/drawingml/2006/main"><ns2:off x="8412480" y="1828800"/><ns2:ext cx="3017520" cy="1371600"/></ns2:xfrm></ns0:spPr><ns0:txBody><ns3:bodyPr xmlns:ns3="http://schemas.openxmlformats.org/drawingml/2006/main" wrap="square" anchor="t" anchorCtr="0"/><ns4:lstStyle><ns4:defPPr algn="ctr"><ns4:defRPr sz="5200" b="1"><ns4:solidFill><ns4:srgbClr val="1E2761"/></ns4:solidFill></ns4:defRPr></ns4:defPPr></ns4:lstStyle><ns4:defPPr algn="ctr"><ns4:buNone/><ns4:defRPr sz="5200" dirty="0" b="1"><ns4:solidFill><ns4:srgbClr val="1E2761"/></ns4:solidFill><ns4:latin typeface="Georgia"/><ns4:ea typeface="Georgia"/></ns4:defRPr></ns4:defPPr><ns4:lvl1pPr algn="ctr"><ns4:buNone/><ns4:defRPr sz="5200" dirty="0" b="1"><ns4:solidFill><ns4:srgbClr val="1E2761"/></ns4:solidFill><ns4:latin typeface="Georgia"/><ns4:ea typeface="Georgia"/></ns4:defRPr></ns4:lvl1pPr><ns4:lvl2pPr algn="ctr"><ns4:buNone/><ns4:defRPr sz="5200" dirty="0" b="1"><ns4:solidFill><ns4:srgbClr val="1E2761"/></ns4:solidFill><ns4:latin typeface="Georgia"/><ns4:ea typeface="Georgia"/></ns4:defRPr></ns4:lvl2pPr><ns4:lvl3pPr algn="ctr"><ns4:buNone/><ns4:defRPr sz="5200" dirty="0" b="1"><ns4:solidFill><ns4:srgbClr val="1E2761"/></ns4:solidFill><ns4:latin typeface="Georgia"/><ns4:ea typeface="Georgia"/></ns4:defRPr></ns4:lvl3pPr><ns4:lvl4pPr algn="ctr"><ns4:buNone/><ns4:defRPr sz="5200" dirty="0" b="1"><ns4:solidFill><ns4:srgbClr val="1E2761"/></ns4:solidFill><ns4:latin typeface="Georgia"/><ns4:ea typeface="Georgia"/></ns4:defRPr></ns4:lvl4pPr><ns4:lvl5pPr algn="ctr"><ns4:buNone/><ns4:defRPr sz="5200" dirty="0" b="1"><ns4:solidFill><ns4:srgbClr val="1E2761"/></ns4:solidFill><ns4:latin typeface="Georgia"/><ns4:ea typeface="Georgia"/></ns4:defRPr></ns4:lvl5pPr><ns4:lvl6pPr algn="ctr"><ns4:buNone/><ns4:defRPr sz="5200" dirty="0" b="1"><ns4:solidFill><ns4:srgbClr val="1E2761"/></ns4:solidFill><ns4:latin typeface="Georgia"/><ns4:ea typeface="Georgia"/></ns4:defRPr></ns4:lvl6pPr><ns4:lvl7pPr algn="ctr"><ns4:buNone/><ns4:defRPr sz="5200" dirty="0" b="1"><ns4:solidFill><ns4:srgbClr val="1E2761"/></ns4:solidFill><ns4:latin typeface="Georgia"/><ns4:ea typeface="Georgia"/></ns4:defRPr></ns4:lvl7pPr><ns4:lvl8pPr algn="ctr"><ns4:buNone/><ns4:defRPr sz="5200" dirty="0" b="1"><ns4:solidFill><ns4:srgbClr val="1E2761"/></ns4:solidFill><ns4:latin typeface="Georgia"/><ns4:ea typeface="Georgia"/></ns4:defRPr></ns4:lvl8pPr><ns4:lvl9pPr algn="ctr"><ns4:buNone/><ns4:defRPr sz="5200" dirty="0" b="1"><ns4:solidFill><ns4:srgbClr val="1E2761"/></ns4:solidFill><ns4:latin typeface="Georgia"/><ns4:ea typeface="Georgia"/></ns4:defRPr></ns4:lvl9pPr></ns4:lstStyle/><ns5:p xmlns:ns5="http://schemas.openxmlformats.org/drawingml/2006/main"><ns5:pPr algn="ctr"><ns5:buNone/></ns5:pPr><ns5:r><ns5:rPr lang="ja-JP"/><ns5:t>指標名
+説明</ns5:t></ns5:r></ns5:p></ns0:txBody></ns0:sp><ns0:sp><ns0:nvSpPr><ns0:cNvPr id="31" name="SlideNum.Footer"/><ns0:cNvSpPr><ns1:spLocks xmlns:ns1="http://schemas.openxmlformats.org/drawingml/2006/main" noGrp="1"/></ns0:cNvSpPr><ns0:nvPr><ns0:ph idx="50" type="sldNum"/></ns0:nvPr></ns0:nvSpPr><ns0:spPr><ns2:xfrm xmlns:ns2="http://schemas.openxmlformats.org/drawingml/2006/main"><ns2:off x="10972800" y="6446520"/><ns2:ext cx="1097280" cy="274320"/></ns2:xfrm></ns0:spPr><ns0:txBody><ns3:bodyPr xmlns:ns3="http://schemas.openxmlformats.org/drawingml/2006/main" wrap="square" anchor="t" anchorCtr="0"/><ns4:lstStyle><ns4:defPPr algn="r"><ns4:defRPr sz="1000"><ns4:solidFill><ns4:srgbClr val="94A3B8"/></ns4:solidFill></ns4:defRPr></ns4:defPPr></ns4:lstStyle><ns4:defPPr algn="r"><ns4:buNone/><ns4:defRPr sz="1000" dirty="0"><ns4:solidFill><ns4:srgbClr val="94A3B8"/></ns4:solidFill><ns4:latin typeface="Calibri"/><ns4:ea typeface="Calibri"/></ns4:defRPr></ns4:defPPr><ns4:lvl1pPr algn="r"><ns4:buNone/><ns4:defRPr sz="1000" dirty="0"><ns4:solidFill><ns4:srgbClr val="94A3B8"/></ns4:solidFill><ns4:latin typeface="Calibri"/><ns4:ea typeface="Calibri"/></ns4:defRPr></ns4:lvl1pPr><ns4:lvl2pPr algn="r"><ns4:buNone/><ns4:defRPr sz="1000" dirty="0"><ns4:solidFill><ns4:srgbClr val="94A3B8"/></ns4:solidFill><ns4:latin typeface="Calibri"/><ns4:ea typeface="Calibri"/></ns4:defRPr></ns4:lvl2pPr><ns4:lvl3pPr algn="r"><ns4:buNone/><ns4:defRPr sz="1000" dirty="0"><ns4:solidFill><ns4:srgbClr val="94A3B8"/></ns4:solidFill><ns4:latin typeface="Calibri"/><ns4:ea typeface="Calibri"/></ns4:defRPr></ns4:lvl3pPr><ns4:lvl4pPr algn="r"><ns4:buNone/><ns4:defRPr sz="1000" dirty="0"><ns4:solidFill><ns4:srgbClr val="94A3B8"/></ns4:solidFill><ns4:latin typeface="Calibri"/><ns4:ea typeface="Calibri"/></ns4:defRPr></ns4:lvl4pPr><ns4:lvl5pPr algn="r"><ns4:buNone/><ns4:defRPr sz="1000" dirty="0"><ns4:solidFill><ns4:srgbClr val="94A3B8"/></ns4:solidFill><ns4:latin typeface="Calibri"/><ns4:ea typeface="Calibri"/></ns4:defRPr></ns4:lvl5pPr><ns4:lvl6pPr algn="r"><ns4:buNone/><ns4:defRPr sz="1000" dirty="0"><ns4:solidFill><ns4:srgbClr val="94A3B8"/></ns4:solidFill><ns4:latin typeface="Calibri"/><ns4:ea typeface="Calibri"/></ns4:defRPr></ns4:lvl6pPr><ns4:lvl7pPr algn="r"><ns4:buNone/><ns4:defRPr sz="1000" dirty="0"><ns4:solidFill><ns4:srgbClr val="94A3B8"/></ns4:solidFill><ns4:latin typeface="Calibri"/><ns4:ea typeface="Calibri"/></ns4:defRPr></ns4:lvl7pPr><ns4:lvl8pPr algn="r"><ns4:buNone/><ns4:defRPr sz="1000" dirty="0"><ns4:solidFill><ns4:srgbClr val="94A3B8"/></ns4:solidFill><ns4:latin typeface="Calibri"/><ns4:ea typeface="Calibri"/></ns4:defRPr></ns4:lvl8pPr><ns4:lvl9pPr algn="r"><ns4:buNone/><ns4:defRPr sz="1000" dirty="0"><ns4:solidFill><ns4:srgbClr val="94A3B8"/></ns4:solidFill><ns4:latin typeface="Calibri"/><ns4:ea typeface="Calibri"/></ns4:defRPr></ns4:lvl9pPr></ns4:lstStyle><ns5:p xmlns:ns5="http://schemas.openxmlformats.org/drawingml/2006/main"><ns5:pPr algn="r"><ns5:buNone/></ns5:pPr><ns5:r><ns5:rPr lang="ja-JP"/><ns5:t>&lt;#&gt;</ns5:t></ns5:r></ns5:p></ns0:txBody></ns0:sp></ns0:spTree></ns0:cSld><ns0:clrMapOvr/></ns0:sldLayout>
 </file>
 
 <file path=ppt/slideLayouts/slideLayout17.xml><?xml version='1.0' encoding='UTF-8' standalone='yes'?>
-<ns0:sldLayout xmlns:ns0="http://schemas.openxmlformats.org/presentationml/2006/main" type="blank" preserve="1"><ns0:cSld name="KPI.4Value.Grid"><ns0:spTree><ns0:nvGrpSpPr><ns0:cNvPr id="1" name=""/><ns0:cNvGrpSpPr/><ns0:nvPr/></ns0:nvGrpSpPr><ns0:grpSpPr><ns1:xfrm xmlns:ns1="http://schemas.openxmlformats.org/drawingml/2006/main"><ns1:off x="0" y="0"/><ns1:ext cx="0" cy="0"/><ns1:chOff x="0" y="0"/><ns1:chExt cx="0" cy="0"/></ns1:xfrm></ns0:grpSpPr><ns0:sp><ns0:nvSpPr><ns0:cNvPr id="2" name="HeaderBar"/><ns0:cNvSpPr><ns1:spLocks xmlns:ns1="http://schemas.openxmlformats.org/drawingml/2006/main" noGrp="1" noSelect="0" noRot="1" noMove="1"/></ns0:cNvSpPr><ns0:nvPr/></ns0:nvSpPr><ns0:spPr><ns2:xfrm xmlns:ns2="http://schemas.openxmlformats.org/drawingml/2006/main"><ns2:off x="0" y="0"/><ns2:ext cx="12192000" cy="1051560"/></ns2:xfrm><ns3:prstGeom xmlns:ns3="http://schemas.openxmlformats.org/drawingml/2006/main" prst="rect"/><ns4:solidFill xmlns:ns4="http://schemas.openxmlformats.org/drawingml/2006/main"><ns4:srgbClr val="1E2761"/></ns4:solidFill><ns5:ln xmlns:ns5="http://schemas.openxmlformats.org/drawingml/2006/main"><ns5:noFill/></ns5:ln></ns0:spPr></ns0:sp><ns0:sp><ns0:nvSpPr><ns0:cNvPr id="10" name="SlideTitle.Header"/><ns0:cNvSpPr><ns1:spLocks xmlns:ns1="http://schemas.openxmlformats.org/drawingml/2006/main" noGrp="1"/></ns0:cNvSpPr><ns0:nvPr><ns0:ph idx="15" type="body"/></ns0:nvPr></ns0:nvSpPr><ns0:spPr><ns2:xfrm xmlns:ns2="http://schemas.openxmlformats.org/drawingml/2006/main"><ns2:off x="731520" y="91440"/><ns2:ext cx="9144000" cy="475488"/></ns2:xfrm></ns0:spPr><ns0:txBody><ns3:bodyPr xmlns:ns3="http://schemas.openxmlformats.org/drawingml/2006/main" wrap="square" anchor="t" anchorCtr="0"/><ns4:lstStyle xmlns:ns4="http://schemas.openxmlformats.org/drawingml/2006/main"><ns4:defPPr algn="l"><ns4:buNone/><ns4:defRPr sz="2800" dirty="0" b="1"><ns4:solidFill><ns4:srgbClr val="FFFFFF"/></ns4:solidFill><ns4:latin typeface="Georgia"/><ns4:ea typeface="Georgia"/></ns4:defRPr></ns4:defPPr><ns4:lvl1pPr algn="l"><ns4:buNone/><ns4:defRPr sz="2800" dirty="0" b="1"><ns4:solidFill><ns4:srgbClr val="FFFFFF"/></ns4:solidFill><ns4:latin typeface="Georgia"/><ns4:ea typeface="Georgia"/></ns4:defRPr></ns4:lvl1pPr><ns4:lvl2pPr algn="l"><ns4:buNone/><ns4:defRPr sz="2800" dirty="0" b="1"><ns4:solidFill><ns4:srgbClr val="FFFFFF"/></ns4:solidFill><ns4:latin typeface="Georgia"/><ns4:ea typeface="Georgia"/></ns4:defRPr></ns4:lvl2pPr><ns4:lvl3pPr algn="l"><ns4:buNone/><ns4:defRPr sz="2800" dirty="0" b="1"><ns4:solidFill><ns4:srgbClr val="FFFFFF"/></ns4:solidFill><ns4:latin typeface="Georgia"/><ns4:ea typeface="Georgia"/></ns4:defRPr></ns4:lvl3pPr><ns4:lvl4pPr algn="l"><ns4:buNone/><ns4:defRPr sz="2800" dirty="0" b="1"><ns4:solidFill><ns4:srgbClr val="FFFFFF"/></ns4:solidFill><ns4:latin typeface="Georgia"/><ns4:ea typeface="Georgia"/></ns4:defRPr></ns4:lvl4pPr><ns4:lvl5pPr algn="l"><ns4:buNone/><ns4:defRPr sz="2800" dirty="0" b="1"><ns4:solidFill><ns4:srgbClr val="FFFFFF"/></ns4:solidFill><ns4:latin typeface="Georgia"/><ns4:ea typeface="Georgia"/></ns4:defRPr></ns4:lvl5pPr><ns4:lvl6pPr algn="l"><ns4:buNone/><ns4:defRPr sz="2800" dirty="0" b="1"><ns4:solidFill><ns4:srgbClr val="FFFFFF"/></ns4:solidFill><ns4:latin typeface="Georgia"/><ns4:ea typeface="Georgia"/></ns4:defRPr></ns4:lvl6pPr><ns4:lvl7pPr algn="l"><ns4:buNone/><ns4:defRPr sz="2800" dirty="0" b="1"><ns4:solidFill><ns4:srgbClr val="FFFFFF"/></ns4:solidFill><ns4:latin typeface="Georgia"/><ns4:ea typeface="Georgia"/></ns4:defRPr></ns4:lvl7pPr><ns4:lvl8pPr algn="l"><ns4:buNone/><ns4:defRPr sz="2800" dirty="0" b="1"><ns4:solidFill><ns4:srgbClr val="FFFFFF"/></ns4:solidFill><ns4:latin typeface="Georgia"/><ns4:ea typeface="Georgia"/></ns4:defRPr></ns4:lvl8pPr><ns4:lvl9pPr algn="l"><ns4:buNone/><ns4:defRPr sz="2800" dirty="0" b="1"><ns4:solidFill><ns4:srgbClr val="FFFFFF"/></ns4:solidFill><ns4:latin typeface="Georgia"/><ns4:ea typeface="Georgia"/></ns4:defRPr></ns4:lvl9pPr></ns4:lstStyle/><ns5:p xmlns:ns5="http://schemas.openxmlformats.org/drawingml/2006/main"><ns5:pPr algn="l"><ns5:buNone/></ns5:pPr><ns5:r><ns5:rPr lang="ja-JP"/><ns5:t>サブタイトル</ns5:t></ns5:r></ns5:p></ns0:txBody></ns0:sp><ns0:sp><ns0:nvSpPr><ns0:cNvPr id="5" name="TL"/><ns0:cNvSpPr><ns1:spLocks xmlns:ns1="http://schemas.openxmlformats.org/drawingml/2006/main" noGrp="1" noSelect="0" noRot="1" noMove="1"/></ns0:cNvSpPr><ns0:nvPr/></ns0:nvSpPr><ns0:spPr><ns2:xfrm xmlns:ns2="http://schemas.openxmlformats.org/drawingml/2006/main"><ns2:off x="457200" y="1280160"/><ns2:ext cx="5303520" cy="2286000"/></ns2:xfrm><ns3:prstGeom xmlns:ns3="http://schemas.openxmlformats.org/drawingml/2006/main" prst="roundRect"><ns3:avLst><ns3:gd name="adj" fmla="val 8000"/></ns3:avLst></ns3:prstGeom><ns4:solidFill xmlns:ns4="http://schemas.openxmlformats.org/drawingml/2006/main"><ns4:srgbClr val="EDF0F7"/></ns4:solidFill><ns5:ln xmlns:ns5="http://schemas.openxmlformats.org/drawingml/2006/main"><ns5:noFill/></ns5:ln></ns0:spPr></ns0:sp><ns0:sp><ns0:nvSpPr><ns0:cNvPr id="6" name="TR"/><ns0:cNvSpPr><ns1:spLocks xmlns:ns1="http://schemas.openxmlformats.org/drawingml/2006/main" noGrp="1" noSelect="0" noRot="1" noMove="1"/></ns0:cNvSpPr><ns0:nvPr/></ns0:nvSpPr><ns0:spPr><ns2:xfrm xmlns:ns2="http://schemas.openxmlformats.org/drawingml/2006/main"><ns2:off x="6126480" y="1280160"/><ns2:ext cx="5394960" cy="2286000"/></ns2:xfrm><ns3:prstGeom xmlns:ns3="http://schemas.openxmlformats.org/drawingml/2006/main" prst="roundRect"><ns3:avLst><ns3:gd name="adj" fmla="val 8000"/></ns3:avLst></ns3:prstGeom><ns4:solidFill xmlns:ns4="http://schemas.openxmlformats.org/drawingml/2006/main"><ns4:srgbClr val="EDF0F7"/></ns4:solidFill><ns5:ln xmlns:ns5="http://schemas.openxmlformats.org/drawingml/2006/main"><ns5:noFill/></ns5:ln></ns0:spPr></ns0:sp><ns0:sp><ns0:nvSpPr><ns0:cNvPr id="7" name="BL"/><ns0:cNvSpPr><ns1:spLocks xmlns:ns1="http://schemas.openxmlformats.org/drawingml/2006/main" noGrp="1" noSelect="0" noRot="1" noMove="1"/></ns0:cNvSpPr><ns0:nvPr/></ns0:nvSpPr><ns0:spPr><ns2:xfrm xmlns:ns2="http://schemas.openxmlformats.org/drawingml/2006/main"><ns2:off x="457200" y="3840480"/><ns2:ext cx="5303520" cy="2286000"/></ns2:xfrm><ns3:prstGeom xmlns:ns3="http://schemas.openxmlformats.org/drawingml/2006/main" prst="roundRect"><ns3:avLst><ns3:gd name="adj" fmla="val 8000"/></ns3:avLst></ns3:prstGeom><ns4:solidFill xmlns:ns4="http://schemas.openxmlformats.org/drawingml/2006/main"><ns4:srgbClr val="EDF0F7"/></ns4:solidFill><ns5:ln xmlns:ns5="http://schemas.openxmlformats.org/drawingml/2006/main"><ns5:noFill/></ns5:ln></ns0:spPr></ns0:sp><ns0:sp><ns0:nvSpPr><ns0:cNvPr id="8" name="BR"/><ns0:cNvSpPr><ns1:spLocks xmlns:ns1="http://schemas.openxmlformats.org/drawingml/2006/main" noGrp="1" noSelect="0" noRot="1" noMove="1"/></ns0:cNvSpPr><ns0:nvPr/></ns0:nvSpPr><ns0:spPr><ns2:xfrm xmlns:ns2="http://schemas.openxmlformats.org/drawingml/2006/main"><ns2:off x="6126480" y="3840480"/><ns2:ext cx="5394960" cy="2286000"/></ns2:xfrm><ns3:prstGeom xmlns:ns3="http://schemas.openxmlformats.org/drawingml/2006/main" prst="roundRect"><ns3:avLst><ns3:gd name="adj" fmla="val 8000"/></ns3:avLst></ns3:prstGeom><ns4:solidFill xmlns:ns4="http://schemas.openxmlformats.org/drawingml/2006/main"><ns4:srgbClr val="EDF0F7"/></ns4:solidFill><ns5:ln xmlns:ns5="http://schemas.openxmlformats.org/drawingml/2006/main"><ns5:noFill/></ns5:ln></ns0:spPr></ns0:sp><ns0:sp><ns0:nvSpPr><ns0:cNvPr id="9" name="A1"/><ns0:cNvSpPr><ns1:spLocks xmlns:ns1="http://schemas.openxmlformats.org/drawingml/2006/main" noGrp="1" noSelect="0" noRot="1" noMove="1"/></ns0:cNvSpPr><ns0:nvPr/></ns0:nvSpPr><ns0:spPr><ns2:xfrm xmlns:ns2="http://schemas.openxmlformats.org/drawingml/2006/main"><ns2:off x="457200" y="1280160"/><ns2:ext cx="54864" cy="2286000"/></ns2:xfrm><ns3:prstGeom xmlns:ns3="http://schemas.openxmlformats.org/drawingml/2006/main" prst="rect"/><ns4:solidFill xmlns:ns4="http://schemas.openxmlformats.org/drawingml/2006/main"><ns4:srgbClr val="3B82F6"/></ns4:solidFill><ns5:ln xmlns:ns5="http://schemas.openxmlformats.org/drawingml/2006/main"><ns5:noFill/></ns5:ln></ns0:spPr></ns0:sp><ns0:sp><ns0:nvSpPr><ns0:cNvPr id="10" name="A2"/><ns0:cNvSpPr><ns1:spLocks xmlns:ns1="http://schemas.openxmlformats.org/drawingml/2006/main" noGrp="1" noSelect="0" noRot="1" noMove="1"/></ns0:cNvSpPr><ns0:nvPr/></ns0:nvSpPr><ns0:spPr><ns2:xfrm xmlns:ns2="http://schemas.openxmlformats.org/drawingml/2006/main"><ns2:off x="6126480" y="1280160"/><ns2:ext cx="54864" cy="2286000"/></ns2:xfrm><ns3:prstGeom xmlns:ns3="http://schemas.openxmlformats.org/drawingml/2006/main" prst="rect"/><ns4:solidFill xmlns:ns4="http://schemas.openxmlformats.org/drawingml/2006/main"><ns4:srgbClr val="06B6D4"/></ns4:solidFill><ns5:ln xmlns:ns5="http://schemas.openxmlformats.org/drawingml/2006/main"><ns5:noFill/></ns5:ln></ns0:spPr></ns0:sp><ns0:sp><ns0:nvSpPr><ns0:cNvPr id="11" name="A3"/><ns0:cNvSpPr><ns1:spLocks xmlns:ns1="http://schemas.openxmlformats.org/drawingml/2006/main" noGrp="1" noSelect="0" noRot="1" noMove="1"/></ns0:cNvSpPr><ns0:nvPr/></ns0:nvSpPr><ns0:spPr><ns2:xfrm xmlns:ns2="http://schemas.openxmlformats.org/drawingml/2006/main"><ns2:off x="457200" y="3840480"/><ns2:ext cx="54864" cy="2286000"/></ns2:xfrm><ns3:prstGeom xmlns:ns3="http://schemas.openxmlformats.org/drawingml/2006/main" prst="rect"/><ns4:solidFill xmlns:ns4="http://schemas.openxmlformats.org/drawingml/2006/main"><ns4:srgbClr val="F59E0B"/></ns4:solidFill><ns5:ln xmlns:ns5="http://schemas.openxmlformats.org/drawingml/2006/main"><ns5:noFill/></ns5:ln></ns0:spPr></ns0:sp><ns0:sp><ns0:nvSpPr><ns0:cNvPr id="12" name="A4"/><ns0:cNvSpPr><ns1:spLocks xmlns:ns1="http://schemas.openxmlformats.org/drawingml/2006/main" noGrp="1" noSelect="0" noRot="1" noMove="1"/></ns0:cNvSpPr><ns0:nvPr/></ns0:nvSpPr><ns0:spPr><ns2:xfrm xmlns:ns2="http://schemas.openxmlformats.org/drawingml/2006/main"><ns2:off x="6126480" y="3840480"/><ns2:ext cx="54864" cy="2286000"/></ns2:xfrm><ns3:prstGeom xmlns:ns3="http://schemas.openxmlformats.org/drawingml/2006/main" prst="rect"/><ns4:solidFill xmlns:ns4="http://schemas.openxmlformats.org/drawingml/2006/main"><ns4:srgbClr val="2563EB"/></ns4:solidFill><ns5:ln xmlns:ns5="http://schemas.openxmlformats.org/drawingml/2006/main"><ns5:noFill/></ns5:ln></ns0:spPr></ns0:sp><ns0:sp><ns0:nvSpPr><ns0:cNvPr id="20" name="Value1.TopLeft"/><ns0:cNvSpPr><ns1:spLocks xmlns:ns1="http://schemas.openxmlformats.org/drawingml/2006/main" noGrp="1"/></ns0:cNvSpPr><ns0:nvPr><ns0:ph idx="1" type="body"/></ns0:nvPr></ns0:nvSpPr><ns0:spPr><ns2:xfrm xmlns:ns2="http://schemas.openxmlformats.org/drawingml/2006/main"><ns2:off x="914400" y="1463040"/><ns2:ext cx="4389120" cy="1828800"/></ns2:xfrm></ns0:spPr><ns0:txBody><ns3:bodyPr xmlns:ns3="http://schemas.openxmlformats.org/drawingml/2006/main" wrap="square" anchor="t" anchorCtr="0"/><ns4:lstStyle xmlns:ns4="http://schemas.openxmlformats.org/drawingml/2006/main"><ns4:defPPr algn="l"><ns4:buNone/><ns4:defRPr sz="1400" dirty="0"><ns4:solidFill><ns4:srgbClr val="1E293B"/></ns4:solidFill><ns4:latin typeface="Calibri"/><ns4:ea typeface="Calibri"/></ns4:defRPr></ns4:defPPr><ns4:lvl1pPr algn="l"><ns4:buNone/><ns4:defRPr sz="1400" dirty="0"><ns4:solidFill><ns4:srgbClr val="1E293B"/></ns4:solidFill><ns4:latin typeface="Calibri"/><ns4:ea typeface="Calibri"/></ns4:defRPr></ns4:lvl1pPr><ns4:lvl2pPr algn="l"><ns4:buNone/><ns4:defRPr sz="1400" dirty="0"><ns4:solidFill><ns4:srgbClr val="1E293B"/></ns4:solidFill><ns4:latin typeface="Calibri"/><ns4:ea typeface="Calibri"/></ns4:defRPr></ns4:lvl2pPr><ns4:lvl3pPr algn="l"><ns4:buNone/><ns4:defRPr sz="1400" dirty="0"><ns4:solidFill><ns4:srgbClr val="1E293B"/></ns4:solidFill><ns4:latin typeface="Calibri"/><ns4:ea typeface="Calibri"/></ns4:defRPr></ns4:lvl3pPr><ns4:lvl4pPr algn="l"><ns4:buNone/><ns4:defRPr sz="1400" dirty="0"><ns4:solidFill><ns4:srgbClr val="1E293B"/></ns4:solidFill><ns4:latin typeface="Calibri"/><ns4:ea typeface="Calibri"/></ns4:defRPr></ns4:lvl4pPr><ns4:lvl5pPr algn="l"><ns4:buNone/><ns4:defRPr sz="1400" dirty="0"><ns4:solidFill><ns4:srgbClr val="1E293B"/></ns4:solidFill><ns4:latin typeface="Calibri"/><ns4:ea typeface="Calibri"/></ns4:defRPr></ns4:lvl5pPr><ns4:lvl6pPr algn="l"><ns4:buNone/><ns4:defRPr sz="1400" dirty="0"><ns4:solidFill><ns4:srgbClr val="1E293B"/></ns4:solidFill><ns4:latin typeface="Calibri"/><ns4:ea typeface="Calibri"/></ns4:defRPr></ns4:lvl6pPr><ns4:lvl7pPr algn="l"><ns4:buNone/><ns4:defRPr sz="1400" dirty="0"><ns4:solidFill><ns4:srgbClr val="1E293B"/></ns4:solidFill><ns4:latin typeface="Calibri"/><ns4:ea typeface="Calibri"/></ns4:defRPr></ns4:lvl7pPr><ns4:lvl8pPr algn="l"><ns4:buNone/><ns4:defRPr sz="1400" dirty="0"><ns4:solidFill><ns4:srgbClr val="1E293B"/></ns4:solidFill><ns4:latin typeface="Calibri"/><ns4:ea typeface="Calibri"/></ns4:defRPr></ns4:lvl8pPr><ns4:lvl9pPr algn="l"><ns4:buNone/><ns4:defRPr sz="1400" dirty="0"><ns4:solidFill><ns4:srgbClr val="1E293B"/></ns4:solidFill><ns4:latin typeface="Calibri"/><ns4:ea typeface="Calibri"/></ns4:defRPr></ns4:lvl9pPr></ns4:lstStyle/><ns5:p xmlns:ns5="http://schemas.openxmlformats.org/drawingml/2006/main"><ns5:pPr algn="l"><ns5:buNone/></ns5:pPr><ns5:r><ns5:rPr lang="ja-JP"/><ns5:t>指標 2
-値・説明</ns5:t></ns5:r></ns5:p></ns0:txBody></ns0:sp><ns0:sp><ns0:nvSpPr><ns0:cNvPr id="22" name="Value3.BottomLeft"/><ns0:cNvSpPr><ns1:spLocks xmlns:ns1="http://schemas.openxmlformats.org/drawingml/2006/main" noGrp="1"/></ns0:cNvSpPr><ns0:nvPr><ns0:ph idx="3" type="body"/></ns0:nvPr></ns0:nvSpPr><ns0:spPr><ns2:xfrm xmlns:ns2="http://schemas.openxmlformats.org/drawingml/2006/main"><ns2:off x="914400" y="4023360"/><ns2:ext cx="4389120" cy="1828800"/></ns2:xfrm></ns0:spPr><ns0:txBody><ns3:bodyPr xmlns:ns3="http://schemas.openxmlformats.org/drawingml/2006/main" wrap="square" anchor="t" anchorCtr="0"/><ns4:lstStyle xmlns:ns4="http://schemas.openxmlformats.org/drawingml/2006/main"><ns4:defPPr algn="l"><ns4:buNone/><ns4:defRPr sz="1400" dirty="0"><ns4:solidFill><ns4:srgbClr val="1E293B"/></ns4:solidFill><ns4:latin typeface="Calibri"/><ns4:ea typeface="Calibri"/></ns4:defRPr></ns4:defPPr><ns4:lvl1pPr algn="l"><ns4:buNone/><ns4:defRPr sz="1400" dirty="0"><ns4:solidFill><ns4:srgbClr val="1E293B"/></ns4:solidFill><ns4:latin typeface="Calibri"/><ns4:ea typeface="Calibri"/></ns4:defRPr></ns4:lvl1pPr><ns4:lvl2pPr algn="l"><ns4:buNone/><ns4:defRPr sz="1400" dirty="0"><ns4:solidFill><ns4:srgbClr val="1E293B"/></ns4:solidFill><ns4:latin typeface="Calibri"/><ns4:ea typeface="Calibri"/></ns4:defRPr></ns4:lvl2pPr><ns4:lvl3pPr algn="l"><ns4:buNone/><ns4:defRPr sz="1400" dirty="0"><ns4:solidFill><ns4:srgbClr val="1E293B"/></ns4:solidFill><ns4:latin typeface="Calibri"/><ns4:ea typeface="Calibri"/></ns4:defRPr></ns4:lvl3pPr><ns4:lvl4pPr algn="l"><ns4:buNone/><ns4:defRPr sz="1400" dirty="0"><ns4:solidFill><ns4:srgbClr val="1E293B"/></ns4:solidFill><ns4:latin typeface="Calibri"/><ns4:ea typeface="Calibri"/></ns4:defRPr></ns4:lvl4pPr><ns4:lvl5pPr algn="l"><ns4:buNone/><ns4:defRPr sz="1400" dirty="0"><ns4:solidFill><ns4:srgbClr val="1E293B"/></ns4:solidFill><ns4:latin typeface="Calibri"/><ns4:ea typeface="Calibri"/></ns4:defRPr></ns4:lvl5pPr><ns4:lvl6pPr algn="l"><ns4:buNone/><ns4:defRPr sz="1400" dirty="0"><ns4:solidFill><ns4:srgbClr val="1E293B"/></ns4:solidFill><ns4:latin typeface="Calibri"/><ns4:ea typeface="Calibri"/></ns4:defRPr></ns4:lvl6pPr><ns4:lvl7pPr algn="l"><ns4:buNone/><ns4:defRPr sz="1400" dirty="0"><ns4:solidFill><ns4:srgbClr val="1E293B"/></ns4:solidFill><ns4:latin typeface="Calibri"/><ns4:ea typeface="Calibri"/></ns4:defRPr></ns4:lvl7pPr><ns4:lvl8pPr algn="l"><ns4:buNone/><ns4:defRPr sz="1400" dirty="0"><ns4:solidFill><ns4:srgbClr val="1E293B"/></ns4:solidFill><ns4:latin typeface="Calibri"/><ns4:ea typeface="Calibri"/></ns4:defRPr></ns4:lvl8pPr><ns4:lvl9pPr algn="l"><ns4:buNone/><ns4:defRPr sz="1400" dirty="0"><ns4:solidFill><ns4:srgbClr val="1E293B"/></ns4:solidFill><ns4:latin typeface="Calibri"/><ns4:ea typeface="Calibri"/></ns4:defRPr></ns4:lvl9pPr></ns4:lstStyle/><ns5:p xmlns:ns5="http://schemas.openxmlformats.org/drawingml/2006/main"><ns5:pPr algn="l"><ns5:buNone/></ns5:pPr><ns5:r><ns5:rPr lang="ja-JP"/><ns5:t>指標 4
-値・説明</ns5:t></ns5:r></ns5:p></ns0:txBody></ns0:sp><ns0:sp><ns0:nvSpPr><ns0:cNvPr id="31" name="SlideNum.Footer"/><ns0:cNvSpPr><ns1:spLocks xmlns:ns1="http://schemas.openxmlformats.org/drawingml/2006/main" noGrp="1"/></ns0:cNvSpPr><ns0:nvPr><ns0:ph idx="50" type="sldNum"/></ns0:nvPr></ns0:nvSpPr><ns0:spPr><ns2:xfrm xmlns:ns2="http://schemas.openxmlformats.org/drawingml/2006/main"><ns2:off x="10972800" y="6446520"/><ns2:ext cx="1097280" cy="274320"/></ns2:xfrm></ns0:spPr><ns0:txBody><ns3:bodyPr xmlns:ns3="http://schemas.openxmlformats.org/drawingml/2006/main" wrap="square" anchor="t" anchorCtr="0"/><ns4:lstStyle xmlns:ns4="http://schemas.openxmlformats.org/drawingml/2006/main"><ns4:defPPr algn="r"><ns4:buNone/><ns4:defRPr sz="1000" dirty="0"><ns4:solidFill><ns4:srgbClr val="94A3B8"/></ns4:solidFill><ns4:latin typeface="Calibri"/><ns4:ea typeface="Calibri"/></ns4:defRPr></ns4:defPPr><ns4:lvl1pPr algn="r"><ns4:buNone/><ns4:defRPr sz="1000" dirty="0"><ns4:solidFill><ns4:srgbClr val="94A3B8"/></ns4:solidFill><ns4:latin typeface="Calibri"/><ns4:ea typeface="Calibri"/></ns4:defRPr></ns4:lvl1pPr><ns4:lvl2pPr algn="r"><ns4:buNone/><ns4:defRPr sz="1000" dirty="0"><ns4:solidFill><ns4:srgbClr val="94A3B8"/></ns4:solidFill><ns4:latin typeface="Calibri"/><ns4:ea typeface="Calibri"/></ns4:defRPr></ns4:lvl2pPr><ns4:lvl3pPr algn="r"><ns4:buNone/><ns4:defRPr sz="1000" dirty="0"><ns4:solidFill><ns4:srgbClr val="94A3B8"/></ns4:solidFill><ns4:latin typeface="Calibri"/><ns4:ea typeface="Calibri"/></ns4:defRPr></ns4:lvl3pPr><ns4:lvl4pPr algn="r"><ns4:buNone/><ns4:defRPr sz="1000" dirty="0"><ns4:solidFill><ns4:srgbClr val="94A3B8"/></ns4:solidFill><ns4:latin typeface="Calibri"/><ns4:ea typeface="Calibri"/></ns4:defRPr></ns4:lvl4pPr><ns4:lvl5pPr algn="r"><ns4:buNone/><ns4:defRPr sz="1000" dirty="0"><ns4:solidFill><ns4:srgbClr val="94A3B8"/></ns4:solidFill><ns4:latin typeface="Calibri"/><ns4:ea typeface="Calibri"/></ns4:defRPr></ns4:lvl5pPr><ns4:lvl6pPr algn="r"><ns4:buNone/><ns4:defRPr sz="1000" dirty="0"><ns4:solidFill><ns4:srgbClr val="94A3B8"/></ns4:solidFill><ns4:latin typeface="Calibri"/><ns4:ea typeface="Calibri"/></ns4:defRPr></ns4:lvl6pPr><ns4:lvl7pPr algn="r"><ns4:buNone/><ns4:defRPr sz="1000" dirty="0"><ns4:solidFill><ns4:srgbClr val="94A3B8"/></ns4:solidFill><ns4:latin typeface="Calibri"/><ns4:ea typeface="Calibri"/></ns4:defRPr></ns4:lvl7pPr><ns4:lvl8pPr algn="r"><ns4:buNone/><ns4:defRPr sz="1000" dirty="0"><ns4:solidFill><ns4:srgbClr val="94A3B8"/></ns4:solidFill><ns4:latin typeface="Calibri"/><ns4:ea typeface="Calibri"/></ns4:defRPr></ns4:lvl8pPr><ns4:lvl9pPr algn="r"><ns4:buNone/><ns4:defRPr sz="1000" dirty="0"><ns4:solidFill><ns4:srgbClr val="94A3B8"/></ns4:solidFill><ns4:latin typeface="Calibri"/><ns4:ea typeface="Calibri"/></ns4:defRPr></ns4:lvl9pPr></ns4:lstStyle><ns5:p xmlns:ns5="http://schemas.openxmlformats.org/drawingml/2006/main"><ns5:pPr algn="r"><ns5:buNone/></ns5:pPr><ns5:r><ns5:rPr lang="ja-JP"/><ns5:t>&lt;#&gt;</ns5:t></ns5:r></ns5:p></ns0:txBody></ns0:sp></ns0:spTree></ns0:cSld><ns0:clrMapOvr/></ns0:sldLayout>
+<ns0:sldLayout xmlns:ns0="http://schemas.openxmlformats.org/presentationml/2006/main" type="blank" preserve="1"><ns0:cSld name="KPI.4Value.Grid"><ns0:spTree><ns0:nvGrpSpPr><ns0:cNvPr id="1" name=""/><ns0:cNvGrpSpPr/><ns0:nvPr/></ns0:nvGrpSpPr><ns0:grpSpPr><ns1:xfrm xmlns:ns1="http://schemas.openxmlformats.org/drawingml/2006/main"><ns1:off x="0" y="0"/><ns1:ext cx="0" cy="0"/><ns1:chOff x="0" y="0"/><ns1:chExt cx="0" cy="0"/></ns1:xfrm></ns0:grpSpPr><ns0:sp><ns0:nvSpPr><ns0:cNvPr id="2" name="HeaderBar"/><ns0:cNvSpPr><ns1:spLocks xmlns:ns1="http://schemas.openxmlformats.org/drawingml/2006/main" noGrp="1" noSelect="0" noRot="1" noMove="1"/></ns0:cNvSpPr><ns0:nvPr/></ns0:nvSpPr><ns0:spPr><ns2:xfrm xmlns:ns2="http://schemas.openxmlformats.org/drawingml/2006/main"><ns2:off x="0" y="0"/><ns2:ext cx="12192000" cy="1051560"/></ns2:xfrm><ns3:prstGeom xmlns:ns3="http://schemas.openxmlformats.org/drawingml/2006/main" prst="rect"/><ns4:solidFill xmlns:ns4="http://schemas.openxmlformats.org/drawingml/2006/main"><ns4:srgbClr val="1E2761"/></ns4:solidFill><ns5:ln xmlns:ns5="http://schemas.openxmlformats.org/drawingml/2006/main"><ns5:noFill/></ns5:ln></ns0:spPr></ns0:sp><ns0:sp><ns0:nvSpPr><ns0:cNvPr id="10" name="SlideTitle.Header"/><ns0:cNvSpPr><ns1:spLocks xmlns:ns1="http://schemas.openxmlformats.org/drawingml/2006/main" noGrp="1"/></ns0:cNvSpPr><ns0:nvPr><ns0:ph idx="15" type="body"/></ns0:nvPr></ns0:nvSpPr><ns0:spPr><ns2:xfrm xmlns:ns2="http://schemas.openxmlformats.org/drawingml/2006/main"><ns2:off x="731520" y="91440"/><ns2:ext cx="9144000" cy="475488"/></ns2:xfrm></ns0:spPr><ns0:txBody><ns3:bodyPr xmlns:ns3="http://schemas.openxmlformats.org/drawingml/2006/main" wrap="square" anchor="t" anchorCtr="0"/><ns4:lstStyle><ns4:defPPr><ns4:defRPr sz="2800" b="1"><ns4:solidFill><ns4:srgbClr val="FFFFFF"/></ns4:solidFill></ns4:defRPr></ns4:defPPr></ns4:lstStyle><ns4:defPPr algn="l"><ns4:buNone/><ns4:defRPr sz="2800" dirty="0" b="1"><ns4:solidFill><ns4:srgbClr val="FFFFFF"/></ns4:solidFill><ns4:latin typeface="Georgia"/><ns4:ea typeface="Georgia"/></ns4:defRPr></ns4:defPPr><ns4:lvl1pPr algn="l"><ns4:buNone/><ns4:defRPr sz="2800" dirty="0" b="1"><ns4:solidFill><ns4:srgbClr val="FFFFFF"/></ns4:solidFill><ns4:latin typeface="Georgia"/><ns4:ea typeface="Georgia"/></ns4:defRPr></ns4:lvl1pPr><ns4:lvl2pPr algn="l"><ns4:buNone/><ns4:defRPr sz="2800" dirty="0" b="1"><ns4:solidFill><ns4:srgbClr val="FFFFFF"/></ns4:solidFill><ns4:latin typeface="Georgia"/><ns4:ea typeface="Georgia"/></ns4:defRPr></ns4:lvl2pPr><ns4:lvl3pPr algn="l"><ns4:buNone/><ns4:defRPr sz="2800" dirty="0" b="1"><ns4:solidFill><ns4:srgbClr val="FFFFFF"/></ns4:solidFill><ns4:latin typeface="Georgia"/><ns4:ea typeface="Georgia"/></ns4:defRPr></ns4:lvl3pPr><ns4:lvl4pPr algn="l"><ns4:buNone/><ns4:defRPr sz="2800" dirty="0" b="1"><ns4:solidFill><ns4:srgbClr val="FFFFFF"/></ns4:solidFill><ns4:latin typeface="Georgia"/><ns4:ea typeface="Georgia"/></ns4:defRPr></ns4:lvl4pPr><ns4:lvl5pPr algn="l"><ns4:buNone/><ns4:defRPr sz="2800" dirty="0" b="1"><ns4:solidFill><ns4:srgbClr val="FFFFFF"/></ns4:solidFill><ns4:latin typeface="Georgia"/><ns4:ea typeface="Georgia"/></ns4:defRPr></ns4:lvl5pPr><ns4:lvl6pPr algn="l"><ns4:buNone/><ns4:defRPr sz="2800" dirty="0" b="1"><ns4:solidFill><ns4:srgbClr val="FFFFFF"/></ns4:solidFill><ns4:latin typeface="Georgia"/><ns4:ea typeface="Georgia"/></ns4:defRPr></ns4:lvl6pPr><ns4:lvl7pPr algn="l"><ns4:buNone/><ns4:defRPr sz="2800" dirty="0" b="1"><ns4:solidFill><ns4:srgbClr val="FFFFFF"/></ns4:solidFill><ns4:latin typeface="Georgia"/><ns4:ea typeface="Georgia"/></ns4:defRPr></ns4:lvl7pPr><ns4:lvl8pPr algn="l"><ns4:buNone/><ns4:defRPr sz="2800" dirty="0" b="1"><ns4:solidFill><ns4:srgbClr val="FFFFFF"/></ns4:solidFill><ns4:latin typeface="Georgia"/><ns4:ea typeface="Georgia"/></ns4:defRPr></ns4:lvl8pPr><ns4:lvl9pPr algn="l"><ns4:buNone/><ns4:defRPr sz="2800" dirty="0" b="1"><ns4:solidFill><ns4:srgbClr val="FFFFFF"/></ns4:solidFill><ns4:latin typeface="Georgia"/><ns4:ea typeface="Georgia"/></ns4:defRPr></ns4:lvl9pPr></ns4:lstStyle/><ns5:p xmlns:ns5="http://schemas.openxmlformats.org/drawingml/2006/main"><ns5:pPr algn="l"><ns5:buNone/></ns5:pPr><ns5:r><ns5:rPr lang="ja-JP"/><ns5:t>サブタイトル</ns5:t></ns5:r></ns5:p></ns0:txBody></ns0:sp><ns0:sp><ns0:nvSpPr><ns0:cNvPr id="5" name="TL"/><ns0:cNvSpPr><ns1:spLocks xmlns:ns1="http://schemas.openxmlformats.org/drawingml/2006/main" noGrp="1" noSelect="0" noRot="1" noMove="1"/></ns0:cNvSpPr><ns0:nvPr/></ns0:nvSpPr><ns0:spPr><ns2:xfrm xmlns:ns2="http://schemas.openxmlformats.org/drawingml/2006/main"><ns2:off x="457200" y="1280160"/><ns2:ext cx="5303520" cy="2286000"/></ns2:xfrm><ns3:prstGeom xmlns:ns3="http://schemas.openxmlformats.org/drawingml/2006/main" prst="roundRect"><ns3:avLst><ns3:gd name="adj" fmla="val 8000"/></ns3:avLst></ns3:prstGeom><ns4:solidFill xmlns:ns4="http://schemas.openxmlformats.org/drawingml/2006/main"><ns4:srgbClr val="EDF0F7"/></ns4:solidFill><ns5:ln xmlns:ns5="http://schemas.openxmlformats.org/drawingml/2006/main"><ns5:noFill/></ns5:ln></ns0:spPr></ns0:sp><ns0:sp><ns0:nvSpPr><ns0:cNvPr id="6" name="TR"/><ns0:cNvSpPr><ns1:spLocks xmlns:ns1="http://schemas.openxmlformats.org/drawingml/2006/main" noGrp="1" noSelect="0" noRot="1" noMove="1"/></ns0:cNvSpPr><ns0:nvPr/></ns0:nvSpPr><ns0:spPr><ns2:xfrm xmlns:ns2="http://schemas.openxmlformats.org/drawingml/2006/main"><ns2:off x="6126480" y="1280160"/><ns2:ext cx="5394960" cy="2286000"/></ns2:xfrm><ns3:prstGeom xmlns:ns3="http://schemas.openxmlformats.org/drawingml/2006/main" prst="roundRect"><ns3:avLst><ns3:gd name="adj" fmla="val 8000"/></ns3:avLst></ns3:prstGeom><ns4:solidFill xmlns:ns4="http://schemas.openxmlformats.org/drawingml/2006/main"><ns4:srgbClr val="EDF0F7"/></ns4:solidFill><ns5:ln xmlns:ns5="http://schemas.openxmlformats.org/drawingml/2006/main"><ns5:noFill/></ns5:ln></ns0:spPr></ns0:sp><ns0:sp><ns0:nvSpPr><ns0:cNvPr id="7" name="BL"/><ns0:cNvSpPr><ns1:spLocks xmlns:ns1="http://schemas.openxmlformats.org/drawingml/2006/main" noGrp="1" noSelect="0" noRot="1" noMove="1"/></ns0:cNvSpPr><ns0:nvPr/></ns0:nvSpPr><ns0:spPr><ns2:xfrm xmlns:ns2="http://schemas.openxmlformats.org/drawingml/2006/main"><ns2:off x="457200" y="3840480"/><ns2:ext cx="5303520" cy="2286000"/></ns2:xfrm><ns3:prstGeom xmlns:ns3="http://schemas.openxmlformats.org/drawingml/2006/main" prst="roundRect"><ns3:avLst><ns3:gd name="adj" fmla="val 8000"/></ns3:avLst></ns3:prstGeom><ns4:solidFill xmlns:ns4="http://schemas.openxmlformats.org/drawingml/2006/main"><ns4:srgbClr val="EDF0F7"/></ns4:solidFill><ns5:ln xmlns:ns5="http://schemas.openxmlformats.org/drawingml/2006/main"><ns5:noFill/></ns5:ln></ns0:spPr></ns0:sp><ns0:sp><ns0:nvSpPr><ns0:cNvPr id="8" name="BR"/><ns0:cNvSpPr><ns1:spLocks xmlns:ns1="http://schemas.openxmlformats.org/drawingml/2006/main" noGrp="1" noSelect="0" noRot="1" noMove="1"/></ns0:cNvSpPr><ns0:nvPr/></ns0:nvSpPr><ns0:spPr><ns2:xfrm xmlns:ns2="http://schemas.openxmlformats.org/drawingml/2006/main"><ns2:off x="6126480" y="3840480"/><ns2:ext cx="5394960" cy="2286000"/></ns2:xfrm><ns3:prstGeom xmlns:ns3="http://schemas.openxmlformats.org/drawingml/2006/main" prst="roundRect"><ns3:avLst><ns3:gd name="adj" fmla="val 8000"/></ns3:avLst></ns3:prstGeom><ns4:solidFill xmlns:ns4="http://schemas.openxmlformats.org/drawingml/2006/main"><ns4:srgbClr val="EDF0F7"/></ns4:solidFill><ns5:ln xmlns:ns5="http://schemas.openxmlformats.org/drawingml/2006/main"><ns5:noFill/></ns5:ln></ns0:spPr></ns0:sp><ns0:sp><ns0:nvSpPr><ns0:cNvPr id="9" name="A1"/><ns0:cNvSpPr><ns1:spLocks xmlns:ns1="http://schemas.openxmlformats.org/drawingml/2006/main" noGrp="1" noSelect="0" noRot="1" noMove="1"/></ns0:cNvSpPr><ns0:nvPr/></ns0:nvSpPr><ns0:spPr><ns2:xfrm xmlns:ns2="http://schemas.openxmlformats.org/drawingml/2006/main"><ns2:off x="457200" y="1280160"/><ns2:ext cx="54864" cy="2286000"/></ns2:xfrm><ns3:prstGeom xmlns:ns3="http://schemas.openxmlformats.org/drawingml/2006/main" prst="rect"/><ns4:solidFill xmlns:ns4="http://schemas.openxmlformats.org/drawingml/2006/main"><ns4:srgbClr val="3B82F6"/></ns4:solidFill><ns5:ln xmlns:ns5="http://schemas.openxmlformats.org/drawingml/2006/main"><ns5:noFill/></ns5:ln></ns0:spPr></ns0:sp><ns0:sp><ns0:nvSpPr><ns0:cNvPr id="10" name="A2"/><ns0:cNvSpPr><ns1:spLocks xmlns:ns1="http://schemas.openxmlformats.org/drawingml/2006/main" noGrp="1" noSelect="0" noRot="1" noMove="1"/></ns0:cNvSpPr><ns0:nvPr/></ns0:nvSpPr><ns0:spPr><ns2:xfrm xmlns:ns2="http://schemas.openxmlformats.org/drawingml/2006/main"><ns2:off x="6126480" y="1280160"/><ns2:ext cx="54864" cy="2286000"/></ns2:xfrm><ns3:prstGeom xmlns:ns3="http://schemas.openxmlformats.org/drawingml/2006/main" prst="rect"/><ns4:solidFill xmlns:ns4="http://schemas.openxmlformats.org/drawingml/2006/main"><ns4:srgbClr val="06B6D4"/></ns4:solidFill><ns5:ln xmlns:ns5="http://schemas.openxmlformats.org/drawingml/2006/main"><ns5:noFill/></ns5:ln></ns0:spPr></ns0:sp><ns0:sp><ns0:nvSpPr><ns0:cNvPr id="11" name="A3"/><ns0:cNvSpPr><ns1:spLocks xmlns:ns1="http://schemas.openxmlformats.org/drawingml/2006/main" noGrp="1" noSelect="0" noRot="1" noMove="1"/></ns0:cNvSpPr><ns0:nvPr/></ns0:nvSpPr><ns0:spPr><ns2:xfrm xmlns:ns2="http://schemas.openxmlformats.org/drawingml/2006/main"><ns2:off x="457200" y="3840480"/><ns2:ext cx="54864" cy="2286000"/></ns2:xfrm><ns3:prstGeom xmlns:ns3="http://schemas.openxmlformats.org/drawingml/2006/main" prst="rect"/><ns4:solidFill xmlns:ns4="http://schemas.openxmlformats.org/drawingml/2006/main"><ns4:srgbClr val="F59E0B"/></ns4:solidFill><ns5:ln xmlns:ns5="http://schemas.openxmlformats.org/drawingml/2006/main"><ns5:noFill/></ns5:ln></ns0:spPr></ns0:sp><ns0:sp><ns0:nvSpPr><ns0:cNvPr id="12" name="A4"/><ns0:cNvSpPr><ns1:spLocks xmlns:ns1="http://schemas.openxmlformats.org/drawingml/2006/main" noGrp="1" noSelect="0" noRot="1" noMove="1"/></ns0:cNvSpPr><ns0:nvPr/></ns0:nvSpPr><ns0:spPr><ns2:xfrm xmlns:ns2="http://schemas.openxmlformats.org/drawingml/2006/main"><ns2:off x="6126480" y="3840480"/><ns2:ext cx="54864" cy="2286000"/></ns2:xfrm><ns3:prstGeom xmlns:ns3="http://schemas.openxmlformats.org/drawingml/2006/main" prst="rect"/><ns4:solidFill xmlns:ns4="http://schemas.openxmlformats.org/drawingml/2006/main"><ns4:srgbClr val="2563EB"/></ns4:solidFill><ns5:ln xmlns:ns5="http://schemas.openxmlformats.org/drawingml/2006/main"><ns5:noFill/></ns5:ln></ns0:spPr></ns0:sp><ns0:sp><ns0:nvSpPr><ns0:cNvPr id="20" name="Value1.TopLeft"/><ns0:cNvSpPr><ns1:spLocks xmlns:ns1="http://schemas.openxmlformats.org/drawingml/2006/main" noGrp="1"/></ns0:cNvSpPr><ns0:nvPr><ns0:ph idx="1" type="body"/></ns0:nvPr></ns0:nvSpPr><ns0:spPr><ns2:xfrm xmlns:ns2="http://schemas.openxmlformats.org/drawingml/2006/main"><ns2:off x="914400" y="1463040"/><ns2:ext cx="4389120" cy="1828800"/></ns2:xfrm></ns0:spPr><ns0:txBody><ns3:bodyPr xmlns:ns3="http://schemas.openxmlformats.org/drawingml/2006/main" wrap="square" anchor="t" anchorCtr="0"/><ns4:lstStyle/><ns4:defPPr algn="l"><ns4:buNone/><ns4:defRPr sz="1400" dirty="0"><ns4:solidFill><ns4:srgbClr val="1E293B"/></ns4:solidFill><ns4:latin typeface="Calibri"/><ns4:ea typeface="Calibri"/></ns4:defRPr></ns4:defPPr><ns4:lvl1pPr algn="l"><ns4:buNone/><ns4:defRPr sz="1400" dirty="0"><ns4:solidFill><ns4:srgbClr val="1E293B"/></ns4:solidFill><ns4:latin typeface="Calibri"/><ns4:ea typeface="Calibri"/></ns4:defRPr></ns4:lvl1pPr><ns4:lvl2pPr algn="l"><ns4:buNone/><ns4:defRPr sz="1400" dirty="0"><ns4:solidFill><ns4:srgbClr val="1E293B"/></ns4:solidFill><ns4:latin typeface="Calibri"/><ns4:ea typeface="Calibri"/></ns4:defRPr></ns4:lvl2pPr><ns4:lvl3pPr algn="l"><ns4:buNone/><ns4:defRPr sz="1400" dirty="0"><ns4:solidFill><ns4:srgbClr val="1E293B"/></ns4:solidFill><ns4:latin typeface="Calibri"/><ns4:ea typeface="Calibri"/></ns4:defRPr></ns4:lvl3pPr><ns4:lvl4pPr algn="l"><ns4:buNone/><ns4:defRPr sz="1400" dirty="0"><ns4:solidFill><ns4:srgbClr val="1E293B"/></ns4:solidFill><ns4:latin typeface="Calibri"/><ns4:ea typeface="Calibri"/></ns4:defRPr></ns4:lvl4pPr><ns4:lvl5pPr algn="l"><ns4:buNone/><ns4:defRPr sz="1400" dirty="0"><ns4:solidFill><ns4:srgbClr val="1E293B"/></ns4:solidFill><ns4:latin typeface="Calibri"/><ns4:ea typeface="Calibri"/></ns4:defRPr></ns4:lvl5pPr><ns4:lvl6pPr algn="l"><ns4:buNone/><ns4:defRPr sz="1400" dirty="0"><ns4:solidFill><ns4:srgbClr val="1E293B"/></ns4:solidFill><ns4:latin typeface="Calibri"/><ns4:ea typeface="Calibri"/></ns4:defRPr></ns4:lvl6pPr><ns4:lvl7pPr algn="l"><ns4:buNone/><ns4:defRPr sz="1400" dirty="0"><ns4:solidFill><ns4:srgbClr val="1E293B"/></ns4:solidFill><ns4:latin typeface="Calibri"/><ns4:ea typeface="Calibri"/></ns4:defRPr></ns4:lvl7pPr><ns4:lvl8pPr algn="l"><ns4:buNone/><ns4:defRPr sz="1400" dirty="0"><ns4:solidFill><ns4:srgbClr val="1E293B"/></ns4:solidFill><ns4:latin typeface="Calibri"/><ns4:ea typeface="Calibri"/></ns4:defRPr></ns4:lvl8pPr><ns4:lvl9pPr algn="l"><ns4:buNone/><ns4:defRPr sz="1400" dirty="0"><ns4:solidFill><ns4:srgbClr val="1E293B"/></ns4:solidFill><ns4:latin typeface="Calibri"/><ns4:ea typeface="Calibri"/></ns4:defRPr></ns4:lvl9pPr></ns4:lstStyle/><ns5:p xmlns:ns5="http://schemas.openxmlformats.org/drawingml/2006/main"><ns5:pPr algn="l"><ns5:buNone/></ns5:pPr><ns5:r><ns5:rPr lang="ja-JP"/><ns5:t>指標 2
+値・説明</ns5:t></ns5:r></ns5:p></ns0:txBody></ns0:sp><ns0:sp><ns0:nvSpPr><ns0:cNvPr id="22" name="Value3.BottomLeft"/><ns0:cNvSpPr><ns1:spLocks xmlns:ns1="http://schemas.openxmlformats.org/drawingml/2006/main" noGrp="1"/></ns0:cNvSpPr><ns0:nvPr><ns0:ph idx="3" type="body"/></ns0:nvPr></ns0:nvSpPr><ns0:spPr><ns2:xfrm xmlns:ns2="http://schemas.openxmlformats.org/drawingml/2006/main"><ns2:off x="914400" y="4023360"/><ns2:ext cx="4389120" cy="1828800"/></ns2:xfrm></ns0:spPr><ns0:txBody><ns3:bodyPr xmlns:ns3="http://schemas.openxmlformats.org/drawingml/2006/main" wrap="square" anchor="t" anchorCtr="0"/><ns4:lstStyle/><ns4:defPPr algn="l"><ns4:buNone/><ns4:defRPr sz="1400" dirty="0"><ns4:solidFill><ns4:srgbClr val="1E293B"/></ns4:solidFill><ns4:latin typeface="Calibri"/><ns4:ea typeface="Calibri"/></ns4:defRPr></ns4:defPPr><ns4:lvl1pPr algn="l"><ns4:buNone/><ns4:defRPr sz="1400" dirty="0"><ns4:solidFill><ns4:srgbClr val="1E293B"/></ns4:solidFill><ns4:latin typeface="Calibri"/><ns4:ea typeface="Calibri"/></ns4:defRPr></ns4:lvl1pPr><ns4:lvl2pPr algn="l"><ns4:buNone/><ns4:defRPr sz="1400" dirty="0"><ns4:solidFill><ns4:srgbClr val="1E293B"/></ns4:solidFill><ns4:latin typeface="Calibri"/><ns4:ea typeface="Calibri"/></ns4:defRPr></ns4:lvl2pPr><ns4:lvl3pPr algn="l"><ns4:buNone/><ns4:defRPr sz="1400" dirty="0"><ns4:solidFill><ns4:srgbClr val="1E293B"/></ns4:solidFill><ns4:latin typeface="Calibri"/><ns4:ea typeface="Calibri"/></ns4:defRPr></ns4:lvl3pPr><ns4:lvl4pPr algn="l"><ns4:buNone/><ns4:defRPr sz="1400" dirty="0"><ns4:solidFill><ns4:srgbClr val="1E293B"/></ns4:solidFill><ns4:latin typeface="Calibri"/><ns4:ea typeface="Calibri"/></ns4:defRPr></ns4:lvl4pPr><ns4:lvl5pPr algn="l"><ns4:buNone/><ns4:defRPr sz="1400" dirty="0"><ns4:solidFill><ns4:srgbClr val="1E293B"/></ns4:solidFill><ns4:latin typeface="Calibri"/><ns4:ea typeface="Calibri"/></ns4:defRPr></ns4:lvl5pPr><ns4:lvl6pPr algn="l"><ns4:buNone/><ns4:defRPr sz="1400" dirty="0"><ns4:solidFill><ns4:srgbClr val="1E293B"/></ns4:solidFill><ns4:latin typeface="Calibri"/><ns4:ea typeface="Calibri"/></ns4:defRPr></ns4:lvl6pPr><ns4:lvl7pPr algn="l"><ns4:buNone/><ns4:defRPr sz="1400" dirty="0"><ns4:solidFill><ns4:srgbClr val="1E293B"/></ns4:solidFill><ns4:latin typeface="Calibri"/><ns4:ea typeface="Calibri"/></ns4:defRPr></ns4:lvl7pPr><ns4:lvl8pPr algn="l"><ns4:buNone/><ns4:defRPr sz="1400" dirty="0"><ns4:solidFill><ns4:srgbClr val="1E293B"/></ns4:solidFill><ns4:latin typeface="Calibri"/><ns4:ea typeface="Calibri"/></ns4:defRPr></ns4:lvl8pPr><ns4:lvl9pPr algn="l"><ns4:buNone/><ns4:defRPr sz="1400" dirty="0"><ns4:solidFill><ns4:srgbClr val="1E293B"/></ns4:solidFill><ns4:latin typeface="Calibri"/><ns4:ea typeface="Calibri"/></ns4:defRPr></ns4:lvl9pPr></ns4:lstStyle/><ns5:p xmlns:ns5="http://schemas.openxmlformats.org/drawingml/2006/main"><ns5:pPr algn="l"><ns5:buNone/></ns5:pPr><ns5:r><ns5:rPr lang="ja-JP"/><ns5:t>指標 4
+値・説明</ns5:t></ns5:r></ns5:p></ns0:txBody></ns0:sp><ns0:sp><ns0:nvSpPr><ns0:cNvPr id="31" name="SlideNum.Footer"/><ns0:cNvSpPr><ns1:spLocks xmlns:ns1="http://schemas.openxmlformats.org/drawingml/2006/main" noGrp="1"/></ns0:cNvSpPr><ns0:nvPr><ns0:ph idx="50" type="sldNum"/></ns0:nvPr></ns0:nvSpPr><ns0:spPr><ns2:xfrm xmlns:ns2="http://schemas.openxmlformats.org/drawingml/2006/main"><ns2:off x="10972800" y="6446520"/><ns2:ext cx="1097280" cy="274320"/></ns2:xfrm></ns0:spPr><ns0:txBody><ns3:bodyPr xmlns:ns3="http://schemas.openxmlformats.org/drawingml/2006/main" wrap="square" anchor="t" anchorCtr="0"/><ns4:lstStyle><ns4:defPPr algn="r"><ns4:defRPr sz="1000"><ns4:solidFill><ns4:srgbClr val="94A3B8"/></ns4:solidFill></ns4:defRPr></ns4:defPPr></ns4:lstStyle><ns4:defPPr algn="r"><ns4:buNone/><ns4:defRPr sz="1000" dirty="0"><ns4:solidFill><ns4:srgbClr val="94A3B8"/></ns4:solidFill><ns4:latin typeface="Calibri"/><ns4:ea typeface="Calibri"/></ns4:defRPr></ns4:defPPr><ns4:lvl1pPr algn="r"><ns4:buNone/><ns4:defRPr sz="1000" dirty="0"><ns4:solidFill><ns4:srgbClr val="94A3B8"/></ns4:solidFill><ns4:latin typeface="Calibri"/><ns4:ea typeface="Calibri"/></ns4:defRPr></ns4:lvl1pPr><ns4:lvl2pPr algn="r"><ns4:buNone/><ns4:defRPr sz="1000" dirty="0"><ns4:solidFill><ns4:srgbClr val="94A3B8"/></ns4:solidFill><ns4:latin typeface="Calibri"/><ns4:ea typeface="Calibri"/></ns4:defRPr></ns4:lvl2pPr><ns4:lvl3pPr algn="r"><ns4:buNone/><ns4:defRPr sz="1000" dirty="0"><ns4:solidFill><ns4:srgbClr val="94A3B8"/></ns4:solidFill><ns4:latin typeface="Calibri"/><ns4:ea typeface="Calibri"/></ns4:defRPr></ns4:lvl3pPr><ns4:lvl4pPr algn="r"><ns4:buNone/><ns4:defRPr sz="1000" dirty="0"><ns4:solidFill><ns4:srgbClr val="94A3B8"/></ns4:solidFill><ns4:latin typeface="Calibri"/><ns4:ea typeface="Calibri"/></ns4:defRPr></ns4:lvl4pPr><ns4:lvl5pPr algn="r"><ns4:buNone/><ns4:defRPr sz="1000" dirty="0"><ns4:solidFill><ns4:srgbClr val="94A3B8"/></ns4:solidFill><ns4:latin typeface="Calibri"/><ns4:ea typeface="Calibri"/></ns4:defRPr></ns4:lvl5pPr><ns4:lvl6pPr algn="r"><ns4:buNone/><ns4:defRPr sz="1000" dirty="0"><ns4:solidFill><ns4:srgbClr val="94A3B8"/></ns4:solidFill><ns4:latin typeface="Calibri"/><ns4:ea typeface="Calibri"/></ns4:defRPr></ns4:lvl6pPr><ns4:lvl7pPr algn="r"><ns4:buNone/><ns4:defRPr sz="1000" dirty="0"><ns4:solidFill><ns4:srgbClr val="94A3B8"/></ns4:solidFill><ns4:latin typeface="Calibri"/><ns4:ea typeface="Calibri"/></ns4:defRPr></ns4:lvl7pPr><ns4:lvl8pPr algn="r"><ns4:buNone/><ns4:defRPr sz="1000" dirty="0"><ns4:solidFill><ns4:srgbClr val="94A3B8"/></ns4:solidFill><ns4:latin typeface="Calibri"/><ns4:ea typeface="Calibri"/></ns4:defRPr></ns4:lvl8pPr><ns4:lvl9pPr algn="r"><ns4:buNone/><ns4:defRPr sz="1000" dirty="0"><ns4:solidFill><ns4:srgbClr val="94A3B8"/></ns4:solidFill><ns4:latin typeface="Calibri"/><ns4:ea typeface="Calibri"/></ns4:defRPr></ns4:lvl9pPr></ns4:lstStyle><ns5:p xmlns:ns5="http://schemas.openxmlformats.org/drawingml/2006/main"><ns5:pPr algn="r"><ns5:buNone/></ns5:pPr><ns5:r><ns5:rPr lang="ja-JP"/><ns5:t>&lt;#&gt;</ns5:t></ns5:r></ns5:p></ns0:txBody></ns0:sp></ns0:spTree></ns0:cSld><ns0:clrMapOvr/></ns0:sldLayout>
 </file>
 
 <file path=ppt/slideLayouts/slideLayout18.xml><?xml version='1.0' encoding='UTF-8' standalone='yes'?>
-<ns0:sldLayout xmlns:ns0="http://schemas.openxmlformats.org/presentationml/2006/main" type="blank" preserve="1"><ns0:cSld name="Chart.1Chart.Single"><ns0:spTree><ns0:nvGrpSpPr><ns0:cNvPr id="1" name=""/><ns0:cNvGrpSpPr/><ns0:nvPr/></ns0:nvGrpSpPr><ns0:grpSpPr><ns1:xfrm xmlns:ns1="http://schemas.openxmlformats.org/drawingml/2006/main"><ns1:off x="0" y="0"/><ns1:ext cx="0" cy="0"/><ns1:chOff x="0" y="0"/><ns1:chExt cx="0" cy="0"/></ns1:xfrm></ns0:grpSpPr><ns0:sp><ns0:nvSpPr><ns0:cNvPr id="2" name="HeaderBar"/><ns0:cNvSpPr><ns1:spLocks xmlns:ns1="http://schemas.openxmlformats.org/drawingml/2006/main" noGrp="1" noSelect="0" noRot="1" noMove="1"/></ns0:cNvSpPr><ns0:nvPr/></ns0:nvSpPr><ns0:spPr><ns2:xfrm xmlns:ns2="http://schemas.openxmlformats.org/drawingml/2006/main"><ns2:off x="0" y="0"/><ns2:ext cx="12192000" cy="1051560"/></ns2:xfrm><ns3:prstGeom xmlns:ns3="http://schemas.openxmlformats.org/drawingml/2006/main" prst="rect"/><ns4:solidFill xmlns:ns4="http://schemas.openxmlformats.org/drawingml/2006/main"><ns4:srgbClr val="1E2761"/></ns4:solidFill><ns5:ln xmlns:ns5="http://schemas.openxmlformats.org/drawingml/2006/main"><ns5:noFill/></ns5:ln></ns0:spPr></ns0:sp><ns0:sp><ns0:nvSpPr><ns0:cNvPr id="10" name="SlideTitle.Header"/><ns0:cNvSpPr><ns1:spLocks xmlns:ns1="http://schemas.openxmlformats.org/drawingml/2006/main" noGrp="1"/></ns0:cNvSpPr><ns0:nvPr><ns0:ph idx="15" type="body"/></ns0:nvPr></ns0:nvSpPr><ns0:spPr><ns2:xfrm xmlns:ns2="http://schemas.openxmlformats.org/drawingml/2006/main"><ns2:off x="731520" y="91440"/><ns2:ext cx="9144000" cy="475488"/></ns2:xfrm></ns0:spPr><ns0:txBody><ns3:bodyPr xmlns:ns3="http://schemas.openxmlformats.org/drawingml/2006/main" wrap="square" anchor="t" anchorCtr="0"/><ns4:lstStyle xmlns:ns4="http://schemas.openxmlformats.org/drawingml/2006/main"><ns4:defPPr algn="l"><ns4:buNone/><ns4:defRPr sz="2800" dirty="0" b="1"><ns4:solidFill><ns4:srgbClr val="FFFFFF"/></ns4:solidFill><ns4:latin typeface="Georgia"/><ns4:ea typeface="Georgia"/></ns4:defRPr></ns4:defPPr><ns4:lvl1pPr algn="l"><ns4:buNone/><ns4:defRPr sz="2800" dirty="0" b="1"><ns4:solidFill><ns4:srgbClr val="FFFFFF"/></ns4:solidFill><ns4:latin typeface="Georgia"/><ns4:ea typeface="Georgia"/></ns4:defRPr></ns4:lvl1pPr><ns4:lvl2pPr algn="l"><ns4:buNone/><ns4:defRPr sz="2800" dirty="0" b="1"><ns4:solidFill><ns4:srgbClr val="FFFFFF"/></ns4:solidFill><ns4:latin typeface="Georgia"/><ns4:ea typeface="Georgia"/></ns4:defRPr></ns4:lvl2pPr><ns4:lvl3pPr algn="l"><ns4:buNone/><ns4:defRPr sz="2800" dirty="0" b="1"><ns4:solidFill><ns4:srgbClr val="FFFFFF"/></ns4:solidFill><ns4:latin typeface="Georgia"/><ns4:ea typeface="Georgia"/></ns4:defRPr></ns4:lvl3pPr><ns4:lvl4pPr algn="l"><ns4:buNone/><ns4:defRPr sz="2800" dirty="0" b="1"><ns4:solidFill><ns4:srgbClr val="FFFFFF"/></ns4:solidFill><ns4:latin typeface="Georgia"/><ns4:ea typeface="Georgia"/></ns4:defRPr></ns4:lvl4pPr><ns4:lvl5pPr algn="l"><ns4:buNone/><ns4:defRPr sz="2800" dirty="0" b="1"><ns4:solidFill><ns4:srgbClr val="FFFFFF"/></ns4:solidFill><ns4:latin typeface="Georgia"/><ns4:ea typeface="Georgia"/></ns4:defRPr></ns4:lvl5pPr><ns4:lvl6pPr algn="l"><ns4:buNone/><ns4:defRPr sz="2800" dirty="0" b="1"><ns4:solidFill><ns4:srgbClr val="FFFFFF"/></ns4:solidFill><ns4:latin typeface="Georgia"/><ns4:ea typeface="Georgia"/></ns4:defRPr></ns4:lvl6pPr><ns4:lvl7pPr algn="l"><ns4:buNone/><ns4:defRPr sz="2800" dirty="0" b="1"><ns4:solidFill><ns4:srgbClr val="FFFFFF"/></ns4:solidFill><ns4:latin typeface="Georgia"/><ns4:ea typeface="Georgia"/></ns4:defRPr></ns4:lvl7pPr><ns4:lvl8pPr algn="l"><ns4:buNone/><ns4:defRPr sz="2800" dirty="0" b="1"><ns4:solidFill><ns4:srgbClr val="FFFFFF"/></ns4:solidFill><ns4:latin typeface="Georgia"/><ns4:ea typeface="Georgia"/></ns4:defRPr></ns4:lvl8pPr><ns4:lvl9pPr algn="l"><ns4:buNone/><ns4:defRPr sz="2800" dirty="0" b="1"><ns4:solidFill><ns4:srgbClr val="FFFFFF"/></ns4:solidFill><ns4:latin typeface="Georgia"/><ns4:ea typeface="Georgia"/></ns4:defRPr></ns4:lvl9pPr></ns4:lstStyle/><ns5:p xmlns:ns5="http://schemas.openxmlformats.org/drawingml/2006/main"><ns5:pPr algn="l"><ns5:buNone/></ns5:pPr><ns5:r><ns5:rPr lang="ja-JP"/><ns5:t>サブタイトル</ns5:t></ns5:r></ns5:p></ns0:txBody></ns0:sp><ns0:sp><ns0:nvSpPr><ns0:cNvPr id="5" name="ChartArea"/><ns0:cNvSpPr><ns1:spLocks xmlns:ns1="http://schemas.openxmlformats.org/drawingml/2006/main" noGrp="1" noSelect="0" noRot="1" noMove="1"/></ns0:cNvSpPr><ns0:nvPr/></ns0:nvSpPr><ns0:spPr><ns2:xfrm xmlns:ns2="http://schemas.openxmlformats.org/drawingml/2006/main"><ns2:off x="457200" y="1280160"/><ns2:ext cx="11247120" cy="4937760"/></ns2:xfrm><ns3:prstGeom xmlns:ns3="http://schemas.openxmlformats.org/drawingml/2006/main" prst="roundRect"><ns3:avLst><ns3:gd name="adj" fmla="val 6000"/></ns3:avLst></ns3:prstGeom><ns4:solidFill xmlns:ns4="http://schemas.openxmlformats.org/drawingml/2006/main"><ns4:srgbClr val="EDF0F7"/></ns4:solidFill><ns5:ln xmlns:ns5="http://schemas.openxmlformats.org/drawingml/2006/main"><ns5:noFill/></ns5:ln></ns0:spPr></ns0:sp><ns0:sp><ns0:nvSpPr><ns0:cNvPr id="20" name="Body.Center"/><ns0:cNvSpPr><ns1:spLocks xmlns:ns1="http://schemas.openxmlformats.org/drawingml/2006/main" noGrp="1"/></ns0:cNvSpPr><ns0:nvPr><ns0:ph idx="1" type="body"/></ns0:nvPr></ns0:nvSpPr><ns0:spPr><ns2:xfrm xmlns:ns2="http://schemas.openxmlformats.org/drawingml/2006/main"><ns2:off x="731520" y="1463040"/><ns2:ext cx="10698480" cy="4572000"/></ns2:xfrm></ns0:spPr><ns0:txBody><ns3:bodyPr xmlns:ns3="http://schemas.openxmlformats.org/drawingml/2006/main" wrap="square" anchor="t" anchorCtr="0"/><ns4:lstStyle xmlns:ns4="http://schemas.openxmlformats.org/drawingml/2006/main"><ns4:defPPr algn="ctr"><ns4:buNone/><ns4:defRPr sz="1400" dirty="0"><ns4:solidFill><ns4:srgbClr val="94A3B8"/></ns4:solidFill><ns4:latin typeface="Calibri"/><ns4:ea typeface="Calibri"/></ns4:defRPr></ns4:defPPr><ns4:lvl1pPr algn="ctr"><ns4:buNone/><ns4:defRPr sz="1400" dirty="0"><ns4:solidFill><ns4:srgbClr val="94A3B8"/></ns4:solidFill><ns4:latin typeface="Calibri"/><ns4:ea typeface="Calibri"/></ns4:defRPr></ns4:lvl1pPr><ns4:lvl2pPr algn="ctr"><ns4:buNone/><ns4:defRPr sz="1400" dirty="0"><ns4:solidFill><ns4:srgbClr val="94A3B8"/></ns4:solidFill><ns4:latin typeface="Calibri"/><ns4:ea typeface="Calibri"/></ns4:defRPr></ns4:lvl2pPr><ns4:lvl3pPr algn="ctr"><ns4:buNone/><ns4:defRPr sz="1400" dirty="0"><ns4:solidFill><ns4:srgbClr val="94A3B8"/></ns4:solidFill><ns4:latin typeface="Calibri"/><ns4:ea typeface="Calibri"/></ns4:defRPr></ns4:lvl3pPr><ns4:lvl4pPr algn="ctr"><ns4:buNone/><ns4:defRPr sz="1400" dirty="0"><ns4:solidFill><ns4:srgbClr val="94A3B8"/></ns4:solidFill><ns4:latin typeface="Calibri"/><ns4:ea typeface="Calibri"/></ns4:defRPr></ns4:lvl4pPr><ns4:lvl5pPr algn="ctr"><ns4:buNone/><ns4:defRPr sz="1400" dirty="0"><ns4:solidFill><ns4:srgbClr val="94A3B8"/></ns4:solidFill><ns4:latin typeface="Calibri"/><ns4:ea typeface="Calibri"/></ns4:defRPr></ns4:lvl5pPr><ns4:lvl6pPr algn="ctr"><ns4:buNone/><ns4:defRPr sz="1400" dirty="0"><ns4:solidFill><ns4:srgbClr val="94A3B8"/></ns4:solidFill><ns4:latin typeface="Calibri"/><ns4:ea typeface="Calibri"/></ns4:defRPr></ns4:lvl6pPr><ns4:lvl7pPr algn="ctr"><ns4:buNone/><ns4:defRPr sz="1400" dirty="0"><ns4:solidFill><ns4:srgbClr val="94A3B8"/></ns4:solidFill><ns4:latin typeface="Calibri"/><ns4:ea typeface="Calibri"/></ns4:defRPr></ns4:lvl7pPr><ns4:lvl8pPr algn="ctr"><ns4:buNone/><ns4:defRPr sz="1400" dirty="0"><ns4:solidFill><ns4:srgbClr val="94A3B8"/></ns4:solidFill><ns4:latin typeface="Calibri"/><ns4:ea typeface="Calibri"/></ns4:defRPr></ns4:lvl8pPr><ns4:lvl9pPr algn="ctr"><ns4:buNone/><ns4:defRPr sz="1400" dirty="0"><ns4:solidFill><ns4:srgbClr val="94A3B8"/></ns4:solidFill><ns4:latin typeface="Calibri"/><ns4:ea typeface="Calibri"/></ns4:defRPr></ns4:lvl9pPr></ns4:lstStyle/><ns5:p xmlns:ns5="http://schemas.openxmlformats.org/drawingml/2006/main"><ns5:pPr algn="r"><ns5:buNone/></ns5:pPr><ns5:r><ns5:rPr lang="ja-JP"/><ns5:t>&lt;#&gt;</ns5:t></ns5:r></ns5:p></ns0:txBody></ns0:sp></ns0:spTree></ns0:cSld><ns0:clrMapOvr/></ns0:sldLayout>
+<ns0:sldLayout xmlns:ns0="http://schemas.openxmlformats.org/presentationml/2006/main" type="blank" preserve="1"><ns0:cSld name="Chart.1Chart.Single"><ns0:spTree><ns0:nvGrpSpPr><ns0:cNvPr id="1" name=""/><ns0:cNvGrpSpPr/><ns0:nvPr/></ns0:nvGrpSpPr><ns0:grpSpPr><ns1:xfrm xmlns:ns1="http://schemas.openxmlformats.org/drawingml/2006/main"><ns1:off x="0" y="0"/><ns1:ext cx="0" cy="0"/><ns1:chOff x="0" y="0"/><ns1:chExt cx="0" cy="0"/></ns1:xfrm></ns0:grpSpPr><ns0:sp><ns0:nvSpPr><ns0:cNvPr id="2" name="HeaderBar"/><ns0:cNvSpPr><ns1:spLocks xmlns:ns1="http://schemas.openxmlformats.org/drawingml/2006/main" noGrp="1" noSelect="0" noRot="1" noMove="1"/></ns0:cNvSpPr><ns0:nvPr/></ns0:nvSpPr><ns0:spPr><ns2:xfrm xmlns:ns2="http://schemas.openxmlformats.org/drawingml/2006/main"><ns2:off x="0" y="0"/><ns2:ext cx="12192000" cy="1051560"/></ns2:xfrm><ns3:prstGeom xmlns:ns3="http://schemas.openxmlformats.org/drawingml/2006/main" prst="rect"/><ns4:solidFill xmlns:ns4="http://schemas.openxmlformats.org/drawingml/2006/main"><ns4:srgbClr val="1E2761"/></ns4:solidFill><ns5:ln xmlns:ns5="http://schemas.openxmlformats.org/drawingml/2006/main"><ns5:noFill/></ns5:ln></ns0:spPr></ns0:sp><ns0:sp><ns0:nvSpPr><ns0:cNvPr id="10" name="SlideTitle.Header"/><ns0:cNvSpPr><ns1:spLocks xmlns:ns1="http://schemas.openxmlformats.org/drawingml/2006/main" noGrp="1"/></ns0:cNvSpPr><ns0:nvPr><ns0:ph idx="15" type="body"/></ns0:nvPr></ns0:nvSpPr><ns0:spPr><ns2:xfrm xmlns:ns2="http://schemas.openxmlformats.org/drawingml/2006/main"><ns2:off x="731520" y="91440"/><ns2:ext cx="9144000" cy="475488"/></ns2:xfrm></ns0:spPr><ns0:txBody><ns3:bodyPr xmlns:ns3="http://schemas.openxmlformats.org/drawingml/2006/main" wrap="square" anchor="t" anchorCtr="0"/><ns4:lstStyle><ns4:defPPr><ns4:defRPr sz="2800" b="1"><ns4:solidFill><ns4:srgbClr val="FFFFFF"/></ns4:solidFill></ns4:defRPr></ns4:defPPr></ns4:lstStyle><ns4:defPPr algn="l"><ns4:buNone/><ns4:defRPr sz="2800" dirty="0" b="1"><ns4:solidFill><ns4:srgbClr val="FFFFFF"/></ns4:solidFill><ns4:latin typeface="Georgia"/><ns4:ea typeface="Georgia"/></ns4:defRPr></ns4:defPPr><ns4:lvl1pPr algn="l"><ns4:buNone/><ns4:defRPr sz="2800" dirty="0" b="1"><ns4:solidFill><ns4:srgbClr val="FFFFFF"/></ns4:solidFill><ns4:latin typeface="Georgia"/><ns4:ea typeface="Georgia"/></ns4:defRPr></ns4:lvl1pPr><ns4:lvl2pPr algn="l"><ns4:buNone/><ns4:defRPr sz="2800" dirty="0" b="1"><ns4:solidFill><ns4:srgbClr val="FFFFFF"/></ns4:solidFill><ns4:latin typeface="Georgia"/><ns4:ea typeface="Georgia"/></ns4:defRPr></ns4:lvl2pPr><ns4:lvl3pPr algn="l"><ns4:buNone/><ns4:defRPr sz="2800" dirty="0" b="1"><ns4:solidFill><ns4:srgbClr val="FFFFFF"/></ns4:solidFill><ns4:latin typeface="Georgia"/><ns4:ea typeface="Georgia"/></ns4:defRPr></ns4:lvl3pPr><ns4:lvl4pPr algn="l"><ns4:buNone/><ns4:defRPr sz="2800" dirty="0" b="1"><ns4:solidFill><ns4:srgbClr val="FFFFFF"/></ns4:solidFill><ns4:latin typeface="Georgia"/><ns4:ea typeface="Georgia"/></ns4:defRPr></ns4:lvl4pPr><ns4:lvl5pPr algn="l"><ns4:buNone/><ns4:defRPr sz="2800" dirty="0" b="1"><ns4:solidFill><ns4:srgbClr val="FFFFFF"/></ns4:solidFill><ns4:latin typeface="Georgia"/><ns4:ea typeface="Georgia"/></ns4:defRPr></ns4:lvl5pPr><ns4:lvl6pPr algn="l"><ns4:buNone/><ns4:defRPr sz="2800" dirty="0" b="1"><ns4:solidFill><ns4:srgbClr val="FFFFFF"/></ns4:solidFill><ns4:latin typeface="Georgia"/><ns4:ea typeface="Georgia"/></ns4:defRPr></ns4:lvl6pPr><ns4:lvl7pPr algn="l"><ns4:buNone/><ns4:defRPr sz="2800" dirty="0" b="1"><ns4:solidFill><ns4:srgbClr val="FFFFFF"/></ns4:solidFill><ns4:latin typeface="Georgia"/><ns4:ea typeface="Georgia"/></ns4:defRPr></ns4:lvl7pPr><ns4:lvl8pPr algn="l"><ns4:buNone/><ns4:defRPr sz="2800" dirty="0" b="1"><ns4:solidFill><ns4:srgbClr val="FFFFFF"/></ns4:solidFill><ns4:latin typeface="Georgia"/><ns4:ea typeface="Georgia"/></ns4:defRPr></ns4:lvl8pPr><ns4:lvl9pPr algn="l"><ns4:buNone/><ns4:defRPr sz="2800" dirty="0" b="1"><ns4:solidFill><ns4:srgbClr val="FFFFFF"/></ns4:solidFill><ns4:latin typeface="Georgia"/><ns4:ea typeface="Georgia"/></ns4:defRPr></ns4:lvl9pPr></ns4:lstStyle/><ns5:p xmlns:ns5="http://schemas.openxmlformats.org/drawingml/2006/main"><ns5:pPr algn="l"><ns5:buNone/></ns5:pPr><ns5:r><ns5:rPr lang="ja-JP"/><ns5:t>サブタイトル</ns5:t></ns5:r></ns5:p></ns0:txBody></ns0:sp><ns0:sp><ns0:nvSpPr><ns0:cNvPr id="5" name="ChartArea"/><ns0:cNvSpPr><ns1:spLocks xmlns:ns1="http://schemas.openxmlformats.org/drawingml/2006/main" noGrp="1" noSelect="0" noRot="1" noMove="1"/></ns0:cNvSpPr><ns0:nvPr/></ns0:nvSpPr><ns0:spPr><ns2:xfrm xmlns:ns2="http://schemas.openxmlformats.org/drawingml/2006/main"><ns2:off x="457200" y="1280160"/><ns2:ext cx="11247120" cy="4937760"/></ns2:xfrm><ns3:prstGeom xmlns:ns3="http://schemas.openxmlformats.org/drawingml/2006/main" prst="roundRect"><ns3:avLst><ns3:gd name="adj" fmla="val 6000"/></ns3:avLst></ns3:prstGeom><ns4:solidFill xmlns:ns4="http://schemas.openxmlformats.org/drawingml/2006/main"><ns4:srgbClr val="EDF0F7"/></ns4:solidFill><ns5:ln xmlns:ns5="http://schemas.openxmlformats.org/drawingml/2006/main"><ns5:noFill/></ns5:ln></ns0:spPr></ns0:sp><ns0:sp><ns0:nvSpPr><ns0:cNvPr id="20" name="Body.Center"/><ns0:cNvSpPr><ns1:spLocks xmlns:ns1="http://schemas.openxmlformats.org/drawingml/2006/main" noGrp="1"/></ns0:cNvSpPr><ns0:nvPr><ns0:ph idx="1" type="body"/></ns0:nvPr></ns0:nvSpPr><ns0:spPr><ns2:xfrm xmlns:ns2="http://schemas.openxmlformats.org/drawingml/2006/main"><ns2:off x="731520" y="1463040"/><ns2:ext cx="10698480" cy="4572000"/></ns2:xfrm></ns0:spPr><ns0:txBody><ns3:bodyPr xmlns:ns3="http://schemas.openxmlformats.org/drawingml/2006/main" wrap="square" anchor="t" anchorCtr="0"/><ns4:lstStyle><ns4:defPPr algn="ctr"><ns4:defRPr><ns4:solidFill><ns4:srgbClr val="94A3B8"/></ns4:solidFill></ns4:defRPr></ns4:defPPr></ns4:lstStyle><ns4:defPPr algn="ctr"><ns4:buNone/><ns4:defRPr sz="1400" dirty="0"><ns4:solidFill><ns4:srgbClr val="94A3B8"/></ns4:solidFill><ns4:latin typeface="Calibri"/><ns4:ea typeface="Calibri"/></ns4:defRPr></ns4:defPPr><ns4:lvl1pPr algn="ctr"><ns4:buNone/><ns4:defRPr sz="1400" dirty="0"><ns4:solidFill><ns4:srgbClr val="94A3B8"/></ns4:solidFill><ns4:latin typeface="Calibri"/><ns4:ea typeface="Calibri"/></ns4:defRPr></ns4:lvl1pPr><ns4:lvl2pPr algn="ctr"><ns4:buNone/><ns4:defRPr sz="1400" dirty="0"><ns4:solidFill><ns4:srgbClr val="94A3B8"/></ns4:solidFill><ns4:latin typeface="Calibri"/><ns4:ea typeface="Calibri"/></ns4:defRPr></ns4:lvl2pPr><ns4:lvl3pPr algn="ctr"><ns4:buNone/><ns4:defRPr sz="1400" dirty="0"><ns4:solidFill><ns4:srgbClr val="94A3B8"/></ns4:solidFill><ns4:latin typeface="Calibri"/><ns4:ea typeface="Calibri"/></ns4:defRPr></ns4:lvl3pPr><ns4:lvl4pPr algn="ctr"><ns4:buNone/><ns4:defRPr sz="1400" dirty="0"><ns4:solidFill><ns4:srgbClr val="94A3B8"/></ns4:solidFill><ns4:latin typeface="Calibri"/><ns4:ea typeface="Calibri"/></ns4:defRPr></ns4:lvl4pPr><ns4:lvl5pPr algn="ctr"><ns4:buNone/><ns4:defRPr sz="1400" dirty="0"><ns4:solidFill><ns4:srgbClr val="94A3B8"/></ns4:solidFill><ns4:latin typeface="Calibri"/><ns4:ea typeface="Calibri"/></ns4:defRPr></ns4:lvl5pPr><ns4:lvl6pPr algn="ctr"><ns4:buNone/><ns4:defRPr sz="1400" dirty="0"><ns4:solidFill><ns4:srgbClr val="94A3B8"/></ns4:solidFill><ns4:latin typeface="Calibri"/><ns4:ea typeface="Calibri"/></ns4:defRPr></ns4:lvl6pPr><ns4:lvl7pPr algn="ctr"><ns4:buNone/><ns4:defRPr sz="1400" dirty="0"><ns4:solidFill><ns4:srgbClr val="94A3B8"/></ns4:solidFill><ns4:latin typeface="Calibri"/><ns4:ea typeface="Calibri"/></ns4:defRPr></ns4:lvl7pPr><ns4:lvl8pPr algn="ctr"><ns4:buNone/><ns4:defRPr sz="1400" dirty="0"><ns4:solidFill><ns4:srgbClr val="94A3B8"/></ns4:solidFill><ns4:latin typeface="Calibri"/><ns4:ea typeface="Calibri"/></ns4:defRPr></ns4:lvl8pPr><ns4:lvl9pPr algn="ctr"><ns4:buNone/><ns4:defRPr sz="1400" dirty="0"><ns4:solidFill><ns4:srgbClr val="94A3B8"/></ns4:solidFill><ns4:latin typeface="Calibri"/><ns4:ea typeface="Calibri"/></ns4:defRPr></ns4:lvl9pPr></ns4:lstStyle/><ns5:p xmlns:ns5="http://schemas.openxmlformats.org/drawingml/2006/main"><ns5:pPr algn="r"><ns5:buNone/></ns5:pPr><ns5:r><ns5:rPr lang="ja-JP"/><ns5:t>&lt;#&gt;</ns5:t></ns5:r></ns5:p></ns0:txBody></ns0:sp></ns0:spTree></ns0:cSld><ns0:clrMapOvr/></ns0:sldLayout>
 </file>
 
 <file path=ppt/slideLayouts/slideLayout19.xml><?xml version='1.0' encoding='UTF-8' standalone='yes'?>
-<ns0:sldLayout xmlns:ns0="http://schemas.openxmlformats.org/presentationml/2006/main" type="blank" preserve="1"><ns0:cSld name="Chart.1Chart.Single+1Analysis"><ns0:spTree><ns0:nvGrpSpPr><ns0:cNvPr id="1" name=""/><ns0:cNvGrpSpPr/><ns0:nvPr/></ns0:nvGrpSpPr><ns0:grpSpPr><ns1:xfrm xmlns:ns1="http://schemas.openxmlformats.org/drawingml/2006/main"><ns1:off x="0" y="0"/><ns1:ext cx="0" cy="0"/><ns1:chOff x="0" y="0"/><ns1:chExt cx="0" cy="0"/></ns1:xfrm></ns0:grpSpPr><ns0:sp><ns0:nvSpPr><ns0:cNvPr id="2" name="HeaderBar"/><ns0:cNvSpPr><ns1:spLocks xmlns:ns1="http://schemas.openxmlformats.org/drawingml/2006/main" noGrp="1" noSelect="0" noRot="1" noMove="1"/></ns0:cNvSpPr><ns0:nvPr/></ns0:nvSpPr><ns0:spPr><ns2:xfrm xmlns:ns2="http://schemas.openxmlformats.org/drawingml/2006/main"><ns2:off x="0" y="0"/><ns2:ext cx="12192000" cy="1051560"/></ns2:xfrm><ns3:prstGeom xmlns:ns3="http://schemas.openxmlformats.org/drawingml/2006/main" prst="rect"/><ns4:solidFill xmlns:ns4="http://schemas.openxmlformats.org/drawingml/2006/main"><ns4:srgbClr val="1E2761"/></ns4:solidFill><ns5:ln xmlns:ns5="http://schemas.openxmlformats.org/drawingml/2006/main"><ns5:noFill/></ns5:ln></ns0:spPr></ns0:sp><ns0:sp><ns0:nvSpPr><ns0:cNvPr id="10" name="SlideTitle.Header"/><ns0:cNvSpPr><ns1:spLocks xmlns:ns1="http://schemas.openxmlformats.org/drawingml/2006/main" noGrp="1"/></ns0:cNvSpPr><ns0:nvPr><ns0:ph idx="15" type="body"/></ns0:nvPr></ns0:nvSpPr><ns0:spPr><ns2:xfrm xmlns:ns2="http://schemas.openxmlformats.org/drawingml/2006/main"><ns2:off x="731520" y="91440"/><ns2:ext cx="9144000" cy="475488"/></ns2:xfrm></ns0:spPr><ns0:txBody><ns3:bodyPr xmlns:ns3="http://schemas.openxmlformats.org/drawingml/2006/main" wrap="square" anchor="t" anchorCtr="0"/><ns4:lstStyle xmlns:ns4="http://schemas.openxmlformats.org/drawingml/2006/main"><ns4:defPPr algn="l"><ns4:buNone/><ns4:defRPr sz="2800" dirty="0" b="1"><ns4:solidFill><ns4:srgbClr val="FFFFFF"/></ns4:solidFill><ns4:latin typeface="Georgia"/><ns4:ea typeface="Georgia"/></ns4:defRPr></ns4:defPPr><ns4:lvl1pPr algn="l"><ns4:buNone/><ns4:defRPr sz="2800" dirty="0" b="1"><ns4:solidFill><ns4:srgbClr val="FFFFFF"/></ns4:solidFill><ns4:latin typeface="Georgia"/><ns4:ea typeface="Georgia"/></ns4:defRPr></ns4:lvl1pPr><ns4:lvl2pPr algn="l"><ns4:buNone/><ns4:defRPr sz="2800" dirty="0" b="1"><ns4:solidFill><ns4:srgbClr val="FFFFFF"/></ns4:solidFill><ns4:latin typeface="Georgia"/><ns4:ea typeface="Georgia"/></ns4:defRPr></ns4:lvl2pPr><ns4:lvl3pPr algn="l"><ns4:buNone/><ns4:defRPr sz="2800" dirty="0" b="1"><ns4:solidFill><ns4:srgbClr val="FFFFFF"/></ns4:solidFill><ns4:latin typeface="Georgia"/><ns4:ea typeface="Georgia"/></ns4:defRPr></ns4:lvl3pPr><ns4:lvl4pPr algn="l"><ns4:buNone/><ns4:defRPr sz="2800" dirty="0" b="1"><ns4:solidFill><ns4:srgbClr val="FFFFFF"/></ns4:solidFill><ns4:latin typeface="Georgia"/><ns4:ea typeface="Georgia"/></ns4:defRPr></ns4:lvl4pPr><ns4:lvl5pPr algn="l"><ns4:buNone/><ns4:defRPr sz="2800" dirty="0" b="1"><ns4:solidFill><ns4:srgbClr val="FFFFFF"/></ns4:solidFill><ns4:latin typeface="Georgia"/><ns4:ea typeface="Georgia"/></ns4:defRPr></ns4:lvl5pPr><ns4:lvl6pPr algn="l"><ns4:buNone/><ns4:defRPr sz="2800" dirty="0" b="1"><ns4:solidFill><ns4:srgbClr val="FFFFFF"/></ns4:solidFill><ns4:latin typeface="Georgia"/><ns4:ea typeface="Georgia"/></ns4:defRPr></ns4:lvl6pPr><ns4:lvl7pPr algn="l"><ns4:buNone/><ns4:defRPr sz="2800" dirty="0" b="1"><ns4:solidFill><ns4:srgbClr val="FFFFFF"/></ns4:solidFill><ns4:latin typeface="Georgia"/><ns4:ea typeface="Georgia"/></ns4:defRPr></ns4:lvl7pPr><ns4:lvl8pPr algn="l"><ns4:buNone/><ns4:defRPr sz="2800" dirty="0" b="1"><ns4:solidFill><ns4:srgbClr val="FFFFFF"/></ns4:solidFill><ns4:latin typeface="Georgia"/><ns4:ea typeface="Georgia"/></ns4:defRPr></ns4:lvl8pPr><ns4:lvl9pPr algn="l"><ns4:buNone/><ns4:defRPr sz="2800" dirty="0" b="1"><ns4:solidFill><ns4:srgbClr val="FFFFFF"/></ns4:solidFill><ns4:latin typeface="Georgia"/><ns4:ea typeface="Georgia"/></ns4:defRPr></ns4:lvl9pPr></ns4:lstStyle/><ns5:p xmlns:ns5="http://schemas.openxmlformats.org/drawingml/2006/main"><ns5:pPr algn="l"><ns5:buNone/></ns5:pPr><ns5:r><ns5:rPr lang="ja-JP"/><ns5:t>サブタイトル</ns5:t></ns5:r></ns5:p></ns0:txBody></ns0:sp><ns0:sp><ns0:nvSpPr><ns0:cNvPr id="5" name="ChartArea"/><ns0:cNvSpPr><ns1:spLocks xmlns:ns1="http://schemas.openxmlformats.org/drawingml/2006/main" noGrp="1" noSelect="0" noRot="1" noMove="1"/></ns0:cNvSpPr><ns0:nvPr/></ns0:nvSpPr><ns0:spPr><ns2:xfrm xmlns:ns2="http://schemas.openxmlformats.org/drawingml/2006/main"><ns2:off x="457200" y="1280160"/><ns2:ext cx="6858000" cy="4937760"/></ns2:xfrm><ns3:prstGeom xmlns:ns3="http://schemas.openxmlformats.org/drawingml/2006/main" prst="roundRect"><ns3:avLst><ns3:gd name="adj" fmla="val 6000"/></ns3:avLst></ns3:prstGeom><ns4:solidFill xmlns:ns4="http://schemas.openxmlformats.org/drawingml/2006/main"><ns4:srgbClr val="EDF0F7"/></ns4:solidFill><ns5:ln xmlns:ns5="http://schemas.openxmlformats.org/drawingml/2006/main"><ns5:noFill/></ns5:ln></ns0:spPr></ns0:sp><ns0:sp><ns0:nvSpPr><ns0:cNvPr id="20" name="Body.Left"/><ns0:cNvSpPr><ns1:spLocks xmlns:ns1="http://schemas.openxmlformats.org/drawingml/2006/main" noGrp="1"/></ns0:cNvSpPr><ns0:nvPr><ns0:ph idx="1" type="body"/></ns0:nvPr></ns0:nvSpPr><ns0:spPr><ns2:xfrm xmlns:ns2="http://schemas.openxmlformats.org/drawingml/2006/main"><ns2:off x="731520" y="1463040"/><ns2:ext cx="6309360" cy="4572000"/></ns2:xfrm></ns0:spPr><ns0:txBody><ns3:bodyPr xmlns:ns3="http://schemas.openxmlformats.org/drawingml/2006/main" wrap="square" anchor="t" anchorCtr="0"/><ns4:lstStyle xmlns:ns4="http://schemas.openxmlformats.org/drawingml/2006/main"><ns4:defPPr algn="ctr"><ns4:buNone/><ns4:defRPr sz="1400" dirty="0"><ns4:solidFill><ns4:srgbClr val="94A3B8"/></ns4:solidFill><ns4:latin typeface="Calibri"/><ns4:ea typeface="Calibri"/></ns4:defRPr></ns4:defPPr><ns4:lvl1pPr algn="ctr"><ns4:buNone/><ns4:defRPr sz="1400" dirty="0"><ns4:solidFill><ns4:srgbClr val="94A3B8"/></ns4:solidFill><ns4:latin typeface="Calibri"/><ns4:ea typeface="Calibri"/></ns4:defRPr></ns4:lvl1pPr><ns4:lvl2pPr algn="ctr"><ns4:buNone/><ns4:defRPr sz="1400" dirty="0"><ns4:solidFill><ns4:srgbClr val="94A3B8"/></ns4:solidFill><ns4:latin typeface="Calibri"/><ns4:ea typeface="Calibri"/></ns4:defRPr></ns4:lvl2pPr><ns4:lvl3pPr algn="ctr"><ns4:buNone/><ns4:defRPr sz="1400" dirty="0"><ns4:solidFill><ns4:srgbClr val="94A3B8"/></ns4:solidFill><ns4:latin typeface="Calibri"/><ns4:ea typeface="Calibri"/></ns4:defRPr></ns4:lvl3pPr><ns4:lvl4pPr algn="ctr"><ns4:buNone/><ns4:defRPr sz="1400" dirty="0"><ns4:solidFill><ns4:srgbClr val="94A3B8"/></ns4:solidFill><ns4:latin typeface="Calibri"/><ns4:ea typeface="Calibri"/></ns4:defRPr></ns4:lvl4pPr><ns4:lvl5pPr algn="ctr"><ns4:buNone/><ns4:defRPr sz="1400" dirty="0"><ns4:solidFill><ns4:srgbClr val="94A3B8"/></ns4:solidFill><ns4:latin typeface="Calibri"/><ns4:ea typeface="Calibri"/></ns4:defRPr></ns4:lvl5pPr><ns4:lvl6pPr algn="ctr"><ns4:buNone/><ns4:defRPr sz="1400" dirty="0"><ns4:solidFill><ns4:srgbClr val="94A3B8"/></ns4:solidFill><ns4:latin typeface="Calibri"/><ns4:ea typeface="Calibri"/></ns4:defRPr></ns4:lvl6pPr><ns4:lvl7pPr algn="ctr"><ns4:buNone/><ns4:defRPr sz="1400" dirty="0"><ns4:solidFill><ns4:srgbClr val="94A3B8"/></ns4:solidFill><ns4:latin typeface="Calibri"/><ns4:ea typeface="Calibri"/></ns4:defRPr></ns4:lvl7pPr><ns4:lvl8pPr algn="ctr"><ns4:buNone/><ns4:defRPr sz="1400" dirty="0"><ns4:solidFill><ns4:srgbClr val="94A3B8"/></ns4:solidFill><ns4:latin typeface="Calibri"/><ns4:ea typeface="Calibri"/></ns4:defRPr></ns4:lvl8pPr><ns4:lvl9pPr algn="ctr"><ns4:buNone/><ns4:defRPr sz="1400" dirty="0"><ns4:solidFill><ns4:srgbClr val="94A3B8"/></ns4:solidFill><ns4:latin typeface="Calibri"/><ns4:ea typeface="Calibri"/></ns4:defRPr></ns4:lvl9pPr></ns4:lstStyle/><ns5:p xmlns:ns5="http://schemas.openxmlformats.org/drawingml/2006/main"><ns5:pPr algn="l"><ns5:buNone/></ns5:pPr><ns5:r><ns5:rPr lang="ja-JP"/><ns5:t>分析テキスト
+<ns0:sldLayout xmlns:ns0="http://schemas.openxmlformats.org/presentationml/2006/main" type="blank" preserve="1"><ns0:cSld name="Chart.1Chart.Single+1Analysis"><ns0:spTree><ns0:nvGrpSpPr><ns0:cNvPr id="1" name=""/><ns0:cNvGrpSpPr/><ns0:nvPr/></ns0:nvGrpSpPr><ns0:grpSpPr><ns1:xfrm xmlns:ns1="http://schemas.openxmlformats.org/drawingml/2006/main"><ns1:off x="0" y="0"/><ns1:ext cx="0" cy="0"/><ns1:chOff x="0" y="0"/><ns1:chExt cx="0" cy="0"/></ns1:xfrm></ns0:grpSpPr><ns0:sp><ns0:nvSpPr><ns0:cNvPr id="2" name="HeaderBar"/><ns0:cNvSpPr><ns1:spLocks xmlns:ns1="http://schemas.openxmlformats.org/drawingml/2006/main" noGrp="1" noSelect="0" noRot="1" noMove="1"/></ns0:cNvSpPr><ns0:nvPr/></ns0:nvSpPr><ns0:spPr><ns2:xfrm xmlns:ns2="http://schemas.openxmlformats.org/drawingml/2006/main"><ns2:off x="0" y="0"/><ns2:ext cx="12192000" cy="1051560"/></ns2:xfrm><ns3:prstGeom xmlns:ns3="http://schemas.openxmlformats.org/drawingml/2006/main" prst="rect"/><ns4:solidFill xmlns:ns4="http://schemas.openxmlformats.org/drawingml/2006/main"><ns4:srgbClr val="1E2761"/></ns4:solidFill><ns5:ln xmlns:ns5="http://schemas.openxmlformats.org/drawingml/2006/main"><ns5:noFill/></ns5:ln></ns0:spPr></ns0:sp><ns0:sp><ns0:nvSpPr><ns0:cNvPr id="10" name="SlideTitle.Header"/><ns0:cNvSpPr><ns1:spLocks xmlns:ns1="http://schemas.openxmlformats.org/drawingml/2006/main" noGrp="1"/></ns0:cNvSpPr><ns0:nvPr><ns0:ph idx="15" type="body"/></ns0:nvPr></ns0:nvSpPr><ns0:spPr><ns2:xfrm xmlns:ns2="http://schemas.openxmlformats.org/drawingml/2006/main"><ns2:off x="731520" y="91440"/><ns2:ext cx="9144000" cy="475488"/></ns2:xfrm></ns0:spPr><ns0:txBody><ns3:bodyPr xmlns:ns3="http://schemas.openxmlformats.org/drawingml/2006/main" wrap="square" anchor="t" anchorCtr="0"/><ns4:lstStyle><ns4:defPPr><ns4:defRPr sz="2800" b="1"><ns4:solidFill><ns4:srgbClr val="FFFFFF"/></ns4:solidFill></ns4:defRPr></ns4:defPPr></ns4:lstStyle><ns4:defPPr algn="l"><ns4:buNone/><ns4:defRPr sz="2800" dirty="0" b="1"><ns4:solidFill><ns4:srgbClr val="FFFFFF"/></ns4:solidFill><ns4:latin typeface="Georgia"/><ns4:ea typeface="Georgia"/></ns4:defRPr></ns4:defPPr><ns4:lvl1pPr algn="l"><ns4:buNone/><ns4:defRPr sz="2800" dirty="0" b="1"><ns4:solidFill><ns4:srgbClr val="FFFFFF"/></ns4:solidFill><ns4:latin typeface="Georgia"/><ns4:ea typeface="Georgia"/></ns4:defRPr></ns4:lvl1pPr><ns4:lvl2pPr algn="l"><ns4:buNone/><ns4:defRPr sz="2800" dirty="0" b="1"><ns4:solidFill><ns4:srgbClr val="FFFFFF"/></ns4:solidFill><ns4:latin typeface="Georgia"/><ns4:ea typeface="Georgia"/></ns4:defRPr></ns4:lvl2pPr><ns4:lvl3pPr algn="l"><ns4:buNone/><ns4:defRPr sz="2800" dirty="0" b="1"><ns4:solidFill><ns4:srgbClr val="FFFFFF"/></ns4:solidFill><ns4:latin typeface="Georgia"/><ns4:ea typeface="Georgia"/></ns4:defRPr></ns4:lvl3pPr><ns4:lvl4pPr algn="l"><ns4:buNone/><ns4:defRPr sz="2800" dirty="0" b="1"><ns4:solidFill><ns4:srgbClr val="FFFFFF"/></ns4:solidFill><ns4:latin typeface="Georgia"/><ns4:ea typeface="Georgia"/></ns4:defRPr></ns4:lvl4pPr><ns4:lvl5pPr algn="l"><ns4:buNone/><ns4:defRPr sz="2800" dirty="0" b="1"><ns4:solidFill><ns4:srgbClr val="FFFFFF"/></ns4:solidFill><ns4:latin typeface="Georgia"/><ns4:ea typeface="Georgia"/></ns4:defRPr></ns4:lvl5pPr><ns4:lvl6pPr algn="l"><ns4:buNone/><ns4:defRPr sz="2800" dirty="0" b="1"><ns4:solidFill><ns4:srgbClr val="FFFFFF"/></ns4:solidFill><ns4:latin typeface="Georgia"/><ns4:ea typeface="Georgia"/></ns4:defRPr></ns4:lvl6pPr><ns4:lvl7pPr algn="l"><ns4:buNone/><ns4:defRPr sz="2800" dirty="0" b="1"><ns4:solidFill><ns4:srgbClr val="FFFFFF"/></ns4:solidFill><ns4:latin typeface="Georgia"/><ns4:ea typeface="Georgia"/></ns4:defRPr></ns4:lvl7pPr><ns4:lvl8pPr algn="l"><ns4:buNone/><ns4:defRPr sz="2800" dirty="0" b="1"><ns4:solidFill><ns4:srgbClr val="FFFFFF"/></ns4:solidFill><ns4:latin typeface="Georgia"/><ns4:ea typeface="Georgia"/></ns4:defRPr></ns4:lvl8pPr><ns4:lvl9pPr algn="l"><ns4:buNone/><ns4:defRPr sz="2800" dirty="0" b="1"><ns4:solidFill><ns4:srgbClr val="FFFFFF"/></ns4:solidFill><ns4:latin typeface="Georgia"/><ns4:ea typeface="Georgia"/></ns4:defRPr></ns4:lvl9pPr></ns4:lstStyle/><ns5:p xmlns:ns5="http://schemas.openxmlformats.org/drawingml/2006/main"><ns5:pPr algn="l"><ns5:buNone/></ns5:pPr><ns5:r><ns5:rPr lang="ja-JP"/><ns5:t>サブタイトル</ns5:t></ns5:r></ns5:p></ns0:txBody></ns0:sp><ns0:sp><ns0:nvSpPr><ns0:cNvPr id="5" name="ChartArea"/><ns0:cNvSpPr><ns1:spLocks xmlns:ns1="http://schemas.openxmlformats.org/drawingml/2006/main" noGrp="1" noSelect="0" noRot="1" noMove="1"/></ns0:cNvSpPr><ns0:nvPr/></ns0:nvSpPr><ns0:spPr><ns2:xfrm xmlns:ns2="http://schemas.openxmlformats.org/drawingml/2006/main"><ns2:off x="457200" y="1280160"/><ns2:ext cx="6858000" cy="4937760"/></ns2:xfrm><ns3:prstGeom xmlns:ns3="http://schemas.openxmlformats.org/drawingml/2006/main" prst="roundRect"><ns3:avLst><ns3:gd name="adj" fmla="val 6000"/></ns3:avLst></ns3:prstGeom><ns4:solidFill xmlns:ns4="http://schemas.openxmlformats.org/drawingml/2006/main"><ns4:srgbClr val="EDF0F7"/></ns4:solidFill><ns5:ln xmlns:ns5="http://schemas.openxmlformats.org/drawingml/2006/main"><ns5:noFill/></ns5:ln></ns0:spPr></ns0:sp><ns0:sp><ns0:nvSpPr><ns0:cNvPr id="20" name="Body.Left"/><ns0:cNvSpPr><ns1:spLocks xmlns:ns1="http://schemas.openxmlformats.org/drawingml/2006/main" noGrp="1"/></ns0:cNvSpPr><ns0:nvPr><ns0:ph idx="1" type="body"/></ns0:nvPr></ns0:nvSpPr><ns0:spPr><ns2:xfrm xmlns:ns2="http://schemas.openxmlformats.org/drawingml/2006/main"><ns2:off x="731520" y="1463040"/><ns2:ext cx="6309360" cy="4572000"/></ns2:xfrm></ns0:spPr><ns0:txBody><ns3:bodyPr xmlns:ns3="http://schemas.openxmlformats.org/drawingml/2006/main" wrap="square" anchor="t" anchorCtr="0"/><ns4:lstStyle><ns4:defPPr algn="ctr"><ns4:defRPr><ns4:solidFill><ns4:srgbClr val="94A3B8"/></ns4:solidFill></ns4:defRPr></ns4:defPPr></ns4:lstStyle><ns4:defPPr algn="ctr"><ns4:buNone/><ns4:defRPr sz="1400" dirty="0"><ns4:solidFill><ns4:srgbClr val="94A3B8"/></ns4:solidFill><ns4:latin typeface="Calibri"/><ns4:ea typeface="Calibri"/></ns4:defRPr></ns4:defPPr><ns4:lvl1pPr algn="ctr"><ns4:buNone/><ns4:defRPr sz="1400" dirty="0"><ns4:solidFill><ns4:srgbClr val="94A3B8"/></ns4:solidFill><ns4:latin typeface="Calibri"/><ns4:ea typeface="Calibri"/></ns4:defRPr></ns4:lvl1pPr><ns4:lvl2pPr algn="ctr"><ns4:buNone/><ns4:defRPr sz="1400" dirty="0"><ns4:solidFill><ns4:srgbClr val="94A3B8"/></ns4:solidFill><ns4:latin typeface="Calibri"/><ns4:ea typeface="Calibri"/></ns4:defRPr></ns4:lvl2pPr><ns4:lvl3pPr algn="ctr"><ns4:buNone/><ns4:defRPr sz="1400" dirty="0"><ns4:solidFill><ns4:srgbClr val="94A3B8"/></ns4:solidFill><ns4:latin typeface="Calibri"/><ns4:ea typeface="Calibri"/></ns4:defRPr></ns4:lvl3pPr><ns4:lvl4pPr algn="ctr"><ns4:buNone/><ns4:defRPr sz="1400" dirty="0"><ns4:solidFill><ns4:srgbClr val="94A3B8"/></ns4:solidFill><ns4:latin typeface="Calibri"/><ns4:ea typeface="Calibri"/></ns4:defRPr></ns4:lvl4pPr><ns4:lvl5pPr algn="ctr"><ns4:buNone/><ns4:defRPr sz="1400" dirty="0"><ns4:solidFill><ns4:srgbClr val="94A3B8"/></ns4:solidFill><ns4:latin typeface="Calibri"/><ns4:ea typeface="Calibri"/></ns4:defRPr></ns4:lvl5pPr><ns4:lvl6pPr algn="ctr"><ns4:buNone/><ns4:defRPr sz="1400" dirty="0"><ns4:solidFill><ns4:srgbClr val="94A3B8"/></ns4:solidFill><ns4:latin typeface="Calibri"/><ns4:ea typeface="Calibri"/></ns4:defRPr></ns4:lvl6pPr><ns4:lvl7pPr algn="ctr"><ns4:buNone/><ns4:defRPr sz="1400" dirty="0"><ns4:solidFill><ns4:srgbClr val="94A3B8"/></ns4:solidFill><ns4:latin typeface="Calibri"/><ns4:ea typeface="Calibri"/></ns4:defRPr></ns4:lvl7pPr><ns4:lvl8pPr algn="ctr"><ns4:buNone/><ns4:defRPr sz="1400" dirty="0"><ns4:solidFill><ns4:srgbClr val="94A3B8"/></ns4:solidFill><ns4:latin typeface="Calibri"/><ns4:ea typeface="Calibri"/></ns4:defRPr></ns4:lvl8pPr><ns4:lvl9pPr algn="ctr"><ns4:buNone/><ns4:defRPr sz="1400" dirty="0"><ns4:solidFill><ns4:srgbClr val="94A3B8"/></ns4:solidFill><ns4:latin typeface="Calibri"/><ns4:ea typeface="Calibri"/></ns4:defRPr></ns4:lvl9pPr></ns4:lstStyle/><ns5:p xmlns:ns5="http://schemas.openxmlformats.org/drawingml/2006/main"><ns5:pPr algn="l"><ns5:buNone/></ns5:pPr><ns5:r><ns5:rPr lang="ja-JP"/><ns5:t>分析テキスト
 
 主要な発見事項や
-考察を記入</ns5:t></ns5:r></ns5:p></ns0:txBody></ns0:sp><ns0:sp><ns0:nvSpPr><ns0:cNvPr id="30" name="SlideNum.Footer"/><ns0:cNvSpPr><ns1:spLocks xmlns:ns1="http://schemas.openxmlformats.org/drawingml/2006/main" noGrp="1"/></ns0:cNvSpPr><ns0:nvPr><ns0:ph idx="50" type="sldNum"/></ns0:nvPr></ns0:nvSpPr><ns0:spPr><ns2:xfrm xmlns:ns2="http://schemas.openxmlformats.org/drawingml/2006/main"><ns2:off x="10972800" y="6446520"/><ns2:ext cx="1097280" cy="274320"/></ns2:xfrm></ns0:spPr><ns0:txBody><ns3:bodyPr xmlns:ns3="http://schemas.openxmlformats.org/drawingml/2006/main" wrap="square" anchor="t" anchorCtr="0"/><ns4:lstStyle xmlns:ns4="http://schemas.openxmlformats.org/drawingml/2006/main"><ns4:defPPr algn="r"><ns4:buNone/><ns4:defRPr sz="1000" dirty="0"><ns4:solidFill><ns4:srgbClr val="94A3B8"/></ns4:solidFill><ns4:latin typeface="Calibri"/><ns4:ea typeface="Calibri"/></ns4:defRPr></ns4:defPPr><ns4:lvl1pPr algn="r"><ns4:buNone/><ns4:defRPr sz="1000" dirty="0"><ns4:solidFill><ns4:srgbClr val="94A3B8"/></ns4:solidFill><ns4:latin typeface="Calibri"/><ns4:ea typeface="Calibri"/></ns4:defRPr></ns4:lvl1pPr><ns4:lvl2pPr algn="r"><ns4:buNone/><ns4:defRPr sz="1000" dirty="0"><ns4:solidFill><ns4:srgbClr val="94A3B8"/></ns4:solidFill><ns4:latin typeface="Calibri"/><ns4:ea typeface="Calibri"/></ns4:defRPr></ns4:lvl2pPr><ns4:lvl3pPr algn="r"><ns4:buNone/><ns4:defRPr sz="1000" dirty="0"><ns4:solidFill><ns4:srgbClr val="94A3B8"/></ns4:solidFill><ns4:latin typeface="Calibri"/><ns4:ea typeface="Calibri"/></ns4:defRPr></ns4:lvl3pPr><ns4:lvl4pPr algn="r"><ns4:buNone/><ns4:defRPr sz="1000" dirty="0"><ns4:solidFill><ns4:srgbClr val="94A3B8"/></ns4:solidFill><ns4:latin typeface="Calibri"/><ns4:ea typeface="Calibri"/></ns4:defRPr></ns4:lvl4pPr><ns4:lvl5pPr algn="r"><ns4:buNone/><ns4:defRPr sz="1000" dirty="0"><ns4:solidFill><ns4:srgbClr val="94A3B8"/></ns4:solidFill><ns4:latin typeface="Calibri"/><ns4:ea typeface="Calibri"/></ns4:defRPr></ns4:lvl5pPr><ns4:lvl6pPr algn="r"><ns4:buNone/><ns4:defRPr sz="1000" dirty="0"><ns4:solidFill><ns4:srgbClr val="94A3B8"/></ns4:solidFill><ns4:latin typeface="Calibri"/><ns4:ea typeface="Calibri"/></ns4:defRPr></ns4:lvl6pPr><ns4:lvl7pPr algn="r"><ns4:buNone/><ns4:defRPr sz="1000" dirty="0"><ns4:solidFill><ns4:srgbClr val="94A3B8"/></ns4:solidFill><ns4:latin typeface="Calibri"/><ns4:ea typeface="Calibri"/></ns4:defRPr></ns4:lvl7pPr><ns4:lvl8pPr algn="r"><ns4:buNone/><ns4:defRPr sz="1000" dirty="0"><ns4:solidFill><ns4:srgbClr val="94A3B8"/></ns4:solidFill><ns4:latin typeface="Calibri"/><ns4:ea typeface="Calibri"/></ns4:defRPr></ns4:lvl8pPr><ns4:lvl9pPr algn="r"><ns4:buNone/><ns4:defRPr sz="1000" dirty="0"><ns4:solidFill><ns4:srgbClr val="94A3B8"/></ns4:solidFill><ns4:latin typeface="Calibri"/><ns4:ea typeface="Calibri"/></ns4:defRPr></ns4:lvl9pPr></ns4:lstStyle><ns5:p xmlns:ns5="http://schemas.openxmlformats.org/drawingml/2006/main"><ns5:pPr algn="r"><ns5:buNone/></ns5:pPr><ns5:r><ns5:rPr lang="ja-JP"/><ns5:t>&lt;#&gt;</ns5:t></ns5:r></ns5:p></ns0:txBody></ns0:sp></ns0:spTree></ns0:cSld><ns0:clrMapOvr/></ns0:sldLayout>
+考察を記入</ns5:t></ns5:r></ns5:p></ns0:txBody></ns0:sp><ns0:sp><ns0:nvSpPr><ns0:cNvPr id="30" name="SlideNum.Footer"/><ns0:cNvSpPr><ns1:spLocks xmlns:ns1="http://schemas.openxmlformats.org/drawingml/2006/main" noGrp="1"/></ns0:cNvSpPr><ns0:nvPr><ns0:ph idx="50" type="sldNum"/></ns0:nvPr></ns0:nvSpPr><ns0:spPr><ns2:xfrm xmlns:ns2="http://schemas.openxmlformats.org/drawingml/2006/main"><ns2:off x="10972800" y="6446520"/><ns2:ext cx="1097280" cy="274320"/></ns2:xfrm></ns0:spPr><ns0:txBody><ns3:bodyPr xmlns:ns3="http://schemas.openxmlformats.org/drawingml/2006/main" wrap="square" anchor="t" anchorCtr="0"/><ns4:lstStyle><ns4:defPPr algn="r"><ns4:defRPr sz="1000"><ns4:solidFill><ns4:srgbClr val="94A3B8"/></ns4:solidFill></ns4:defRPr></ns4:defPPr></ns4:lstStyle><ns4:defPPr algn="r"><ns4:buNone/><ns4:defRPr sz="1000" dirty="0"><ns4:solidFill><ns4:srgbClr val="94A3B8"/></ns4:solidFill><ns4:latin typeface="Calibri"/><ns4:ea typeface="Calibri"/></ns4:defRPr></ns4:defPPr><ns4:lvl1pPr algn="r"><ns4:buNone/><ns4:defRPr sz="1000" dirty="0"><ns4:solidFill><ns4:srgbClr val="94A3B8"/></ns4:solidFill><ns4:latin typeface="Calibri"/><ns4:ea typeface="Calibri"/></ns4:defRPr></ns4:lvl1pPr><ns4:lvl2pPr algn="r"><ns4:buNone/><ns4:defRPr sz="1000" dirty="0"><ns4:solidFill><ns4:srgbClr val="94A3B8"/></ns4:solidFill><ns4:latin typeface="Calibri"/><ns4:ea typeface="Calibri"/></ns4:defRPr></ns4:lvl2pPr><ns4:lvl3pPr algn="r"><ns4:buNone/><ns4:defRPr sz="1000" dirty="0"><ns4:solidFill><ns4:srgbClr val="94A3B8"/></ns4:solidFill><ns4:latin typeface="Calibri"/><ns4:ea typeface="Calibri"/></ns4:defRPr></ns4:lvl3pPr><ns4:lvl4pPr algn="r"><ns4:buNone/><ns4:defRPr sz="1000" dirty="0"><ns4:solidFill><ns4:srgbClr val="94A3B8"/></ns4:solidFill><ns4:latin typeface="Calibri"/><ns4:ea typeface="Calibri"/></ns4:defRPr></ns4:lvl4pPr><ns4:lvl5pPr algn="r"><ns4:buNone/><ns4:defRPr sz="1000" dirty="0"><ns4:solidFill><ns4:srgbClr val="94A3B8"/></ns4:solidFill><ns4:latin typeface="Calibri"/><ns4:ea typeface="Calibri"/></ns4:defRPr></ns4:lvl5pPr><ns4:lvl6pPr algn="r"><ns4:buNone/><ns4:defRPr sz="1000" dirty="0"><ns4:solidFill><ns4:srgbClr val="94A3B8"/></ns4:solidFill><ns4:latin typeface="Calibri"/><ns4:ea typeface="Calibri"/></ns4:defRPr></ns4:lvl6pPr><ns4:lvl7pPr algn="r"><ns4:buNone/><ns4:defRPr sz="1000" dirty="0"><ns4:solidFill><ns4:srgbClr val="94A3B8"/></ns4:solidFill><ns4:latin typeface="Calibri"/><ns4:ea typeface="Calibri"/></ns4:defRPr></ns4:lvl7pPr><ns4:lvl8pPr algn="r"><ns4:buNone/><ns4:defRPr sz="1000" dirty="0"><ns4:solidFill><ns4:srgbClr val="94A3B8"/></ns4:solidFill><ns4:latin typeface="Calibri"/><ns4:ea typeface="Calibri"/></ns4:defRPr></ns4:lvl8pPr><ns4:lvl9pPr algn="r"><ns4:buNone/><ns4:defRPr sz="1000" dirty="0"><ns4:solidFill><ns4:srgbClr val="94A3B8"/></ns4:solidFill><ns4:latin typeface="Calibri"/><ns4:ea typeface="Calibri"/></ns4:defRPr></ns4:lvl9pPr></ns4:lstStyle><ns5:p xmlns:ns5="http://schemas.openxmlformats.org/drawingml/2006/main"><ns5:pPr algn="r"><ns5:buNone/></ns5:pPr><ns5:r><ns5:rPr lang="ja-JP"/><ns5:t>&lt;#&gt;</ns5:t></ns5:r></ns5:p></ns0:txBody></ns0:sp></ns0:spTree></ns0:cSld><ns0:clrMapOvr/></ns0:sldLayout>
 </file>
 
 <file path=ppt/slideLayouts/slideLayout2.xml><?xml version="1.0" encoding="utf-8"?>
@@ -1082,9 +1054,9 @@
           <a:bodyPr wrap="square" anchor="t" anchorCtr="0"/>
           <a:lstStyle>
             <a:defPPr>
-              <a:defRPr>
+              <a:defRPr sz="1400" b="1">
                 <a:solidFill>
-                  <a:srgbClr val="FFFFFF"/>
+                  <a:srgbClr val="3B82F6"/>
                 </a:solidFill>
               </a:defRPr>
             </a:defPPr>
@@ -1120,11 +1092,7 @@
           <a:bodyPr wrap="square" anchor="t" anchorCtr="0"/>
           <a:lstStyle>
             <a:defPPr>
-              <a:defRPr>
-                <a:solidFill>
-                  <a:srgbClr val="FFFFFF"/>
-                </a:solidFill>
-              </a:defRPr>
+              <a:defRPr sz="4400"/>
             </a:defPPr>
           </a:lstStyle>
           <a:p>
@@ -1158,7 +1126,7 @@
           <a:bodyPr wrap="square" anchor="t" anchorCtr="0"/>
           <a:lstStyle>
             <a:defPPr>
-              <a:defRPr>
+              <a:defRPr sz="1800">
                 <a:solidFill>
                   <a:srgbClr val="CADCFC"/>
                 </a:solidFill>
@@ -1196,7 +1164,7 @@
           <a:bodyPr wrap="square" anchor="t" anchorCtr="0"/>
           <a:lstStyle>
             <a:defPPr>
-              <a:defRPr>
+              <a:defRPr sz="1300">
                 <a:solidFill>
                   <a:srgbClr val="CADCFC"/>
                 </a:solidFill>
@@ -1238,7 +1206,7 @@
           <a:bodyPr wrap="square" anchor="t" anchorCtr="0"/>
           <a:lstStyle>
             <a:defPPr>
-              <a:defRPr>
+              <a:defRPr sz="1100">
                 <a:solidFill>
                   <a:srgbClr val="CADCFC"/>
                 </a:solidFill>
@@ -1263,44 +1231,44 @@
 </file>
 
 <file path=ppt/slideLayouts/slideLayout20.xml><?xml version='1.0' encoding='UTF-8' standalone='yes'?>
-<ns0:sldLayout xmlns:ns0="http://schemas.openxmlformats.org/presentationml/2006/main" type="blank" preserve="1"><ns0:cSld name="Chart.2Chart.Equal"><ns0:spTree><ns0:nvGrpSpPr><ns0:cNvPr id="1" name=""/><ns0:cNvGrpSpPr/><ns0:nvPr/></ns0:nvGrpSpPr><ns0:grpSpPr><ns1:xfrm xmlns:ns1="http://schemas.openxmlformats.org/drawingml/2006/main"><ns1:off x="0" y="0"/><ns1:ext cx="0" cy="0"/><ns1:chOff x="0" y="0"/><ns1:chExt cx="0" cy="0"/></ns1:xfrm></ns0:grpSpPr><ns0:sp><ns0:nvSpPr><ns0:cNvPr id="2" name="HeaderBar"/><ns0:cNvSpPr><ns1:spLocks xmlns:ns1="http://schemas.openxmlformats.org/drawingml/2006/main" noGrp="1" noSelect="0" noRot="1" noMove="1"/></ns0:cNvSpPr><ns0:nvPr/></ns0:nvSpPr><ns0:spPr><ns2:xfrm xmlns:ns2="http://schemas.openxmlformats.org/drawingml/2006/main"><ns2:off x="0" y="0"/><ns2:ext cx="12192000" cy="1051560"/></ns2:xfrm><ns3:prstGeom xmlns:ns3="http://schemas.openxmlformats.org/drawingml/2006/main" prst="rect"/><ns4:solidFill xmlns:ns4="http://schemas.openxmlformats.org/drawingml/2006/main"><ns4:srgbClr val="1E2761"/></ns4:solidFill><ns5:ln xmlns:ns5="http://schemas.openxmlformats.org/drawingml/2006/main"><ns5:noFill/></ns5:ln></ns0:spPr></ns0:sp><ns0:sp><ns0:nvSpPr><ns0:cNvPr id="10" name="SlideTitle.Header"/><ns0:cNvSpPr><ns1:spLocks xmlns:ns1="http://schemas.openxmlformats.org/drawingml/2006/main" noGrp="1"/></ns0:cNvSpPr><ns0:nvPr><ns0:ph idx="15" type="body"/></ns0:nvPr></ns0:nvSpPr><ns0:spPr><ns2:xfrm xmlns:ns2="http://schemas.openxmlformats.org/drawingml/2006/main"><ns2:off x="731520" y="91440"/><ns2:ext cx="9144000" cy="475488"/></ns2:xfrm></ns0:spPr><ns0:txBody><ns3:bodyPr xmlns:ns3="http://schemas.openxmlformats.org/drawingml/2006/main" wrap="square" anchor="t" anchorCtr="0"/><ns4:lstStyle xmlns:ns4="http://schemas.openxmlformats.org/drawingml/2006/main"><ns4:defPPr algn="l"><ns4:buNone/><ns4:defRPr sz="2800" dirty="0" b="1"><ns4:solidFill><ns4:srgbClr val="FFFFFF"/></ns4:solidFill><ns4:latin typeface="Georgia"/><ns4:ea typeface="Georgia"/></ns4:defRPr></ns4:defPPr><ns4:lvl1pPr algn="l"><ns4:buNone/><ns4:defRPr sz="2800" dirty="0" b="1"><ns4:solidFill><ns4:srgbClr val="FFFFFF"/></ns4:solidFill><ns4:latin typeface="Georgia"/><ns4:ea typeface="Georgia"/></ns4:defRPr></ns4:lvl1pPr><ns4:lvl2pPr algn="l"><ns4:buNone/><ns4:defRPr sz="2800" dirty="0" b="1"><ns4:solidFill><ns4:srgbClr val="FFFFFF"/></ns4:solidFill><ns4:latin typeface="Georgia"/><ns4:ea typeface="Georgia"/></ns4:defRPr></ns4:lvl2pPr><ns4:lvl3pPr algn="l"><ns4:buNone/><ns4:defRPr sz="2800" dirty="0" b="1"><ns4:solidFill><ns4:srgbClr val="FFFFFF"/></ns4:solidFill><ns4:latin typeface="Georgia"/><ns4:ea typeface="Georgia"/></ns4:defRPr></ns4:lvl3pPr><ns4:lvl4pPr algn="l"><ns4:buNone/><ns4:defRPr sz="2800" dirty="0" b="1"><ns4:solidFill><ns4:srgbClr val="FFFFFF"/></ns4:solidFill><ns4:latin typeface="Georgia"/><ns4:ea typeface="Georgia"/></ns4:defRPr></ns4:lvl4pPr><ns4:lvl5pPr algn="l"><ns4:buNone/><ns4:defRPr sz="2800" dirty="0" b="1"><ns4:solidFill><ns4:srgbClr val="FFFFFF"/></ns4:solidFill><ns4:latin typeface="Georgia"/><ns4:ea typeface="Georgia"/></ns4:defRPr></ns4:lvl5pPr><ns4:lvl6pPr algn="l"><ns4:buNone/><ns4:defRPr sz="2800" dirty="0" b="1"><ns4:solidFill><ns4:srgbClr val="FFFFFF"/></ns4:solidFill><ns4:latin typeface="Georgia"/><ns4:ea typeface="Georgia"/></ns4:defRPr></ns4:lvl6pPr><ns4:lvl7pPr algn="l"><ns4:buNone/><ns4:defRPr sz="2800" dirty="0" b="1"><ns4:solidFill><ns4:srgbClr val="FFFFFF"/></ns4:solidFill><ns4:latin typeface="Georgia"/><ns4:ea typeface="Georgia"/></ns4:defRPr></ns4:lvl7pPr><ns4:lvl8pPr algn="l"><ns4:buNone/><ns4:defRPr sz="2800" dirty="0" b="1"><ns4:solidFill><ns4:srgbClr val="FFFFFF"/></ns4:solidFill><ns4:latin typeface="Georgia"/><ns4:ea typeface="Georgia"/></ns4:defRPr></ns4:lvl8pPr><ns4:lvl9pPr algn="l"><ns4:buNone/><ns4:defRPr sz="2800" dirty="0" b="1"><ns4:solidFill><ns4:srgbClr val="FFFFFF"/></ns4:solidFill><ns4:latin typeface="Georgia"/><ns4:ea typeface="Georgia"/></ns4:defRPr></ns4:lvl9pPr></ns4:lstStyle/><ns5:p xmlns:ns5="http://schemas.openxmlformats.org/drawingml/2006/main"><ns5:pPr algn="l"><ns5:buNone/></ns5:pPr><ns5:r><ns5:rPr lang="ja-JP"/><ns5:t>サブタイトル</ns5:t></ns5:r></ns5:p></ns0:txBody></ns0:sp><ns0:sp><ns0:nvSpPr><ns0:cNvPr id="5" name="ChartL"/><ns0:cNvSpPr><ns1:spLocks xmlns:ns1="http://schemas.openxmlformats.org/drawingml/2006/main" noGrp="1" noSelect="0" noRot="1" noMove="1"/></ns0:cNvSpPr><ns0:nvPr/></ns0:nvSpPr><ns0:spPr><ns2:xfrm xmlns:ns2="http://schemas.openxmlformats.org/drawingml/2006/main"><ns2:off x="457200" y="1280160"/><ns2:ext cx="5394960" cy="4937760"/></ns2:xfrm><ns3:prstGeom xmlns:ns3="http://schemas.openxmlformats.org/drawingml/2006/main" prst="roundRect"><ns3:avLst><ns3:gd name="adj" fmla="val 6000"/></ns3:avLst></ns3:prstGeom><ns4:solidFill xmlns:ns4="http://schemas.openxmlformats.org/drawingml/2006/main"><ns4:srgbClr val="EDF0F7"/></ns4:solidFill><ns5:ln xmlns:ns5="http://schemas.openxmlformats.org/drawingml/2006/main"><ns5:noFill/></ns5:ln></ns0:spPr></ns0:sp><ns0:sp><ns0:nvSpPr><ns0:cNvPr id="6" name="ChartR"/><ns0:cNvSpPr><ns1:spLocks xmlns:ns1="http://schemas.openxmlformats.org/drawingml/2006/main" noGrp="1" noSelect="0" noRot="1" noMove="1"/></ns0:cNvSpPr><ns0:nvPr/></ns0:nvSpPr><ns0:spPr><ns2:xfrm xmlns:ns2="http://schemas.openxmlformats.org/drawingml/2006/main"><ns2:off x="6126480" y="1280160"/><ns2:ext cx="5394960" cy="4937760"/></ns2:xfrm><ns3:prstGeom xmlns:ns3="http://schemas.openxmlformats.org/drawingml/2006/main" prst="roundRect"><ns3:avLst><ns3:gd name="adj" fmla="val 6000"/></ns3:avLst></ns3:prstGeom><ns4:solidFill xmlns:ns4="http://schemas.openxmlformats.org/drawingml/2006/main"><ns4:srgbClr val="EDF0F7"/></ns4:solidFill><ns5:ln xmlns:ns5="http://schemas.openxmlformats.org/drawingml/2006/main"><ns5:noFill/></ns5:ln></ns0:spPr></ns0:sp><ns0:sp><ns0:nvSpPr><ns0:cNvPr id="20" name="Body1.Left"/><ns0:cNvSpPr><ns1:spLocks xmlns:ns1="http://schemas.openxmlformats.org/drawingml/2006/main" noGrp="1"/></ns0:cNvSpPr><ns0:nvPr><ns0:ph idx="1" type="body"/></ns0:nvPr></ns0:nvSpPr><ns0:spPr><ns2:xfrm xmlns:ns2="http://schemas.openxmlformats.org/drawingml/2006/main"><ns2:off x="731520" y="1463040"/><ns2:ext cx="4846320" cy="4572000"/></ns2:xfrm></ns0:spPr><ns0:txBody><ns3:bodyPr xmlns:ns3="http://schemas.openxmlformats.org/drawingml/2006/main" wrap="square" anchor="t" anchorCtr="0"/><ns4:lstStyle xmlns:ns4="http://schemas.openxmlformats.org/drawingml/2006/main"><ns4:defPPr algn="ctr"><ns4:buNone/><ns4:defRPr sz="1400" dirty="0"><ns4:solidFill><ns4:srgbClr val="94A3B8"/></ns4:solidFill><ns4:latin typeface="Calibri"/><ns4:ea typeface="Calibri"/></ns4:defRPr></ns4:defPPr><ns4:lvl1pPr algn="ctr"><ns4:buNone/><ns4:defRPr sz="1400" dirty="0"><ns4:solidFill><ns4:srgbClr val="94A3B8"/></ns4:solidFill><ns4:latin typeface="Calibri"/><ns4:ea typeface="Calibri"/></ns4:defRPr></ns4:lvl1pPr><ns4:lvl2pPr algn="ctr"><ns4:buNone/><ns4:defRPr sz="1400" dirty="0"><ns4:solidFill><ns4:srgbClr val="94A3B8"/></ns4:solidFill><ns4:latin typeface="Calibri"/><ns4:ea typeface="Calibri"/></ns4:defRPr></ns4:lvl2pPr><ns4:lvl3pPr algn="ctr"><ns4:buNone/><ns4:defRPr sz="1400" dirty="0"><ns4:solidFill><ns4:srgbClr val="94A3B8"/></ns4:solidFill><ns4:latin typeface="Calibri"/><ns4:ea typeface="Calibri"/></ns4:defRPr></ns4:lvl3pPr><ns4:lvl4pPr algn="ctr"><ns4:buNone/><ns4:defRPr sz="1400" dirty="0"><ns4:solidFill><ns4:srgbClr val="94A3B8"/></ns4:solidFill><ns4:latin typeface="Calibri"/><ns4:ea typeface="Calibri"/></ns4:defRPr></ns4:lvl4pPr><ns4:lvl5pPr algn="ctr"><ns4:buNone/><ns4:defRPr sz="1400" dirty="0"><ns4:solidFill><ns4:srgbClr val="94A3B8"/></ns4:solidFill><ns4:latin typeface="Calibri"/><ns4:ea typeface="Calibri"/></ns4:defRPr></ns4:lvl5pPr><ns4:lvl6pPr algn="ctr"><ns4:buNone/><ns4:defRPr sz="1400" dirty="0"><ns4:solidFill><ns4:srgbClr val="94A3B8"/></ns4:solidFill><ns4:latin typeface="Calibri"/><ns4:ea typeface="Calibri"/></ns4:defRPr></ns4:lvl6pPr><ns4:lvl7pPr algn="ctr"><ns4:buNone/><ns4:defRPr sz="1400" dirty="0"><ns4:solidFill><ns4:srgbClr val="94A3B8"/></ns4:solidFill><ns4:latin typeface="Calibri"/><ns4:ea typeface="Calibri"/></ns4:defRPr></ns4:lvl7pPr><ns4:lvl8pPr algn="ctr"><ns4:buNone/><ns4:defRPr sz="1400" dirty="0"><ns4:solidFill><ns4:srgbClr val="94A3B8"/></ns4:solidFill><ns4:latin typeface="Calibri"/><ns4:ea typeface="Calibri"/></ns4:defRPr></ns4:lvl8pPr><ns4:lvl9pPr algn="ctr"><ns4:buNone/><ns4:defRPr sz="1400" dirty="0"><ns4:solidFill><ns4:srgbClr val="94A3B8"/></ns4:solidFill><ns4:latin typeface="Calibri"/><ns4:ea typeface="Calibri"/></ns4:defRPr></ns4:lvl9pPr></ns4:lstStyle/><ns5:p xmlns:ns5="http://schemas.openxmlformats.org/drawingml/2006/main"><ns5:pPr algn="ctr"><ns5:buNone/></ns5:pPr><ns5:r><ns5:rPr lang="ja-JP"/><ns5:t>チャート 2</ns5:t></ns5:r></ns5:p></ns0:txBody></ns0:sp><ns0:sp><ns0:nvSpPr><ns0:cNvPr id="30" name="SlideNum.Footer"/><ns0:cNvSpPr><ns1:spLocks xmlns:ns1="http://schemas.openxmlformats.org/drawingml/2006/main" noGrp="1"/></ns0:cNvSpPr><ns0:nvPr><ns0:ph idx="50" type="sldNum"/></ns0:nvPr></ns0:nvSpPr><ns0:spPr><ns2:xfrm xmlns:ns2="http://schemas.openxmlformats.org/drawingml/2006/main"><ns2:off x="10972800" y="6446520"/><ns2:ext cx="1097280" cy="274320"/></ns2:xfrm></ns0:spPr><ns0:txBody><ns3:bodyPr xmlns:ns3="http://schemas.openxmlformats.org/drawingml/2006/main" wrap="square" anchor="t" anchorCtr="0"/><ns4:lstStyle xmlns:ns4="http://schemas.openxmlformats.org/drawingml/2006/main"><ns4:defPPr algn="r"><ns4:buNone/><ns4:defRPr sz="1000" dirty="0"><ns4:solidFill><ns4:srgbClr val="94A3B8"/></ns4:solidFill><ns4:latin typeface="Calibri"/><ns4:ea typeface="Calibri"/></ns4:defRPr></ns4:defPPr><ns4:lvl1pPr algn="r"><ns4:buNone/><ns4:defRPr sz="1000" dirty="0"><ns4:solidFill><ns4:srgbClr val="94A3B8"/></ns4:solidFill><ns4:latin typeface="Calibri"/><ns4:ea typeface="Calibri"/></ns4:defRPr></ns4:lvl1pPr><ns4:lvl2pPr algn="r"><ns4:buNone/><ns4:defRPr sz="1000" dirty="0"><ns4:solidFill><ns4:srgbClr val="94A3B8"/></ns4:solidFill><ns4:latin typeface="Calibri"/><ns4:ea typeface="Calibri"/></ns4:defRPr></ns4:lvl2pPr><ns4:lvl3pPr algn="r"><ns4:buNone/><ns4:defRPr sz="1000" dirty="0"><ns4:solidFill><ns4:srgbClr val="94A3B8"/></ns4:solidFill><ns4:latin typeface="Calibri"/><ns4:ea typeface="Calibri"/></ns4:defRPr></ns4:lvl3pPr><ns4:lvl4pPr algn="r"><ns4:buNone/><ns4:defRPr sz="1000" dirty="0"><ns4:solidFill><ns4:srgbClr val="94A3B8"/></ns4:solidFill><ns4:latin typeface="Calibri"/><ns4:ea typeface="Calibri"/></ns4:defRPr></ns4:lvl4pPr><ns4:lvl5pPr algn="r"><ns4:buNone/><ns4:defRPr sz="1000" dirty="0"><ns4:solidFill><ns4:srgbClr val="94A3B8"/></ns4:solidFill><ns4:latin typeface="Calibri"/><ns4:ea typeface="Calibri"/></ns4:defRPr></ns4:lvl5pPr><ns4:lvl6pPr algn="r"><ns4:buNone/><ns4:defRPr sz="1000" dirty="0"><ns4:solidFill><ns4:srgbClr val="94A3B8"/></ns4:solidFill><ns4:latin typeface="Calibri"/><ns4:ea typeface="Calibri"/></ns4:defRPr></ns4:lvl6pPr><ns4:lvl7pPr algn="r"><ns4:buNone/><ns4:defRPr sz="1000" dirty="0"><ns4:solidFill><ns4:srgbClr val="94A3B8"/></ns4:solidFill><ns4:latin typeface="Calibri"/><ns4:ea typeface="Calibri"/></ns4:defRPr></ns4:lvl7pPr><ns4:lvl8pPr algn="r"><ns4:buNone/><ns4:defRPr sz="1000" dirty="0"><ns4:solidFill><ns4:srgbClr val="94A3B8"/></ns4:solidFill><ns4:latin typeface="Calibri"/><ns4:ea typeface="Calibri"/></ns4:defRPr></ns4:lvl8pPr><ns4:lvl9pPr algn="r"><ns4:buNone/><ns4:defRPr sz="1000" dirty="0"><ns4:solidFill><ns4:srgbClr val="94A3B8"/></ns4:solidFill><ns4:latin typeface="Calibri"/><ns4:ea typeface="Calibri"/></ns4:defRPr></ns4:lvl9pPr></ns4:lstStyle><ns5:p xmlns:ns5="http://schemas.openxmlformats.org/drawingml/2006/main"><ns5:pPr algn="r"><ns5:buNone/></ns5:pPr><ns5:r><ns5:rPr lang="ja-JP"/><ns5:t>&lt;#&gt;</ns5:t></ns5:r></ns5:p></ns0:txBody></ns0:sp></ns0:spTree></ns0:cSld><ns0:clrMapOvr/></ns0:sldLayout>
+<ns0:sldLayout xmlns:ns0="http://schemas.openxmlformats.org/presentationml/2006/main" type="blank" preserve="1"><ns0:cSld name="Chart.2Chart.Equal"><ns0:spTree><ns0:nvGrpSpPr><ns0:cNvPr id="1" name=""/><ns0:cNvGrpSpPr/><ns0:nvPr/></ns0:nvGrpSpPr><ns0:grpSpPr><ns1:xfrm xmlns:ns1="http://schemas.openxmlformats.org/drawingml/2006/main"><ns1:off x="0" y="0"/><ns1:ext cx="0" cy="0"/><ns1:chOff x="0" y="0"/><ns1:chExt cx="0" cy="0"/></ns1:xfrm></ns0:grpSpPr><ns0:sp><ns0:nvSpPr><ns0:cNvPr id="2" name="HeaderBar"/><ns0:cNvSpPr><ns1:spLocks xmlns:ns1="http://schemas.openxmlformats.org/drawingml/2006/main" noGrp="1" noSelect="0" noRot="1" noMove="1"/></ns0:cNvSpPr><ns0:nvPr/></ns0:nvSpPr><ns0:spPr><ns2:xfrm xmlns:ns2="http://schemas.openxmlformats.org/drawingml/2006/main"><ns2:off x="0" y="0"/><ns2:ext cx="12192000" cy="1051560"/></ns2:xfrm><ns3:prstGeom xmlns:ns3="http://schemas.openxmlformats.org/drawingml/2006/main" prst="rect"/><ns4:solidFill xmlns:ns4="http://schemas.openxmlformats.org/drawingml/2006/main"><ns4:srgbClr val="1E2761"/></ns4:solidFill><ns5:ln xmlns:ns5="http://schemas.openxmlformats.org/drawingml/2006/main"><ns5:noFill/></ns5:ln></ns0:spPr></ns0:sp><ns0:sp><ns0:nvSpPr><ns0:cNvPr id="10" name="SlideTitle.Header"/><ns0:cNvSpPr><ns1:spLocks xmlns:ns1="http://schemas.openxmlformats.org/drawingml/2006/main" noGrp="1"/></ns0:cNvSpPr><ns0:nvPr><ns0:ph idx="15" type="body"/></ns0:nvPr></ns0:nvSpPr><ns0:spPr><ns2:xfrm xmlns:ns2="http://schemas.openxmlformats.org/drawingml/2006/main"><ns2:off x="731520" y="91440"/><ns2:ext cx="9144000" cy="475488"/></ns2:xfrm></ns0:spPr><ns0:txBody><ns3:bodyPr xmlns:ns3="http://schemas.openxmlformats.org/drawingml/2006/main" wrap="square" anchor="t" anchorCtr="0"/><ns4:lstStyle><ns4:defPPr><ns4:defRPr sz="2800" b="1"><ns4:solidFill><ns4:srgbClr val="FFFFFF"/></ns4:solidFill></ns4:defRPr></ns4:defPPr></ns4:lstStyle><ns4:defPPr algn="l"><ns4:buNone/><ns4:defRPr sz="2800" dirty="0" b="1"><ns4:solidFill><ns4:srgbClr val="FFFFFF"/></ns4:solidFill><ns4:latin typeface="Georgia"/><ns4:ea typeface="Georgia"/></ns4:defRPr></ns4:defPPr><ns4:lvl1pPr algn="l"><ns4:buNone/><ns4:defRPr sz="2800" dirty="0" b="1"><ns4:solidFill><ns4:srgbClr val="FFFFFF"/></ns4:solidFill><ns4:latin typeface="Georgia"/><ns4:ea typeface="Georgia"/></ns4:defRPr></ns4:lvl1pPr><ns4:lvl2pPr algn="l"><ns4:buNone/><ns4:defRPr sz="2800" dirty="0" b="1"><ns4:solidFill><ns4:srgbClr val="FFFFFF"/></ns4:solidFill><ns4:latin typeface="Georgia"/><ns4:ea typeface="Georgia"/></ns4:defRPr></ns4:lvl2pPr><ns4:lvl3pPr algn="l"><ns4:buNone/><ns4:defRPr sz="2800" dirty="0" b="1"><ns4:solidFill><ns4:srgbClr val="FFFFFF"/></ns4:solidFill><ns4:latin typeface="Georgia"/><ns4:ea typeface="Georgia"/></ns4:defRPr></ns4:lvl3pPr><ns4:lvl4pPr algn="l"><ns4:buNone/><ns4:defRPr sz="2800" dirty="0" b="1"><ns4:solidFill><ns4:srgbClr val="FFFFFF"/></ns4:solidFill><ns4:latin typeface="Georgia"/><ns4:ea typeface="Georgia"/></ns4:defRPr></ns4:lvl4pPr><ns4:lvl5pPr algn="l"><ns4:buNone/><ns4:defRPr sz="2800" dirty="0" b="1"><ns4:solidFill><ns4:srgbClr val="FFFFFF"/></ns4:solidFill><ns4:latin typeface="Georgia"/><ns4:ea typeface="Georgia"/></ns4:defRPr></ns4:lvl5pPr><ns4:lvl6pPr algn="l"><ns4:buNone/><ns4:defRPr sz="2800" dirty="0" b="1"><ns4:solidFill><ns4:srgbClr val="FFFFFF"/></ns4:solidFill><ns4:latin typeface="Georgia"/><ns4:ea typeface="Georgia"/></ns4:defRPr></ns4:lvl6pPr><ns4:lvl7pPr algn="l"><ns4:buNone/><ns4:defRPr sz="2800" dirty="0" b="1"><ns4:solidFill><ns4:srgbClr val="FFFFFF"/></ns4:solidFill><ns4:latin typeface="Georgia"/><ns4:ea typeface="Georgia"/></ns4:defRPr></ns4:lvl7pPr><ns4:lvl8pPr algn="l"><ns4:buNone/><ns4:defRPr sz="2800" dirty="0" b="1"><ns4:solidFill><ns4:srgbClr val="FFFFFF"/></ns4:solidFill><ns4:latin typeface="Georgia"/><ns4:ea typeface="Georgia"/></ns4:defRPr></ns4:lvl8pPr><ns4:lvl9pPr algn="l"><ns4:buNone/><ns4:defRPr sz="2800" dirty="0" b="1"><ns4:solidFill><ns4:srgbClr val="FFFFFF"/></ns4:solidFill><ns4:latin typeface="Georgia"/><ns4:ea typeface="Georgia"/></ns4:defRPr></ns4:lvl9pPr></ns4:lstStyle/><ns5:p xmlns:ns5="http://schemas.openxmlformats.org/drawingml/2006/main"><ns5:pPr algn="l"><ns5:buNone/></ns5:pPr><ns5:r><ns5:rPr lang="ja-JP"/><ns5:t>サブタイトル</ns5:t></ns5:r></ns5:p></ns0:txBody></ns0:sp><ns0:sp><ns0:nvSpPr><ns0:cNvPr id="5" name="ChartL"/><ns0:cNvSpPr><ns1:spLocks xmlns:ns1="http://schemas.openxmlformats.org/drawingml/2006/main" noGrp="1" noSelect="0" noRot="1" noMove="1"/></ns0:cNvSpPr><ns0:nvPr/></ns0:nvSpPr><ns0:spPr><ns2:xfrm xmlns:ns2="http://schemas.openxmlformats.org/drawingml/2006/main"><ns2:off x="457200" y="1280160"/><ns2:ext cx="5394960" cy="4937760"/></ns2:xfrm><ns3:prstGeom xmlns:ns3="http://schemas.openxmlformats.org/drawingml/2006/main" prst="roundRect"><ns3:avLst><ns3:gd name="adj" fmla="val 6000"/></ns3:avLst></ns3:prstGeom><ns4:solidFill xmlns:ns4="http://schemas.openxmlformats.org/drawingml/2006/main"><ns4:srgbClr val="EDF0F7"/></ns4:solidFill><ns5:ln xmlns:ns5="http://schemas.openxmlformats.org/drawingml/2006/main"><ns5:noFill/></ns5:ln></ns0:spPr></ns0:sp><ns0:sp><ns0:nvSpPr><ns0:cNvPr id="6" name="ChartR"/><ns0:cNvSpPr><ns1:spLocks xmlns:ns1="http://schemas.openxmlformats.org/drawingml/2006/main" noGrp="1" noSelect="0" noRot="1" noMove="1"/></ns0:cNvSpPr><ns0:nvPr/></ns0:nvSpPr><ns0:spPr><ns2:xfrm xmlns:ns2="http://schemas.openxmlformats.org/drawingml/2006/main"><ns2:off x="6126480" y="1280160"/><ns2:ext cx="5394960" cy="4937760"/></ns2:xfrm><ns3:prstGeom xmlns:ns3="http://schemas.openxmlformats.org/drawingml/2006/main" prst="roundRect"><ns3:avLst><ns3:gd name="adj" fmla="val 6000"/></ns3:avLst></ns3:prstGeom><ns4:solidFill xmlns:ns4="http://schemas.openxmlformats.org/drawingml/2006/main"><ns4:srgbClr val="EDF0F7"/></ns4:solidFill><ns5:ln xmlns:ns5="http://schemas.openxmlformats.org/drawingml/2006/main"><ns5:noFill/></ns5:ln></ns0:spPr></ns0:sp><ns0:sp><ns0:nvSpPr><ns0:cNvPr id="20" name="Body1.Left"/><ns0:cNvSpPr><ns1:spLocks xmlns:ns1="http://schemas.openxmlformats.org/drawingml/2006/main" noGrp="1"/></ns0:cNvSpPr><ns0:nvPr><ns0:ph idx="1" type="body"/></ns0:nvPr></ns0:nvSpPr><ns0:spPr><ns2:xfrm xmlns:ns2="http://schemas.openxmlformats.org/drawingml/2006/main"><ns2:off x="731520" y="1463040"/><ns2:ext cx="4846320" cy="4572000"/></ns2:xfrm></ns0:spPr><ns0:txBody><ns3:bodyPr xmlns:ns3="http://schemas.openxmlformats.org/drawingml/2006/main" wrap="square" anchor="t" anchorCtr="0"/><ns4:lstStyle><ns4:defPPr algn="ctr"><ns4:defRPr><ns4:solidFill><ns4:srgbClr val="94A3B8"/></ns4:solidFill></ns4:defRPr></ns4:defPPr></ns4:lstStyle><ns4:defPPr algn="ctr"><ns4:buNone/><ns4:defRPr sz="1400" dirty="0"><ns4:solidFill><ns4:srgbClr val="94A3B8"/></ns4:solidFill><ns4:latin typeface="Calibri"/><ns4:ea typeface="Calibri"/></ns4:defRPr></ns4:defPPr><ns4:lvl1pPr algn="ctr"><ns4:buNone/><ns4:defRPr sz="1400" dirty="0"><ns4:solidFill><ns4:srgbClr val="94A3B8"/></ns4:solidFill><ns4:latin typeface="Calibri"/><ns4:ea typeface="Calibri"/></ns4:defRPr></ns4:lvl1pPr><ns4:lvl2pPr algn="ctr"><ns4:buNone/><ns4:defRPr sz="1400" dirty="0"><ns4:solidFill><ns4:srgbClr val="94A3B8"/></ns4:solidFill><ns4:latin typeface="Calibri"/><ns4:ea typeface="Calibri"/></ns4:defRPr></ns4:lvl2pPr><ns4:lvl3pPr algn="ctr"><ns4:buNone/><ns4:defRPr sz="1400" dirty="0"><ns4:solidFill><ns4:srgbClr val="94A3B8"/></ns4:solidFill><ns4:latin typeface="Calibri"/><ns4:ea typeface="Calibri"/></ns4:defRPr></ns4:lvl3pPr><ns4:lvl4pPr algn="ctr"><ns4:buNone/><ns4:defRPr sz="1400" dirty="0"><ns4:solidFill><ns4:srgbClr val="94A3B8"/></ns4:solidFill><ns4:latin typeface="Calibri"/><ns4:ea typeface="Calibri"/></ns4:defRPr></ns4:lvl4pPr><ns4:lvl5pPr algn="ctr"><ns4:buNone/><ns4:defRPr sz="1400" dirty="0"><ns4:solidFill><ns4:srgbClr val="94A3B8"/></ns4:solidFill><ns4:latin typeface="Calibri"/><ns4:ea typeface="Calibri"/></ns4:defRPr></ns4:lvl5pPr><ns4:lvl6pPr algn="ctr"><ns4:buNone/><ns4:defRPr sz="1400" dirty="0"><ns4:solidFill><ns4:srgbClr val="94A3B8"/></ns4:solidFill><ns4:latin typeface="Calibri"/><ns4:ea typeface="Calibri"/></ns4:defRPr></ns4:lvl6pPr><ns4:lvl7pPr algn="ctr"><ns4:buNone/><ns4:defRPr sz="1400" dirty="0"><ns4:solidFill><ns4:srgbClr val="94A3B8"/></ns4:solidFill><ns4:latin typeface="Calibri"/><ns4:ea typeface="Calibri"/></ns4:defRPr></ns4:lvl7pPr><ns4:lvl8pPr algn="ctr"><ns4:buNone/><ns4:defRPr sz="1400" dirty="0"><ns4:solidFill><ns4:srgbClr val="94A3B8"/></ns4:solidFill><ns4:latin typeface="Calibri"/><ns4:ea typeface="Calibri"/></ns4:defRPr></ns4:lvl8pPr><ns4:lvl9pPr algn="ctr"><ns4:buNone/><ns4:defRPr sz="1400" dirty="0"><ns4:solidFill><ns4:srgbClr val="94A3B8"/></ns4:solidFill><ns4:latin typeface="Calibri"/><ns4:ea typeface="Calibri"/></ns4:defRPr></ns4:lvl9pPr></ns4:lstStyle/><ns5:p xmlns:ns5="http://schemas.openxmlformats.org/drawingml/2006/main"><ns5:pPr algn="ctr"><ns5:buNone/></ns5:pPr><ns5:r><ns5:rPr lang="ja-JP"/><ns5:t>チャート 2</ns5:t></ns5:r></ns5:p></ns0:txBody></ns0:sp><ns0:sp><ns0:nvSpPr><ns0:cNvPr id="30" name="SlideNum.Footer"/><ns0:cNvSpPr><ns1:spLocks xmlns:ns1="http://schemas.openxmlformats.org/drawingml/2006/main" noGrp="1"/></ns0:cNvSpPr><ns0:nvPr><ns0:ph idx="50" type="sldNum"/></ns0:nvPr></ns0:nvSpPr><ns0:spPr><ns2:xfrm xmlns:ns2="http://schemas.openxmlformats.org/drawingml/2006/main"><ns2:off x="10972800" y="6446520"/><ns2:ext cx="1097280" cy="274320"/></ns2:xfrm></ns0:spPr><ns0:txBody><ns3:bodyPr xmlns:ns3="http://schemas.openxmlformats.org/drawingml/2006/main" wrap="square" anchor="t" anchorCtr="0"/><ns4:lstStyle><ns4:defPPr algn="r"><ns4:defRPr sz="1000"><ns4:solidFill><ns4:srgbClr val="94A3B8"/></ns4:solidFill></ns4:defRPr></ns4:defPPr></ns4:lstStyle><ns4:defPPr algn="r"><ns4:buNone/><ns4:defRPr sz="1000" dirty="0"><ns4:solidFill><ns4:srgbClr val="94A3B8"/></ns4:solidFill><ns4:latin typeface="Calibri"/><ns4:ea typeface="Calibri"/></ns4:defRPr></ns4:defPPr><ns4:lvl1pPr algn="r"><ns4:buNone/><ns4:defRPr sz="1000" dirty="0"><ns4:solidFill><ns4:srgbClr val="94A3B8"/></ns4:solidFill><ns4:latin typeface="Calibri"/><ns4:ea typeface="Calibri"/></ns4:defRPr></ns4:lvl1pPr><ns4:lvl2pPr algn="r"><ns4:buNone/><ns4:defRPr sz="1000" dirty="0"><ns4:solidFill><ns4:srgbClr val="94A3B8"/></ns4:solidFill><ns4:latin typeface="Calibri"/><ns4:ea typeface="Calibri"/></ns4:defRPr></ns4:lvl2pPr><ns4:lvl3pPr algn="r"><ns4:buNone/><ns4:defRPr sz="1000" dirty="0"><ns4:solidFill><ns4:srgbClr val="94A3B8"/></ns4:solidFill><ns4:latin typeface="Calibri"/><ns4:ea typeface="Calibri"/></ns4:defRPr></ns4:lvl3pPr><ns4:lvl4pPr algn="r"><ns4:buNone/><ns4:defRPr sz="1000" dirty="0"><ns4:solidFill><ns4:srgbClr val="94A3B8"/></ns4:solidFill><ns4:latin typeface="Calibri"/><ns4:ea typeface="Calibri"/></ns4:defRPr></ns4:lvl4pPr><ns4:lvl5pPr algn="r"><ns4:buNone/><ns4:defRPr sz="1000" dirty="0"><ns4:solidFill><ns4:srgbClr val="94A3B8"/></ns4:solidFill><ns4:latin typeface="Calibri"/><ns4:ea typeface="Calibri"/></ns4:defRPr></ns4:lvl5pPr><ns4:lvl6pPr algn="r"><ns4:buNone/><ns4:defRPr sz="1000" dirty="0"><ns4:solidFill><ns4:srgbClr val="94A3B8"/></ns4:solidFill><ns4:latin typeface="Calibri"/><ns4:ea typeface="Calibri"/></ns4:defRPr></ns4:lvl6pPr><ns4:lvl7pPr algn="r"><ns4:buNone/><ns4:defRPr sz="1000" dirty="0"><ns4:solidFill><ns4:srgbClr val="94A3B8"/></ns4:solidFill><ns4:latin typeface="Calibri"/><ns4:ea typeface="Calibri"/></ns4:defRPr></ns4:lvl7pPr><ns4:lvl8pPr algn="r"><ns4:buNone/><ns4:defRPr sz="1000" dirty="0"><ns4:solidFill><ns4:srgbClr val="94A3B8"/></ns4:solidFill><ns4:latin typeface="Calibri"/><ns4:ea typeface="Calibri"/></ns4:defRPr></ns4:lvl8pPr><ns4:lvl9pPr algn="r"><ns4:buNone/><ns4:defRPr sz="1000" dirty="0"><ns4:solidFill><ns4:srgbClr val="94A3B8"/></ns4:solidFill><ns4:latin typeface="Calibri"/><ns4:ea typeface="Calibri"/></ns4:defRPr></ns4:lvl9pPr></ns4:lstStyle><ns5:p xmlns:ns5="http://schemas.openxmlformats.org/drawingml/2006/main"><ns5:pPr algn="r"><ns5:buNone/></ns5:pPr><ns5:r><ns5:rPr lang="ja-JP"/><ns5:t>&lt;#&gt;</ns5:t></ns5:r></ns5:p></ns0:txBody></ns0:sp></ns0:spTree></ns0:cSld><ns0:clrMapOvr/></ns0:sldLayout>
 </file>
 
 <file path=ppt/slideLayouts/slideLayout21.xml><?xml version='1.0' encoding='UTF-8' standalone='yes'?>
-<ns0:sldLayout xmlns:ns0="http://schemas.openxmlformats.org/presentationml/2006/main" type="blank" preserve="1"><ns0:cSld name="Table.1Table.Single+1Source"><ns0:spTree><ns0:nvGrpSpPr><ns0:cNvPr id="1" name=""/><ns0:cNvGrpSpPr/><ns0:nvPr/></ns0:nvGrpSpPr><ns0:grpSpPr><ns1:xfrm xmlns:ns1="http://schemas.openxmlformats.org/drawingml/2006/main"><ns1:off x="0" y="0"/><ns1:ext cx="0" cy="0"/><ns1:chOff x="0" y="0"/><ns1:chExt cx="0" cy="0"/></ns1:xfrm></ns0:grpSpPr><ns0:sp><ns0:nvSpPr><ns0:cNvPr id="2" name="HeaderBar"/><ns0:cNvSpPr><ns1:spLocks xmlns:ns1="http://schemas.openxmlformats.org/drawingml/2006/main" noGrp="1" noSelect="0" noRot="1" noMove="1"/></ns0:cNvSpPr><ns0:nvPr/></ns0:nvSpPr><ns0:spPr><ns2:xfrm xmlns:ns2="http://schemas.openxmlformats.org/drawingml/2006/main"><ns2:off x="0" y="0"/><ns2:ext cx="12192000" cy="1051560"/></ns2:xfrm><ns3:prstGeom xmlns:ns3="http://schemas.openxmlformats.org/drawingml/2006/main" prst="rect"/><ns4:solidFill xmlns:ns4="http://schemas.openxmlformats.org/drawingml/2006/main"><ns4:srgbClr val="1E2761"/></ns4:solidFill><ns5:ln xmlns:ns5="http://schemas.openxmlformats.org/drawingml/2006/main"><ns5:noFill/></ns5:ln></ns0:spPr></ns0:sp><ns0:sp><ns0:nvSpPr><ns0:cNvPr id="10" name="SlideTitle.Header"/><ns0:cNvSpPr><ns1:spLocks xmlns:ns1="http://schemas.openxmlformats.org/drawingml/2006/main" noGrp="1"/></ns0:cNvSpPr><ns0:nvPr><ns0:ph idx="15" type="body"/></ns0:nvPr></ns0:nvSpPr><ns0:spPr><ns2:xfrm xmlns:ns2="http://schemas.openxmlformats.org/drawingml/2006/main"><ns2:off x="731520" y="91440"/><ns2:ext cx="9144000" cy="475488"/></ns2:xfrm></ns0:spPr><ns0:txBody><ns3:bodyPr xmlns:ns3="http://schemas.openxmlformats.org/drawingml/2006/main" wrap="square" anchor="t" anchorCtr="0"/><ns4:lstStyle xmlns:ns4="http://schemas.openxmlformats.org/drawingml/2006/main"><ns4:defPPr algn="l"><ns4:buNone/><ns4:defRPr sz="2800" dirty="0" b="1"><ns4:solidFill><ns4:srgbClr val="FFFFFF"/></ns4:solidFill><ns4:latin typeface="Georgia"/><ns4:ea typeface="Georgia"/></ns4:defRPr></ns4:defPPr><ns4:lvl1pPr algn="l"><ns4:buNone/><ns4:defRPr sz="2800" dirty="0" b="1"><ns4:solidFill><ns4:srgbClr val="FFFFFF"/></ns4:solidFill><ns4:latin typeface="Georgia"/><ns4:ea typeface="Georgia"/></ns4:defRPr></ns4:lvl1pPr><ns4:lvl2pPr algn="l"><ns4:buNone/><ns4:defRPr sz="2800" dirty="0" b="1"><ns4:solidFill><ns4:srgbClr val="FFFFFF"/></ns4:solidFill><ns4:latin typeface="Georgia"/><ns4:ea typeface="Georgia"/></ns4:defRPr></ns4:lvl2pPr><ns4:lvl3pPr algn="l"><ns4:buNone/><ns4:defRPr sz="2800" dirty="0" b="1"><ns4:solidFill><ns4:srgbClr val="FFFFFF"/></ns4:solidFill><ns4:latin typeface="Georgia"/><ns4:ea typeface="Georgia"/></ns4:defRPr></ns4:lvl3pPr><ns4:lvl4pPr algn="l"><ns4:buNone/><ns4:defRPr sz="2800" dirty="0" b="1"><ns4:solidFill><ns4:srgbClr val="FFFFFF"/></ns4:solidFill><ns4:latin typeface="Georgia"/><ns4:ea typeface="Georgia"/></ns4:defRPr></ns4:lvl4pPr><ns4:lvl5pPr algn="l"><ns4:buNone/><ns4:defRPr sz="2800" dirty="0" b="1"><ns4:solidFill><ns4:srgbClr val="FFFFFF"/></ns4:solidFill><ns4:latin typeface="Georgia"/><ns4:ea typeface="Georgia"/></ns4:defRPr></ns4:lvl5pPr><ns4:lvl6pPr algn="l"><ns4:buNone/><ns4:defRPr sz="2800" dirty="0" b="1"><ns4:solidFill><ns4:srgbClr val="FFFFFF"/></ns4:solidFill><ns4:latin typeface="Georgia"/><ns4:ea typeface="Georgia"/></ns4:defRPr></ns4:lvl6pPr><ns4:lvl7pPr algn="l"><ns4:buNone/><ns4:defRPr sz="2800" dirty="0" b="1"><ns4:solidFill><ns4:srgbClr val="FFFFFF"/></ns4:solidFill><ns4:latin typeface="Georgia"/><ns4:ea typeface="Georgia"/></ns4:defRPr></ns4:lvl7pPr><ns4:lvl8pPr algn="l"><ns4:buNone/><ns4:defRPr sz="2800" dirty="0" b="1"><ns4:solidFill><ns4:srgbClr val="FFFFFF"/></ns4:solidFill><ns4:latin typeface="Georgia"/><ns4:ea typeface="Georgia"/></ns4:defRPr></ns4:lvl8pPr><ns4:lvl9pPr algn="l"><ns4:buNone/><ns4:defRPr sz="2800" dirty="0" b="1"><ns4:solidFill><ns4:srgbClr val="FFFFFF"/></ns4:solidFill><ns4:latin typeface="Georgia"/><ns4:ea typeface="Georgia"/></ns4:defRPr></ns4:lvl9pPr></ns4:lstStyle/><ns5:p xmlns:ns5="http://schemas.openxmlformats.org/drawingml/2006/main"><ns5:pPr algn="l"><ns5:buNone/></ns5:pPr><ns5:r><ns5:rPr lang="ja-JP"/><ns5:t>サブタイトル</ns5:t></ns5:r></ns5:p></ns0:txBody></ns0:sp><ns0:sp><ns0:nvSpPr><ns0:cNvPr id="20" name="Body.Center"/><ns0:cNvSpPr><ns1:spLocks xmlns:ns1="http://schemas.openxmlformats.org/drawingml/2006/main" noGrp="1"/></ns0:cNvSpPr><ns0:nvPr><ns0:ph idx="1" type="body"/></ns0:nvPr></ns0:nvSpPr><ns0:spPr><ns2:xfrm xmlns:ns2="http://schemas.openxmlformats.org/drawingml/2006/main"><ns2:off x="457200" y="1325880"/><ns2:ext cx="11247120" cy="4572000"/></ns2:xfrm></ns0:spPr><ns0:txBody><ns3:bodyPr xmlns:ns3="http://schemas.openxmlformats.org/drawingml/2006/main" wrap="square" anchor="t" anchorCtr="0"/><ns4:lstStyle xmlns:ns4="http://schemas.openxmlformats.org/drawingml/2006/main"><ns4:defPPr algn="l"><ns4:buNone/><ns4:defRPr sz="1400" dirty="0"><ns4:solidFill><ns4:srgbClr val="1E293B"/></ns4:solidFill><ns4:latin typeface="Calibri"/><ns4:ea typeface="Calibri"/></ns4:defRPr></ns4:defPPr><ns4:lvl1pPr algn="l"><ns4:buNone/><ns4:defRPr sz="1400" dirty="0"><ns4:solidFill><ns4:srgbClr val="1E293B"/></ns4:solidFill><ns4:latin typeface="Calibri"/><ns4:ea typeface="Calibri"/></ns4:defRPr></ns4:lvl1pPr><ns4:lvl2pPr algn="l"><ns4:buNone/><ns4:defRPr sz="1400" dirty="0"><ns4:solidFill><ns4:srgbClr val="1E293B"/></ns4:solidFill><ns4:latin typeface="Calibri"/><ns4:ea typeface="Calibri"/></ns4:defRPr></ns4:lvl2pPr><ns4:lvl3pPr algn="l"><ns4:buNone/><ns4:defRPr sz="1400" dirty="0"><ns4:solidFill><ns4:srgbClr val="1E293B"/></ns4:solidFill><ns4:latin typeface="Calibri"/><ns4:ea typeface="Calibri"/></ns4:defRPr></ns4:lvl3pPr><ns4:lvl4pPr algn="l"><ns4:buNone/><ns4:defRPr sz="1400" dirty="0"><ns4:solidFill><ns4:srgbClr val="1E293B"/></ns4:solidFill><ns4:latin typeface="Calibri"/><ns4:ea typeface="Calibri"/></ns4:defRPr></ns4:lvl4pPr><ns4:lvl5pPr algn="l"><ns4:buNone/><ns4:defRPr sz="1400" dirty="0"><ns4:solidFill><ns4:srgbClr val="1E293B"/></ns4:solidFill><ns4:latin typeface="Calibri"/><ns4:ea typeface="Calibri"/></ns4:defRPr></ns4:lvl5pPr><ns4:lvl6pPr algn="l"><ns4:buNone/><ns4:defRPr sz="1400" dirty="0"><ns4:solidFill><ns4:srgbClr val="1E293B"/></ns4:solidFill><ns4:latin typeface="Calibri"/><ns4:ea typeface="Calibri"/></ns4:defRPr></ns4:lvl6pPr><ns4:lvl7pPr algn="l"><ns4:buNone/><ns4:defRPr sz="1400" dirty="0"><ns4:solidFill><ns4:srgbClr val="1E293B"/></ns4:solidFill><ns4:latin typeface="Calibri"/><ns4:ea typeface="Calibri"/></ns4:defRPr></ns4:lvl7pPr><ns4:lvl8pPr algn="l"><ns4:buNone/><ns4:defRPr sz="1400" dirty="0"><ns4:solidFill><ns4:srgbClr val="1E293B"/></ns4:solidFill><ns4:latin typeface="Calibri"/><ns4:ea typeface="Calibri"/></ns4:defRPr></ns4:lvl8pPr><ns4:lvl9pPr algn="l"><ns4:buNone/><ns4:defRPr sz="1400" dirty="0"><ns4:solidFill><ns4:srgbClr val="1E293B"/></ns4:solidFill><ns4:latin typeface="Calibri"/><ns4:ea typeface="Calibri"/></ns4:defRPr></ns4:lvl9pPr></ns4:lstStyle/><ns5:p xmlns:ns5="http://schemas.openxmlformats.org/drawingml/2006/main"><ns5:pPr algn="l"><ns5:buNone/></ns5:pPr><ns5:r><ns5:rPr lang="ja-JP"/><ns5:t>出典：</ns5:t></ns5:r></ns5:p></ns0:txBody></ns0:sp><ns0:sp><ns0:nvSpPr><ns0:cNvPr id="30" name="SlideNum.Footer"/><ns0:cNvSpPr><ns1:spLocks xmlns:ns1="http://schemas.openxmlformats.org/drawingml/2006/main" noGrp="1"/></ns0:cNvSpPr><ns0:nvPr><ns0:ph idx="50" type="sldNum"/></ns0:nvPr></ns0:nvSpPr><ns0:spPr><ns2:xfrm xmlns:ns2="http://schemas.openxmlformats.org/drawingml/2006/main"><ns2:off x="10972800" y="6446520"/><ns2:ext cx="1097280" cy="274320"/></ns2:xfrm></ns0:spPr><ns0:txBody><ns3:bodyPr xmlns:ns3="http://schemas.openxmlformats.org/drawingml/2006/main" wrap="square" anchor="t" anchorCtr="0"/><ns4:lstStyle xmlns:ns4="http://schemas.openxmlformats.org/drawingml/2006/main"><ns4:defPPr algn="r"><ns4:buNone/><ns4:defRPr sz="1000" dirty="0"><ns4:solidFill><ns4:srgbClr val="94A3B8"/></ns4:solidFill><ns4:latin typeface="Calibri"/><ns4:ea typeface="Calibri"/></ns4:defRPr></ns4:defPPr><ns4:lvl1pPr algn="r"><ns4:buNone/><ns4:defRPr sz="1000" dirty="0"><ns4:solidFill><ns4:srgbClr val="94A3B8"/></ns4:solidFill><ns4:latin typeface="Calibri"/><ns4:ea typeface="Calibri"/></ns4:defRPr></ns4:lvl1pPr><ns4:lvl2pPr algn="r"><ns4:buNone/><ns4:defRPr sz="1000" dirty="0"><ns4:solidFill><ns4:srgbClr val="94A3B8"/></ns4:solidFill><ns4:latin typeface="Calibri"/><ns4:ea typeface="Calibri"/></ns4:defRPr></ns4:lvl2pPr><ns4:lvl3pPr algn="r"><ns4:buNone/><ns4:defRPr sz="1000" dirty="0"><ns4:solidFill><ns4:srgbClr val="94A3B8"/></ns4:solidFill><ns4:latin typeface="Calibri"/><ns4:ea typeface="Calibri"/></ns4:defRPr></ns4:lvl3pPr><ns4:lvl4pPr algn="r"><ns4:buNone/><ns4:defRPr sz="1000" dirty="0"><ns4:solidFill><ns4:srgbClr val="94A3B8"/></ns4:solidFill><ns4:latin typeface="Calibri"/><ns4:ea typeface="Calibri"/></ns4:defRPr></ns4:lvl4pPr><ns4:lvl5pPr algn="r"><ns4:buNone/><ns4:defRPr sz="1000" dirty="0"><ns4:solidFill><ns4:srgbClr val="94A3B8"/></ns4:solidFill><ns4:latin typeface="Calibri"/><ns4:ea typeface="Calibri"/></ns4:defRPr></ns4:lvl5pPr><ns4:lvl6pPr algn="r"><ns4:buNone/><ns4:defRPr sz="1000" dirty="0"><ns4:solidFill><ns4:srgbClr val="94A3B8"/></ns4:solidFill><ns4:latin typeface="Calibri"/><ns4:ea typeface="Calibri"/></ns4:defRPr></ns4:lvl6pPr><ns4:lvl7pPr algn="r"><ns4:buNone/><ns4:defRPr sz="1000" dirty="0"><ns4:solidFill><ns4:srgbClr val="94A3B8"/></ns4:solidFill><ns4:latin typeface="Calibri"/><ns4:ea typeface="Calibri"/></ns4:defRPr></ns4:lvl7pPr><ns4:lvl8pPr algn="r"><ns4:buNone/><ns4:defRPr sz="1000" dirty="0"><ns4:solidFill><ns4:srgbClr val="94A3B8"/></ns4:solidFill><ns4:latin typeface="Calibri"/><ns4:ea typeface="Calibri"/></ns4:defRPr></ns4:lvl8pPr><ns4:lvl9pPr algn="r"><ns4:buNone/><ns4:defRPr sz="1000" dirty="0"><ns4:solidFill><ns4:srgbClr val="94A3B8"/></ns4:solidFill><ns4:latin typeface="Calibri"/><ns4:ea typeface="Calibri"/></ns4:defRPr></ns4:lvl9pPr></ns4:lstStyle><ns5:p xmlns:ns5="http://schemas.openxmlformats.org/drawingml/2006/main"><ns5:pPr algn="r"><ns5:buNone/></ns5:pPr><ns5:r><ns5:rPr lang="ja-JP"/><ns5:t>&lt;#&gt;</ns5:t></ns5:r></ns5:p></ns0:txBody></ns0:sp></ns0:spTree></ns0:cSld><ns0:clrMapOvr/></ns0:sldLayout>
+<ns0:sldLayout xmlns:ns0="http://schemas.openxmlformats.org/presentationml/2006/main" type="blank" preserve="1"><ns0:cSld name="Table.1Table.Single+1Source"><ns0:spTree><ns0:nvGrpSpPr><ns0:cNvPr id="1" name=""/><ns0:cNvGrpSpPr/><ns0:nvPr/></ns0:nvGrpSpPr><ns0:grpSpPr><ns1:xfrm xmlns:ns1="http://schemas.openxmlformats.org/drawingml/2006/main"><ns1:off x="0" y="0"/><ns1:ext cx="0" cy="0"/><ns1:chOff x="0" y="0"/><ns1:chExt cx="0" cy="0"/></ns1:xfrm></ns0:grpSpPr><ns0:sp><ns0:nvSpPr><ns0:cNvPr id="2" name="HeaderBar"/><ns0:cNvSpPr><ns1:spLocks xmlns:ns1="http://schemas.openxmlformats.org/drawingml/2006/main" noGrp="1" noSelect="0" noRot="1" noMove="1"/></ns0:cNvSpPr><ns0:nvPr/></ns0:nvSpPr><ns0:spPr><ns2:xfrm xmlns:ns2="http://schemas.openxmlformats.org/drawingml/2006/main"><ns2:off x="0" y="0"/><ns2:ext cx="12192000" cy="1051560"/></ns2:xfrm><ns3:prstGeom xmlns:ns3="http://schemas.openxmlformats.org/drawingml/2006/main" prst="rect"/><ns4:solidFill xmlns:ns4="http://schemas.openxmlformats.org/drawingml/2006/main"><ns4:srgbClr val="1E2761"/></ns4:solidFill><ns5:ln xmlns:ns5="http://schemas.openxmlformats.org/drawingml/2006/main"><ns5:noFill/></ns5:ln></ns0:spPr></ns0:sp><ns0:sp><ns0:nvSpPr><ns0:cNvPr id="10" name="SlideTitle.Header"/><ns0:cNvSpPr><ns1:spLocks xmlns:ns1="http://schemas.openxmlformats.org/drawingml/2006/main" noGrp="1"/></ns0:cNvSpPr><ns0:nvPr><ns0:ph idx="15" type="body"/></ns0:nvPr></ns0:nvSpPr><ns0:spPr><ns2:xfrm xmlns:ns2="http://schemas.openxmlformats.org/drawingml/2006/main"><ns2:off x="731520" y="91440"/><ns2:ext cx="9144000" cy="475488"/></ns2:xfrm></ns0:spPr><ns0:txBody><ns3:bodyPr xmlns:ns3="http://schemas.openxmlformats.org/drawingml/2006/main" wrap="square" anchor="t" anchorCtr="0"/><ns4:lstStyle><ns4:defPPr><ns4:defRPr sz="2800" b="1"><ns4:solidFill><ns4:srgbClr val="FFFFFF"/></ns4:solidFill></ns4:defRPr></ns4:defPPr></ns4:lstStyle><ns4:defPPr algn="l"><ns4:buNone/><ns4:defRPr sz="2800" dirty="0" b="1"><ns4:solidFill><ns4:srgbClr val="FFFFFF"/></ns4:solidFill><ns4:latin typeface="Georgia"/><ns4:ea typeface="Georgia"/></ns4:defRPr></ns4:defPPr><ns4:lvl1pPr algn="l"><ns4:buNone/><ns4:defRPr sz="2800" dirty="0" b="1"><ns4:solidFill><ns4:srgbClr val="FFFFFF"/></ns4:solidFill><ns4:latin typeface="Georgia"/><ns4:ea typeface="Georgia"/></ns4:defRPr></ns4:lvl1pPr><ns4:lvl2pPr algn="l"><ns4:buNone/><ns4:defRPr sz="2800" dirty="0" b="1"><ns4:solidFill><ns4:srgbClr val="FFFFFF"/></ns4:solidFill><ns4:latin typeface="Georgia"/><ns4:ea typeface="Georgia"/></ns4:defRPr></ns4:lvl2pPr><ns4:lvl3pPr algn="l"><ns4:buNone/><ns4:defRPr sz="2800" dirty="0" b="1"><ns4:solidFill><ns4:srgbClr val="FFFFFF"/></ns4:solidFill><ns4:latin typeface="Georgia"/><ns4:ea typeface="Georgia"/></ns4:defRPr></ns4:lvl3pPr><ns4:lvl4pPr algn="l"><ns4:buNone/><ns4:defRPr sz="2800" dirty="0" b="1"><ns4:solidFill><ns4:srgbClr val="FFFFFF"/></ns4:solidFill><ns4:latin typeface="Georgia"/><ns4:ea typeface="Georgia"/></ns4:defRPr></ns4:lvl4pPr><ns4:lvl5pPr algn="l"><ns4:buNone/><ns4:defRPr sz="2800" dirty="0" b="1"><ns4:solidFill><ns4:srgbClr val="FFFFFF"/></ns4:solidFill><ns4:latin typeface="Georgia"/><ns4:ea typeface="Georgia"/></ns4:defRPr></ns4:lvl5pPr><ns4:lvl6pPr algn="l"><ns4:buNone/><ns4:defRPr sz="2800" dirty="0" b="1"><ns4:solidFill><ns4:srgbClr val="FFFFFF"/></ns4:solidFill><ns4:latin typeface="Georgia"/><ns4:ea typeface="Georgia"/></ns4:defRPr></ns4:lvl6pPr><ns4:lvl7pPr algn="l"><ns4:buNone/><ns4:defRPr sz="2800" dirty="0" b="1"><ns4:solidFill><ns4:srgbClr val="FFFFFF"/></ns4:solidFill><ns4:latin typeface="Georgia"/><ns4:ea typeface="Georgia"/></ns4:defRPr></ns4:lvl7pPr><ns4:lvl8pPr algn="l"><ns4:buNone/><ns4:defRPr sz="2800" dirty="0" b="1"><ns4:solidFill><ns4:srgbClr val="FFFFFF"/></ns4:solidFill><ns4:latin typeface="Georgia"/><ns4:ea typeface="Georgia"/></ns4:defRPr></ns4:lvl8pPr><ns4:lvl9pPr algn="l"><ns4:buNone/><ns4:defRPr sz="2800" dirty="0" b="1"><ns4:solidFill><ns4:srgbClr val="FFFFFF"/></ns4:solidFill><ns4:latin typeface="Georgia"/><ns4:ea typeface="Georgia"/></ns4:defRPr></ns4:lvl9pPr></ns4:lstStyle/><ns5:p xmlns:ns5="http://schemas.openxmlformats.org/drawingml/2006/main"><ns5:pPr algn="l"><ns5:buNone/></ns5:pPr><ns5:r><ns5:rPr lang="ja-JP"/><ns5:t>サブタイトル</ns5:t></ns5:r></ns5:p></ns0:txBody></ns0:sp><ns0:sp><ns0:nvSpPr><ns0:cNvPr id="20" name="Body.Center"/><ns0:cNvSpPr><ns1:spLocks xmlns:ns1="http://schemas.openxmlformats.org/drawingml/2006/main" noGrp="1"/></ns0:cNvSpPr><ns0:nvPr><ns0:ph idx="1" type="body"/></ns0:nvPr></ns0:nvSpPr><ns0:spPr><ns2:xfrm xmlns:ns2="http://schemas.openxmlformats.org/drawingml/2006/main"><ns2:off x="457200" y="1325880"/><ns2:ext cx="11247120" cy="4572000"/></ns2:xfrm></ns0:spPr><ns0:txBody><ns3:bodyPr xmlns:ns3="http://schemas.openxmlformats.org/drawingml/2006/main" wrap="square" anchor="t" anchorCtr="0"/><ns4:lstStyle/><ns4:defPPr algn="l"><ns4:buNone/><ns4:defRPr sz="1400" dirty="0"><ns4:solidFill><ns4:srgbClr val="1E293B"/></ns4:solidFill><ns4:latin typeface="Calibri"/><ns4:ea typeface="Calibri"/></ns4:defRPr></ns4:defPPr><ns4:lvl1pPr algn="l"><ns4:buNone/><ns4:defRPr sz="1400" dirty="0"><ns4:solidFill><ns4:srgbClr val="1E293B"/></ns4:solidFill><ns4:latin typeface="Calibri"/><ns4:ea typeface="Calibri"/></ns4:defRPr></ns4:lvl1pPr><ns4:lvl2pPr algn="l"><ns4:buNone/><ns4:defRPr sz="1400" dirty="0"><ns4:solidFill><ns4:srgbClr val="1E293B"/></ns4:solidFill><ns4:latin typeface="Calibri"/><ns4:ea typeface="Calibri"/></ns4:defRPr></ns4:lvl2pPr><ns4:lvl3pPr algn="l"><ns4:buNone/><ns4:defRPr sz="1400" dirty="0"><ns4:solidFill><ns4:srgbClr val="1E293B"/></ns4:solidFill><ns4:latin typeface="Calibri"/><ns4:ea typeface="Calibri"/></ns4:defRPr></ns4:lvl3pPr><ns4:lvl4pPr algn="l"><ns4:buNone/><ns4:defRPr sz="1400" dirty="0"><ns4:solidFill><ns4:srgbClr val="1E293B"/></ns4:solidFill><ns4:latin typeface="Calibri"/><ns4:ea typeface="Calibri"/></ns4:defRPr></ns4:lvl4pPr><ns4:lvl5pPr algn="l"><ns4:buNone/><ns4:defRPr sz="1400" dirty="0"><ns4:solidFill><ns4:srgbClr val="1E293B"/></ns4:solidFill><ns4:latin typeface="Calibri"/><ns4:ea typeface="Calibri"/></ns4:defRPr></ns4:lvl5pPr><ns4:lvl6pPr algn="l"><ns4:buNone/><ns4:defRPr sz="1400" dirty="0"><ns4:solidFill><ns4:srgbClr val="1E293B"/></ns4:solidFill><ns4:latin typeface="Calibri"/><ns4:ea typeface="Calibri"/></ns4:defRPr></ns4:lvl6pPr><ns4:lvl7pPr algn="l"><ns4:buNone/><ns4:defRPr sz="1400" dirty="0"><ns4:solidFill><ns4:srgbClr val="1E293B"/></ns4:solidFill><ns4:latin typeface="Calibri"/><ns4:ea typeface="Calibri"/></ns4:defRPr></ns4:lvl7pPr><ns4:lvl8pPr algn="l"><ns4:buNone/><ns4:defRPr sz="1400" dirty="0"><ns4:solidFill><ns4:srgbClr val="1E293B"/></ns4:solidFill><ns4:latin typeface="Calibri"/><ns4:ea typeface="Calibri"/></ns4:defRPr></ns4:lvl8pPr><ns4:lvl9pPr algn="l"><ns4:buNone/><ns4:defRPr sz="1400" dirty="0"><ns4:solidFill><ns4:srgbClr val="1E293B"/></ns4:solidFill><ns4:latin typeface="Calibri"/><ns4:ea typeface="Calibri"/></ns4:defRPr></ns4:lvl9pPr></ns4:lstStyle/><ns5:p xmlns:ns5="http://schemas.openxmlformats.org/drawingml/2006/main"><ns5:pPr algn="l"><ns5:buNone/></ns5:pPr><ns5:r><ns5:rPr lang="ja-JP"/><ns5:t>出典：</ns5:t></ns5:r></ns5:p></ns0:txBody></ns0:sp><ns0:sp><ns0:nvSpPr><ns0:cNvPr id="30" name="SlideNum.Footer"/><ns0:cNvSpPr><ns1:spLocks xmlns:ns1="http://schemas.openxmlformats.org/drawingml/2006/main" noGrp="1"/></ns0:cNvSpPr><ns0:nvPr><ns0:ph idx="50" type="sldNum"/></ns0:nvPr></ns0:nvSpPr><ns0:spPr><ns2:xfrm xmlns:ns2="http://schemas.openxmlformats.org/drawingml/2006/main"><ns2:off x="10972800" y="6446520"/><ns2:ext cx="1097280" cy="274320"/></ns2:xfrm></ns0:spPr><ns0:txBody><ns3:bodyPr xmlns:ns3="http://schemas.openxmlformats.org/drawingml/2006/main" wrap="square" anchor="t" anchorCtr="0"/><ns4:lstStyle><ns4:defPPr algn="r"><ns4:defRPr sz="1000"><ns4:solidFill><ns4:srgbClr val="94A3B8"/></ns4:solidFill></ns4:defRPr></ns4:defPPr></ns4:lstStyle><ns4:defPPr algn="r"><ns4:buNone/><ns4:defRPr sz="1000" dirty="0"><ns4:solidFill><ns4:srgbClr val="94A3B8"/></ns4:solidFill><ns4:latin typeface="Calibri"/><ns4:ea typeface="Calibri"/></ns4:defRPr></ns4:defPPr><ns4:lvl1pPr algn="r"><ns4:buNone/><ns4:defRPr sz="1000" dirty="0"><ns4:solidFill><ns4:srgbClr val="94A3B8"/></ns4:solidFill><ns4:latin typeface="Calibri"/><ns4:ea typeface="Calibri"/></ns4:defRPr></ns4:lvl1pPr><ns4:lvl2pPr algn="r"><ns4:buNone/><ns4:defRPr sz="1000" dirty="0"><ns4:solidFill><ns4:srgbClr val="94A3B8"/></ns4:solidFill><ns4:latin typeface="Calibri"/><ns4:ea typeface="Calibri"/></ns4:defRPr></ns4:lvl2pPr><ns4:lvl3pPr algn="r"><ns4:buNone/><ns4:defRPr sz="1000" dirty="0"><ns4:solidFill><ns4:srgbClr val="94A3B8"/></ns4:solidFill><ns4:latin typeface="Calibri"/><ns4:ea typeface="Calibri"/></ns4:defRPr></ns4:lvl3pPr><ns4:lvl4pPr algn="r"><ns4:buNone/><ns4:defRPr sz="1000" dirty="0"><ns4:solidFill><ns4:srgbClr val="94A3B8"/></ns4:solidFill><ns4:latin typeface="Calibri"/><ns4:ea typeface="Calibri"/></ns4:defRPr></ns4:lvl4pPr><ns4:lvl5pPr algn="r"><ns4:buNone/><ns4:defRPr sz="1000" dirty="0"><ns4:solidFill><ns4:srgbClr val="94A3B8"/></ns4:solidFill><ns4:latin typeface="Calibri"/><ns4:ea typeface="Calibri"/></ns4:defRPr></ns4:lvl5pPr><ns4:lvl6pPr algn="r"><ns4:buNone/><ns4:defRPr sz="1000" dirty="0"><ns4:solidFill><ns4:srgbClr val="94A3B8"/></ns4:solidFill><ns4:latin typeface="Calibri"/><ns4:ea typeface="Calibri"/></ns4:defRPr></ns4:lvl6pPr><ns4:lvl7pPr algn="r"><ns4:buNone/><ns4:defRPr sz="1000" dirty="0"><ns4:solidFill><ns4:srgbClr val="94A3B8"/></ns4:solidFill><ns4:latin typeface="Calibri"/><ns4:ea typeface="Calibri"/></ns4:defRPr></ns4:lvl7pPr><ns4:lvl8pPr algn="r"><ns4:buNone/><ns4:defRPr sz="1000" dirty="0"><ns4:solidFill><ns4:srgbClr val="94A3B8"/></ns4:solidFill><ns4:latin typeface="Calibri"/><ns4:ea typeface="Calibri"/></ns4:defRPr></ns4:lvl8pPr><ns4:lvl9pPr algn="r"><ns4:buNone/><ns4:defRPr sz="1000" dirty="0"><ns4:solidFill><ns4:srgbClr val="94A3B8"/></ns4:solidFill><ns4:latin typeface="Calibri"/><ns4:ea typeface="Calibri"/></ns4:defRPr></ns4:lvl9pPr></ns4:lstStyle><ns5:p xmlns:ns5="http://schemas.openxmlformats.org/drawingml/2006/main"><ns5:pPr algn="r"><ns5:buNone/></ns5:pPr><ns5:r><ns5:rPr lang="ja-JP"/><ns5:t>&lt;#&gt;</ns5:t></ns5:r></ns5:p></ns0:txBody></ns0:sp></ns0:spTree></ns0:cSld><ns0:clrMapOvr/></ns0:sldLayout>
 </file>
 
 <file path=ppt/slideLayouts/slideLayout22.xml><?xml version='1.0' encoding='UTF-8' standalone='yes'?>
-<ns0:sldLayout xmlns:ns0="http://schemas.openxmlformats.org/presentationml/2006/main" type="blank" preserve="1"><ns0:cSld name="Table.1Table.Single+1Notes"><ns0:spTree><ns0:nvGrpSpPr><ns0:cNvPr id="1" name=""/><ns0:cNvGrpSpPr/><ns0:nvPr/></ns0:nvGrpSpPr><ns0:grpSpPr><ns1:xfrm xmlns:ns1="http://schemas.openxmlformats.org/drawingml/2006/main"><ns1:off x="0" y="0"/><ns1:ext cx="0" cy="0"/><ns1:chOff x="0" y="0"/><ns1:chExt cx="0" cy="0"/></ns1:xfrm></ns0:grpSpPr><ns0:sp><ns0:nvSpPr><ns0:cNvPr id="2" name="HeaderBar"/><ns0:cNvSpPr><ns1:spLocks xmlns:ns1="http://schemas.openxmlformats.org/drawingml/2006/main" noGrp="1" noSelect="0" noRot="1" noMove="1"/></ns0:cNvSpPr><ns0:nvPr/></ns0:nvSpPr><ns0:spPr><ns2:xfrm xmlns:ns2="http://schemas.openxmlformats.org/drawingml/2006/main"><ns2:off x="0" y="0"/><ns2:ext cx="12192000" cy="1051560"/></ns2:xfrm><ns3:prstGeom xmlns:ns3="http://schemas.openxmlformats.org/drawingml/2006/main" prst="rect"/><ns4:solidFill xmlns:ns4="http://schemas.openxmlformats.org/drawingml/2006/main"><ns4:srgbClr val="1E2761"/></ns4:solidFill><ns5:ln xmlns:ns5="http://schemas.openxmlformats.org/drawingml/2006/main"><ns5:noFill/></ns5:ln></ns0:spPr></ns0:sp><ns0:sp><ns0:nvSpPr><ns0:cNvPr id="10" name="SlideTitle.Header"/><ns0:cNvSpPr><ns1:spLocks xmlns:ns1="http://schemas.openxmlformats.org/drawingml/2006/main" noGrp="1"/></ns0:cNvSpPr><ns0:nvPr><ns0:ph idx="15" type="body"/></ns0:nvPr></ns0:nvSpPr><ns0:spPr><ns2:xfrm xmlns:ns2="http://schemas.openxmlformats.org/drawingml/2006/main"><ns2:off x="731520" y="91440"/><ns2:ext cx="9144000" cy="475488"/></ns2:xfrm></ns0:spPr><ns0:txBody><ns3:bodyPr xmlns:ns3="http://schemas.openxmlformats.org/drawingml/2006/main" wrap="square" anchor="t" anchorCtr="0"/><ns4:lstStyle xmlns:ns4="http://schemas.openxmlformats.org/drawingml/2006/main"><ns4:defPPr algn="l"><ns4:buNone/><ns4:defRPr sz="2800" dirty="0" b="1"><ns4:solidFill><ns4:srgbClr val="FFFFFF"/></ns4:solidFill><ns4:latin typeface="Georgia"/><ns4:ea typeface="Georgia"/></ns4:defRPr></ns4:defPPr><ns4:lvl1pPr algn="l"><ns4:buNone/><ns4:defRPr sz="2800" dirty="0" b="1"><ns4:solidFill><ns4:srgbClr val="FFFFFF"/></ns4:solidFill><ns4:latin typeface="Georgia"/><ns4:ea typeface="Georgia"/></ns4:defRPr></ns4:lvl1pPr><ns4:lvl2pPr algn="l"><ns4:buNone/><ns4:defRPr sz="2800" dirty="0" b="1"><ns4:solidFill><ns4:srgbClr val="FFFFFF"/></ns4:solidFill><ns4:latin typeface="Georgia"/><ns4:ea typeface="Georgia"/></ns4:defRPr></ns4:lvl2pPr><ns4:lvl3pPr algn="l"><ns4:buNone/><ns4:defRPr sz="2800" dirty="0" b="1"><ns4:solidFill><ns4:srgbClr val="FFFFFF"/></ns4:solidFill><ns4:latin typeface="Georgia"/><ns4:ea typeface="Georgia"/></ns4:defRPr></ns4:lvl3pPr><ns4:lvl4pPr algn="l"><ns4:buNone/><ns4:defRPr sz="2800" dirty="0" b="1"><ns4:solidFill><ns4:srgbClr val="FFFFFF"/></ns4:solidFill><ns4:latin typeface="Georgia"/><ns4:ea typeface="Georgia"/></ns4:defRPr></ns4:lvl4pPr><ns4:lvl5pPr algn="l"><ns4:buNone/><ns4:defRPr sz="2800" dirty="0" b="1"><ns4:solidFill><ns4:srgbClr val="FFFFFF"/></ns4:solidFill><ns4:latin typeface="Georgia"/><ns4:ea typeface="Georgia"/></ns4:defRPr></ns4:lvl5pPr><ns4:lvl6pPr algn="l"><ns4:buNone/><ns4:defRPr sz="2800" dirty="0" b="1"><ns4:solidFill><ns4:srgbClr val="FFFFFF"/></ns4:solidFill><ns4:latin typeface="Georgia"/><ns4:ea typeface="Georgia"/></ns4:defRPr></ns4:lvl6pPr><ns4:lvl7pPr algn="l"><ns4:buNone/><ns4:defRPr sz="2800" dirty="0" b="1"><ns4:solidFill><ns4:srgbClr val="FFFFFF"/></ns4:solidFill><ns4:latin typeface="Georgia"/><ns4:ea typeface="Georgia"/></ns4:defRPr></ns4:lvl7pPr><ns4:lvl8pPr algn="l"><ns4:buNone/><ns4:defRPr sz="2800" dirty="0" b="1"><ns4:solidFill><ns4:srgbClr val="FFFFFF"/></ns4:solidFill><ns4:latin typeface="Georgia"/><ns4:ea typeface="Georgia"/></ns4:defRPr></ns4:lvl8pPr><ns4:lvl9pPr algn="l"><ns4:buNone/><ns4:defRPr sz="2800" dirty="0" b="1"><ns4:solidFill><ns4:srgbClr val="FFFFFF"/></ns4:solidFill><ns4:latin typeface="Georgia"/><ns4:ea typeface="Georgia"/></ns4:defRPr></ns4:lvl9pPr></ns4:lstStyle/><ns5:p xmlns:ns5="http://schemas.openxmlformats.org/drawingml/2006/main"><ns5:pPr algn="l"><ns5:buNone/></ns5:pPr><ns5:r><ns5:rPr lang="ja-JP"/><ns5:t>サブタイトル</ns5:t></ns5:r></ns5:p></ns0:txBody></ns0:sp><ns0:sp><ns0:nvSpPr><ns0:cNvPr id="20" name="Body.Left"/><ns0:cNvSpPr><ns1:spLocks xmlns:ns1="http://schemas.openxmlformats.org/drawingml/2006/main" noGrp="1"/></ns0:cNvSpPr><ns0:nvPr><ns0:ph idx="1" type="body"/></ns0:nvPr></ns0:nvSpPr><ns0:spPr><ns2:xfrm xmlns:ns2="http://schemas.openxmlformats.org/drawingml/2006/main"><ns2:off x="457200" y="1325880"/><ns2:ext cx="7772400" cy="4937760"/></ns2:xfrm></ns0:spPr><ns0:txBody><ns3:bodyPr xmlns:ns3="http://schemas.openxmlformats.org/drawingml/2006/main" wrap="square" anchor="t" anchorCtr="0"/><ns4:lstStyle xmlns:ns4="http://schemas.openxmlformats.org/drawingml/2006/main"><ns4:defPPr algn="l"><ns4:buNone/><ns4:defRPr sz="1400" dirty="0"><ns4:solidFill><ns4:srgbClr val="1E293B"/></ns4:solidFill><ns4:latin typeface="Calibri"/><ns4:ea typeface="Calibri"/></ns4:defRPr></ns4:defPPr><ns4:lvl1pPr algn="l"><ns4:buNone/><ns4:defRPr sz="1400" dirty="0"><ns4:solidFill><ns4:srgbClr val="1E293B"/></ns4:solidFill><ns4:latin typeface="Calibri"/><ns4:ea typeface="Calibri"/></ns4:defRPr></ns4:lvl1pPr><ns4:lvl2pPr algn="l"><ns4:buNone/><ns4:defRPr sz="1400" dirty="0"><ns4:solidFill><ns4:srgbClr val="1E293B"/></ns4:solidFill><ns4:latin typeface="Calibri"/><ns4:ea typeface="Calibri"/></ns4:defRPr></ns4:lvl2pPr><ns4:lvl3pPr algn="l"><ns4:buNone/><ns4:defRPr sz="1400" dirty="0"><ns4:solidFill><ns4:srgbClr val="1E293B"/></ns4:solidFill><ns4:latin typeface="Calibri"/><ns4:ea typeface="Calibri"/></ns4:defRPr></ns4:lvl3pPr><ns4:lvl4pPr algn="l"><ns4:buNone/><ns4:defRPr sz="1400" dirty="0"><ns4:solidFill><ns4:srgbClr val="1E293B"/></ns4:solidFill><ns4:latin typeface="Calibri"/><ns4:ea typeface="Calibri"/></ns4:defRPr></ns4:lvl4pPr><ns4:lvl5pPr algn="l"><ns4:buNone/><ns4:defRPr sz="1400" dirty="0"><ns4:solidFill><ns4:srgbClr val="1E293B"/></ns4:solidFill><ns4:latin typeface="Calibri"/><ns4:ea typeface="Calibri"/></ns4:defRPr></ns4:lvl5pPr><ns4:lvl6pPr algn="l"><ns4:buNone/><ns4:defRPr sz="1400" dirty="0"><ns4:solidFill><ns4:srgbClr val="1E293B"/></ns4:solidFill><ns4:latin typeface="Calibri"/><ns4:ea typeface="Calibri"/></ns4:defRPr></ns4:lvl6pPr><ns4:lvl7pPr algn="l"><ns4:buNone/><ns4:defRPr sz="1400" dirty="0"><ns4:solidFill><ns4:srgbClr val="1E293B"/></ns4:solidFill><ns4:latin typeface="Calibri"/><ns4:ea typeface="Calibri"/></ns4:defRPr></ns4:lvl7pPr><ns4:lvl8pPr algn="l"><ns4:buNone/><ns4:defRPr sz="1400" dirty="0"><ns4:solidFill><ns4:srgbClr val="1E293B"/></ns4:solidFill><ns4:latin typeface="Calibri"/><ns4:ea typeface="Calibri"/></ns4:defRPr></ns4:lvl8pPr><ns4:lvl9pPr algn="l"><ns4:buNone/><ns4:defRPr sz="1400" dirty="0"><ns4:solidFill><ns4:srgbClr val="1E293B"/></ns4:solidFill><ns4:latin typeface="Calibri"/><ns4:ea typeface="Calibri"/></ns4:defRPr></ns4:lvl9pPr></ns4:lstStyle/><ns5:p xmlns:ns5="http://schemas.openxmlformats.org/drawingml/2006/main"><ns5:pPr algn="l"><ns5:buNone/></ns5:pPr><ns5:r><ns5:rPr lang="ja-JP"/><ns5:t>コメント・注記
+<ns0:sldLayout xmlns:ns0="http://schemas.openxmlformats.org/presentationml/2006/main" type="blank" preserve="1"><ns0:cSld name="Table.1Table.Single+1Notes"><ns0:spTree><ns0:nvGrpSpPr><ns0:cNvPr id="1" name=""/><ns0:cNvGrpSpPr/><ns0:nvPr/></ns0:nvGrpSpPr><ns0:grpSpPr><ns1:xfrm xmlns:ns1="http://schemas.openxmlformats.org/drawingml/2006/main"><ns1:off x="0" y="0"/><ns1:ext cx="0" cy="0"/><ns1:chOff x="0" y="0"/><ns1:chExt cx="0" cy="0"/></ns1:xfrm></ns0:grpSpPr><ns0:sp><ns0:nvSpPr><ns0:cNvPr id="2" name="HeaderBar"/><ns0:cNvSpPr><ns1:spLocks xmlns:ns1="http://schemas.openxmlformats.org/drawingml/2006/main" noGrp="1" noSelect="0" noRot="1" noMove="1"/></ns0:cNvSpPr><ns0:nvPr/></ns0:nvSpPr><ns0:spPr><ns2:xfrm xmlns:ns2="http://schemas.openxmlformats.org/drawingml/2006/main"><ns2:off x="0" y="0"/><ns2:ext cx="12192000" cy="1051560"/></ns2:xfrm><ns3:prstGeom xmlns:ns3="http://schemas.openxmlformats.org/drawingml/2006/main" prst="rect"/><ns4:solidFill xmlns:ns4="http://schemas.openxmlformats.org/drawingml/2006/main"><ns4:srgbClr val="1E2761"/></ns4:solidFill><ns5:ln xmlns:ns5="http://schemas.openxmlformats.org/drawingml/2006/main"><ns5:noFill/></ns5:ln></ns0:spPr></ns0:sp><ns0:sp><ns0:nvSpPr><ns0:cNvPr id="10" name="SlideTitle.Header"/><ns0:cNvSpPr><ns1:spLocks xmlns:ns1="http://schemas.openxmlformats.org/drawingml/2006/main" noGrp="1"/></ns0:cNvSpPr><ns0:nvPr><ns0:ph idx="15" type="body"/></ns0:nvPr></ns0:nvSpPr><ns0:spPr><ns2:xfrm xmlns:ns2="http://schemas.openxmlformats.org/drawingml/2006/main"><ns2:off x="731520" y="91440"/><ns2:ext cx="9144000" cy="475488"/></ns2:xfrm></ns0:spPr><ns0:txBody><ns3:bodyPr xmlns:ns3="http://schemas.openxmlformats.org/drawingml/2006/main" wrap="square" anchor="t" anchorCtr="0"/><ns4:lstStyle><ns4:defPPr><ns4:defRPr sz="2800" b="1"><ns4:solidFill><ns4:srgbClr val="FFFFFF"/></ns4:solidFill></ns4:defRPr></ns4:defPPr></ns4:lstStyle><ns4:defPPr algn="l"><ns4:buNone/><ns4:defRPr sz="2800" dirty="0" b="1"><ns4:solidFill><ns4:srgbClr val="FFFFFF"/></ns4:solidFill><ns4:latin typeface="Georgia"/><ns4:ea typeface="Georgia"/></ns4:defRPr></ns4:defPPr><ns4:lvl1pPr algn="l"><ns4:buNone/><ns4:defRPr sz="2800" dirty="0" b="1"><ns4:solidFill><ns4:srgbClr val="FFFFFF"/></ns4:solidFill><ns4:latin typeface="Georgia"/><ns4:ea typeface="Georgia"/></ns4:defRPr></ns4:lvl1pPr><ns4:lvl2pPr algn="l"><ns4:buNone/><ns4:defRPr sz="2800" dirty="0" b="1"><ns4:solidFill><ns4:srgbClr val="FFFFFF"/></ns4:solidFill><ns4:latin typeface="Georgia"/><ns4:ea typeface="Georgia"/></ns4:defRPr></ns4:lvl2pPr><ns4:lvl3pPr algn="l"><ns4:buNone/><ns4:defRPr sz="2800" dirty="0" b="1"><ns4:solidFill><ns4:srgbClr val="FFFFFF"/></ns4:solidFill><ns4:latin typeface="Georgia"/><ns4:ea typeface="Georgia"/></ns4:defRPr></ns4:lvl3pPr><ns4:lvl4pPr algn="l"><ns4:buNone/><ns4:defRPr sz="2800" dirty="0" b="1"><ns4:solidFill><ns4:srgbClr val="FFFFFF"/></ns4:solidFill><ns4:latin typeface="Georgia"/><ns4:ea typeface="Georgia"/></ns4:defRPr></ns4:lvl4pPr><ns4:lvl5pPr algn="l"><ns4:buNone/><ns4:defRPr sz="2800" dirty="0" b="1"><ns4:solidFill><ns4:srgbClr val="FFFFFF"/></ns4:solidFill><ns4:latin typeface="Georgia"/><ns4:ea typeface="Georgia"/></ns4:defRPr></ns4:lvl5pPr><ns4:lvl6pPr algn="l"><ns4:buNone/><ns4:defRPr sz="2800" dirty="0" b="1"><ns4:solidFill><ns4:srgbClr val="FFFFFF"/></ns4:solidFill><ns4:latin typeface="Georgia"/><ns4:ea typeface="Georgia"/></ns4:defRPr></ns4:lvl6pPr><ns4:lvl7pPr algn="l"><ns4:buNone/><ns4:defRPr sz="2800" dirty="0" b="1"><ns4:solidFill><ns4:srgbClr val="FFFFFF"/></ns4:solidFill><ns4:latin typeface="Georgia"/><ns4:ea typeface="Georgia"/></ns4:defRPr></ns4:lvl7pPr><ns4:lvl8pPr algn="l"><ns4:buNone/><ns4:defRPr sz="2800" dirty="0" b="1"><ns4:solidFill><ns4:srgbClr val="FFFFFF"/></ns4:solidFill><ns4:latin typeface="Georgia"/><ns4:ea typeface="Georgia"/></ns4:defRPr></ns4:lvl8pPr><ns4:lvl9pPr algn="l"><ns4:buNone/><ns4:defRPr sz="2800" dirty="0" b="1"><ns4:solidFill><ns4:srgbClr val="FFFFFF"/></ns4:solidFill><ns4:latin typeface="Georgia"/><ns4:ea typeface="Georgia"/></ns4:defRPr></ns4:lvl9pPr></ns4:lstStyle/><ns5:p xmlns:ns5="http://schemas.openxmlformats.org/drawingml/2006/main"><ns5:pPr algn="l"><ns5:buNone/></ns5:pPr><ns5:r><ns5:rPr lang="ja-JP"/><ns5:t>サブタイトル</ns5:t></ns5:r></ns5:p></ns0:txBody></ns0:sp><ns0:sp><ns0:nvSpPr><ns0:cNvPr id="20" name="Body.Left"/><ns0:cNvSpPr><ns1:spLocks xmlns:ns1="http://schemas.openxmlformats.org/drawingml/2006/main" noGrp="1"/></ns0:cNvSpPr><ns0:nvPr><ns0:ph idx="1" type="body"/></ns0:nvPr></ns0:nvSpPr><ns0:spPr><ns2:xfrm xmlns:ns2="http://schemas.openxmlformats.org/drawingml/2006/main"><ns2:off x="457200" y="1325880"/><ns2:ext cx="7772400" cy="4937760"/></ns2:xfrm></ns0:spPr><ns0:txBody><ns3:bodyPr xmlns:ns3="http://schemas.openxmlformats.org/drawingml/2006/main" wrap="square" anchor="t" anchorCtr="0"/><ns4:lstStyle/><ns4:defPPr algn="l"><ns4:buNone/><ns4:defRPr sz="1400" dirty="0"><ns4:solidFill><ns4:srgbClr val="1E293B"/></ns4:solidFill><ns4:latin typeface="Calibri"/><ns4:ea typeface="Calibri"/></ns4:defRPr></ns4:defPPr><ns4:lvl1pPr algn="l"><ns4:buNone/><ns4:defRPr sz="1400" dirty="0"><ns4:solidFill><ns4:srgbClr val="1E293B"/></ns4:solidFill><ns4:latin typeface="Calibri"/><ns4:ea typeface="Calibri"/></ns4:defRPr></ns4:lvl1pPr><ns4:lvl2pPr algn="l"><ns4:buNone/><ns4:defRPr sz="1400" dirty="0"><ns4:solidFill><ns4:srgbClr val="1E293B"/></ns4:solidFill><ns4:latin typeface="Calibri"/><ns4:ea typeface="Calibri"/></ns4:defRPr></ns4:lvl2pPr><ns4:lvl3pPr algn="l"><ns4:buNone/><ns4:defRPr sz="1400" dirty="0"><ns4:solidFill><ns4:srgbClr val="1E293B"/></ns4:solidFill><ns4:latin typeface="Calibri"/><ns4:ea typeface="Calibri"/></ns4:defRPr></ns4:lvl3pPr><ns4:lvl4pPr algn="l"><ns4:buNone/><ns4:defRPr sz="1400" dirty="0"><ns4:solidFill><ns4:srgbClr val="1E293B"/></ns4:solidFill><ns4:latin typeface="Calibri"/><ns4:ea typeface="Calibri"/></ns4:defRPr></ns4:lvl4pPr><ns4:lvl5pPr algn="l"><ns4:buNone/><ns4:defRPr sz="1400" dirty="0"><ns4:solidFill><ns4:srgbClr val="1E293B"/></ns4:solidFill><ns4:latin typeface="Calibri"/><ns4:ea typeface="Calibri"/></ns4:defRPr></ns4:lvl5pPr><ns4:lvl6pPr algn="l"><ns4:buNone/><ns4:defRPr sz="1400" dirty="0"><ns4:solidFill><ns4:srgbClr val="1E293B"/></ns4:solidFill><ns4:latin typeface="Calibri"/><ns4:ea typeface="Calibri"/></ns4:defRPr></ns4:lvl6pPr><ns4:lvl7pPr algn="l"><ns4:buNone/><ns4:defRPr sz="1400" dirty="0"><ns4:solidFill><ns4:srgbClr val="1E293B"/></ns4:solidFill><ns4:latin typeface="Calibri"/><ns4:ea typeface="Calibri"/></ns4:defRPr></ns4:lvl7pPr><ns4:lvl8pPr algn="l"><ns4:buNone/><ns4:defRPr sz="1400" dirty="0"><ns4:solidFill><ns4:srgbClr val="1E293B"/></ns4:solidFill><ns4:latin typeface="Calibri"/><ns4:ea typeface="Calibri"/></ns4:defRPr></ns4:lvl8pPr><ns4:lvl9pPr algn="l"><ns4:buNone/><ns4:defRPr sz="1400" dirty="0"><ns4:solidFill><ns4:srgbClr val="1E293B"/></ns4:solidFill><ns4:latin typeface="Calibri"/><ns4:ea typeface="Calibri"/></ns4:defRPr></ns4:lvl9pPr></ns4:lstStyle/><ns5:p xmlns:ns5="http://schemas.openxmlformats.org/drawingml/2006/main"><ns5:pPr algn="l"><ns5:buNone/></ns5:pPr><ns5:r><ns5:rPr lang="ja-JP"/><ns5:t>コメント・注記
 
-テーブルの補足情報</ns5:t></ns5:r></ns5:p></ns0:txBody></ns0:sp><ns0:sp><ns0:nvSpPr><ns0:cNvPr id="30" name="SlideNum.Footer"/><ns0:cNvSpPr><ns1:spLocks xmlns:ns1="http://schemas.openxmlformats.org/drawingml/2006/main" noGrp="1"/></ns0:cNvSpPr><ns0:nvPr><ns0:ph idx="50" type="sldNum"/></ns0:nvPr></ns0:nvSpPr><ns0:spPr><ns2:xfrm xmlns:ns2="http://schemas.openxmlformats.org/drawingml/2006/main"><ns2:off x="10972800" y="6446520"/><ns2:ext cx="1097280" cy="274320"/></ns2:xfrm></ns0:spPr><ns0:txBody><ns3:bodyPr xmlns:ns3="http://schemas.openxmlformats.org/drawingml/2006/main" wrap="square" anchor="t" anchorCtr="0"/><ns4:lstStyle xmlns:ns4="http://schemas.openxmlformats.org/drawingml/2006/main"><ns4:defPPr algn="r"><ns4:buNone/><ns4:defRPr sz="1000" dirty="0"><ns4:solidFill><ns4:srgbClr val="94A3B8"/></ns4:solidFill><ns4:latin typeface="Calibri"/><ns4:ea typeface="Calibri"/></ns4:defRPr></ns4:defPPr><ns4:lvl1pPr algn="r"><ns4:buNone/><ns4:defRPr sz="1000" dirty="0"><ns4:solidFill><ns4:srgbClr val="94A3B8"/></ns4:solidFill><ns4:latin typeface="Calibri"/><ns4:ea typeface="Calibri"/></ns4:defRPr></ns4:lvl1pPr><ns4:lvl2pPr algn="r"><ns4:buNone/><ns4:defRPr sz="1000" dirty="0"><ns4:solidFill><ns4:srgbClr val="94A3B8"/></ns4:solidFill><ns4:latin typeface="Calibri"/><ns4:ea typeface="Calibri"/></ns4:defRPr></ns4:lvl2pPr><ns4:lvl3pPr algn="r"><ns4:buNone/><ns4:defRPr sz="1000" dirty="0"><ns4:solidFill><ns4:srgbClr val="94A3B8"/></ns4:solidFill><ns4:latin typeface="Calibri"/><ns4:ea typeface="Calibri"/></ns4:defRPr></ns4:lvl3pPr><ns4:lvl4pPr algn="r"><ns4:buNone/><ns4:defRPr sz="1000" dirty="0"><ns4:solidFill><ns4:srgbClr val="94A3B8"/></ns4:solidFill><ns4:latin typeface="Calibri"/><ns4:ea typeface="Calibri"/></ns4:defRPr></ns4:lvl4pPr><ns4:lvl5pPr algn="r"><ns4:buNone/><ns4:defRPr sz="1000" dirty="0"><ns4:solidFill><ns4:srgbClr val="94A3B8"/></ns4:solidFill><ns4:latin typeface="Calibri"/><ns4:ea typeface="Calibri"/></ns4:defRPr></ns4:lvl5pPr><ns4:lvl6pPr algn="r"><ns4:buNone/><ns4:defRPr sz="1000" dirty="0"><ns4:solidFill><ns4:srgbClr val="94A3B8"/></ns4:solidFill><ns4:latin typeface="Calibri"/><ns4:ea typeface="Calibri"/></ns4:defRPr></ns4:lvl6pPr><ns4:lvl7pPr algn="r"><ns4:buNone/><ns4:defRPr sz="1000" dirty="0"><ns4:solidFill><ns4:srgbClr val="94A3B8"/></ns4:solidFill><ns4:latin typeface="Calibri"/><ns4:ea typeface="Calibri"/></ns4:defRPr></ns4:lvl7pPr><ns4:lvl8pPr algn="r"><ns4:buNone/><ns4:defRPr sz="1000" dirty="0"><ns4:solidFill><ns4:srgbClr val="94A3B8"/></ns4:solidFill><ns4:latin typeface="Calibri"/><ns4:ea typeface="Calibri"/></ns4:defRPr></ns4:lvl8pPr><ns4:lvl9pPr algn="r"><ns4:buNone/><ns4:defRPr sz="1000" dirty="0"><ns4:solidFill><ns4:srgbClr val="94A3B8"/></ns4:solidFill><ns4:latin typeface="Calibri"/><ns4:ea typeface="Calibri"/></ns4:defRPr></ns4:lvl9pPr></ns4:lstStyle><ns5:p xmlns:ns5="http://schemas.openxmlformats.org/drawingml/2006/main"><ns5:pPr algn="r"><ns5:buNone/></ns5:pPr><ns5:r><ns5:rPr lang="ja-JP"/><ns5:t>&lt;#&gt;</ns5:t></ns5:r></ns5:p></ns0:txBody></ns0:sp></ns0:spTree></ns0:cSld><ns0:clrMapOvr/></ns0:sldLayout>
+テーブルの補足情報</ns5:t></ns5:r></ns5:p></ns0:txBody></ns0:sp><ns0:sp><ns0:nvSpPr><ns0:cNvPr id="30" name="SlideNum.Footer"/><ns0:cNvSpPr><ns1:spLocks xmlns:ns1="http://schemas.openxmlformats.org/drawingml/2006/main" noGrp="1"/></ns0:cNvSpPr><ns0:nvPr><ns0:ph idx="50" type="sldNum"/></ns0:nvPr></ns0:nvSpPr><ns0:spPr><ns2:xfrm xmlns:ns2="http://schemas.openxmlformats.org/drawingml/2006/main"><ns2:off x="10972800" y="6446520"/><ns2:ext cx="1097280" cy="274320"/></ns2:xfrm></ns0:spPr><ns0:txBody><ns3:bodyPr xmlns:ns3="http://schemas.openxmlformats.org/drawingml/2006/main" wrap="square" anchor="t" anchorCtr="0"/><ns4:lstStyle><ns4:defPPr algn="r"><ns4:defRPr sz="1000"><ns4:solidFill><ns4:srgbClr val="94A3B8"/></ns4:solidFill></ns4:defRPr></ns4:defPPr></ns4:lstStyle><ns4:defPPr algn="r"><ns4:buNone/><ns4:defRPr sz="1000" dirty="0"><ns4:solidFill><ns4:srgbClr val="94A3B8"/></ns4:solidFill><ns4:latin typeface="Calibri"/><ns4:ea typeface="Calibri"/></ns4:defRPr></ns4:defPPr><ns4:lvl1pPr algn="r"><ns4:buNone/><ns4:defRPr sz="1000" dirty="0"><ns4:solidFill><ns4:srgbClr val="94A3B8"/></ns4:solidFill><ns4:latin typeface="Calibri"/><ns4:ea typeface="Calibri"/></ns4:defRPr></ns4:lvl1pPr><ns4:lvl2pPr algn="r"><ns4:buNone/><ns4:defRPr sz="1000" dirty="0"><ns4:solidFill><ns4:srgbClr val="94A3B8"/></ns4:solidFill><ns4:latin typeface="Calibri"/><ns4:ea typeface="Calibri"/></ns4:defRPr></ns4:lvl2pPr><ns4:lvl3pPr algn="r"><ns4:buNone/><ns4:defRPr sz="1000" dirty="0"><ns4:solidFill><ns4:srgbClr val="94A3B8"/></ns4:solidFill><ns4:latin typeface="Calibri"/><ns4:ea typeface="Calibri"/></ns4:defRPr></ns4:lvl3pPr><ns4:lvl4pPr algn="r"><ns4:buNone/><ns4:defRPr sz="1000" dirty="0"><ns4:solidFill><ns4:srgbClr val="94A3B8"/></ns4:solidFill><ns4:latin typeface="Calibri"/><ns4:ea typeface="Calibri"/></ns4:defRPr></ns4:lvl4pPr><ns4:lvl5pPr algn="r"><ns4:buNone/><ns4:defRPr sz="1000" dirty="0"><ns4:solidFill><ns4:srgbClr val="94A3B8"/></ns4:solidFill><ns4:latin typeface="Calibri"/><ns4:ea typeface="Calibri"/></ns4:defRPr></ns4:lvl5pPr><ns4:lvl6pPr algn="r"><ns4:buNone/><ns4:defRPr sz="1000" dirty="0"><ns4:solidFill><ns4:srgbClr val="94A3B8"/></ns4:solidFill><ns4:latin typeface="Calibri"/><ns4:ea typeface="Calibri"/></ns4:defRPr></ns4:lvl6pPr><ns4:lvl7pPr algn="r"><ns4:buNone/><ns4:defRPr sz="1000" dirty="0"><ns4:solidFill><ns4:srgbClr val="94A3B8"/></ns4:solidFill><ns4:latin typeface="Calibri"/><ns4:ea typeface="Calibri"/></ns4:defRPr></ns4:lvl7pPr><ns4:lvl8pPr algn="r"><ns4:buNone/><ns4:defRPr sz="1000" dirty="0"><ns4:solidFill><ns4:srgbClr val="94A3B8"/></ns4:solidFill><ns4:latin typeface="Calibri"/><ns4:ea typeface="Calibri"/></ns4:defRPr></ns4:lvl8pPr><ns4:lvl9pPr algn="r"><ns4:buNone/><ns4:defRPr sz="1000" dirty="0"><ns4:solidFill><ns4:srgbClr val="94A3B8"/></ns4:solidFill><ns4:latin typeface="Calibri"/><ns4:ea typeface="Calibri"/></ns4:defRPr></ns4:lvl9pPr></ns4:lstStyle><ns5:p xmlns:ns5="http://schemas.openxmlformats.org/drawingml/2006/main"><ns5:pPr algn="r"><ns5:buNone/></ns5:pPr><ns5:r><ns5:rPr lang="ja-JP"/><ns5:t>&lt;#&gt;</ns5:t></ns5:r></ns5:p></ns0:txBody></ns0:sp></ns0:spTree></ns0:cSld><ns0:clrMapOvr/></ns0:sldLayout>
 </file>
 
 <file path=ppt/slideLayouts/slideLayout23.xml><?xml version='1.0' encoding='UTF-8' standalone='yes'?>
-<ns0:sldLayout xmlns:ns0="http://schemas.openxmlformats.org/presentationml/2006/main" type="blank" preserve="1"><ns0:cSld name="Compare.2Option.Versus"><ns0:spTree><ns0:nvGrpSpPr><ns0:cNvPr id="1" name=""/><ns0:cNvGrpSpPr/><ns0:nvPr/></ns0:nvGrpSpPr><ns0:grpSpPr><ns1:xfrm xmlns:ns1="http://schemas.openxmlformats.org/drawingml/2006/main"><ns1:off x="0" y="0"/><ns1:ext cx="0" cy="0"/><ns1:chOff x="0" y="0"/><ns1:chExt cx="0" cy="0"/></ns1:xfrm></ns0:grpSpPr><ns0:sp><ns0:nvSpPr><ns0:cNvPr id="2" name="HeaderBar"/><ns0:cNvSpPr><ns1:spLocks xmlns:ns1="http://schemas.openxmlformats.org/drawingml/2006/main" noGrp="1" noSelect="0" noRot="1" noMove="1"/></ns0:cNvSpPr><ns0:nvPr/></ns0:nvSpPr><ns0:spPr><ns2:xfrm xmlns:ns2="http://schemas.openxmlformats.org/drawingml/2006/main"><ns2:off x="0" y="0"/><ns2:ext cx="12192000" cy="1051560"/></ns2:xfrm><ns3:prstGeom xmlns:ns3="http://schemas.openxmlformats.org/drawingml/2006/main" prst="rect"/><ns4:solidFill xmlns:ns4="http://schemas.openxmlformats.org/drawingml/2006/main"><ns4:srgbClr val="1E2761"/></ns4:solidFill><ns5:ln xmlns:ns5="http://schemas.openxmlformats.org/drawingml/2006/main"><ns5:noFill/></ns5:ln></ns0:spPr></ns0:sp><ns0:sp><ns0:nvSpPr><ns0:cNvPr id="10" name="SlideTitle.Header"/><ns0:cNvSpPr><ns1:spLocks xmlns:ns1="http://schemas.openxmlformats.org/drawingml/2006/main" noGrp="1"/></ns0:cNvSpPr><ns0:nvPr><ns0:ph idx="15" type="body"/></ns0:nvPr></ns0:nvSpPr><ns0:spPr><ns2:xfrm xmlns:ns2="http://schemas.openxmlformats.org/drawingml/2006/main"><ns2:off x="731520" y="91440"/><ns2:ext cx="9144000" cy="475488"/></ns2:xfrm></ns0:spPr><ns0:txBody><ns3:bodyPr xmlns:ns3="http://schemas.openxmlformats.org/drawingml/2006/main" wrap="square" anchor="t" anchorCtr="0"/><ns4:lstStyle xmlns:ns4="http://schemas.openxmlformats.org/drawingml/2006/main"><ns4:defPPr algn="l"><ns4:buNone/><ns4:defRPr sz="2800" dirty="0" b="1"><ns4:solidFill><ns4:srgbClr val="FFFFFF"/></ns4:solidFill><ns4:latin typeface="Georgia"/><ns4:ea typeface="Georgia"/></ns4:defRPr></ns4:defPPr><ns4:lvl1pPr algn="l"><ns4:buNone/><ns4:defRPr sz="2800" dirty="0" b="1"><ns4:solidFill><ns4:srgbClr val="FFFFFF"/></ns4:solidFill><ns4:latin typeface="Georgia"/><ns4:ea typeface="Georgia"/></ns4:defRPr></ns4:lvl1pPr><ns4:lvl2pPr algn="l"><ns4:buNone/><ns4:defRPr sz="2800" dirty="0" b="1"><ns4:solidFill><ns4:srgbClr val="FFFFFF"/></ns4:solidFill><ns4:latin typeface="Georgia"/><ns4:ea typeface="Georgia"/></ns4:defRPr></ns4:lvl2pPr><ns4:lvl3pPr algn="l"><ns4:buNone/><ns4:defRPr sz="2800" dirty="0" b="1"><ns4:solidFill><ns4:srgbClr val="FFFFFF"/></ns4:solidFill><ns4:latin typeface="Georgia"/><ns4:ea typeface="Georgia"/></ns4:defRPr></ns4:lvl3pPr><ns4:lvl4pPr algn="l"><ns4:buNone/><ns4:defRPr sz="2800" dirty="0" b="1"><ns4:solidFill><ns4:srgbClr val="FFFFFF"/></ns4:solidFill><ns4:latin typeface="Georgia"/><ns4:ea typeface="Georgia"/></ns4:defRPr></ns4:lvl4pPr><ns4:lvl5pPr algn="l"><ns4:buNone/><ns4:defRPr sz="2800" dirty="0" b="1"><ns4:solidFill><ns4:srgbClr val="FFFFFF"/></ns4:solidFill><ns4:latin typeface="Georgia"/><ns4:ea typeface="Georgia"/></ns4:defRPr></ns4:lvl5pPr><ns4:lvl6pPr algn="l"><ns4:buNone/><ns4:defRPr sz="2800" dirty="0" b="1"><ns4:solidFill><ns4:srgbClr val="FFFFFF"/></ns4:solidFill><ns4:latin typeface="Georgia"/><ns4:ea typeface="Georgia"/></ns4:defRPr></ns4:lvl6pPr><ns4:lvl7pPr algn="l"><ns4:buNone/><ns4:defRPr sz="2800" dirty="0" b="1"><ns4:solidFill><ns4:srgbClr val="FFFFFF"/></ns4:solidFill><ns4:latin typeface="Georgia"/><ns4:ea typeface="Georgia"/></ns4:defRPr></ns4:lvl7pPr><ns4:lvl8pPr algn="l"><ns4:buNone/><ns4:defRPr sz="2800" dirty="0" b="1"><ns4:solidFill><ns4:srgbClr val="FFFFFF"/></ns4:solidFill><ns4:latin typeface="Georgia"/><ns4:ea typeface="Georgia"/></ns4:defRPr></ns4:lvl8pPr><ns4:lvl9pPr algn="l"><ns4:buNone/><ns4:defRPr sz="2800" dirty="0" b="1"><ns4:solidFill><ns4:srgbClr val="FFFFFF"/></ns4:solidFill><ns4:latin typeface="Georgia"/><ns4:ea typeface="Georgia"/></ns4:defRPr></ns4:lvl9pPr></ns4:lstStyle/><ns5:p xmlns:ns5="http://schemas.openxmlformats.org/drawingml/2006/main"><ns5:pPr algn="l"><ns5:buNone/></ns5:pPr><ns5:r><ns5:rPr lang="ja-JP"/><ns5:t>サブタイトル</ns5:t></ns5:r></ns5:p></ns0:txBody></ns0:sp><ns0:sp><ns0:nvSpPr><ns0:cNvPr id="5" name="PanelL"/><ns0:cNvSpPr><ns1:spLocks xmlns:ns1="http://schemas.openxmlformats.org/drawingml/2006/main" noGrp="1" noSelect="0" noRot="1" noMove="1"/></ns0:cNvSpPr><ns0:nvPr/></ns0:nvSpPr><ns0:spPr><ns2:xfrm xmlns:ns2="http://schemas.openxmlformats.org/drawingml/2006/main"><ns2:off x="457200" y="1280160"/><ns2:ext cx="5303520" cy="4937760"/></ns2:xfrm><ns3:prstGeom xmlns:ns3="http://schemas.openxmlformats.org/drawingml/2006/main" prst="roundRect"><ns3:avLst><ns3:gd name="adj" fmla="val 8000"/></ns3:avLst></ns3:prstGeom><ns4:solidFill xmlns:ns4="http://schemas.openxmlformats.org/drawingml/2006/main"><ns4:srgbClr val="EDF0F7"/></ns4:solidFill><ns5:ln xmlns:ns5="http://schemas.openxmlformats.org/drawingml/2006/main"><ns5:noFill/></ns5:ln></ns0:spPr></ns0:sp><ns0:sp><ns0:nvSpPr><ns0:cNvPr id="6" name="PanelR"/><ns0:cNvSpPr><ns1:spLocks xmlns:ns1="http://schemas.openxmlformats.org/drawingml/2006/main" noGrp="1" noSelect="0" noRot="1" noMove="1"/></ns0:cNvSpPr><ns0:nvPr/></ns0:nvSpPr><ns0:spPr><ns2:xfrm xmlns:ns2="http://schemas.openxmlformats.org/drawingml/2006/main"><ns2:off x="6126480" y="1280160"/><ns2:ext cx="5394960" cy="4937760"/></ns2:xfrm><ns3:prstGeom xmlns:ns3="http://schemas.openxmlformats.org/drawingml/2006/main" prst="roundRect"><ns3:avLst><ns3:gd name="adj" fmla="val 8000"/></ns3:avLst></ns3:prstGeom><ns4:solidFill xmlns:ns4="http://schemas.openxmlformats.org/drawingml/2006/main"><ns4:srgbClr val="EDF0F7"/></ns4:solidFill><ns5:ln xmlns:ns5="http://schemas.openxmlformats.org/drawingml/2006/main"><ns5:noFill/></ns5:ln></ns0:spPr></ns0:sp><ns0:sp><ns0:nvSpPr><ns0:cNvPr id="7" name="AccentL"/><ns0:cNvSpPr><ns1:spLocks xmlns:ns1="http://schemas.openxmlformats.org/drawingml/2006/main" noGrp="1" noSelect="0" noRot="1" noMove="1"/></ns0:cNvSpPr><ns0:nvPr/></ns0:nvSpPr><ns0:spPr><ns2:xfrm xmlns:ns2="http://schemas.openxmlformats.org/drawingml/2006/main"><ns2:off x="457200" y="1280160"/><ns2:ext cx="5303520" cy="54864"/></ns2:xfrm><ns3:prstGeom xmlns:ns3="http://schemas.openxmlformats.org/drawingml/2006/main" prst="rect"/><ns4:solidFill xmlns:ns4="http://schemas.openxmlformats.org/drawingml/2006/main"><ns4:srgbClr val="3B82F6"/></ns4:solidFill><ns5:ln xmlns:ns5="http://schemas.openxmlformats.org/drawingml/2006/main"><ns5:noFill/></ns5:ln></ns0:spPr></ns0:sp><ns0:sp><ns0:nvSpPr><ns0:cNvPr id="8" name="AccentR"/><ns0:cNvSpPr><ns1:spLocks xmlns:ns1="http://schemas.openxmlformats.org/drawingml/2006/main" noGrp="1" noSelect="0" noRot="1" noMove="1"/></ns0:cNvSpPr><ns0:nvPr/></ns0:nvSpPr><ns0:spPr><ns2:xfrm xmlns:ns2="http://schemas.openxmlformats.org/drawingml/2006/main"><ns2:off x="6126480" y="1280160"/><ns2:ext cx="5394960" cy="54864"/></ns2:xfrm><ns3:prstGeom xmlns:ns3="http://schemas.openxmlformats.org/drawingml/2006/main" prst="rect"/><ns4:solidFill xmlns:ns4="http://schemas.openxmlformats.org/drawingml/2006/main"><ns4:srgbClr val="06B6D4"/></ns4:solidFill><ns5:ln xmlns:ns5="http://schemas.openxmlformats.org/drawingml/2006/main"><ns5:noFill/></ns5:ln></ns0:spPr></ns0:sp><ns0:sp><ns0:nvSpPr><ns0:cNvPr id="9" name="VS"/><ns0:cNvSpPr><ns1:spLocks xmlns:ns1="http://schemas.openxmlformats.org/drawingml/2006/main" noGrp="1"/></ns0:cNvSpPr><ns0:nvPr/></ns0:nvSpPr><ns0:spPr><ns2:xfrm xmlns:ns2="http://schemas.openxmlformats.org/drawingml/2006/main"><ns2:off x="5309408461680" y="3428121901679"/><ns2:ext cx="548640" cy="548640"/></ns2:xfrm><ns3:prstGeom xmlns:ns3="http://schemas.openxmlformats.org/drawingml/2006/main" prst="ellipse"/><ns4:solidFill xmlns:ns4="http://schemas.openxmlformats.org/drawingml/2006/main"><ns4:srgbClr val="1E2761"/></ns4:solidFill><ns5:ln xmlns:ns5="http://schemas.openxmlformats.org/drawingml/2006/main"><ns5:noFill/></ns5:ln></ns0:spPr></ns0:sp><ns0:sp><ns0:nvSpPr><ns0:cNvPr id="20" name="OptionLabel1.Left"/><ns0:cNvSpPr><ns1:spLocks xmlns:ns1="http://schemas.openxmlformats.org/drawingml/2006/main" noGrp="1"/></ns0:cNvSpPr><ns0:nvPr><ns0:ph idx="1" type="body"/></ns0:nvPr></ns0:nvSpPr><ns0:spPr><ns2:xfrm xmlns:ns2="http://schemas.openxmlformats.org/drawingml/2006/main"><ns2:off x="731520" y="1554480"/><ns2:ext cx="4754880" cy="457200"/></ns2:xfrm></ns0:spPr><ns0:txBody><ns3:bodyPr xmlns:ns3="http://schemas.openxmlformats.org/drawingml/2006/main" wrap="square" anchor="t" anchorCtr="0"/><ns4:lstStyle xmlns:ns4="http://schemas.openxmlformats.org/drawingml/2006/main"><ns4:defPPr algn="l"><ns4:buNone/><ns4:defRPr sz="1600" dirty="0" b="1"><ns4:solidFill><ns4:srgbClr val="3B82F6"/></ns4:solidFill><ns4:latin typeface="Calibri"/><ns4:ea typeface="Calibri"/></ns4:defRPr></ns4:defPPr><ns4:lvl1pPr algn="l"><ns4:buNone/><ns4:defRPr sz="1600" dirty="0" b="1"><ns4:solidFill><ns4:srgbClr val="3B82F6"/></ns4:solidFill><ns4:latin typeface="Calibri"/><ns4:ea typeface="Calibri"/></ns4:defRPr></ns4:lvl1pPr><ns4:lvl2pPr algn="l"><ns4:buNone/><ns4:defRPr sz="1600" dirty="0" b="1"><ns4:solidFill><ns4:srgbClr val="3B82F6"/></ns4:solidFill><ns4:latin typeface="Calibri"/><ns4:ea typeface="Calibri"/></ns4:defRPr></ns4:lvl2pPr><ns4:lvl3pPr algn="l"><ns4:buNone/><ns4:defRPr sz="1600" dirty="0" b="1"><ns4:solidFill><ns4:srgbClr val="3B82F6"/></ns4:solidFill><ns4:latin typeface="Calibri"/><ns4:ea typeface="Calibri"/></ns4:defRPr></ns4:lvl3pPr><ns4:lvl4pPr algn="l"><ns4:buNone/><ns4:defRPr sz="1600" dirty="0" b="1"><ns4:solidFill><ns4:srgbClr val="3B82F6"/></ns4:solidFill><ns4:latin typeface="Calibri"/><ns4:ea typeface="Calibri"/></ns4:defRPr></ns4:lvl4pPr><ns4:lvl5pPr algn="l"><ns4:buNone/><ns4:defRPr sz="1600" dirty="0" b="1"><ns4:solidFill><ns4:srgbClr val="3B82F6"/></ns4:solidFill><ns4:latin typeface="Calibri"/><ns4:ea typeface="Calibri"/></ns4:defRPr></ns4:lvl5pPr><ns4:lvl6pPr algn="l"><ns4:buNone/><ns4:defRPr sz="1600" dirty="0" b="1"><ns4:solidFill><ns4:srgbClr val="3B82F6"/></ns4:solidFill><ns4:latin typeface="Calibri"/><ns4:ea typeface="Calibri"/></ns4:defRPr></ns4:lvl6pPr><ns4:lvl7pPr algn="l"><ns4:buNone/><ns4:defRPr sz="1600" dirty="0" b="1"><ns4:solidFill><ns4:srgbClr val="3B82F6"/></ns4:solidFill><ns4:latin typeface="Calibri"/><ns4:ea typeface="Calibri"/></ns4:defRPr></ns4:lvl7pPr><ns4:lvl8pPr algn="l"><ns4:buNone/><ns4:defRPr sz="1600" dirty="0" b="1"><ns4:solidFill><ns4:srgbClr val="3B82F6"/></ns4:solidFill><ns4:latin typeface="Calibri"/><ns4:ea typeface="Calibri"/></ns4:defRPr></ns4:lvl8pPr><ns4:lvl9pPr algn="l"><ns4:buNone/><ns4:defRPr sz="1600" dirty="0" b="1"><ns4:solidFill><ns4:srgbClr val="3B82F6"/></ns4:solidFill><ns4:latin typeface="Calibri"/><ns4:ea typeface="Calibri"/></ns4:defRPr></ns4:lvl9pPr></ns4:lstStyle/><ns5:p xmlns:ns5="http://schemas.openxmlformats.org/drawingml/2006/main"><ns5:pPr algn="l"><ns5:buNone/></ns5:pPr><ns5:r><ns5:rPr lang="ja-JP"/><ns5:t>内容を入力</ns5:t></ns5:r></ns5:p></ns0:txBody></ns0:sp><ns0:sp><ns0:nvSpPr><ns0:cNvPr id="22" name="OptionLabel2.Right"/><ns0:cNvSpPr><ns1:spLocks xmlns:ns1="http://schemas.openxmlformats.org/drawingml/2006/main" noGrp="1"/></ns0:cNvSpPr><ns0:nvPr><ns0:ph idx="3" type="body"/></ns0:nvPr></ns0:nvSpPr><ns0:spPr><ns2:xfrm xmlns:ns2="http://schemas.openxmlformats.org/drawingml/2006/main"><ns2:off x="6400800" y="1554480"/><ns2:ext cx="4846320" cy="457200"/></ns2:xfrm></ns0:spPr><ns0:txBody><ns3:bodyPr xmlns:ns3="http://schemas.openxmlformats.org/drawingml/2006/main" wrap="square" anchor="t" anchorCtr="0"/><ns4:lstStyle xmlns:ns4="http://schemas.openxmlformats.org/drawingml/2006/main"><ns4:defPPr algn="l"><ns4:buNone/><ns4:defRPr sz="1600" dirty="0" b="1"><ns4:solidFill><ns4:srgbClr val="06B6D4"/></ns4:solidFill><ns4:latin typeface="Calibri"/><ns4:ea typeface="Calibri"/></ns4:defRPr></ns4:defPPr><ns4:lvl1pPr algn="l"><ns4:buNone/><ns4:defRPr sz="1600" dirty="0" b="1"><ns4:solidFill><ns4:srgbClr val="06B6D4"/></ns4:solidFill><ns4:latin typeface="Calibri"/><ns4:ea typeface="Calibri"/></ns4:defRPr></ns4:lvl1pPr><ns4:lvl2pPr algn="l"><ns4:buNone/><ns4:defRPr sz="1600" dirty="0" b="1"><ns4:solidFill><ns4:srgbClr val="06B6D4"/></ns4:solidFill><ns4:latin typeface="Calibri"/><ns4:ea typeface="Calibri"/></ns4:defRPr></ns4:lvl2pPr><ns4:lvl3pPr algn="l"><ns4:buNone/><ns4:defRPr sz="1600" dirty="0" b="1"><ns4:solidFill><ns4:srgbClr val="06B6D4"/></ns4:solidFill><ns4:latin typeface="Calibri"/><ns4:ea typeface="Calibri"/></ns4:defRPr></ns4:lvl3pPr><ns4:lvl4pPr algn="l"><ns4:buNone/><ns4:defRPr sz="1600" dirty="0" b="1"><ns4:solidFill><ns4:srgbClr val="06B6D4"/></ns4:solidFill><ns4:latin typeface="Calibri"/><ns4:ea typeface="Calibri"/></ns4:defRPr></ns4:lvl4pPr><ns4:lvl5pPr algn="l"><ns4:buNone/><ns4:defRPr sz="1600" dirty="0" b="1"><ns4:solidFill><ns4:srgbClr val="06B6D4"/></ns4:solidFill><ns4:latin typeface="Calibri"/><ns4:ea typeface="Calibri"/></ns4:defRPr></ns4:lvl5pPr><ns4:lvl6pPr algn="l"><ns4:buNone/><ns4:defRPr sz="1600" dirty="0" b="1"><ns4:solidFill><ns4:srgbClr val="06B6D4"/></ns4:solidFill><ns4:latin typeface="Calibri"/><ns4:ea typeface="Calibri"/></ns4:defRPr></ns4:lvl6pPr><ns4:lvl7pPr algn="l"><ns4:buNone/><ns4:defRPr sz="1600" dirty="0" b="1"><ns4:solidFill><ns4:srgbClr val="06B6D4"/></ns4:solidFill><ns4:latin typeface="Calibri"/><ns4:ea typeface="Calibri"/></ns4:defRPr></ns4:lvl7pPr><ns4:lvl8pPr algn="l"><ns4:buNone/><ns4:defRPr sz="1600" dirty="0" b="1"><ns4:solidFill><ns4:srgbClr val="06B6D4"/></ns4:solidFill><ns4:latin typeface="Calibri"/><ns4:ea typeface="Calibri"/></ns4:defRPr></ns4:lvl8pPr><ns4:lvl9pPr algn="l"><ns4:buNone/><ns4:defRPr sz="1600" dirty="0" b="1"><ns4:solidFill><ns4:srgbClr val="06B6D4"/></ns4:solidFill><ns4:latin typeface="Calibri"/><ns4:ea typeface="Calibri"/></ns4:defRPr></ns4:lvl9pPr></ns4:lstStyle/><ns5:p xmlns:ns5="http://schemas.openxmlformats.org/drawingml/2006/main"><ns5:pPr algn="l"><ns5:buNone/></ns5:pPr><ns5:r><ns5:rPr lang="ja-JP"/><ns5:t>内容を入力</ns5:t></ns5:r></ns5:p></ns0:txBody></ns0:sp><ns0:sp><ns0:nvSpPr><ns0:cNvPr id="30" name="SlideNum.Footer"/><ns0:cNvSpPr><ns1:spLocks xmlns:ns1="http://schemas.openxmlformats.org/drawingml/2006/main" noGrp="1"/></ns0:cNvSpPr><ns0:nvPr><ns0:ph idx="50" type="sldNum"/></ns0:nvPr></ns0:nvSpPr><ns0:spPr><ns2:xfrm xmlns:ns2="http://schemas.openxmlformats.org/drawingml/2006/main"><ns2:off x="10972800" y="6446520"/><ns2:ext cx="1097280" cy="274320"/></ns2:xfrm></ns0:spPr><ns0:txBody><ns3:bodyPr xmlns:ns3="http://schemas.openxmlformats.org/drawingml/2006/main" wrap="square" anchor="t" anchorCtr="0"/><ns4:lstStyle xmlns:ns4="http://schemas.openxmlformats.org/drawingml/2006/main"><ns4:defPPr algn="r"><ns4:buNone/><ns4:defRPr sz="1000" dirty="0"><ns4:solidFill><ns4:srgbClr val="94A3B8"/></ns4:solidFill><ns4:latin typeface="Calibri"/><ns4:ea typeface="Calibri"/></ns4:defRPr></ns4:defPPr><ns4:lvl1pPr algn="r"><ns4:buNone/><ns4:defRPr sz="1000" dirty="0"><ns4:solidFill><ns4:srgbClr val="94A3B8"/></ns4:solidFill><ns4:latin typeface="Calibri"/><ns4:ea typeface="Calibri"/></ns4:defRPr></ns4:lvl1pPr><ns4:lvl2pPr algn="r"><ns4:buNone/><ns4:defRPr sz="1000" dirty="0"><ns4:solidFill><ns4:srgbClr val="94A3B8"/></ns4:solidFill><ns4:latin typeface="Calibri"/><ns4:ea typeface="Calibri"/></ns4:defRPr></ns4:lvl2pPr><ns4:lvl3pPr algn="r"><ns4:buNone/><ns4:defRPr sz="1000" dirty="0"><ns4:solidFill><ns4:srgbClr val="94A3B8"/></ns4:solidFill><ns4:latin typeface="Calibri"/><ns4:ea typeface="Calibri"/></ns4:defRPr></ns4:lvl3pPr><ns4:lvl4pPr algn="r"><ns4:buNone/><ns4:defRPr sz="1000" dirty="0"><ns4:solidFill><ns4:srgbClr val="94A3B8"/></ns4:solidFill><ns4:latin typeface="Calibri"/><ns4:ea typeface="Calibri"/></ns4:defRPr></ns4:lvl4pPr><ns4:lvl5pPr algn="r"><ns4:buNone/><ns4:defRPr sz="1000" dirty="0"><ns4:solidFill><ns4:srgbClr val="94A3B8"/></ns4:solidFill><ns4:latin typeface="Calibri"/><ns4:ea typeface="Calibri"/></ns4:defRPr></ns4:lvl5pPr><ns4:lvl6pPr algn="r"><ns4:buNone/><ns4:defRPr sz="1000" dirty="0"><ns4:solidFill><ns4:srgbClr val="94A3B8"/></ns4:solidFill><ns4:latin typeface="Calibri"/><ns4:ea typeface="Calibri"/></ns4:defRPr></ns4:lvl6pPr><ns4:lvl7pPr algn="r"><ns4:buNone/><ns4:defRPr sz="1000" dirty="0"><ns4:solidFill><ns4:srgbClr val="94A3B8"/></ns4:solidFill><ns4:latin typeface="Calibri"/><ns4:ea typeface="Calibri"/></ns4:defRPr></ns4:lvl7pPr><ns4:lvl8pPr algn="r"><ns4:buNone/><ns4:defRPr sz="1000" dirty="0"><ns4:solidFill><ns4:srgbClr val="94A3B8"/></ns4:solidFill><ns4:latin typeface="Calibri"/><ns4:ea typeface="Calibri"/></ns4:defRPr></ns4:lvl8pPr><ns4:lvl9pPr algn="r"><ns4:buNone/><ns4:defRPr sz="1000" dirty="0"><ns4:solidFill><ns4:srgbClr val="94A3B8"/></ns4:solidFill><ns4:latin typeface="Calibri"/><ns4:ea typeface="Calibri"/></ns4:defRPr></ns4:lvl9pPr></ns4:lstStyle><ns5:p xmlns:ns5="http://schemas.openxmlformats.org/drawingml/2006/main"><ns5:pPr algn="r"><ns5:buNone/></ns5:pPr><ns5:r><ns5:rPr lang="ja-JP"/><ns5:t>&lt;#&gt;</ns5:t></ns5:r></ns5:p></ns0:txBody></ns0:sp></ns0:spTree></ns0:cSld><ns0:clrMapOvr/></ns0:sldLayout>
+<ns0:sldLayout xmlns:ns0="http://schemas.openxmlformats.org/presentationml/2006/main" type="blank" preserve="1"><ns0:cSld name="Compare.2Option.Versus"><ns0:spTree><ns0:nvGrpSpPr><ns0:cNvPr id="1" name=""/><ns0:cNvGrpSpPr/><ns0:nvPr/></ns0:nvGrpSpPr><ns0:grpSpPr><ns1:xfrm xmlns:ns1="http://schemas.openxmlformats.org/drawingml/2006/main"><ns1:off x="0" y="0"/><ns1:ext cx="0" cy="0"/><ns1:chOff x="0" y="0"/><ns1:chExt cx="0" cy="0"/></ns1:xfrm></ns0:grpSpPr><ns0:sp><ns0:nvSpPr><ns0:cNvPr id="2" name="HeaderBar"/><ns0:cNvSpPr><ns1:spLocks xmlns:ns1="http://schemas.openxmlformats.org/drawingml/2006/main" noGrp="1" noSelect="0" noRot="1" noMove="1"/></ns0:cNvSpPr><ns0:nvPr/></ns0:nvSpPr><ns0:spPr><ns2:xfrm xmlns:ns2="http://schemas.openxmlformats.org/drawingml/2006/main"><ns2:off x="0" y="0"/><ns2:ext cx="12192000" cy="1051560"/></ns2:xfrm><ns3:prstGeom xmlns:ns3="http://schemas.openxmlformats.org/drawingml/2006/main" prst="rect"/><ns4:solidFill xmlns:ns4="http://schemas.openxmlformats.org/drawingml/2006/main"><ns4:srgbClr val="1E2761"/></ns4:solidFill><ns5:ln xmlns:ns5="http://schemas.openxmlformats.org/drawingml/2006/main"><ns5:noFill/></ns5:ln></ns0:spPr></ns0:sp><ns0:sp><ns0:nvSpPr><ns0:cNvPr id="10" name="SlideTitle.Header"/><ns0:cNvSpPr><ns1:spLocks xmlns:ns1="http://schemas.openxmlformats.org/drawingml/2006/main" noGrp="1"/></ns0:cNvSpPr><ns0:nvPr><ns0:ph idx="15" type="body"/></ns0:nvPr></ns0:nvSpPr><ns0:spPr><ns2:xfrm xmlns:ns2="http://schemas.openxmlformats.org/drawingml/2006/main"><ns2:off x="731520" y="91440"/><ns2:ext cx="9144000" cy="475488"/></ns2:xfrm></ns0:spPr><ns0:txBody><ns3:bodyPr xmlns:ns3="http://schemas.openxmlformats.org/drawingml/2006/main" wrap="square" anchor="t" anchorCtr="0"/><ns4:lstStyle><ns4:defPPr><ns4:defRPr sz="2800" b="1"><ns4:solidFill><ns4:srgbClr val="FFFFFF"/></ns4:solidFill></ns4:defRPr></ns4:defPPr></ns4:lstStyle><ns4:defPPr algn="l"><ns4:buNone/><ns4:defRPr sz="2800" dirty="0" b="1"><ns4:solidFill><ns4:srgbClr val="FFFFFF"/></ns4:solidFill><ns4:latin typeface="Georgia"/><ns4:ea typeface="Georgia"/></ns4:defRPr></ns4:defPPr><ns4:lvl1pPr algn="l"><ns4:buNone/><ns4:defRPr sz="2800" dirty="0" b="1"><ns4:solidFill><ns4:srgbClr val="FFFFFF"/></ns4:solidFill><ns4:latin typeface="Georgia"/><ns4:ea typeface="Georgia"/></ns4:defRPr></ns4:lvl1pPr><ns4:lvl2pPr algn="l"><ns4:buNone/><ns4:defRPr sz="2800" dirty="0" b="1"><ns4:solidFill><ns4:srgbClr val="FFFFFF"/></ns4:solidFill><ns4:latin typeface="Georgia"/><ns4:ea typeface="Georgia"/></ns4:defRPr></ns4:lvl2pPr><ns4:lvl3pPr algn="l"><ns4:buNone/><ns4:defRPr sz="2800" dirty="0" b="1"><ns4:solidFill><ns4:srgbClr val="FFFFFF"/></ns4:solidFill><ns4:latin typeface="Georgia"/><ns4:ea typeface="Georgia"/></ns4:defRPr></ns4:lvl3pPr><ns4:lvl4pPr algn="l"><ns4:buNone/><ns4:defRPr sz="2800" dirty="0" b="1"><ns4:solidFill><ns4:srgbClr val="FFFFFF"/></ns4:solidFill><ns4:latin typeface="Georgia"/><ns4:ea typeface="Georgia"/></ns4:defRPr></ns4:lvl4pPr><ns4:lvl5pPr algn="l"><ns4:buNone/><ns4:defRPr sz="2800" dirty="0" b="1"><ns4:solidFill><ns4:srgbClr val="FFFFFF"/></ns4:solidFill><ns4:latin typeface="Georgia"/><ns4:ea typeface="Georgia"/></ns4:defRPr></ns4:lvl5pPr><ns4:lvl6pPr algn="l"><ns4:buNone/><ns4:defRPr sz="2800" dirty="0" b="1"><ns4:solidFill><ns4:srgbClr val="FFFFFF"/></ns4:solidFill><ns4:latin typeface="Georgia"/><ns4:ea typeface="Georgia"/></ns4:defRPr></ns4:lvl6pPr><ns4:lvl7pPr algn="l"><ns4:buNone/><ns4:defRPr sz="2800" dirty="0" b="1"><ns4:solidFill><ns4:srgbClr val="FFFFFF"/></ns4:solidFill><ns4:latin typeface="Georgia"/><ns4:ea typeface="Georgia"/></ns4:defRPr></ns4:lvl7pPr><ns4:lvl8pPr algn="l"><ns4:buNone/><ns4:defRPr sz="2800" dirty="0" b="1"><ns4:solidFill><ns4:srgbClr val="FFFFFF"/></ns4:solidFill><ns4:latin typeface="Georgia"/><ns4:ea typeface="Georgia"/></ns4:defRPr></ns4:lvl8pPr><ns4:lvl9pPr algn="l"><ns4:buNone/><ns4:defRPr sz="2800" dirty="0" b="1"><ns4:solidFill><ns4:srgbClr val="FFFFFF"/></ns4:solidFill><ns4:latin typeface="Georgia"/><ns4:ea typeface="Georgia"/></ns4:defRPr></ns4:lvl9pPr></ns4:lstStyle/><ns5:p xmlns:ns5="http://schemas.openxmlformats.org/drawingml/2006/main"><ns5:pPr algn="l"><ns5:buNone/></ns5:pPr><ns5:r><ns5:rPr lang="ja-JP"/><ns5:t>サブタイトル</ns5:t></ns5:r></ns5:p></ns0:txBody></ns0:sp><ns0:sp><ns0:nvSpPr><ns0:cNvPr id="5" name="PanelL"/><ns0:cNvSpPr><ns1:spLocks xmlns:ns1="http://schemas.openxmlformats.org/drawingml/2006/main" noGrp="1" noSelect="0" noRot="1" noMove="1"/></ns0:cNvSpPr><ns0:nvPr/></ns0:nvSpPr><ns0:spPr><ns2:xfrm xmlns:ns2="http://schemas.openxmlformats.org/drawingml/2006/main"><ns2:off x="457200" y="1280160"/><ns2:ext cx="5303520" cy="4937760"/></ns2:xfrm><ns3:prstGeom xmlns:ns3="http://schemas.openxmlformats.org/drawingml/2006/main" prst="roundRect"><ns3:avLst><ns3:gd name="adj" fmla="val 8000"/></ns3:avLst></ns3:prstGeom><ns4:solidFill xmlns:ns4="http://schemas.openxmlformats.org/drawingml/2006/main"><ns4:srgbClr val="EDF0F7"/></ns4:solidFill><ns5:ln xmlns:ns5="http://schemas.openxmlformats.org/drawingml/2006/main"><ns5:noFill/></ns5:ln></ns0:spPr></ns0:sp><ns0:sp><ns0:nvSpPr><ns0:cNvPr id="6" name="PanelR"/><ns0:cNvSpPr><ns1:spLocks xmlns:ns1="http://schemas.openxmlformats.org/drawingml/2006/main" noGrp="1" noSelect="0" noRot="1" noMove="1"/></ns0:cNvSpPr><ns0:nvPr/></ns0:nvSpPr><ns0:spPr><ns2:xfrm xmlns:ns2="http://schemas.openxmlformats.org/drawingml/2006/main"><ns2:off x="6126480" y="1280160"/><ns2:ext cx="5394960" cy="4937760"/></ns2:xfrm><ns3:prstGeom xmlns:ns3="http://schemas.openxmlformats.org/drawingml/2006/main" prst="roundRect"><ns3:avLst><ns3:gd name="adj" fmla="val 8000"/></ns3:avLst></ns3:prstGeom><ns4:solidFill xmlns:ns4="http://schemas.openxmlformats.org/drawingml/2006/main"><ns4:srgbClr val="EDF0F7"/></ns4:solidFill><ns5:ln xmlns:ns5="http://schemas.openxmlformats.org/drawingml/2006/main"><ns5:noFill/></ns5:ln></ns0:spPr></ns0:sp><ns0:sp><ns0:nvSpPr><ns0:cNvPr id="7" name="AccentL"/><ns0:cNvSpPr><ns1:spLocks xmlns:ns1="http://schemas.openxmlformats.org/drawingml/2006/main" noGrp="1" noSelect="0" noRot="1" noMove="1"/></ns0:cNvSpPr><ns0:nvPr/></ns0:nvSpPr><ns0:spPr><ns2:xfrm xmlns:ns2="http://schemas.openxmlformats.org/drawingml/2006/main"><ns2:off x="457200" y="1280160"/><ns2:ext cx="5303520" cy="54864"/></ns2:xfrm><ns3:prstGeom xmlns:ns3="http://schemas.openxmlformats.org/drawingml/2006/main" prst="rect"/><ns4:solidFill xmlns:ns4="http://schemas.openxmlformats.org/drawingml/2006/main"><ns4:srgbClr val="3B82F6"/></ns4:solidFill><ns5:ln xmlns:ns5="http://schemas.openxmlformats.org/drawingml/2006/main"><ns5:noFill/></ns5:ln></ns0:spPr></ns0:sp><ns0:sp><ns0:nvSpPr><ns0:cNvPr id="8" name="AccentR"/><ns0:cNvSpPr><ns1:spLocks xmlns:ns1="http://schemas.openxmlformats.org/drawingml/2006/main" noGrp="1" noSelect="0" noRot="1" noMove="1"/></ns0:cNvSpPr><ns0:nvPr/></ns0:nvSpPr><ns0:spPr><ns2:xfrm xmlns:ns2="http://schemas.openxmlformats.org/drawingml/2006/main"><ns2:off x="6126480" y="1280160"/><ns2:ext cx="5394960" cy="54864"/></ns2:xfrm><ns3:prstGeom xmlns:ns3="http://schemas.openxmlformats.org/drawingml/2006/main" prst="rect"/><ns4:solidFill xmlns:ns4="http://schemas.openxmlformats.org/drawingml/2006/main"><ns4:srgbClr val="06B6D4"/></ns4:solidFill><ns5:ln xmlns:ns5="http://schemas.openxmlformats.org/drawingml/2006/main"><ns5:noFill/></ns5:ln></ns0:spPr></ns0:sp><ns0:sp><ns0:nvSpPr><ns0:cNvPr id="9" name="VS"/><ns0:cNvSpPr><ns1:spLocks xmlns:ns1="http://schemas.openxmlformats.org/drawingml/2006/main" noGrp="1"/></ns0:cNvSpPr><ns0:nvPr/></ns0:nvSpPr><ns0:spPr><ns2:xfrm xmlns:ns2="http://schemas.openxmlformats.org/drawingml/2006/main"><ns2:off x="5309408461680" y="3428121901679"/><ns2:ext cx="548640" cy="548640"/></ns2:xfrm><ns3:prstGeom xmlns:ns3="http://schemas.openxmlformats.org/drawingml/2006/main" prst="ellipse"/><ns4:solidFill xmlns:ns4="http://schemas.openxmlformats.org/drawingml/2006/main"><ns4:srgbClr val="1E2761"/></ns4:solidFill><ns5:ln xmlns:ns5="http://schemas.openxmlformats.org/drawingml/2006/main"><ns5:noFill/></ns5:ln></ns0:spPr></ns0:sp><ns0:sp><ns0:nvSpPr><ns0:cNvPr id="20" name="OptionLabel1.Left"/><ns0:cNvSpPr><ns1:spLocks xmlns:ns1="http://schemas.openxmlformats.org/drawingml/2006/main" noGrp="1"/></ns0:cNvSpPr><ns0:nvPr><ns0:ph idx="1" type="body"/></ns0:nvPr></ns0:nvSpPr><ns0:spPr><ns2:xfrm xmlns:ns2="http://schemas.openxmlformats.org/drawingml/2006/main"><ns2:off x="731520" y="1554480"/><ns2:ext cx="4754880" cy="457200"/></ns2:xfrm></ns0:spPr><ns0:txBody><ns3:bodyPr xmlns:ns3="http://schemas.openxmlformats.org/drawingml/2006/main" wrap="square" anchor="t" anchorCtr="0"/><ns4:lstStyle><ns4:defPPr><ns4:defRPr sz="1600" b="1"><ns4:solidFill><ns4:srgbClr val="3B82F6"/></ns4:solidFill></ns4:defRPr></ns4:defPPr></ns4:lstStyle><ns4:defPPr algn="l"><ns4:buNone/><ns4:defRPr sz="1600" dirty="0" b="1"><ns4:solidFill><ns4:srgbClr val="3B82F6"/></ns4:solidFill><ns4:latin typeface="Calibri"/><ns4:ea typeface="Calibri"/></ns4:defRPr></ns4:defPPr><ns4:lvl1pPr algn="l"><ns4:buNone/><ns4:defRPr sz="1600" dirty="0" b="1"><ns4:solidFill><ns4:srgbClr val="3B82F6"/></ns4:solidFill><ns4:latin typeface="Calibri"/><ns4:ea typeface="Calibri"/></ns4:defRPr></ns4:lvl1pPr><ns4:lvl2pPr algn="l"><ns4:buNone/><ns4:defRPr sz="1600" dirty="0" b="1"><ns4:solidFill><ns4:srgbClr val="3B82F6"/></ns4:solidFill><ns4:latin typeface="Calibri"/><ns4:ea typeface="Calibri"/></ns4:defRPr></ns4:lvl2pPr><ns4:lvl3pPr algn="l"><ns4:buNone/><ns4:defRPr sz="1600" dirty="0" b="1"><ns4:solidFill><ns4:srgbClr val="3B82F6"/></ns4:solidFill><ns4:latin typeface="Calibri"/><ns4:ea typeface="Calibri"/></ns4:defRPr></ns4:lvl3pPr><ns4:lvl4pPr algn="l"><ns4:buNone/><ns4:defRPr sz="1600" dirty="0" b="1"><ns4:solidFill><ns4:srgbClr val="3B82F6"/></ns4:solidFill><ns4:latin typeface="Calibri"/><ns4:ea typeface="Calibri"/></ns4:defRPr></ns4:lvl4pPr><ns4:lvl5pPr algn="l"><ns4:buNone/><ns4:defRPr sz="1600" dirty="0" b="1"><ns4:solidFill><ns4:srgbClr val="3B82F6"/></ns4:solidFill><ns4:latin typeface="Calibri"/><ns4:ea typeface="Calibri"/></ns4:defRPr></ns4:lvl5pPr><ns4:lvl6pPr algn="l"><ns4:buNone/><ns4:defRPr sz="1600" dirty="0" b="1"><ns4:solidFill><ns4:srgbClr val="3B82F6"/></ns4:solidFill><ns4:latin typeface="Calibri"/><ns4:ea typeface="Calibri"/></ns4:defRPr></ns4:lvl6pPr><ns4:lvl7pPr algn="l"><ns4:buNone/><ns4:defRPr sz="1600" dirty="0" b="1"><ns4:solidFill><ns4:srgbClr val="3B82F6"/></ns4:solidFill><ns4:latin typeface="Calibri"/><ns4:ea typeface="Calibri"/></ns4:defRPr></ns4:lvl7pPr><ns4:lvl8pPr algn="l"><ns4:buNone/><ns4:defRPr sz="1600" dirty="0" b="1"><ns4:solidFill><ns4:srgbClr val="3B82F6"/></ns4:solidFill><ns4:latin typeface="Calibri"/><ns4:ea typeface="Calibri"/></ns4:defRPr></ns4:lvl8pPr><ns4:lvl9pPr algn="l"><ns4:buNone/><ns4:defRPr sz="1600" dirty="0" b="1"><ns4:solidFill><ns4:srgbClr val="3B82F6"/></ns4:solidFill><ns4:latin typeface="Calibri"/><ns4:ea typeface="Calibri"/></ns4:defRPr></ns4:lvl9pPr></ns4:lstStyle/><ns5:p xmlns:ns5="http://schemas.openxmlformats.org/drawingml/2006/main"><ns5:pPr algn="l"><ns5:buNone/></ns5:pPr><ns5:r><ns5:rPr lang="ja-JP"/><ns5:t>内容を入力</ns5:t></ns5:r></ns5:p></ns0:txBody></ns0:sp><ns0:sp><ns0:nvSpPr><ns0:cNvPr id="22" name="OptionLabel2.Right"/><ns0:cNvSpPr><ns1:spLocks xmlns:ns1="http://schemas.openxmlformats.org/drawingml/2006/main" noGrp="1"/></ns0:cNvSpPr><ns0:nvPr><ns0:ph idx="3" type="body"/></ns0:nvPr></ns0:nvSpPr><ns0:spPr><ns2:xfrm xmlns:ns2="http://schemas.openxmlformats.org/drawingml/2006/main"><ns2:off x="6400800" y="1554480"/><ns2:ext cx="4846320" cy="457200"/></ns2:xfrm></ns0:spPr><ns0:txBody><ns3:bodyPr xmlns:ns3="http://schemas.openxmlformats.org/drawingml/2006/main" wrap="square" anchor="t" anchorCtr="0"/><ns4:lstStyle><ns4:defPPr><ns4:defRPr sz="1600" b="1"><ns4:solidFill><ns4:srgbClr val="06B6D4"/></ns4:solidFill></ns4:defRPr></ns4:defPPr></ns4:lstStyle><ns4:defPPr algn="l"><ns4:buNone/><ns4:defRPr sz="1600" dirty="0" b="1"><ns4:solidFill><ns4:srgbClr val="06B6D4"/></ns4:solidFill><ns4:latin typeface="Calibri"/><ns4:ea typeface="Calibri"/></ns4:defRPr></ns4:defPPr><ns4:lvl1pPr algn="l"><ns4:buNone/><ns4:defRPr sz="1600" dirty="0" b="1"><ns4:solidFill><ns4:srgbClr val="06B6D4"/></ns4:solidFill><ns4:latin typeface="Calibri"/><ns4:ea typeface="Calibri"/></ns4:defRPr></ns4:lvl1pPr><ns4:lvl2pPr algn="l"><ns4:buNone/><ns4:defRPr sz="1600" dirty="0" b="1"><ns4:solidFill><ns4:srgbClr val="06B6D4"/></ns4:solidFill><ns4:latin typeface="Calibri"/><ns4:ea typeface="Calibri"/></ns4:defRPr></ns4:lvl2pPr><ns4:lvl3pPr algn="l"><ns4:buNone/><ns4:defRPr sz="1600" dirty="0" b="1"><ns4:solidFill><ns4:srgbClr val="06B6D4"/></ns4:solidFill><ns4:latin typeface="Calibri"/><ns4:ea typeface="Calibri"/></ns4:defRPr></ns4:lvl3pPr><ns4:lvl4pPr algn="l"><ns4:buNone/><ns4:defRPr sz="1600" dirty="0" b="1"><ns4:solidFill><ns4:srgbClr val="06B6D4"/></ns4:solidFill><ns4:latin typeface="Calibri"/><ns4:ea typeface="Calibri"/></ns4:defRPr></ns4:lvl4pPr><ns4:lvl5pPr algn="l"><ns4:buNone/><ns4:defRPr sz="1600" dirty="0" b="1"><ns4:solidFill><ns4:srgbClr val="06B6D4"/></ns4:solidFill><ns4:latin typeface="Calibri"/><ns4:ea typeface="Calibri"/></ns4:defRPr></ns4:lvl5pPr><ns4:lvl6pPr algn="l"><ns4:buNone/><ns4:defRPr sz="1600" dirty="0" b="1"><ns4:solidFill><ns4:srgbClr val="06B6D4"/></ns4:solidFill><ns4:latin typeface="Calibri"/><ns4:ea typeface="Calibri"/></ns4:defRPr></ns4:lvl6pPr><ns4:lvl7pPr algn="l"><ns4:buNone/><ns4:defRPr sz="1600" dirty="0" b="1"><ns4:solidFill><ns4:srgbClr val="06B6D4"/></ns4:solidFill><ns4:latin typeface="Calibri"/><ns4:ea typeface="Calibri"/></ns4:defRPr></ns4:lvl7pPr><ns4:lvl8pPr algn="l"><ns4:buNone/><ns4:defRPr sz="1600" dirty="0" b="1"><ns4:solidFill><ns4:srgbClr val="06B6D4"/></ns4:solidFill><ns4:latin typeface="Calibri"/><ns4:ea typeface="Calibri"/></ns4:defRPr></ns4:lvl8pPr><ns4:lvl9pPr algn="l"><ns4:buNone/><ns4:defRPr sz="1600" dirty="0" b="1"><ns4:solidFill><ns4:srgbClr val="06B6D4"/></ns4:solidFill><ns4:latin typeface="Calibri"/><ns4:ea typeface="Calibri"/></ns4:defRPr></ns4:lvl9pPr></ns4:lstStyle/><ns5:p xmlns:ns5="http://schemas.openxmlformats.org/drawingml/2006/main"><ns5:pPr algn="l"><ns5:buNone/></ns5:pPr><ns5:r><ns5:rPr lang="ja-JP"/><ns5:t>内容を入力</ns5:t></ns5:r></ns5:p></ns0:txBody></ns0:sp><ns0:sp><ns0:nvSpPr><ns0:cNvPr id="30" name="SlideNum.Footer"/><ns0:cNvSpPr><ns1:spLocks xmlns:ns1="http://schemas.openxmlformats.org/drawingml/2006/main" noGrp="1"/></ns0:cNvSpPr><ns0:nvPr><ns0:ph idx="50" type="sldNum"/></ns0:nvPr></ns0:nvSpPr><ns0:spPr><ns2:xfrm xmlns:ns2="http://schemas.openxmlformats.org/drawingml/2006/main"><ns2:off x="10972800" y="6446520"/><ns2:ext cx="1097280" cy="274320"/></ns2:xfrm></ns0:spPr><ns0:txBody><ns3:bodyPr xmlns:ns3="http://schemas.openxmlformats.org/drawingml/2006/main" wrap="square" anchor="t" anchorCtr="0"/><ns4:lstStyle><ns4:defPPr algn="r"><ns4:defRPr sz="1000"><ns4:solidFill><ns4:srgbClr val="94A3B8"/></ns4:solidFill></ns4:defRPr></ns4:defPPr></ns4:lstStyle><ns4:defPPr algn="r"><ns4:buNone/><ns4:defRPr sz="1000" dirty="0"><ns4:solidFill><ns4:srgbClr val="94A3B8"/></ns4:solidFill><ns4:latin typeface="Calibri"/><ns4:ea typeface="Calibri"/></ns4:defRPr></ns4:defPPr><ns4:lvl1pPr algn="r"><ns4:buNone/><ns4:defRPr sz="1000" dirty="0"><ns4:solidFill><ns4:srgbClr val="94A3B8"/></ns4:solidFill><ns4:latin typeface="Calibri"/><ns4:ea typeface="Calibri"/></ns4:defRPr></ns4:lvl1pPr><ns4:lvl2pPr algn="r"><ns4:buNone/><ns4:defRPr sz="1000" dirty="0"><ns4:solidFill><ns4:srgbClr val="94A3B8"/></ns4:solidFill><ns4:latin typeface="Calibri"/><ns4:ea typeface="Calibri"/></ns4:defRPr></ns4:lvl2pPr><ns4:lvl3pPr algn="r"><ns4:buNone/><ns4:defRPr sz="1000" dirty="0"><ns4:solidFill><ns4:srgbClr val="94A3B8"/></ns4:solidFill><ns4:latin typeface="Calibri"/><ns4:ea typeface="Calibri"/></ns4:defRPr></ns4:lvl3pPr><ns4:lvl4pPr algn="r"><ns4:buNone/><ns4:defRPr sz="1000" dirty="0"><ns4:solidFill><ns4:srgbClr val="94A3B8"/></ns4:solidFill><ns4:latin typeface="Calibri"/><ns4:ea typeface="Calibri"/></ns4:defRPr></ns4:lvl4pPr><ns4:lvl5pPr algn="r"><ns4:buNone/><ns4:defRPr sz="1000" dirty="0"><ns4:solidFill><ns4:srgbClr val="94A3B8"/></ns4:solidFill><ns4:latin typeface="Calibri"/><ns4:ea typeface="Calibri"/></ns4:defRPr></ns4:lvl5pPr><ns4:lvl6pPr algn="r"><ns4:buNone/><ns4:defRPr sz="1000" dirty="0"><ns4:solidFill><ns4:srgbClr val="94A3B8"/></ns4:solidFill><ns4:latin typeface="Calibri"/><ns4:ea typeface="Calibri"/></ns4:defRPr></ns4:lvl6pPr><ns4:lvl7pPr algn="r"><ns4:buNone/><ns4:defRPr sz="1000" dirty="0"><ns4:solidFill><ns4:srgbClr val="94A3B8"/></ns4:solidFill><ns4:latin typeface="Calibri"/><ns4:ea typeface="Calibri"/></ns4:defRPr></ns4:lvl7pPr><ns4:lvl8pPr algn="r"><ns4:buNone/><ns4:defRPr sz="1000" dirty="0"><ns4:solidFill><ns4:srgbClr val="94A3B8"/></ns4:solidFill><ns4:latin typeface="Calibri"/><ns4:ea typeface="Calibri"/></ns4:defRPr></ns4:lvl8pPr><ns4:lvl9pPr algn="r"><ns4:buNone/><ns4:defRPr sz="1000" dirty="0"><ns4:solidFill><ns4:srgbClr val="94A3B8"/></ns4:solidFill><ns4:latin typeface="Calibri"/><ns4:ea typeface="Calibri"/></ns4:defRPr></ns4:lvl9pPr></ns4:lstStyle><ns5:p xmlns:ns5="http://schemas.openxmlformats.org/drawingml/2006/main"><ns5:pPr algn="r"><ns5:buNone/></ns5:pPr><ns5:r><ns5:rPr lang="ja-JP"/><ns5:t>&lt;#&gt;</ns5:t></ns5:r></ns5:p></ns0:txBody></ns0:sp></ns0:spTree></ns0:cSld><ns0:clrMapOvr/></ns0:sldLayout>
 </file>
 
 <file path=ppt/slideLayouts/slideLayout24.xml><?xml version='1.0' encoding='UTF-8' standalone='yes'?>
-<ns0:sldLayout xmlns:ns0="http://schemas.openxmlformats.org/presentationml/2006/main" type="blank" preserve="1"><ns0:cSld name="Compare.1Matrix.Single"><ns0:spTree><ns0:nvGrpSpPr><ns0:cNvPr id="1" name=""/><ns0:cNvGrpSpPr/><ns0:nvPr/></ns0:nvGrpSpPr><ns0:grpSpPr><ns1:xfrm xmlns:ns1="http://schemas.openxmlformats.org/drawingml/2006/main"><ns1:off x="0" y="0"/><ns1:ext cx="0" cy="0"/><ns1:chOff x="0" y="0"/><ns1:chExt cx="0" cy="0"/></ns1:xfrm></ns0:grpSpPr><ns0:sp><ns0:nvSpPr><ns0:cNvPr id="2" name="HeaderBar"/><ns0:cNvSpPr><ns1:spLocks xmlns:ns1="http://schemas.openxmlformats.org/drawingml/2006/main" noGrp="1" noSelect="0" noRot="1" noMove="1"/></ns0:cNvSpPr><ns0:nvPr/></ns0:nvSpPr><ns0:spPr><ns2:xfrm xmlns:ns2="http://schemas.openxmlformats.org/drawingml/2006/main"><ns2:off x="0" y="0"/><ns2:ext cx="12192000" cy="1051560"/></ns2:xfrm><ns3:prstGeom xmlns:ns3="http://schemas.openxmlformats.org/drawingml/2006/main" prst="rect"/><ns4:solidFill xmlns:ns4="http://schemas.openxmlformats.org/drawingml/2006/main"><ns4:srgbClr val="1E2761"/></ns4:solidFill><ns5:ln xmlns:ns5="http://schemas.openxmlformats.org/drawingml/2006/main"><ns5:noFill/></ns5:ln></ns0:spPr></ns0:sp><ns0:sp><ns0:nvSpPr><ns0:cNvPr id="10" name="SlideTitle.Header"/><ns0:cNvSpPr><ns1:spLocks xmlns:ns1="http://schemas.openxmlformats.org/drawingml/2006/main" noGrp="1"/></ns0:cNvSpPr><ns0:nvPr><ns0:ph idx="15" type="body"/></ns0:nvPr></ns0:nvSpPr><ns0:spPr><ns2:xfrm xmlns:ns2="http://schemas.openxmlformats.org/drawingml/2006/main"><ns2:off x="731520" y="91440"/><ns2:ext cx="9144000" cy="475488"/></ns2:xfrm></ns0:spPr><ns0:txBody><ns3:bodyPr xmlns:ns3="http://schemas.openxmlformats.org/drawingml/2006/main" wrap="square" anchor="t" anchorCtr="0"/><ns4:lstStyle xmlns:ns4="http://schemas.openxmlformats.org/drawingml/2006/main"><ns4:defPPr algn="l"><ns4:buNone/><ns4:defRPr sz="2800" dirty="0" b="1"><ns4:solidFill><ns4:srgbClr val="FFFFFF"/></ns4:solidFill><ns4:latin typeface="Georgia"/><ns4:ea typeface="Georgia"/></ns4:defRPr></ns4:defPPr><ns4:lvl1pPr algn="l"><ns4:buNone/><ns4:defRPr sz="2800" dirty="0" b="1"><ns4:solidFill><ns4:srgbClr val="FFFFFF"/></ns4:solidFill><ns4:latin typeface="Georgia"/><ns4:ea typeface="Georgia"/></ns4:defRPr></ns4:lvl1pPr><ns4:lvl2pPr algn="l"><ns4:buNone/><ns4:defRPr sz="2800" dirty="0" b="1"><ns4:solidFill><ns4:srgbClr val="FFFFFF"/></ns4:solidFill><ns4:latin typeface="Georgia"/><ns4:ea typeface="Georgia"/></ns4:defRPr></ns4:lvl2pPr><ns4:lvl3pPr algn="l"><ns4:buNone/><ns4:defRPr sz="2800" dirty="0" b="1"><ns4:solidFill><ns4:srgbClr val="FFFFFF"/></ns4:solidFill><ns4:latin typeface="Georgia"/><ns4:ea typeface="Georgia"/></ns4:defRPr></ns4:lvl3pPr><ns4:lvl4pPr algn="l"><ns4:buNone/><ns4:defRPr sz="2800" dirty="0" b="1"><ns4:solidFill><ns4:srgbClr val="FFFFFF"/></ns4:solidFill><ns4:latin typeface="Georgia"/><ns4:ea typeface="Georgia"/></ns4:defRPr></ns4:lvl4pPr><ns4:lvl5pPr algn="l"><ns4:buNone/><ns4:defRPr sz="2800" dirty="0" b="1"><ns4:solidFill><ns4:srgbClr val="FFFFFF"/></ns4:solidFill><ns4:latin typeface="Georgia"/><ns4:ea typeface="Georgia"/></ns4:defRPr></ns4:lvl5pPr><ns4:lvl6pPr algn="l"><ns4:buNone/><ns4:defRPr sz="2800" dirty="0" b="1"><ns4:solidFill><ns4:srgbClr val="FFFFFF"/></ns4:solidFill><ns4:latin typeface="Georgia"/><ns4:ea typeface="Georgia"/></ns4:defRPr></ns4:lvl6pPr><ns4:lvl7pPr algn="l"><ns4:buNone/><ns4:defRPr sz="2800" dirty="0" b="1"><ns4:solidFill><ns4:srgbClr val="FFFFFF"/></ns4:solidFill><ns4:latin typeface="Georgia"/><ns4:ea typeface="Georgia"/></ns4:defRPr></ns4:lvl7pPr><ns4:lvl8pPr algn="l"><ns4:buNone/><ns4:defRPr sz="2800" dirty="0" b="1"><ns4:solidFill><ns4:srgbClr val="FFFFFF"/></ns4:solidFill><ns4:latin typeface="Georgia"/><ns4:ea typeface="Georgia"/></ns4:defRPr></ns4:lvl8pPr><ns4:lvl9pPr algn="l"><ns4:buNone/><ns4:defRPr sz="2800" dirty="0" b="1"><ns4:solidFill><ns4:srgbClr val="FFFFFF"/></ns4:solidFill><ns4:latin typeface="Georgia"/><ns4:ea typeface="Georgia"/></ns4:defRPr></ns4:lvl9pPr></ns4:lstStyle/><ns5:p xmlns:ns5="http://schemas.openxmlformats.org/drawingml/2006/main"><ns5:pPr algn="l"><ns5:buNone/></ns5:pPr><ns5:r><ns5:rPr lang="ja-JP"/><ns5:t>サブタイトル</ns5:t></ns5:r></ns5:p></ns0:txBody></ns0:sp><ns0:sp><ns0:nvSpPr><ns0:cNvPr id="5" name="ContentBG"/><ns0:cNvSpPr><ns1:spLocks xmlns:ns1="http://schemas.openxmlformats.org/drawingml/2006/main" noGrp="1" noSelect="0" noRot="1" noMove="1"/></ns0:cNvSpPr><ns0:nvPr/></ns0:nvSpPr><ns0:spPr><ns2:xfrm xmlns:ns2="http://schemas.openxmlformats.org/drawingml/2006/main"><ns2:off x="457200" y="1280160"/><ns2:ext cx="11247120" cy="5029200"/></ns2:xfrm><ns3:prstGeom xmlns:ns3="http://schemas.openxmlformats.org/drawingml/2006/main" prst="rect"/><ns4:solidFill xmlns:ns4="http://schemas.openxmlformats.org/drawingml/2006/main"><ns4:srgbClr val="FFFFFF"/></ns4:solidFill><ns5:ln xmlns:ns5="http://schemas.openxmlformats.org/drawingml/2006/main"><ns5:noFill/></ns5:ln></ns0:spPr></ns0:sp><ns0:sp><ns0:nvSpPr><ns0:cNvPr id="30" name="SlideNum.Footer"/><ns0:cNvSpPr><ns1:spLocks xmlns:ns1="http://schemas.openxmlformats.org/drawingml/2006/main" noGrp="1"/></ns0:cNvSpPr><ns0:nvPr><ns0:ph idx="50" type="sldNum"/></ns0:nvPr></ns0:nvSpPr><ns0:spPr><ns2:xfrm xmlns:ns2="http://schemas.openxmlformats.org/drawingml/2006/main"><ns2:off x="10972800" y="6446520"/><ns2:ext cx="1097280" cy="274320"/></ns2:xfrm></ns0:spPr><ns0:txBody><ns3:bodyPr xmlns:ns3="http://schemas.openxmlformats.org/drawingml/2006/main" wrap="square" anchor="t" anchorCtr="0"/><ns4:lstStyle xmlns:ns4="http://schemas.openxmlformats.org/drawingml/2006/main"><ns4:defPPr algn="r"><ns4:buNone/><ns4:defRPr sz="1000" dirty="0"><ns4:solidFill><ns4:srgbClr val="94A3B8"/></ns4:solidFill><ns4:latin typeface="Calibri"/><ns4:ea typeface="Calibri"/></ns4:defRPr></ns4:defPPr><ns4:lvl1pPr algn="r"><ns4:buNone/><ns4:defRPr sz="1000" dirty="0"><ns4:solidFill><ns4:srgbClr val="94A3B8"/></ns4:solidFill><ns4:latin typeface="Calibri"/><ns4:ea typeface="Calibri"/></ns4:defRPr></ns4:lvl1pPr><ns4:lvl2pPr algn="r"><ns4:buNone/><ns4:defRPr sz="1000" dirty="0"><ns4:solidFill><ns4:srgbClr val="94A3B8"/></ns4:solidFill><ns4:latin typeface="Calibri"/><ns4:ea typeface="Calibri"/></ns4:defRPr></ns4:lvl2pPr><ns4:lvl3pPr algn="r"><ns4:buNone/><ns4:defRPr sz="1000" dirty="0"><ns4:solidFill><ns4:srgbClr val="94A3B8"/></ns4:solidFill><ns4:latin typeface="Calibri"/><ns4:ea typeface="Calibri"/></ns4:defRPr></ns4:lvl3pPr><ns4:lvl4pPr algn="r"><ns4:buNone/><ns4:defRPr sz="1000" dirty="0"><ns4:solidFill><ns4:srgbClr val="94A3B8"/></ns4:solidFill><ns4:latin typeface="Calibri"/><ns4:ea typeface="Calibri"/></ns4:defRPr></ns4:lvl4pPr><ns4:lvl5pPr algn="r"><ns4:buNone/><ns4:defRPr sz="1000" dirty="0"><ns4:solidFill><ns4:srgbClr val="94A3B8"/></ns4:solidFill><ns4:latin typeface="Calibri"/><ns4:ea typeface="Calibri"/></ns4:defRPr></ns4:lvl5pPr><ns4:lvl6pPr algn="r"><ns4:buNone/><ns4:defRPr sz="1000" dirty="0"><ns4:solidFill><ns4:srgbClr val="94A3B8"/></ns4:solidFill><ns4:latin typeface="Calibri"/><ns4:ea typeface="Calibri"/></ns4:defRPr></ns4:lvl6pPr><ns4:lvl7pPr algn="r"><ns4:buNone/><ns4:defRPr sz="1000" dirty="0"><ns4:solidFill><ns4:srgbClr val="94A3B8"/></ns4:solidFill><ns4:latin typeface="Calibri"/><ns4:ea typeface="Calibri"/></ns4:defRPr></ns4:lvl7pPr><ns4:lvl8pPr algn="r"><ns4:buNone/><ns4:defRPr sz="1000" dirty="0"><ns4:solidFill><ns4:srgbClr val="94A3B8"/></ns4:solidFill><ns4:latin typeface="Calibri"/><ns4:ea typeface="Calibri"/></ns4:defRPr></ns4:lvl8pPr><ns4:lvl9pPr algn="r"><ns4:buNone/><ns4:defRPr sz="1000" dirty="0"><ns4:solidFill><ns4:srgbClr val="94A3B8"/></ns4:solidFill><ns4:latin typeface="Calibri"/><ns4:ea typeface="Calibri"/></ns4:defRPr></ns4:lvl9pPr></ns4:lstStyle><ns5:p xmlns:ns5="http://schemas.openxmlformats.org/drawingml/2006/main"><ns5:pPr algn="r"><ns5:buNone/></ns5:pPr><ns5:r><ns5:rPr lang="ja-JP"/><ns5:t>&lt;#&gt;</ns5:t></ns5:r></ns5:p></ns0:txBody></ns0:sp></ns0:spTree></ns0:cSld><ns0:clrMapOvr/></ns0:sldLayout>
+<ns0:sldLayout xmlns:ns0="http://schemas.openxmlformats.org/presentationml/2006/main" type="blank" preserve="1"><ns0:cSld name="Compare.1Matrix.Single"><ns0:spTree><ns0:nvGrpSpPr><ns0:cNvPr id="1" name=""/><ns0:cNvGrpSpPr/><ns0:nvPr/></ns0:nvGrpSpPr><ns0:grpSpPr><ns1:xfrm xmlns:ns1="http://schemas.openxmlformats.org/drawingml/2006/main"><ns1:off x="0" y="0"/><ns1:ext cx="0" cy="0"/><ns1:chOff x="0" y="0"/><ns1:chExt cx="0" cy="0"/></ns1:xfrm></ns0:grpSpPr><ns0:sp><ns0:nvSpPr><ns0:cNvPr id="2" name="HeaderBar"/><ns0:cNvSpPr><ns1:spLocks xmlns:ns1="http://schemas.openxmlformats.org/drawingml/2006/main" noGrp="1" noSelect="0" noRot="1" noMove="1"/></ns0:cNvSpPr><ns0:nvPr/></ns0:nvSpPr><ns0:spPr><ns2:xfrm xmlns:ns2="http://schemas.openxmlformats.org/drawingml/2006/main"><ns2:off x="0" y="0"/><ns2:ext cx="12192000" cy="1051560"/></ns2:xfrm><ns3:prstGeom xmlns:ns3="http://schemas.openxmlformats.org/drawingml/2006/main" prst="rect"/><ns4:solidFill xmlns:ns4="http://schemas.openxmlformats.org/drawingml/2006/main"><ns4:srgbClr val="1E2761"/></ns4:solidFill><ns5:ln xmlns:ns5="http://schemas.openxmlformats.org/drawingml/2006/main"><ns5:noFill/></ns5:ln></ns0:spPr></ns0:sp><ns0:sp><ns0:nvSpPr><ns0:cNvPr id="10" name="SlideTitle.Header"/><ns0:cNvSpPr><ns1:spLocks xmlns:ns1="http://schemas.openxmlformats.org/drawingml/2006/main" noGrp="1"/></ns0:cNvSpPr><ns0:nvPr><ns0:ph idx="15" type="body"/></ns0:nvPr></ns0:nvSpPr><ns0:spPr><ns2:xfrm xmlns:ns2="http://schemas.openxmlformats.org/drawingml/2006/main"><ns2:off x="731520" y="91440"/><ns2:ext cx="9144000" cy="475488"/></ns2:xfrm></ns0:spPr><ns0:txBody><ns3:bodyPr xmlns:ns3="http://schemas.openxmlformats.org/drawingml/2006/main" wrap="square" anchor="t" anchorCtr="0"/><ns4:lstStyle><ns4:defPPr><ns4:defRPr sz="2800" b="1"><ns4:solidFill><ns4:srgbClr val="FFFFFF"/></ns4:solidFill></ns4:defRPr></ns4:defPPr></ns4:lstStyle><ns4:defPPr algn="l"><ns4:buNone/><ns4:defRPr sz="2800" dirty="0" b="1"><ns4:solidFill><ns4:srgbClr val="FFFFFF"/></ns4:solidFill><ns4:latin typeface="Georgia"/><ns4:ea typeface="Georgia"/></ns4:defRPr></ns4:defPPr><ns4:lvl1pPr algn="l"><ns4:buNone/><ns4:defRPr sz="2800" dirty="0" b="1"><ns4:solidFill><ns4:srgbClr val="FFFFFF"/></ns4:solidFill><ns4:latin typeface="Georgia"/><ns4:ea typeface="Georgia"/></ns4:defRPr></ns4:lvl1pPr><ns4:lvl2pPr algn="l"><ns4:buNone/><ns4:defRPr sz="2800" dirty="0" b="1"><ns4:solidFill><ns4:srgbClr val="FFFFFF"/></ns4:solidFill><ns4:latin typeface="Georgia"/><ns4:ea typeface="Georgia"/></ns4:defRPr></ns4:lvl2pPr><ns4:lvl3pPr algn="l"><ns4:buNone/><ns4:defRPr sz="2800" dirty="0" b="1"><ns4:solidFill><ns4:srgbClr val="FFFFFF"/></ns4:solidFill><ns4:latin typeface="Georgia"/><ns4:ea typeface="Georgia"/></ns4:defRPr></ns4:lvl3pPr><ns4:lvl4pPr algn="l"><ns4:buNone/><ns4:defRPr sz="2800" dirty="0" b="1"><ns4:solidFill><ns4:srgbClr val="FFFFFF"/></ns4:solidFill><ns4:latin typeface="Georgia"/><ns4:ea typeface="Georgia"/></ns4:defRPr></ns4:lvl4pPr><ns4:lvl5pPr algn="l"><ns4:buNone/><ns4:defRPr sz="2800" dirty="0" b="1"><ns4:solidFill><ns4:srgbClr val="FFFFFF"/></ns4:solidFill><ns4:latin typeface="Georgia"/><ns4:ea typeface="Georgia"/></ns4:defRPr></ns4:lvl5pPr><ns4:lvl6pPr algn="l"><ns4:buNone/><ns4:defRPr sz="2800" dirty="0" b="1"><ns4:solidFill><ns4:srgbClr val="FFFFFF"/></ns4:solidFill><ns4:latin typeface="Georgia"/><ns4:ea typeface="Georgia"/></ns4:defRPr></ns4:lvl6pPr><ns4:lvl7pPr algn="l"><ns4:buNone/><ns4:defRPr sz="2800" dirty="0" b="1"><ns4:solidFill><ns4:srgbClr val="FFFFFF"/></ns4:solidFill><ns4:latin typeface="Georgia"/><ns4:ea typeface="Georgia"/></ns4:defRPr></ns4:lvl7pPr><ns4:lvl8pPr algn="l"><ns4:buNone/><ns4:defRPr sz="2800" dirty="0" b="1"><ns4:solidFill><ns4:srgbClr val="FFFFFF"/></ns4:solidFill><ns4:latin typeface="Georgia"/><ns4:ea typeface="Georgia"/></ns4:defRPr></ns4:lvl8pPr><ns4:lvl9pPr algn="l"><ns4:buNone/><ns4:defRPr sz="2800" dirty="0" b="1"><ns4:solidFill><ns4:srgbClr val="FFFFFF"/></ns4:solidFill><ns4:latin typeface="Georgia"/><ns4:ea typeface="Georgia"/></ns4:defRPr></ns4:lvl9pPr></ns4:lstStyle/><ns5:p xmlns:ns5="http://schemas.openxmlformats.org/drawingml/2006/main"><ns5:pPr algn="l"><ns5:buNone/></ns5:pPr><ns5:r><ns5:rPr lang="ja-JP"/><ns5:t>サブタイトル</ns5:t></ns5:r></ns5:p></ns0:txBody></ns0:sp><ns0:sp><ns0:nvSpPr><ns0:cNvPr id="5" name="ContentBG"/><ns0:cNvSpPr><ns1:spLocks xmlns:ns1="http://schemas.openxmlformats.org/drawingml/2006/main" noGrp="1" noSelect="0" noRot="1" noMove="1"/></ns0:cNvSpPr><ns0:nvPr/></ns0:nvSpPr><ns0:spPr><ns2:xfrm xmlns:ns2="http://schemas.openxmlformats.org/drawingml/2006/main"><ns2:off x="457200" y="1280160"/><ns2:ext cx="11247120" cy="5029200"/></ns2:xfrm><ns3:prstGeom xmlns:ns3="http://schemas.openxmlformats.org/drawingml/2006/main" prst="rect"/><ns4:solidFill xmlns:ns4="http://schemas.openxmlformats.org/drawingml/2006/main"><ns4:srgbClr val="FFFFFF"/></ns4:solidFill><ns5:ln xmlns:ns5="http://schemas.openxmlformats.org/drawingml/2006/main"><ns5:noFill/></ns5:ln></ns0:spPr></ns0:sp><ns0:sp><ns0:nvSpPr><ns0:cNvPr id="30" name="SlideNum.Footer"/><ns0:cNvSpPr><ns1:spLocks xmlns:ns1="http://schemas.openxmlformats.org/drawingml/2006/main" noGrp="1"/></ns0:cNvSpPr><ns0:nvPr><ns0:ph idx="50" type="sldNum"/></ns0:nvPr></ns0:nvSpPr><ns0:spPr><ns2:xfrm xmlns:ns2="http://schemas.openxmlformats.org/drawingml/2006/main"><ns2:off x="10972800" y="6446520"/><ns2:ext cx="1097280" cy="274320"/></ns2:xfrm></ns0:spPr><ns0:txBody><ns3:bodyPr xmlns:ns3="http://schemas.openxmlformats.org/drawingml/2006/main" wrap="square" anchor="t" anchorCtr="0"/><ns4:lstStyle><ns4:defPPr algn="r"><ns4:defRPr sz="1000"><ns4:solidFill><ns4:srgbClr val="94A3B8"/></ns4:solidFill></ns4:defRPr></ns4:defPPr></ns4:lstStyle><ns4:defPPr algn="r"><ns4:buNone/><ns4:defRPr sz="1000" dirty="0"><ns4:solidFill><ns4:srgbClr val="94A3B8"/></ns4:solidFill><ns4:latin typeface="Calibri"/><ns4:ea typeface="Calibri"/></ns4:defRPr></ns4:defPPr><ns4:lvl1pPr algn="r"><ns4:buNone/><ns4:defRPr sz="1000" dirty="0"><ns4:solidFill><ns4:srgbClr val="94A3B8"/></ns4:solidFill><ns4:latin typeface="Calibri"/><ns4:ea typeface="Calibri"/></ns4:defRPr></ns4:lvl1pPr><ns4:lvl2pPr algn="r"><ns4:buNone/><ns4:defRPr sz="1000" dirty="0"><ns4:solidFill><ns4:srgbClr val="94A3B8"/></ns4:solidFill><ns4:latin typeface="Calibri"/><ns4:ea typeface="Calibri"/></ns4:defRPr></ns4:lvl2pPr><ns4:lvl3pPr algn="r"><ns4:buNone/><ns4:defRPr sz="1000" dirty="0"><ns4:solidFill><ns4:srgbClr val="94A3B8"/></ns4:solidFill><ns4:latin typeface="Calibri"/><ns4:ea typeface="Calibri"/></ns4:defRPr></ns4:lvl3pPr><ns4:lvl4pPr algn="r"><ns4:buNone/><ns4:defRPr sz="1000" dirty="0"><ns4:solidFill><ns4:srgbClr val="94A3B8"/></ns4:solidFill><ns4:latin typeface="Calibri"/><ns4:ea typeface="Calibri"/></ns4:defRPr></ns4:lvl4pPr><ns4:lvl5pPr algn="r"><ns4:buNone/><ns4:defRPr sz="1000" dirty="0"><ns4:solidFill><ns4:srgbClr val="94A3B8"/></ns4:solidFill><ns4:latin typeface="Calibri"/><ns4:ea typeface="Calibri"/></ns4:defRPr></ns4:lvl5pPr><ns4:lvl6pPr algn="r"><ns4:buNone/><ns4:defRPr sz="1000" dirty="0"><ns4:solidFill><ns4:srgbClr val="94A3B8"/></ns4:solidFill><ns4:latin typeface="Calibri"/><ns4:ea typeface="Calibri"/></ns4:defRPr></ns4:lvl6pPr><ns4:lvl7pPr algn="r"><ns4:buNone/><ns4:defRPr sz="1000" dirty="0"><ns4:solidFill><ns4:srgbClr val="94A3B8"/></ns4:solidFill><ns4:latin typeface="Calibri"/><ns4:ea typeface="Calibri"/></ns4:defRPr></ns4:lvl7pPr><ns4:lvl8pPr algn="r"><ns4:buNone/><ns4:defRPr sz="1000" dirty="0"><ns4:solidFill><ns4:srgbClr val="94A3B8"/></ns4:solidFill><ns4:latin typeface="Calibri"/><ns4:ea typeface="Calibri"/></ns4:defRPr></ns4:lvl8pPr><ns4:lvl9pPr algn="r"><ns4:buNone/><ns4:defRPr sz="1000" dirty="0"><ns4:solidFill><ns4:srgbClr val="94A3B8"/></ns4:solidFill><ns4:latin typeface="Calibri"/><ns4:ea typeface="Calibri"/></ns4:defRPr></ns4:lvl9pPr></ns4:lstStyle><ns5:p xmlns:ns5="http://schemas.openxmlformats.org/drawingml/2006/main"><ns5:pPr algn="r"><ns5:buNone/></ns5:pPr><ns5:r><ns5:rPr lang="ja-JP"/><ns5:t>&lt;#&gt;</ns5:t></ns5:r></ns5:p></ns0:txBody></ns0:sp></ns0:spTree></ns0:cSld><ns0:clrMapOvr/></ns0:sldLayout>
 </file>
 
 <file path=ppt/slideLayouts/slideLayout25.xml><?xml version='1.0' encoding='UTF-8' standalone='yes'?>
-<ns0:sldLayout xmlns:ns0="http://schemas.openxmlformats.org/presentationml/2006/main" type="blank" preserve="1"><ns0:cSld name="Process.4Step.Sequential"><ns0:spTree><ns0:nvGrpSpPr><ns0:cNvPr id="1" name=""/><ns0:cNvGrpSpPr/><ns0:nvPr/></ns0:nvGrpSpPr><ns0:grpSpPr><ns1:xfrm xmlns:ns1="http://schemas.openxmlformats.org/drawingml/2006/main"><ns1:off x="0" y="0"/><ns1:ext cx="0" cy="0"/><ns1:chOff x="0" y="0"/><ns1:chExt cx="0" cy="0"/></ns1:xfrm></ns0:grpSpPr><ns0:sp><ns0:nvSpPr><ns0:cNvPr id="2" name="HeaderBar"/><ns0:cNvSpPr><ns1:spLocks xmlns:ns1="http://schemas.openxmlformats.org/drawingml/2006/main" noGrp="1" noSelect="0" noRot="1" noMove="1"/></ns0:cNvSpPr><ns0:nvPr/></ns0:nvSpPr><ns0:spPr><ns2:xfrm xmlns:ns2="http://schemas.openxmlformats.org/drawingml/2006/main"><ns2:off x="0" y="0"/><ns2:ext cx="12192000" cy="1051560"/></ns2:xfrm><ns3:prstGeom xmlns:ns3="http://schemas.openxmlformats.org/drawingml/2006/main" prst="rect"/><ns4:solidFill xmlns:ns4="http://schemas.openxmlformats.org/drawingml/2006/main"><ns4:srgbClr val="1E2761"/></ns4:solidFill><ns5:ln xmlns:ns5="http://schemas.openxmlformats.org/drawingml/2006/main"><ns5:noFill/></ns5:ln></ns0:spPr></ns0:sp><ns0:sp><ns0:nvSpPr><ns0:cNvPr id="10" name="SlideTitle.Header"/><ns0:cNvSpPr><ns1:spLocks xmlns:ns1="http://schemas.openxmlformats.org/drawingml/2006/main" noGrp="1"/></ns0:cNvSpPr><ns0:nvPr><ns0:ph idx="15" type="body"/></ns0:nvPr></ns0:nvSpPr><ns0:spPr><ns2:xfrm xmlns:ns2="http://schemas.openxmlformats.org/drawingml/2006/main"><ns2:off x="731520" y="91440"/><ns2:ext cx="9144000" cy="475488"/></ns2:xfrm></ns0:spPr><ns0:txBody><ns3:bodyPr xmlns:ns3="http://schemas.openxmlformats.org/drawingml/2006/main" wrap="square" anchor="t" anchorCtr="0"/><ns4:lstStyle xmlns:ns4="http://schemas.openxmlformats.org/drawingml/2006/main"><ns4:defPPr algn="l"><ns4:buNone/><ns4:defRPr sz="2800" dirty="0" b="1"><ns4:solidFill><ns4:srgbClr val="FFFFFF"/></ns4:solidFill><ns4:latin typeface="Georgia"/><ns4:ea typeface="Georgia"/></ns4:defRPr></ns4:defPPr><ns4:lvl1pPr algn="l"><ns4:buNone/><ns4:defRPr sz="2800" dirty="0" b="1"><ns4:solidFill><ns4:srgbClr val="FFFFFF"/></ns4:solidFill><ns4:latin typeface="Georgia"/><ns4:ea typeface="Georgia"/></ns4:defRPr></ns4:lvl1pPr><ns4:lvl2pPr algn="l"><ns4:buNone/><ns4:defRPr sz="2800" dirty="0" b="1"><ns4:solidFill><ns4:srgbClr val="FFFFFF"/></ns4:solidFill><ns4:latin typeface="Georgia"/><ns4:ea typeface="Georgia"/></ns4:defRPr></ns4:lvl2pPr><ns4:lvl3pPr algn="l"><ns4:buNone/><ns4:defRPr sz="2800" dirty="0" b="1"><ns4:solidFill><ns4:srgbClr val="FFFFFF"/></ns4:solidFill><ns4:latin typeface="Georgia"/><ns4:ea typeface="Georgia"/></ns4:defRPr></ns4:lvl3pPr><ns4:lvl4pPr algn="l"><ns4:buNone/><ns4:defRPr sz="2800" dirty="0" b="1"><ns4:solidFill><ns4:srgbClr val="FFFFFF"/></ns4:solidFill><ns4:latin typeface="Georgia"/><ns4:ea typeface="Georgia"/></ns4:defRPr></ns4:lvl4pPr><ns4:lvl5pPr algn="l"><ns4:buNone/><ns4:defRPr sz="2800" dirty="0" b="1"><ns4:solidFill><ns4:srgbClr val="FFFFFF"/></ns4:solidFill><ns4:latin typeface="Georgia"/><ns4:ea typeface="Georgia"/></ns4:defRPr></ns4:lvl5pPr><ns4:lvl6pPr algn="l"><ns4:buNone/><ns4:defRPr sz="2800" dirty="0" b="1"><ns4:solidFill><ns4:srgbClr val="FFFFFF"/></ns4:solidFill><ns4:latin typeface="Georgia"/><ns4:ea typeface="Georgia"/></ns4:defRPr></ns4:lvl6pPr><ns4:lvl7pPr algn="l"><ns4:buNone/><ns4:defRPr sz="2800" dirty="0" b="1"><ns4:solidFill><ns4:srgbClr val="FFFFFF"/></ns4:solidFill><ns4:latin typeface="Georgia"/><ns4:ea typeface="Georgia"/></ns4:defRPr></ns4:lvl7pPr><ns4:lvl8pPr algn="l"><ns4:buNone/><ns4:defRPr sz="2800" dirty="0" b="1"><ns4:solidFill><ns4:srgbClr val="FFFFFF"/></ns4:solidFill><ns4:latin typeface="Georgia"/><ns4:ea typeface="Georgia"/></ns4:defRPr></ns4:lvl8pPr><ns4:lvl9pPr algn="l"><ns4:buNone/><ns4:defRPr sz="2800" dirty="0" b="1"><ns4:solidFill><ns4:srgbClr val="FFFFFF"/></ns4:solidFill><ns4:latin typeface="Georgia"/><ns4:ea typeface="Georgia"/></ns4:defRPr></ns4:lvl9pPr></ns4:lstStyle/><ns5:p xmlns:ns5="http://schemas.openxmlformats.org/drawingml/2006/main"><ns5:pPr algn="l"><ns5:buNone/></ns5:pPr><ns5:r><ns5:rPr lang="ja-JP"/><ns5:t>サブタイトル</ns5:t></ns5:r></ns5:p></ns0:txBody></ns0:sp><ns0:sp><ns0:nvSpPr><ns0:cNvPr id="5" name="ConnLine"/><ns0:cNvSpPr><ns1:spLocks xmlns:ns1="http://schemas.openxmlformats.org/drawingml/2006/main" noGrp="1" noSelect="0" noRot="1" noMove="1"/></ns0:cNvSpPr><ns0:nvPr/></ns0:nvSpPr><ns0:spPr><ns2:xfrm xmlns:ns2="http://schemas.openxmlformats.org/drawingml/2006/main"><ns2:off x="1645920" y="2651760"/><ns2:ext cx="8869680" cy="36576"/></ns2:xfrm><ns3:prstGeom xmlns:ns3="http://schemas.openxmlformats.org/drawingml/2006/main" prst="rect"/><ns4:solidFill xmlns:ns4="http://schemas.openxmlformats.org/drawingml/2006/main"><ns4:srgbClr val="CADCFC"/></ns4:solidFill><ns5:ln xmlns:ns5="http://schemas.openxmlformats.org/drawingml/2006/main"><ns5:noFill/></ns5:ln></ns0:spPr></ns0:sp><ns0:sp><ns0:nvSpPr><ns0:cNvPr id="6" name="C1"/><ns0:cNvSpPr><ns1:spLocks xmlns:ns1="http://schemas.openxmlformats.org/drawingml/2006/main" noGrp="1"/></ns0:cNvSpPr><ns0:nvPr/></ns0:nvSpPr><ns0:spPr><ns2:xfrm xmlns:ns2="http://schemas.openxmlformats.org/drawingml/2006/main"><ns2:off x="1672254463968" y="2466575455968"/><ns2:ext cx="512064" cy="512064"/></ns2:xfrm><ns3:prstGeom xmlns:ns3="http://schemas.openxmlformats.org/drawingml/2006/main" prst="ellipse"/><ns4:solidFill xmlns:ns4="http://schemas.openxmlformats.org/drawingml/2006/main"><ns4:srgbClr val="3B82F6"/></ns4:solidFill><ns5:ln xmlns:ns5="http://schemas.openxmlformats.org/drawingml/2006/main"><ns5:noFill/></ns5:ln></ns0:spPr></ns0:sp><ns0:sp><ns0:nvSpPr><ns0:cNvPr id="7" name="C2"/><ns0:cNvSpPr><ns1:spLocks xmlns:ns1="http://schemas.openxmlformats.org/drawingml/2006/main" noGrp="1"/></ns0:cNvSpPr><ns0:nvPr/></ns0:nvSpPr><ns0:spPr><ns2:xfrm xmlns:ns2="http://schemas.openxmlformats.org/drawingml/2006/main"><ns2:off x="4347862015968" y="2466575455968"/><ns2:ext cx="512064" cy="512064"/></ns2:xfrm><ns3:prstGeom xmlns:ns3="http://schemas.openxmlformats.org/drawingml/2006/main" prst="ellipse"/><ns4:solidFill xmlns:ns4="http://schemas.openxmlformats.org/drawingml/2006/main"><ns4:srgbClr val="3B82F6"/></ns4:solidFill><ns5:ln xmlns:ns5="http://schemas.openxmlformats.org/drawingml/2006/main"><ns5:noFill/></ns5:ln></ns0:spPr></ns0:sp><ns0:sp><ns0:nvSpPr><ns0:cNvPr id="8" name="C3"/><ns0:cNvSpPr><ns1:spLocks xmlns:ns1="http://schemas.openxmlformats.org/drawingml/2006/main" noGrp="1"/></ns0:cNvSpPr><ns0:nvPr/></ns0:nvSpPr><ns0:spPr><ns2:xfrm xmlns:ns2="http://schemas.openxmlformats.org/drawingml/2006/main"><ns2:off x="7023469567968" y="2466575455968"/><ns2:ext cx="512064" cy="512064"/></ns2:xfrm><ns3:prstGeom xmlns:ns3="http://schemas.openxmlformats.org/drawingml/2006/main" prst="ellipse"/><ns4:solidFill xmlns:ns4="http://schemas.openxmlformats.org/drawingml/2006/main"><ns4:srgbClr val="3B82F6"/></ns4:solidFill><ns5:ln xmlns:ns5="http://schemas.openxmlformats.org/drawingml/2006/main"><ns5:noFill/></ns5:ln></ns0:spPr></ns0:sp><ns0:sp><ns0:nvSpPr><ns0:cNvPr id="9" name="C4"/><ns0:cNvSpPr><ns1:spLocks xmlns:ns1="http://schemas.openxmlformats.org/drawingml/2006/main" noGrp="1"/></ns0:cNvSpPr><ns0:nvPr/></ns0:nvSpPr><ns0:spPr><ns2:xfrm xmlns:ns2="http://schemas.openxmlformats.org/drawingml/2006/main"><ns2:off x="9615464383968" y="2466575455968"/><ns2:ext cx="512064" cy="512064"/></ns2:xfrm><ns3:prstGeom xmlns:ns3="http://schemas.openxmlformats.org/drawingml/2006/main" prst="ellipse"/><ns4:solidFill xmlns:ns4="http://schemas.openxmlformats.org/drawingml/2006/main"><ns4:srgbClr val="3B82F6"/></ns4:solidFill><ns5:ln xmlns:ns5="http://schemas.openxmlformats.org/drawingml/2006/main"><ns5:noFill/></ns5:ln></ns0:spPr></ns0:sp><ns0:sp><ns0:nvSpPr><ns0:cNvPr id="20" name="Step1.Left"/><ns0:cNvSpPr><ns1:spLocks xmlns:ns1="http://schemas.openxmlformats.org/drawingml/2006/main" noGrp="1"/></ns0:cNvSpPr><ns0:nvPr><ns0:ph idx="1" type="body"/></ns0:nvPr></ns0:nvSpPr><ns0:spPr><ns2:xfrm xmlns:ns2="http://schemas.openxmlformats.org/drawingml/2006/main"><ns2:off x="457200" y="3291840"/><ns2:ext cx="2560320" cy="2743200"/></ns2:xfrm></ns0:spPr><ns0:txBody><ns3:bodyPr xmlns:ns3="http://schemas.openxmlformats.org/drawingml/2006/main" wrap="square" anchor="t" anchorCtr="0"/><ns4:lstStyle xmlns:ns4="http://schemas.openxmlformats.org/drawingml/2006/main"><ns4:defPPr algn="ctr"><ns4:buNone/><ns4:defRPr sz="1300" dirty="0"><ns4:solidFill><ns4:srgbClr val="1E293B"/></ns4:solidFill><ns4:latin typeface="Calibri"/><ns4:ea typeface="Calibri"/></ns4:defRPr></ns4:defPPr><ns4:lvl1pPr algn="ctr"><ns4:buNone/><ns4:defRPr sz="1300" dirty="0"><ns4:solidFill><ns4:srgbClr val="1E293B"/></ns4:solidFill><ns4:latin typeface="Calibri"/><ns4:ea typeface="Calibri"/></ns4:defRPr></ns4:lvl1pPr><ns4:lvl2pPr algn="ctr"><ns4:buNone/><ns4:defRPr sz="1300" dirty="0"><ns4:solidFill><ns4:srgbClr val="1E293B"/></ns4:solidFill><ns4:latin typeface="Calibri"/><ns4:ea typeface="Calibri"/></ns4:defRPr></ns4:lvl2pPr><ns4:lvl3pPr algn="ctr"><ns4:buNone/><ns4:defRPr sz="1300" dirty="0"><ns4:solidFill><ns4:srgbClr val="1E293B"/></ns4:solidFill><ns4:latin typeface="Calibri"/><ns4:ea typeface="Calibri"/></ns4:defRPr></ns4:lvl3pPr><ns4:lvl4pPr algn="ctr"><ns4:buNone/><ns4:defRPr sz="1300" dirty="0"><ns4:solidFill><ns4:srgbClr val="1E293B"/></ns4:solidFill><ns4:latin typeface="Calibri"/><ns4:ea typeface="Calibri"/></ns4:defRPr></ns4:lvl4pPr><ns4:lvl5pPr algn="ctr"><ns4:buNone/><ns4:defRPr sz="1300" dirty="0"><ns4:solidFill><ns4:srgbClr val="1E293B"/></ns4:solidFill><ns4:latin typeface="Calibri"/><ns4:ea typeface="Calibri"/></ns4:defRPr></ns4:lvl5pPr><ns4:lvl6pPr algn="ctr"><ns4:buNone/><ns4:defRPr sz="1300" dirty="0"><ns4:solidFill><ns4:srgbClr val="1E293B"/></ns4:solidFill><ns4:latin typeface="Calibri"/><ns4:ea typeface="Calibri"/></ns4:defRPr></ns4:lvl6pPr><ns4:lvl7pPr algn="ctr"><ns4:buNone/><ns4:defRPr sz="1300" dirty="0"><ns4:solidFill><ns4:srgbClr val="1E293B"/></ns4:solidFill><ns4:latin typeface="Calibri"/><ns4:ea typeface="Calibri"/></ns4:defRPr></ns4:lvl7pPr><ns4:lvl8pPr algn="ctr"><ns4:buNone/><ns4:defRPr sz="1300" dirty="0"><ns4:solidFill><ns4:srgbClr val="1E293B"/></ns4:solidFill><ns4:latin typeface="Calibri"/><ns4:ea typeface="Calibri"/></ns4:defRPr></ns4:lvl8pPr><ns4:lvl9pPr algn="ctr"><ns4:buNone/><ns4:defRPr sz="1300" dirty="0"><ns4:solidFill><ns4:srgbClr val="1E293B"/></ns4:solidFill><ns4:latin typeface="Calibri"/><ns4:ea typeface="Calibri"/></ns4:defRPr></ns4:lvl9pPr></ns4:lstStyle/><ns5:p xmlns:ns5="http://schemas.openxmlformats.org/drawingml/2006/main"><ns5:pPr algn="ctr"><ns5:buNone/></ns5:pPr><ns5:r><ns5:rPr lang="ja-JP"/><ns5:t>STEP 2
+<ns0:sldLayout xmlns:ns0="http://schemas.openxmlformats.org/presentationml/2006/main" type="blank" preserve="1"><ns0:cSld name="Process.4Step.Sequential"><ns0:spTree><ns0:nvGrpSpPr><ns0:cNvPr id="1" name=""/><ns0:cNvGrpSpPr/><ns0:nvPr/></ns0:nvGrpSpPr><ns0:grpSpPr><ns1:xfrm xmlns:ns1="http://schemas.openxmlformats.org/drawingml/2006/main"><ns1:off x="0" y="0"/><ns1:ext cx="0" cy="0"/><ns1:chOff x="0" y="0"/><ns1:chExt cx="0" cy="0"/></ns1:xfrm></ns0:grpSpPr><ns0:sp><ns0:nvSpPr><ns0:cNvPr id="2" name="HeaderBar"/><ns0:cNvSpPr><ns1:spLocks xmlns:ns1="http://schemas.openxmlformats.org/drawingml/2006/main" noGrp="1" noSelect="0" noRot="1" noMove="1"/></ns0:cNvSpPr><ns0:nvPr/></ns0:nvSpPr><ns0:spPr><ns2:xfrm xmlns:ns2="http://schemas.openxmlformats.org/drawingml/2006/main"><ns2:off x="0" y="0"/><ns2:ext cx="12192000" cy="1051560"/></ns2:xfrm><ns3:prstGeom xmlns:ns3="http://schemas.openxmlformats.org/drawingml/2006/main" prst="rect"/><ns4:solidFill xmlns:ns4="http://schemas.openxmlformats.org/drawingml/2006/main"><ns4:srgbClr val="1E2761"/></ns4:solidFill><ns5:ln xmlns:ns5="http://schemas.openxmlformats.org/drawingml/2006/main"><ns5:noFill/></ns5:ln></ns0:spPr></ns0:sp><ns0:sp><ns0:nvSpPr><ns0:cNvPr id="10" name="SlideTitle.Header"/><ns0:cNvSpPr><ns1:spLocks xmlns:ns1="http://schemas.openxmlformats.org/drawingml/2006/main" noGrp="1"/></ns0:cNvSpPr><ns0:nvPr><ns0:ph idx="15" type="body"/></ns0:nvPr></ns0:nvSpPr><ns0:spPr><ns2:xfrm xmlns:ns2="http://schemas.openxmlformats.org/drawingml/2006/main"><ns2:off x="731520" y="91440"/><ns2:ext cx="9144000" cy="475488"/></ns2:xfrm></ns0:spPr><ns0:txBody><ns3:bodyPr xmlns:ns3="http://schemas.openxmlformats.org/drawingml/2006/main" wrap="square" anchor="t" anchorCtr="0"/><ns4:lstStyle><ns4:defPPr><ns4:defRPr sz="2800" b="1"><ns4:solidFill><ns4:srgbClr val="FFFFFF"/></ns4:solidFill></ns4:defRPr></ns4:defPPr></ns4:lstStyle><ns4:defPPr algn="l"><ns4:buNone/><ns4:defRPr sz="2800" dirty="0" b="1"><ns4:solidFill><ns4:srgbClr val="FFFFFF"/></ns4:solidFill><ns4:latin typeface="Georgia"/><ns4:ea typeface="Georgia"/></ns4:defRPr></ns4:defPPr><ns4:lvl1pPr algn="l"><ns4:buNone/><ns4:defRPr sz="2800" dirty="0" b="1"><ns4:solidFill><ns4:srgbClr val="FFFFFF"/></ns4:solidFill><ns4:latin typeface="Georgia"/><ns4:ea typeface="Georgia"/></ns4:defRPr></ns4:lvl1pPr><ns4:lvl2pPr algn="l"><ns4:buNone/><ns4:defRPr sz="2800" dirty="0" b="1"><ns4:solidFill><ns4:srgbClr val="FFFFFF"/></ns4:solidFill><ns4:latin typeface="Georgia"/><ns4:ea typeface="Georgia"/></ns4:defRPr></ns4:lvl2pPr><ns4:lvl3pPr algn="l"><ns4:buNone/><ns4:defRPr sz="2800" dirty="0" b="1"><ns4:solidFill><ns4:srgbClr val="FFFFFF"/></ns4:solidFill><ns4:latin typeface="Georgia"/><ns4:ea typeface="Georgia"/></ns4:defRPr></ns4:lvl3pPr><ns4:lvl4pPr algn="l"><ns4:buNone/><ns4:defRPr sz="2800" dirty="0" b="1"><ns4:solidFill><ns4:srgbClr val="FFFFFF"/></ns4:solidFill><ns4:latin typeface="Georgia"/><ns4:ea typeface="Georgia"/></ns4:defRPr></ns4:lvl4pPr><ns4:lvl5pPr algn="l"><ns4:buNone/><ns4:defRPr sz="2800" dirty="0" b="1"><ns4:solidFill><ns4:srgbClr val="FFFFFF"/></ns4:solidFill><ns4:latin typeface="Georgia"/><ns4:ea typeface="Georgia"/></ns4:defRPr></ns4:lvl5pPr><ns4:lvl6pPr algn="l"><ns4:buNone/><ns4:defRPr sz="2800" dirty="0" b="1"><ns4:solidFill><ns4:srgbClr val="FFFFFF"/></ns4:solidFill><ns4:latin typeface="Georgia"/><ns4:ea typeface="Georgia"/></ns4:defRPr></ns4:lvl6pPr><ns4:lvl7pPr algn="l"><ns4:buNone/><ns4:defRPr sz="2800" dirty="0" b="1"><ns4:solidFill><ns4:srgbClr val="FFFFFF"/></ns4:solidFill><ns4:latin typeface="Georgia"/><ns4:ea typeface="Georgia"/></ns4:defRPr></ns4:lvl7pPr><ns4:lvl8pPr algn="l"><ns4:buNone/><ns4:defRPr sz="2800" dirty="0" b="1"><ns4:solidFill><ns4:srgbClr val="FFFFFF"/></ns4:solidFill><ns4:latin typeface="Georgia"/><ns4:ea typeface="Georgia"/></ns4:defRPr></ns4:lvl8pPr><ns4:lvl9pPr algn="l"><ns4:buNone/><ns4:defRPr sz="2800" dirty="0" b="1"><ns4:solidFill><ns4:srgbClr val="FFFFFF"/></ns4:solidFill><ns4:latin typeface="Georgia"/><ns4:ea typeface="Georgia"/></ns4:defRPr></ns4:lvl9pPr></ns4:lstStyle/><ns5:p xmlns:ns5="http://schemas.openxmlformats.org/drawingml/2006/main"><ns5:pPr algn="l"><ns5:buNone/></ns5:pPr><ns5:r><ns5:rPr lang="ja-JP"/><ns5:t>サブタイトル</ns5:t></ns5:r></ns5:p></ns0:txBody></ns0:sp><ns0:sp><ns0:nvSpPr><ns0:cNvPr id="5" name="ConnLine"/><ns0:cNvSpPr><ns1:spLocks xmlns:ns1="http://schemas.openxmlformats.org/drawingml/2006/main" noGrp="1" noSelect="0" noRot="1" noMove="1"/></ns0:cNvSpPr><ns0:nvPr/></ns0:nvSpPr><ns0:spPr><ns2:xfrm xmlns:ns2="http://schemas.openxmlformats.org/drawingml/2006/main"><ns2:off x="1645920" y="2651760"/><ns2:ext cx="8869680" cy="36576"/></ns2:xfrm><ns3:prstGeom xmlns:ns3="http://schemas.openxmlformats.org/drawingml/2006/main" prst="rect"/><ns4:solidFill xmlns:ns4="http://schemas.openxmlformats.org/drawingml/2006/main"><ns4:srgbClr val="CADCFC"/></ns4:solidFill><ns5:ln xmlns:ns5="http://schemas.openxmlformats.org/drawingml/2006/main"><ns5:noFill/></ns5:ln></ns0:spPr></ns0:sp><ns0:sp><ns0:nvSpPr><ns0:cNvPr id="6" name="C1"/><ns0:cNvSpPr><ns1:spLocks xmlns:ns1="http://schemas.openxmlformats.org/drawingml/2006/main" noGrp="1"/></ns0:cNvSpPr><ns0:nvPr/></ns0:nvSpPr><ns0:spPr><ns2:xfrm xmlns:ns2="http://schemas.openxmlformats.org/drawingml/2006/main"><ns2:off x="1672254463968" y="2466575455968"/><ns2:ext cx="512064" cy="512064"/></ns2:xfrm><ns3:prstGeom xmlns:ns3="http://schemas.openxmlformats.org/drawingml/2006/main" prst="ellipse"/><ns4:solidFill xmlns:ns4="http://schemas.openxmlformats.org/drawingml/2006/main"><ns4:srgbClr val="3B82F6"/></ns4:solidFill><ns5:ln xmlns:ns5="http://schemas.openxmlformats.org/drawingml/2006/main"><ns5:noFill/></ns5:ln></ns0:spPr></ns0:sp><ns0:sp><ns0:nvSpPr><ns0:cNvPr id="7" name="C2"/><ns0:cNvSpPr><ns1:spLocks xmlns:ns1="http://schemas.openxmlformats.org/drawingml/2006/main" noGrp="1"/></ns0:cNvSpPr><ns0:nvPr/></ns0:nvSpPr><ns0:spPr><ns2:xfrm xmlns:ns2="http://schemas.openxmlformats.org/drawingml/2006/main"><ns2:off x="4347862015968" y="2466575455968"/><ns2:ext cx="512064" cy="512064"/></ns2:xfrm><ns3:prstGeom xmlns:ns3="http://schemas.openxmlformats.org/drawingml/2006/main" prst="ellipse"/><ns4:solidFill xmlns:ns4="http://schemas.openxmlformats.org/drawingml/2006/main"><ns4:srgbClr val="3B82F6"/></ns4:solidFill><ns5:ln xmlns:ns5="http://schemas.openxmlformats.org/drawingml/2006/main"><ns5:noFill/></ns5:ln></ns0:spPr></ns0:sp><ns0:sp><ns0:nvSpPr><ns0:cNvPr id="8" name="C3"/><ns0:cNvSpPr><ns1:spLocks xmlns:ns1="http://schemas.openxmlformats.org/drawingml/2006/main" noGrp="1"/></ns0:cNvSpPr><ns0:nvPr/></ns0:nvSpPr><ns0:spPr><ns2:xfrm xmlns:ns2="http://schemas.openxmlformats.org/drawingml/2006/main"><ns2:off x="7023469567968" y="2466575455968"/><ns2:ext cx="512064" cy="512064"/></ns2:xfrm><ns3:prstGeom xmlns:ns3="http://schemas.openxmlformats.org/drawingml/2006/main" prst="ellipse"/><ns4:solidFill xmlns:ns4="http://schemas.openxmlformats.org/drawingml/2006/main"><ns4:srgbClr val="3B82F6"/></ns4:solidFill><ns5:ln xmlns:ns5="http://schemas.openxmlformats.org/drawingml/2006/main"><ns5:noFill/></ns5:ln></ns0:spPr></ns0:sp><ns0:sp><ns0:nvSpPr><ns0:cNvPr id="9" name="C4"/><ns0:cNvSpPr><ns1:spLocks xmlns:ns1="http://schemas.openxmlformats.org/drawingml/2006/main" noGrp="1"/></ns0:cNvSpPr><ns0:nvPr/></ns0:nvSpPr><ns0:spPr><ns2:xfrm xmlns:ns2="http://schemas.openxmlformats.org/drawingml/2006/main"><ns2:off x="9615464383968" y="2466575455968"/><ns2:ext cx="512064" cy="512064"/></ns2:xfrm><ns3:prstGeom xmlns:ns3="http://schemas.openxmlformats.org/drawingml/2006/main" prst="ellipse"/><ns4:solidFill xmlns:ns4="http://schemas.openxmlformats.org/drawingml/2006/main"><ns4:srgbClr val="3B82F6"/></ns4:solidFill><ns5:ln xmlns:ns5="http://schemas.openxmlformats.org/drawingml/2006/main"><ns5:noFill/></ns5:ln></ns0:spPr></ns0:sp><ns0:sp><ns0:nvSpPr><ns0:cNvPr id="20" name="Step1.Left"/><ns0:cNvSpPr><ns1:spLocks xmlns:ns1="http://schemas.openxmlformats.org/drawingml/2006/main" noGrp="1"/></ns0:cNvSpPr><ns0:nvPr><ns0:ph idx="1" type="body"/></ns0:nvPr></ns0:nvSpPr><ns0:spPr><ns2:xfrm xmlns:ns2="http://schemas.openxmlformats.org/drawingml/2006/main"><ns2:off x="457200" y="3291840"/><ns2:ext cx="2560320" cy="2743200"/></ns2:xfrm></ns0:spPr><ns0:txBody><ns3:bodyPr xmlns:ns3="http://schemas.openxmlformats.org/drawingml/2006/main" wrap="square" anchor="t" anchorCtr="0"/><ns4:lstStyle><ns4:defPPr algn="ctr"><ns4:defRPr sz="1300"></ns4:defRPr></ns4:defPPr></ns4:lstStyle><ns4:defPPr algn="ctr"><ns4:buNone/><ns4:defRPr sz="1300" dirty="0"><ns4:solidFill><ns4:srgbClr val="1E293B"/></ns4:solidFill><ns4:latin typeface="Calibri"/><ns4:ea typeface="Calibri"/></ns4:defRPr></ns4:defPPr><ns4:lvl1pPr algn="ctr"><ns4:buNone/><ns4:defRPr sz="1300" dirty="0"><ns4:solidFill><ns4:srgbClr val="1E293B"/></ns4:solidFill><ns4:latin typeface="Calibri"/><ns4:ea typeface="Calibri"/></ns4:defRPr></ns4:lvl1pPr><ns4:lvl2pPr algn="ctr"><ns4:buNone/><ns4:defRPr sz="1300" dirty="0"><ns4:solidFill><ns4:srgbClr val="1E293B"/></ns4:solidFill><ns4:latin typeface="Calibri"/><ns4:ea typeface="Calibri"/></ns4:defRPr></ns4:lvl2pPr><ns4:lvl3pPr algn="ctr"><ns4:buNone/><ns4:defRPr sz="1300" dirty="0"><ns4:solidFill><ns4:srgbClr val="1E293B"/></ns4:solidFill><ns4:latin typeface="Calibri"/><ns4:ea typeface="Calibri"/></ns4:defRPr></ns4:lvl3pPr><ns4:lvl4pPr algn="ctr"><ns4:buNone/><ns4:defRPr sz="1300" dirty="0"><ns4:solidFill><ns4:srgbClr val="1E293B"/></ns4:solidFill><ns4:latin typeface="Calibri"/><ns4:ea typeface="Calibri"/></ns4:defRPr></ns4:lvl4pPr><ns4:lvl5pPr algn="ctr"><ns4:buNone/><ns4:defRPr sz="1300" dirty="0"><ns4:solidFill><ns4:srgbClr val="1E293B"/></ns4:solidFill><ns4:latin typeface="Calibri"/><ns4:ea typeface="Calibri"/></ns4:defRPr></ns4:lvl5pPr><ns4:lvl6pPr algn="ctr"><ns4:buNone/><ns4:defRPr sz="1300" dirty="0"><ns4:solidFill><ns4:srgbClr val="1E293B"/></ns4:solidFill><ns4:latin typeface="Calibri"/><ns4:ea typeface="Calibri"/></ns4:defRPr></ns4:lvl6pPr><ns4:lvl7pPr algn="ctr"><ns4:buNone/><ns4:defRPr sz="1300" dirty="0"><ns4:solidFill><ns4:srgbClr val="1E293B"/></ns4:solidFill><ns4:latin typeface="Calibri"/><ns4:ea typeface="Calibri"/></ns4:defRPr></ns4:lvl7pPr><ns4:lvl8pPr algn="ctr"><ns4:buNone/><ns4:defRPr sz="1300" dirty="0"><ns4:solidFill><ns4:srgbClr val="1E293B"/></ns4:solidFill><ns4:latin typeface="Calibri"/><ns4:ea typeface="Calibri"/></ns4:defRPr></ns4:lvl8pPr><ns4:lvl9pPr algn="ctr"><ns4:buNone/><ns4:defRPr sz="1300" dirty="0"><ns4:solidFill><ns4:srgbClr val="1E293B"/></ns4:solidFill><ns4:latin typeface="Calibri"/><ns4:ea typeface="Calibri"/></ns4:defRPr></ns4:lvl9pPr></ns4:lstStyle/><ns5:p xmlns:ns5="http://schemas.openxmlformats.org/drawingml/2006/main"><ns5:pPr algn="ctr"><ns5:buNone/></ns5:pPr><ns5:r><ns5:rPr lang="ja-JP"/><ns5:t>STEP 2
 タイトル
-説明テキスト</ns5:t></ns5:r></ns5:p></ns0:txBody></ns0:sp><ns0:sp><ns0:nvSpPr><ns0:cNvPr id="22" name="Step3.CenterRight"/><ns0:cNvSpPr><ns1:spLocks xmlns:ns1="http://schemas.openxmlformats.org/drawingml/2006/main" noGrp="1"/></ns0:cNvSpPr><ns0:nvPr><ns0:ph idx="3" type="body"/></ns0:nvPr></ns0:nvSpPr><ns0:spPr><ns2:xfrm xmlns:ns2="http://schemas.openxmlformats.org/drawingml/2006/main"><ns2:off x="6309360" y="3291840"/><ns2:ext cx="2560320" cy="2743200"/></ns2:xfrm></ns0:spPr><ns0:txBody><ns3:bodyPr xmlns:ns3="http://schemas.openxmlformats.org/drawingml/2006/main" wrap="square" anchor="t" anchorCtr="0"/><ns4:lstStyle xmlns:ns4="http://schemas.openxmlformats.org/drawingml/2006/main"><ns4:defPPr algn="ctr"><ns4:buNone/><ns4:defRPr sz="1300" dirty="0"><ns4:solidFill><ns4:srgbClr val="1E293B"/></ns4:solidFill><ns4:latin typeface="Calibri"/><ns4:ea typeface="Calibri"/></ns4:defRPr></ns4:defPPr><ns4:lvl1pPr algn="ctr"><ns4:buNone/><ns4:defRPr sz="1300" dirty="0"><ns4:solidFill><ns4:srgbClr val="1E293B"/></ns4:solidFill><ns4:latin typeface="Calibri"/><ns4:ea typeface="Calibri"/></ns4:defRPr></ns4:lvl1pPr><ns4:lvl2pPr algn="ctr"><ns4:buNone/><ns4:defRPr sz="1300" dirty="0"><ns4:solidFill><ns4:srgbClr val="1E293B"/></ns4:solidFill><ns4:latin typeface="Calibri"/><ns4:ea typeface="Calibri"/></ns4:defRPr></ns4:lvl2pPr><ns4:lvl3pPr algn="ctr"><ns4:buNone/><ns4:defRPr sz="1300" dirty="0"><ns4:solidFill><ns4:srgbClr val="1E293B"/></ns4:solidFill><ns4:latin typeface="Calibri"/><ns4:ea typeface="Calibri"/></ns4:defRPr></ns4:lvl3pPr><ns4:lvl4pPr algn="ctr"><ns4:buNone/><ns4:defRPr sz="1300" dirty="0"><ns4:solidFill><ns4:srgbClr val="1E293B"/></ns4:solidFill><ns4:latin typeface="Calibri"/><ns4:ea typeface="Calibri"/></ns4:defRPr></ns4:lvl4pPr><ns4:lvl5pPr algn="ctr"><ns4:buNone/><ns4:defRPr sz="1300" dirty="0"><ns4:solidFill><ns4:srgbClr val="1E293B"/></ns4:solidFill><ns4:latin typeface="Calibri"/><ns4:ea typeface="Calibri"/></ns4:defRPr></ns4:lvl5pPr><ns4:lvl6pPr algn="ctr"><ns4:buNone/><ns4:defRPr sz="1300" dirty="0"><ns4:solidFill><ns4:srgbClr val="1E293B"/></ns4:solidFill><ns4:latin typeface="Calibri"/><ns4:ea typeface="Calibri"/></ns4:defRPr></ns4:lvl6pPr><ns4:lvl7pPr algn="ctr"><ns4:buNone/><ns4:defRPr sz="1300" dirty="0"><ns4:solidFill><ns4:srgbClr val="1E293B"/></ns4:solidFill><ns4:latin typeface="Calibri"/><ns4:ea typeface="Calibri"/></ns4:defRPr></ns4:lvl7pPr><ns4:lvl8pPr algn="ctr"><ns4:buNone/><ns4:defRPr sz="1300" dirty="0"><ns4:solidFill><ns4:srgbClr val="1E293B"/></ns4:solidFill><ns4:latin typeface="Calibri"/><ns4:ea typeface="Calibri"/></ns4:defRPr></ns4:lvl8pPr><ns4:lvl9pPr algn="ctr"><ns4:buNone/><ns4:defRPr sz="1300" dirty="0"><ns4:solidFill><ns4:srgbClr val="1E293B"/></ns4:solidFill><ns4:latin typeface="Calibri"/><ns4:ea typeface="Calibri"/></ns4:defRPr></ns4:lvl9pPr></ns4:lstStyle/><ns5:p xmlns:ns5="http://schemas.openxmlformats.org/drawingml/2006/main"><ns5:pPr algn="ctr"><ns5:buNone/></ns5:pPr><ns5:r><ns5:rPr lang="ja-JP"/><ns5:t>STEP 4
+説明テキスト</ns5:t></ns5:r></ns5:p></ns0:txBody></ns0:sp><ns0:sp><ns0:nvSpPr><ns0:cNvPr id="22" name="Step3.CenterRight"/><ns0:cNvSpPr><ns1:spLocks xmlns:ns1="http://schemas.openxmlformats.org/drawingml/2006/main" noGrp="1"/></ns0:cNvSpPr><ns0:nvPr><ns0:ph idx="3" type="body"/></ns0:nvPr></ns0:nvSpPr><ns0:spPr><ns2:xfrm xmlns:ns2="http://schemas.openxmlformats.org/drawingml/2006/main"><ns2:off x="6309360" y="3291840"/><ns2:ext cx="2560320" cy="2743200"/></ns2:xfrm></ns0:spPr><ns0:txBody><ns3:bodyPr xmlns:ns3="http://schemas.openxmlformats.org/drawingml/2006/main" wrap="square" anchor="t" anchorCtr="0"/><ns4:lstStyle><ns4:defPPr algn="ctr"><ns4:defRPr sz="1300"></ns4:defRPr></ns4:defPPr></ns4:lstStyle><ns4:defPPr algn="ctr"><ns4:buNone/><ns4:defRPr sz="1300" dirty="0"><ns4:solidFill><ns4:srgbClr val="1E293B"/></ns4:solidFill><ns4:latin typeface="Calibri"/><ns4:ea typeface="Calibri"/></ns4:defRPr></ns4:defPPr><ns4:lvl1pPr algn="ctr"><ns4:buNone/><ns4:defRPr sz="1300" dirty="0"><ns4:solidFill><ns4:srgbClr val="1E293B"/></ns4:solidFill><ns4:latin typeface="Calibri"/><ns4:ea typeface="Calibri"/></ns4:defRPr></ns4:lvl1pPr><ns4:lvl2pPr algn="ctr"><ns4:buNone/><ns4:defRPr sz="1300" dirty="0"><ns4:solidFill><ns4:srgbClr val="1E293B"/></ns4:solidFill><ns4:latin typeface="Calibri"/><ns4:ea typeface="Calibri"/></ns4:defRPr></ns4:lvl2pPr><ns4:lvl3pPr algn="ctr"><ns4:buNone/><ns4:defRPr sz="1300" dirty="0"><ns4:solidFill><ns4:srgbClr val="1E293B"/></ns4:solidFill><ns4:latin typeface="Calibri"/><ns4:ea typeface="Calibri"/></ns4:defRPr></ns4:lvl3pPr><ns4:lvl4pPr algn="ctr"><ns4:buNone/><ns4:defRPr sz="1300" dirty="0"><ns4:solidFill><ns4:srgbClr val="1E293B"/></ns4:solidFill><ns4:latin typeface="Calibri"/><ns4:ea typeface="Calibri"/></ns4:defRPr></ns4:lvl4pPr><ns4:lvl5pPr algn="ctr"><ns4:buNone/><ns4:defRPr sz="1300" dirty="0"><ns4:solidFill><ns4:srgbClr val="1E293B"/></ns4:solidFill><ns4:latin typeface="Calibri"/><ns4:ea typeface="Calibri"/></ns4:defRPr></ns4:lvl5pPr><ns4:lvl6pPr algn="ctr"><ns4:buNone/><ns4:defRPr sz="1300" dirty="0"><ns4:solidFill><ns4:srgbClr val="1E293B"/></ns4:solidFill><ns4:latin typeface="Calibri"/><ns4:ea typeface="Calibri"/></ns4:defRPr></ns4:lvl6pPr><ns4:lvl7pPr algn="ctr"><ns4:buNone/><ns4:defRPr sz="1300" dirty="0"><ns4:solidFill><ns4:srgbClr val="1E293B"/></ns4:solidFill><ns4:latin typeface="Calibri"/><ns4:ea typeface="Calibri"/></ns4:defRPr></ns4:lvl7pPr><ns4:lvl8pPr algn="ctr"><ns4:buNone/><ns4:defRPr sz="1300" dirty="0"><ns4:solidFill><ns4:srgbClr val="1E293B"/></ns4:solidFill><ns4:latin typeface="Calibri"/><ns4:ea typeface="Calibri"/></ns4:defRPr></ns4:lvl8pPr><ns4:lvl9pPr algn="ctr"><ns4:buNone/><ns4:defRPr sz="1300" dirty="0"><ns4:solidFill><ns4:srgbClr val="1E293B"/></ns4:solidFill><ns4:latin typeface="Calibri"/><ns4:ea typeface="Calibri"/></ns4:defRPr></ns4:lvl9pPr></ns4:lstStyle/><ns5:p xmlns:ns5="http://schemas.openxmlformats.org/drawingml/2006/main"><ns5:pPr algn="ctr"><ns5:buNone/></ns5:pPr><ns5:r><ns5:rPr lang="ja-JP"/><ns5:t>STEP 4
 タイトル
-説明テキスト</ns5:t></ns5:r></ns5:p></ns0:txBody></ns0:sp><ns0:sp><ns0:nvSpPr><ns0:cNvPr id="30" name="SlideNum.Footer"/><ns0:cNvSpPr><ns1:spLocks xmlns:ns1="http://schemas.openxmlformats.org/drawingml/2006/main" noGrp="1"/></ns0:cNvSpPr><ns0:nvPr><ns0:ph idx="50" type="sldNum"/></ns0:nvPr></ns0:nvSpPr><ns0:spPr><ns2:xfrm xmlns:ns2="http://schemas.openxmlformats.org/drawingml/2006/main"><ns2:off x="10972800" y="6446520"/><ns2:ext cx="1097280" cy="274320"/></ns2:xfrm></ns0:spPr><ns0:txBody><ns3:bodyPr xmlns:ns3="http://schemas.openxmlformats.org/drawingml/2006/main" wrap="square" anchor="t" anchorCtr="0"/><ns4:lstStyle xmlns:ns4="http://schemas.openxmlformats.org/drawingml/2006/main"><ns4:defPPr algn="r"><ns4:buNone/><ns4:defRPr sz="1000" dirty="0"><ns4:solidFill><ns4:srgbClr val="94A3B8"/></ns4:solidFill><ns4:latin typeface="Calibri"/><ns4:ea typeface="Calibri"/></ns4:defRPr></ns4:defPPr><ns4:lvl1pPr algn="r"><ns4:buNone/><ns4:defRPr sz="1000" dirty="0"><ns4:solidFill><ns4:srgbClr val="94A3B8"/></ns4:solidFill><ns4:latin typeface="Calibri"/><ns4:ea typeface="Calibri"/></ns4:defRPr></ns4:lvl1pPr><ns4:lvl2pPr algn="r"><ns4:buNone/><ns4:defRPr sz="1000" dirty="0"><ns4:solidFill><ns4:srgbClr val="94A3B8"/></ns4:solidFill><ns4:latin typeface="Calibri"/><ns4:ea typeface="Calibri"/></ns4:defRPr></ns4:lvl2pPr><ns4:lvl3pPr algn="r"><ns4:buNone/><ns4:defRPr sz="1000" dirty="0"><ns4:solidFill><ns4:srgbClr val="94A3B8"/></ns4:solidFill><ns4:latin typeface="Calibri"/><ns4:ea typeface="Calibri"/></ns4:defRPr></ns4:lvl3pPr><ns4:lvl4pPr algn="r"><ns4:buNone/><ns4:defRPr sz="1000" dirty="0"><ns4:solidFill><ns4:srgbClr val="94A3B8"/></ns4:solidFill><ns4:latin typeface="Calibri"/><ns4:ea typeface="Calibri"/></ns4:defRPr></ns4:lvl4pPr><ns4:lvl5pPr algn="r"><ns4:buNone/><ns4:defRPr sz="1000" dirty="0"><ns4:solidFill><ns4:srgbClr val="94A3B8"/></ns4:solidFill><ns4:latin typeface="Calibri"/><ns4:ea typeface="Calibri"/></ns4:defRPr></ns4:lvl5pPr><ns4:lvl6pPr algn="r"><ns4:buNone/><ns4:defRPr sz="1000" dirty="0"><ns4:solidFill><ns4:srgbClr val="94A3B8"/></ns4:solidFill><ns4:latin typeface="Calibri"/><ns4:ea typeface="Calibri"/></ns4:defRPr></ns4:lvl6pPr><ns4:lvl7pPr algn="r"><ns4:buNone/><ns4:defRPr sz="1000" dirty="0"><ns4:solidFill><ns4:srgbClr val="94A3B8"/></ns4:solidFill><ns4:latin typeface="Calibri"/><ns4:ea typeface="Calibri"/></ns4:defRPr></ns4:lvl7pPr><ns4:lvl8pPr algn="r"><ns4:buNone/><ns4:defRPr sz="1000" dirty="0"><ns4:solidFill><ns4:srgbClr val="94A3B8"/></ns4:solidFill><ns4:latin typeface="Calibri"/><ns4:ea typeface="Calibri"/></ns4:defRPr></ns4:lvl8pPr><ns4:lvl9pPr algn="r"><ns4:buNone/><ns4:defRPr sz="1000" dirty="0"><ns4:solidFill><ns4:srgbClr val="94A3B8"/></ns4:solidFill><ns4:latin typeface="Calibri"/><ns4:ea typeface="Calibri"/></ns4:defRPr></ns4:lvl9pPr></ns4:lstStyle><ns5:p xmlns:ns5="http://schemas.openxmlformats.org/drawingml/2006/main"><ns5:pPr algn="r"><ns5:buNone/></ns5:pPr><ns5:r><ns5:rPr lang="ja-JP"/><ns5:t>&lt;#&gt;</ns5:t></ns5:r></ns5:p></ns0:txBody></ns0:sp></ns0:spTree></ns0:cSld><ns0:clrMapOvr/></ns0:sldLayout>
+説明テキスト</ns5:t></ns5:r></ns5:p></ns0:txBody></ns0:sp><ns0:sp><ns0:nvSpPr><ns0:cNvPr id="30" name="SlideNum.Footer"/><ns0:cNvSpPr><ns1:spLocks xmlns:ns1="http://schemas.openxmlformats.org/drawingml/2006/main" noGrp="1"/></ns0:cNvSpPr><ns0:nvPr><ns0:ph idx="50" type="sldNum"/></ns0:nvPr></ns0:nvSpPr><ns0:spPr><ns2:xfrm xmlns:ns2="http://schemas.openxmlformats.org/drawingml/2006/main"><ns2:off x="10972800" y="6446520"/><ns2:ext cx="1097280" cy="274320"/></ns2:xfrm></ns0:spPr><ns0:txBody><ns3:bodyPr xmlns:ns3="http://schemas.openxmlformats.org/drawingml/2006/main" wrap="square" anchor="t" anchorCtr="0"/><ns4:lstStyle><ns4:defPPr algn="r"><ns4:defRPr sz="1000"><ns4:solidFill><ns4:srgbClr val="94A3B8"/></ns4:solidFill></ns4:defRPr></ns4:defPPr></ns4:lstStyle><ns4:defPPr algn="r"><ns4:buNone/><ns4:defRPr sz="1000" dirty="0"><ns4:solidFill><ns4:srgbClr val="94A3B8"/></ns4:solidFill><ns4:latin typeface="Calibri"/><ns4:ea typeface="Calibri"/></ns4:defRPr></ns4:defPPr><ns4:lvl1pPr algn="r"><ns4:buNone/><ns4:defRPr sz="1000" dirty="0"><ns4:solidFill><ns4:srgbClr val="94A3B8"/></ns4:solidFill><ns4:latin typeface="Calibri"/><ns4:ea typeface="Calibri"/></ns4:defRPr></ns4:lvl1pPr><ns4:lvl2pPr algn="r"><ns4:buNone/><ns4:defRPr sz="1000" dirty="0"><ns4:solidFill><ns4:srgbClr val="94A3B8"/></ns4:solidFill><ns4:latin typeface="Calibri"/><ns4:ea typeface="Calibri"/></ns4:defRPr></ns4:lvl2pPr><ns4:lvl3pPr algn="r"><ns4:buNone/><ns4:defRPr sz="1000" dirty="0"><ns4:solidFill><ns4:srgbClr val="94A3B8"/></ns4:solidFill><ns4:latin typeface="Calibri"/><ns4:ea typeface="Calibri"/></ns4:defRPr></ns4:lvl3pPr><ns4:lvl4pPr algn="r"><ns4:buNone/><ns4:defRPr sz="1000" dirty="0"><ns4:solidFill><ns4:srgbClr val="94A3B8"/></ns4:solidFill><ns4:latin typeface="Calibri"/><ns4:ea typeface="Calibri"/></ns4:defRPr></ns4:lvl4pPr><ns4:lvl5pPr algn="r"><ns4:buNone/><ns4:defRPr sz="1000" dirty="0"><ns4:solidFill><ns4:srgbClr val="94A3B8"/></ns4:solidFill><ns4:latin typeface="Calibri"/><ns4:ea typeface="Calibri"/></ns4:defRPr></ns4:lvl5pPr><ns4:lvl6pPr algn="r"><ns4:buNone/><ns4:defRPr sz="1000" dirty="0"><ns4:solidFill><ns4:srgbClr val="94A3B8"/></ns4:solidFill><ns4:latin typeface="Calibri"/><ns4:ea typeface="Calibri"/></ns4:defRPr></ns4:lvl6pPr><ns4:lvl7pPr algn="r"><ns4:buNone/><ns4:defRPr sz="1000" dirty="0"><ns4:solidFill><ns4:srgbClr val="94A3B8"/></ns4:solidFill><ns4:latin typeface="Calibri"/><ns4:ea typeface="Calibri"/></ns4:defRPr></ns4:lvl7pPr><ns4:lvl8pPr algn="r"><ns4:buNone/><ns4:defRPr sz="1000" dirty="0"><ns4:solidFill><ns4:srgbClr val="94A3B8"/></ns4:solidFill><ns4:latin typeface="Calibri"/><ns4:ea typeface="Calibri"/></ns4:defRPr></ns4:lvl8pPr><ns4:lvl9pPr algn="r"><ns4:buNone/><ns4:defRPr sz="1000" dirty="0"><ns4:solidFill><ns4:srgbClr val="94A3B8"/></ns4:solidFill><ns4:latin typeface="Calibri"/><ns4:ea typeface="Calibri"/></ns4:defRPr></ns4:lvl9pPr></ns4:lstStyle><ns5:p xmlns:ns5="http://schemas.openxmlformats.org/drawingml/2006/main"><ns5:pPr algn="r"><ns5:buNone/></ns5:pPr><ns5:r><ns5:rPr lang="ja-JP"/><ns5:t>&lt;#&gt;</ns5:t></ns5:r></ns5:p></ns0:txBody></ns0:sp></ns0:spTree></ns0:cSld><ns0:clrMapOvr/></ns0:sldLayout>
 </file>
 
 <file path=ppt/slideLayouts/slideLayout26.xml><?xml version='1.0' encoding='UTF-8' standalone='yes'?>
-<ns0:sldLayout xmlns:ns0="http://schemas.openxmlformats.org/presentationml/2006/main" type="blank" preserve="1"><ns0:cSld name="Process.3Step.Sequential"><ns0:spTree><ns0:nvGrpSpPr><ns0:cNvPr id="1" name=""/><ns0:cNvGrpSpPr/><ns0:nvPr/></ns0:nvGrpSpPr><ns0:grpSpPr><ns1:xfrm xmlns:ns1="http://schemas.openxmlformats.org/drawingml/2006/main"><ns1:off x="0" y="0"/><ns1:ext cx="0" cy="0"/><ns1:chOff x="0" y="0"/><ns1:chExt cx="0" cy="0"/></ns1:xfrm></ns0:grpSpPr><ns0:sp><ns0:nvSpPr><ns0:cNvPr id="2" name="HeaderBar"/><ns0:cNvSpPr><ns1:spLocks xmlns:ns1="http://schemas.openxmlformats.org/drawingml/2006/main" noGrp="1" noSelect="0" noRot="1" noMove="1"/></ns0:cNvSpPr><ns0:nvPr/></ns0:nvSpPr><ns0:spPr><ns2:xfrm xmlns:ns2="http://schemas.openxmlformats.org/drawingml/2006/main"><ns2:off x="0" y="0"/><ns2:ext cx="12192000" cy="1051560"/></ns2:xfrm><ns3:prstGeom xmlns:ns3="http://schemas.openxmlformats.org/drawingml/2006/main" prst="rect"/><ns4:solidFill xmlns:ns4="http://schemas.openxmlformats.org/drawingml/2006/main"><ns4:srgbClr val="1E2761"/></ns4:solidFill><ns5:ln xmlns:ns5="http://schemas.openxmlformats.org/drawingml/2006/main"><ns5:noFill/></ns5:ln></ns0:spPr></ns0:sp><ns0:sp><ns0:nvSpPr><ns0:cNvPr id="10" name="SlideTitle.Header"/><ns0:cNvSpPr><ns1:spLocks xmlns:ns1="http://schemas.openxmlformats.org/drawingml/2006/main" noGrp="1"/></ns0:cNvSpPr><ns0:nvPr><ns0:ph idx="15" type="body"/></ns0:nvPr></ns0:nvSpPr><ns0:spPr><ns2:xfrm xmlns:ns2="http://schemas.openxmlformats.org/drawingml/2006/main"><ns2:off x="731520" y="91440"/><ns2:ext cx="9144000" cy="475488"/></ns2:xfrm></ns0:spPr><ns0:txBody><ns3:bodyPr xmlns:ns3="http://schemas.openxmlformats.org/drawingml/2006/main" wrap="square" anchor="t" anchorCtr="0"/><ns4:lstStyle xmlns:ns4="http://schemas.openxmlformats.org/drawingml/2006/main"><ns4:defPPr algn="l"><ns4:buNone/><ns4:defRPr sz="2800" dirty="0" b="1"><ns4:solidFill><ns4:srgbClr val="FFFFFF"/></ns4:solidFill><ns4:latin typeface="Georgia"/><ns4:ea typeface="Georgia"/></ns4:defRPr></ns4:defPPr><ns4:lvl1pPr algn="l"><ns4:buNone/><ns4:defRPr sz="2800" dirty="0" b="1"><ns4:solidFill><ns4:srgbClr val="FFFFFF"/></ns4:solidFill><ns4:latin typeface="Georgia"/><ns4:ea typeface="Georgia"/></ns4:defRPr></ns4:lvl1pPr><ns4:lvl2pPr algn="l"><ns4:buNone/><ns4:defRPr sz="2800" dirty="0" b="1"><ns4:solidFill><ns4:srgbClr val="FFFFFF"/></ns4:solidFill><ns4:latin typeface="Georgia"/><ns4:ea typeface="Georgia"/></ns4:defRPr></ns4:lvl2pPr><ns4:lvl3pPr algn="l"><ns4:buNone/><ns4:defRPr sz="2800" dirty="0" b="1"><ns4:solidFill><ns4:srgbClr val="FFFFFF"/></ns4:solidFill><ns4:latin typeface="Georgia"/><ns4:ea typeface="Georgia"/></ns4:defRPr></ns4:lvl3pPr><ns4:lvl4pPr algn="l"><ns4:buNone/><ns4:defRPr sz="2800" dirty="0" b="1"><ns4:solidFill><ns4:srgbClr val="FFFFFF"/></ns4:solidFill><ns4:latin typeface="Georgia"/><ns4:ea typeface="Georgia"/></ns4:defRPr></ns4:lvl4pPr><ns4:lvl5pPr algn="l"><ns4:buNone/><ns4:defRPr sz="2800" dirty="0" b="1"><ns4:solidFill><ns4:srgbClr val="FFFFFF"/></ns4:solidFill><ns4:latin typeface="Georgia"/><ns4:ea typeface="Georgia"/></ns4:defRPr></ns4:lvl5pPr><ns4:lvl6pPr algn="l"><ns4:buNone/><ns4:defRPr sz="2800" dirty="0" b="1"><ns4:solidFill><ns4:srgbClr val="FFFFFF"/></ns4:solidFill><ns4:latin typeface="Georgia"/><ns4:ea typeface="Georgia"/></ns4:defRPr></ns4:lvl6pPr><ns4:lvl7pPr algn="l"><ns4:buNone/><ns4:defRPr sz="2800" dirty="0" b="1"><ns4:solidFill><ns4:srgbClr val="FFFFFF"/></ns4:solidFill><ns4:latin typeface="Georgia"/><ns4:ea typeface="Georgia"/></ns4:defRPr></ns4:lvl7pPr><ns4:lvl8pPr algn="l"><ns4:buNone/><ns4:defRPr sz="2800" dirty="0" b="1"><ns4:solidFill><ns4:srgbClr val="FFFFFF"/></ns4:solidFill><ns4:latin typeface="Georgia"/><ns4:ea typeface="Georgia"/></ns4:defRPr></ns4:lvl8pPr><ns4:lvl9pPr algn="l"><ns4:buNone/><ns4:defRPr sz="2800" dirty="0" b="1"><ns4:solidFill><ns4:srgbClr val="FFFFFF"/></ns4:solidFill><ns4:latin typeface="Georgia"/><ns4:ea typeface="Georgia"/></ns4:defRPr></ns4:lvl9pPr></ns4:lstStyle/><ns5:p xmlns:ns5="http://schemas.openxmlformats.org/drawingml/2006/main"><ns5:pPr algn="l"><ns5:buNone/></ns5:pPr><ns5:r><ns5:rPr lang="ja-JP"/><ns5:t>サブタイトル</ns5:t></ns5:r></ns5:p></ns0:txBody></ns0:sp><ns0:sp><ns0:nvSpPr><ns0:cNvPr id="5" name="VLine"/><ns0:cNvSpPr><ns1:spLocks xmlns:ns1="http://schemas.openxmlformats.org/drawingml/2006/main" noGrp="1" noSelect="0" noRot="1" noMove="1"/></ns0:cNvSpPr><ns0:nvPr/></ns0:nvSpPr><ns0:spPr><ns2:xfrm xmlns:ns2="http://schemas.openxmlformats.org/drawingml/2006/main"><ns2:off x="1828800" y="1645920"/><ns2:ext cx="36576" cy="4389120"/></ns2:xfrm><ns3:prstGeom xmlns:ns3="http://schemas.openxmlformats.org/drawingml/2006/main" prst="rect"/><ns4:solidFill xmlns:ns4="http://schemas.openxmlformats.org/drawingml/2006/main"><ns4:srgbClr val="CADCFC"/></ns4:solidFill><ns5:ln xmlns:ns5="http://schemas.openxmlformats.org/drawingml/2006/main"><ns5:noFill/></ns5:ln></ns0:spPr></ns0:sp><ns0:sp><ns0:nvSpPr><ns0:cNvPr id="6" name="S1"/><ns0:cNvSpPr><ns1:spLocks xmlns:ns1="http://schemas.openxmlformats.org/drawingml/2006/main" noGrp="1"/></ns0:cNvSpPr><ns0:nvPr/></ns0:nvSpPr><ns0:spPr><ns2:xfrm xmlns:ns2="http://schemas.openxmlformats.org/drawingml/2006/main"><ns2:off x="1688977066032" y="1839479990832"/><ns2:ext cx="402336" cy="402336"/></ns2:xfrm><ns3:prstGeom xmlns:ns3="http://schemas.openxmlformats.org/drawingml/2006/main" prst="ellipse"/><ns4:solidFill xmlns:ns4="http://schemas.openxmlformats.org/drawingml/2006/main"><ns4:srgbClr val="3B82F6"/></ns4:solidFill><ns5:ln xmlns:ns5="http://schemas.openxmlformats.org/drawingml/2006/main"><ns5:noFill/></ns5:ln></ns0:spPr></ns0:sp><ns0:sp><ns0:nvSpPr><ns0:cNvPr id="7" name="S2"/><ns0:cNvSpPr><ns1:spLocks xmlns:ns1="http://schemas.openxmlformats.org/drawingml/2006/main" noGrp="1"/></ns0:cNvSpPr><ns0:nvPr/></ns0:nvSpPr><ns0:spPr><ns2:xfrm xmlns:ns2="http://schemas.openxmlformats.org/drawingml/2006/main"><ns2:off x="1688977066032" y="3177283766832"/><ns2:ext cx="402336" cy="402336"/></ns2:xfrm><ns3:prstGeom xmlns:ns3="http://schemas.openxmlformats.org/drawingml/2006/main" prst="ellipse"/><ns4:solidFill xmlns:ns4="http://schemas.openxmlformats.org/drawingml/2006/main"><ns4:srgbClr val="3B82F6"/></ns4:solidFill><ns5:ln xmlns:ns5="http://schemas.openxmlformats.org/drawingml/2006/main"><ns5:noFill/></ns5:ln></ns0:spPr></ns0:sp><ns0:sp><ns0:nvSpPr><ns0:cNvPr id="8" name="S3"/><ns0:cNvSpPr><ns1:spLocks xmlns:ns1="http://schemas.openxmlformats.org/drawingml/2006/main" noGrp="1"/></ns0:cNvSpPr><ns0:nvPr/></ns0:nvSpPr><ns0:spPr><ns2:xfrm xmlns:ns2="http://schemas.openxmlformats.org/drawingml/2006/main"><ns2:off x="1688977066032" y="4515087542832"/><ns2:ext cx="402336" cy="402336"/></ns2:xfrm><ns3:prstGeom xmlns:ns3="http://schemas.openxmlformats.org/drawingml/2006/main" prst="ellipse"/><ns4:solidFill xmlns:ns4="http://schemas.openxmlformats.org/drawingml/2006/main"><ns4:srgbClr val="3B82F6"/></ns4:solidFill><ns5:ln xmlns:ns5="http://schemas.openxmlformats.org/drawingml/2006/main"><ns5:noFill/></ns5:ln></ns0:spPr></ns0:sp><ns0:sp><ns0:nvSpPr><ns0:cNvPr id="20" name="Step1.Top"/><ns0:cNvSpPr><ns1:spLocks xmlns:ns1="http://schemas.openxmlformats.org/drawingml/2006/main" noGrp="1"/></ns0:cNvSpPr><ns0:nvPr><ns0:ph idx="1" type="body"/></ns0:nvPr></ns0:nvSpPr><ns0:spPr><ns2:xfrm xmlns:ns2="http://schemas.openxmlformats.org/drawingml/2006/main"><ns2:off x="2560320" y="1554480"/><ns2:ext cx="8686800" cy="1097280"/></ns2:xfrm></ns0:spPr><ns0:txBody><ns3:bodyPr xmlns:ns3="http://schemas.openxmlformats.org/drawingml/2006/main" wrap="square" anchor="t" anchorCtr="0"/><ns4:lstStyle xmlns:ns4="http://schemas.openxmlformats.org/drawingml/2006/main"><ns4:defPPr algn="l"><ns4:buNone/><ns4:defRPr sz="1400" dirty="0"><ns4:solidFill><ns4:srgbClr val="1E293B"/></ns4:solidFill><ns4:latin typeface="Calibri"/><ns4:ea typeface="Calibri"/></ns4:defRPr></ns4:defPPr><ns4:lvl1pPr algn="l"><ns4:buNone/><ns4:defRPr sz="1400" dirty="0"><ns4:solidFill><ns4:srgbClr val="1E293B"/></ns4:solidFill><ns4:latin typeface="Calibri"/><ns4:ea typeface="Calibri"/></ns4:defRPr></ns4:lvl1pPr><ns4:lvl2pPr algn="l"><ns4:buNone/><ns4:defRPr sz="1400" dirty="0"><ns4:solidFill><ns4:srgbClr val="1E293B"/></ns4:solidFill><ns4:latin typeface="Calibri"/><ns4:ea typeface="Calibri"/></ns4:defRPr></ns4:lvl2pPr><ns4:lvl3pPr algn="l"><ns4:buNone/><ns4:defRPr sz="1400" dirty="0"><ns4:solidFill><ns4:srgbClr val="1E293B"/></ns4:solidFill><ns4:latin typeface="Calibri"/><ns4:ea typeface="Calibri"/></ns4:defRPr></ns4:lvl3pPr><ns4:lvl4pPr algn="l"><ns4:buNone/><ns4:defRPr sz="1400" dirty="0"><ns4:solidFill><ns4:srgbClr val="1E293B"/></ns4:solidFill><ns4:latin typeface="Calibri"/><ns4:ea typeface="Calibri"/></ns4:defRPr></ns4:lvl4pPr><ns4:lvl5pPr algn="l"><ns4:buNone/><ns4:defRPr sz="1400" dirty="0"><ns4:solidFill><ns4:srgbClr val="1E293B"/></ns4:solidFill><ns4:latin typeface="Calibri"/><ns4:ea typeface="Calibri"/></ns4:defRPr></ns4:lvl5pPr><ns4:lvl6pPr algn="l"><ns4:buNone/><ns4:defRPr sz="1400" dirty="0"><ns4:solidFill><ns4:srgbClr val="1E293B"/></ns4:solidFill><ns4:latin typeface="Calibri"/><ns4:ea typeface="Calibri"/></ns4:defRPr></ns4:lvl6pPr><ns4:lvl7pPr algn="l"><ns4:buNone/><ns4:defRPr sz="1400" dirty="0"><ns4:solidFill><ns4:srgbClr val="1E293B"/></ns4:solidFill><ns4:latin typeface="Calibri"/><ns4:ea typeface="Calibri"/></ns4:defRPr></ns4:lvl7pPr><ns4:lvl8pPr algn="l"><ns4:buNone/><ns4:defRPr sz="1400" dirty="0"><ns4:solidFill><ns4:srgbClr val="1E293B"/></ns4:solidFill><ns4:latin typeface="Calibri"/><ns4:ea typeface="Calibri"/></ns4:defRPr></ns4:lvl8pPr><ns4:lvl9pPr algn="l"><ns4:buNone/><ns4:defRPr sz="1400" dirty="0"><ns4:solidFill><ns4:srgbClr val="1E293B"/></ns4:solidFill><ns4:latin typeface="Calibri"/><ns4:ea typeface="Calibri"/></ns4:defRPr></ns4:lvl9pPr></ns4:lstStyle/><ns5:p xmlns:ns5="http://schemas.openxmlformats.org/drawingml/2006/main"><ns5:pPr algn="l"><ns5:buNone/></ns5:pPr><ns5:r><ns5:rPr lang="ja-JP"/><ns5:t>ステップ 2：タイトル
-説明テキスト</ns5:t></ns5:r></ns5:p></ns0:txBody></ns0:sp><ns0:sp><ns0:nvSpPr><ns0:cNvPr id="22" name="Step3.Bottom"/><ns0:cNvSpPr><ns1:spLocks xmlns:ns1="http://schemas.openxmlformats.org/drawingml/2006/main" noGrp="1"/></ns0:cNvSpPr><ns0:nvPr><ns0:ph idx="3" type="body"/></ns0:nvPr></ns0:nvSpPr><ns0:spPr><ns2:xfrm xmlns:ns2="http://schemas.openxmlformats.org/drawingml/2006/main"><ns2:off x="2560320" y="4480560"/><ns2:ext cx="8686800" cy="1097280"/></ns2:xfrm></ns0:spPr><ns0:txBody><ns3:bodyPr xmlns:ns3="http://schemas.openxmlformats.org/drawingml/2006/main" wrap="square" anchor="t" anchorCtr="0"/><ns4:lstStyle xmlns:ns4="http://schemas.openxmlformats.org/drawingml/2006/main"><ns4:defPPr algn="l"><ns4:buNone/><ns4:defRPr sz="1400" dirty="0"><ns4:solidFill><ns4:srgbClr val="1E293B"/></ns4:solidFill><ns4:latin typeface="Calibri"/><ns4:ea typeface="Calibri"/></ns4:defRPr></ns4:defPPr><ns4:lvl1pPr algn="l"><ns4:buNone/><ns4:defRPr sz="1400" dirty="0"><ns4:solidFill><ns4:srgbClr val="1E293B"/></ns4:solidFill><ns4:latin typeface="Calibri"/><ns4:ea typeface="Calibri"/></ns4:defRPr></ns4:lvl1pPr><ns4:lvl2pPr algn="l"><ns4:buNone/><ns4:defRPr sz="1400" dirty="0"><ns4:solidFill><ns4:srgbClr val="1E293B"/></ns4:solidFill><ns4:latin typeface="Calibri"/><ns4:ea typeface="Calibri"/></ns4:defRPr></ns4:lvl2pPr><ns4:lvl3pPr algn="l"><ns4:buNone/><ns4:defRPr sz="1400" dirty="0"><ns4:solidFill><ns4:srgbClr val="1E293B"/></ns4:solidFill><ns4:latin typeface="Calibri"/><ns4:ea typeface="Calibri"/></ns4:defRPr></ns4:lvl3pPr><ns4:lvl4pPr algn="l"><ns4:buNone/><ns4:defRPr sz="1400" dirty="0"><ns4:solidFill><ns4:srgbClr val="1E293B"/></ns4:solidFill><ns4:latin typeface="Calibri"/><ns4:ea typeface="Calibri"/></ns4:defRPr></ns4:lvl4pPr><ns4:lvl5pPr algn="l"><ns4:buNone/><ns4:defRPr sz="1400" dirty="0"><ns4:solidFill><ns4:srgbClr val="1E293B"/></ns4:solidFill><ns4:latin typeface="Calibri"/><ns4:ea typeface="Calibri"/></ns4:defRPr></ns4:lvl5pPr><ns4:lvl6pPr algn="l"><ns4:buNone/><ns4:defRPr sz="1400" dirty="0"><ns4:solidFill><ns4:srgbClr val="1E293B"/></ns4:solidFill><ns4:latin typeface="Calibri"/><ns4:ea typeface="Calibri"/></ns4:defRPr></ns4:lvl6pPr><ns4:lvl7pPr algn="l"><ns4:buNone/><ns4:defRPr sz="1400" dirty="0"><ns4:solidFill><ns4:srgbClr val="1E293B"/></ns4:solidFill><ns4:latin typeface="Calibri"/><ns4:ea typeface="Calibri"/></ns4:defRPr></ns4:lvl7pPr><ns4:lvl8pPr algn="l"><ns4:buNone/><ns4:defRPr sz="1400" dirty="0"><ns4:solidFill><ns4:srgbClr val="1E293B"/></ns4:solidFill><ns4:latin typeface="Calibri"/><ns4:ea typeface="Calibri"/></ns4:defRPr></ns4:lvl8pPr><ns4:lvl9pPr algn="l"><ns4:buNone/><ns4:defRPr sz="1400" dirty="0"><ns4:solidFill><ns4:srgbClr val="1E293B"/></ns4:solidFill><ns4:latin typeface="Calibri"/><ns4:ea typeface="Calibri"/></ns4:defRPr></ns4:lvl9pPr></ns4:lstStyle/><ns5:p xmlns:ns5="http://schemas.openxmlformats.org/drawingml/2006/main"><ns5:pPr algn="r"><ns5:buNone/></ns5:pPr><ns5:r><ns5:rPr lang="ja-JP"/><ns5:t>&lt;#&gt;</ns5:t></ns5:r></ns5:p></ns0:txBody></ns0:sp></ns0:spTree></ns0:cSld><ns0:clrMapOvr/></ns0:sldLayout>
+<ns0:sldLayout xmlns:ns0="http://schemas.openxmlformats.org/presentationml/2006/main" type="blank" preserve="1"><ns0:cSld name="Process.3Step.Sequential"><ns0:spTree><ns0:nvGrpSpPr><ns0:cNvPr id="1" name=""/><ns0:cNvGrpSpPr/><ns0:nvPr/></ns0:nvGrpSpPr><ns0:grpSpPr><ns1:xfrm xmlns:ns1="http://schemas.openxmlformats.org/drawingml/2006/main"><ns1:off x="0" y="0"/><ns1:ext cx="0" cy="0"/><ns1:chOff x="0" y="0"/><ns1:chExt cx="0" cy="0"/></ns1:xfrm></ns0:grpSpPr><ns0:sp><ns0:nvSpPr><ns0:cNvPr id="2" name="HeaderBar"/><ns0:cNvSpPr><ns1:spLocks xmlns:ns1="http://schemas.openxmlformats.org/drawingml/2006/main" noGrp="1" noSelect="0" noRot="1" noMove="1"/></ns0:cNvSpPr><ns0:nvPr/></ns0:nvSpPr><ns0:spPr><ns2:xfrm xmlns:ns2="http://schemas.openxmlformats.org/drawingml/2006/main"><ns2:off x="0" y="0"/><ns2:ext cx="12192000" cy="1051560"/></ns2:xfrm><ns3:prstGeom xmlns:ns3="http://schemas.openxmlformats.org/drawingml/2006/main" prst="rect"/><ns4:solidFill xmlns:ns4="http://schemas.openxmlformats.org/drawingml/2006/main"><ns4:srgbClr val="1E2761"/></ns4:solidFill><ns5:ln xmlns:ns5="http://schemas.openxmlformats.org/drawingml/2006/main"><ns5:noFill/></ns5:ln></ns0:spPr></ns0:sp><ns0:sp><ns0:nvSpPr><ns0:cNvPr id="10" name="SlideTitle.Header"/><ns0:cNvSpPr><ns1:spLocks xmlns:ns1="http://schemas.openxmlformats.org/drawingml/2006/main" noGrp="1"/></ns0:cNvSpPr><ns0:nvPr><ns0:ph idx="15" type="body"/></ns0:nvPr></ns0:nvSpPr><ns0:spPr><ns2:xfrm xmlns:ns2="http://schemas.openxmlformats.org/drawingml/2006/main"><ns2:off x="731520" y="91440"/><ns2:ext cx="9144000" cy="475488"/></ns2:xfrm></ns0:spPr><ns0:txBody><ns3:bodyPr xmlns:ns3="http://schemas.openxmlformats.org/drawingml/2006/main" wrap="square" anchor="t" anchorCtr="0"/><ns4:lstStyle><ns4:defPPr><ns4:defRPr sz="2800" b="1"><ns4:solidFill><ns4:srgbClr val="FFFFFF"/></ns4:solidFill></ns4:defRPr></ns4:defPPr></ns4:lstStyle><ns4:defPPr algn="l"><ns4:buNone/><ns4:defRPr sz="2800" dirty="0" b="1"><ns4:solidFill><ns4:srgbClr val="FFFFFF"/></ns4:solidFill><ns4:latin typeface="Georgia"/><ns4:ea typeface="Georgia"/></ns4:defRPr></ns4:defPPr><ns4:lvl1pPr algn="l"><ns4:buNone/><ns4:defRPr sz="2800" dirty="0" b="1"><ns4:solidFill><ns4:srgbClr val="FFFFFF"/></ns4:solidFill><ns4:latin typeface="Georgia"/><ns4:ea typeface="Georgia"/></ns4:defRPr></ns4:lvl1pPr><ns4:lvl2pPr algn="l"><ns4:buNone/><ns4:defRPr sz="2800" dirty="0" b="1"><ns4:solidFill><ns4:srgbClr val="FFFFFF"/></ns4:solidFill><ns4:latin typeface="Georgia"/><ns4:ea typeface="Georgia"/></ns4:defRPr></ns4:lvl2pPr><ns4:lvl3pPr algn="l"><ns4:buNone/><ns4:defRPr sz="2800" dirty="0" b="1"><ns4:solidFill><ns4:srgbClr val="FFFFFF"/></ns4:solidFill><ns4:latin typeface="Georgia"/><ns4:ea typeface="Georgia"/></ns4:defRPr></ns4:lvl3pPr><ns4:lvl4pPr algn="l"><ns4:buNone/><ns4:defRPr sz="2800" dirty="0" b="1"><ns4:solidFill><ns4:srgbClr val="FFFFFF"/></ns4:solidFill><ns4:latin typeface="Georgia"/><ns4:ea typeface="Georgia"/></ns4:defRPr></ns4:lvl4pPr><ns4:lvl5pPr algn="l"><ns4:buNone/><ns4:defRPr sz="2800" dirty="0" b="1"><ns4:solidFill><ns4:srgbClr val="FFFFFF"/></ns4:solidFill><ns4:latin typeface="Georgia"/><ns4:ea typeface="Georgia"/></ns4:defRPr></ns4:lvl5pPr><ns4:lvl6pPr algn="l"><ns4:buNone/><ns4:defRPr sz="2800" dirty="0" b="1"><ns4:solidFill><ns4:srgbClr val="FFFFFF"/></ns4:solidFill><ns4:latin typeface="Georgia"/><ns4:ea typeface="Georgia"/></ns4:defRPr></ns4:lvl6pPr><ns4:lvl7pPr algn="l"><ns4:buNone/><ns4:defRPr sz="2800" dirty="0" b="1"><ns4:solidFill><ns4:srgbClr val="FFFFFF"/></ns4:solidFill><ns4:latin typeface="Georgia"/><ns4:ea typeface="Georgia"/></ns4:defRPr></ns4:lvl7pPr><ns4:lvl8pPr algn="l"><ns4:buNone/><ns4:defRPr sz="2800" dirty="0" b="1"><ns4:solidFill><ns4:srgbClr val="FFFFFF"/></ns4:solidFill><ns4:latin typeface="Georgia"/><ns4:ea typeface="Georgia"/></ns4:defRPr></ns4:lvl8pPr><ns4:lvl9pPr algn="l"><ns4:buNone/><ns4:defRPr sz="2800" dirty="0" b="1"><ns4:solidFill><ns4:srgbClr val="FFFFFF"/></ns4:solidFill><ns4:latin typeface="Georgia"/><ns4:ea typeface="Georgia"/></ns4:defRPr></ns4:lvl9pPr></ns4:lstStyle/><ns5:p xmlns:ns5="http://schemas.openxmlformats.org/drawingml/2006/main"><ns5:pPr algn="l"><ns5:buNone/></ns5:pPr><ns5:r><ns5:rPr lang="ja-JP"/><ns5:t>サブタイトル</ns5:t></ns5:r></ns5:p></ns0:txBody></ns0:sp><ns0:sp><ns0:nvSpPr><ns0:cNvPr id="5" name="VLine"/><ns0:cNvSpPr><ns1:spLocks xmlns:ns1="http://schemas.openxmlformats.org/drawingml/2006/main" noGrp="1" noSelect="0" noRot="1" noMove="1"/></ns0:cNvSpPr><ns0:nvPr/></ns0:nvSpPr><ns0:spPr><ns2:xfrm xmlns:ns2="http://schemas.openxmlformats.org/drawingml/2006/main"><ns2:off x="1828800" y="1645920"/><ns2:ext cx="36576" cy="4389120"/></ns2:xfrm><ns3:prstGeom xmlns:ns3="http://schemas.openxmlformats.org/drawingml/2006/main" prst="rect"/><ns4:solidFill xmlns:ns4="http://schemas.openxmlformats.org/drawingml/2006/main"><ns4:srgbClr val="CADCFC"/></ns4:solidFill><ns5:ln xmlns:ns5="http://schemas.openxmlformats.org/drawingml/2006/main"><ns5:noFill/></ns5:ln></ns0:spPr></ns0:sp><ns0:sp><ns0:nvSpPr><ns0:cNvPr id="6" name="S1"/><ns0:cNvSpPr><ns1:spLocks xmlns:ns1="http://schemas.openxmlformats.org/drawingml/2006/main" noGrp="1"/></ns0:cNvSpPr><ns0:nvPr/></ns0:nvSpPr><ns0:spPr><ns2:xfrm xmlns:ns2="http://schemas.openxmlformats.org/drawingml/2006/main"><ns2:off x="1688977066032" y="1839479990832"/><ns2:ext cx="402336" cy="402336"/></ns2:xfrm><ns3:prstGeom xmlns:ns3="http://schemas.openxmlformats.org/drawingml/2006/main" prst="ellipse"/><ns4:solidFill xmlns:ns4="http://schemas.openxmlformats.org/drawingml/2006/main"><ns4:srgbClr val="3B82F6"/></ns4:solidFill><ns5:ln xmlns:ns5="http://schemas.openxmlformats.org/drawingml/2006/main"><ns5:noFill/></ns5:ln></ns0:spPr></ns0:sp><ns0:sp><ns0:nvSpPr><ns0:cNvPr id="7" name="S2"/><ns0:cNvSpPr><ns1:spLocks xmlns:ns1="http://schemas.openxmlformats.org/drawingml/2006/main" noGrp="1"/></ns0:cNvSpPr><ns0:nvPr/></ns0:nvSpPr><ns0:spPr><ns2:xfrm xmlns:ns2="http://schemas.openxmlformats.org/drawingml/2006/main"><ns2:off x="1688977066032" y="3177283766832"/><ns2:ext cx="402336" cy="402336"/></ns2:xfrm><ns3:prstGeom xmlns:ns3="http://schemas.openxmlformats.org/drawingml/2006/main" prst="ellipse"/><ns4:solidFill xmlns:ns4="http://schemas.openxmlformats.org/drawingml/2006/main"><ns4:srgbClr val="3B82F6"/></ns4:solidFill><ns5:ln xmlns:ns5="http://schemas.openxmlformats.org/drawingml/2006/main"><ns5:noFill/></ns5:ln></ns0:spPr></ns0:sp><ns0:sp><ns0:nvSpPr><ns0:cNvPr id="8" name="S3"/><ns0:cNvSpPr><ns1:spLocks xmlns:ns1="http://schemas.openxmlformats.org/drawingml/2006/main" noGrp="1"/></ns0:cNvSpPr><ns0:nvPr/></ns0:nvSpPr><ns0:spPr><ns2:xfrm xmlns:ns2="http://schemas.openxmlformats.org/drawingml/2006/main"><ns2:off x="1688977066032" y="4515087542832"/><ns2:ext cx="402336" cy="402336"/></ns2:xfrm><ns3:prstGeom xmlns:ns3="http://schemas.openxmlformats.org/drawingml/2006/main" prst="ellipse"/><ns4:solidFill xmlns:ns4="http://schemas.openxmlformats.org/drawingml/2006/main"><ns4:srgbClr val="3B82F6"/></ns4:solidFill><ns5:ln xmlns:ns5="http://schemas.openxmlformats.org/drawingml/2006/main"><ns5:noFill/></ns5:ln></ns0:spPr></ns0:sp><ns0:sp><ns0:nvSpPr><ns0:cNvPr id="20" name="Step1.Top"/><ns0:cNvSpPr><ns1:spLocks xmlns:ns1="http://schemas.openxmlformats.org/drawingml/2006/main" noGrp="1"/></ns0:cNvSpPr><ns0:nvPr><ns0:ph idx="1" type="body"/></ns0:nvPr></ns0:nvSpPr><ns0:spPr><ns2:xfrm xmlns:ns2="http://schemas.openxmlformats.org/drawingml/2006/main"><ns2:off x="2560320" y="1554480"/><ns2:ext cx="8686800" cy="1097280"/></ns2:xfrm></ns0:spPr><ns0:txBody><ns3:bodyPr xmlns:ns3="http://schemas.openxmlformats.org/drawingml/2006/main" wrap="square" anchor="t" anchorCtr="0"/><ns4:lstStyle/><ns4:defPPr algn="l"><ns4:buNone/><ns4:defRPr sz="1400" dirty="0"><ns4:solidFill><ns4:srgbClr val="1E293B"/></ns4:solidFill><ns4:latin typeface="Calibri"/><ns4:ea typeface="Calibri"/></ns4:defRPr></ns4:defPPr><ns4:lvl1pPr algn="l"><ns4:buNone/><ns4:defRPr sz="1400" dirty="0"><ns4:solidFill><ns4:srgbClr val="1E293B"/></ns4:solidFill><ns4:latin typeface="Calibri"/><ns4:ea typeface="Calibri"/></ns4:defRPr></ns4:lvl1pPr><ns4:lvl2pPr algn="l"><ns4:buNone/><ns4:defRPr sz="1400" dirty="0"><ns4:solidFill><ns4:srgbClr val="1E293B"/></ns4:solidFill><ns4:latin typeface="Calibri"/><ns4:ea typeface="Calibri"/></ns4:defRPr></ns4:lvl2pPr><ns4:lvl3pPr algn="l"><ns4:buNone/><ns4:defRPr sz="1400" dirty="0"><ns4:solidFill><ns4:srgbClr val="1E293B"/></ns4:solidFill><ns4:latin typeface="Calibri"/><ns4:ea typeface="Calibri"/></ns4:defRPr></ns4:lvl3pPr><ns4:lvl4pPr algn="l"><ns4:buNone/><ns4:defRPr sz="1400" dirty="0"><ns4:solidFill><ns4:srgbClr val="1E293B"/></ns4:solidFill><ns4:latin typeface="Calibri"/><ns4:ea typeface="Calibri"/></ns4:defRPr></ns4:lvl4pPr><ns4:lvl5pPr algn="l"><ns4:buNone/><ns4:defRPr sz="1400" dirty="0"><ns4:solidFill><ns4:srgbClr val="1E293B"/></ns4:solidFill><ns4:latin typeface="Calibri"/><ns4:ea typeface="Calibri"/></ns4:defRPr></ns4:lvl5pPr><ns4:lvl6pPr algn="l"><ns4:buNone/><ns4:defRPr sz="1400" dirty="0"><ns4:solidFill><ns4:srgbClr val="1E293B"/></ns4:solidFill><ns4:latin typeface="Calibri"/><ns4:ea typeface="Calibri"/></ns4:defRPr></ns4:lvl6pPr><ns4:lvl7pPr algn="l"><ns4:buNone/><ns4:defRPr sz="1400" dirty="0"><ns4:solidFill><ns4:srgbClr val="1E293B"/></ns4:solidFill><ns4:latin typeface="Calibri"/><ns4:ea typeface="Calibri"/></ns4:defRPr></ns4:lvl7pPr><ns4:lvl8pPr algn="l"><ns4:buNone/><ns4:defRPr sz="1400" dirty="0"><ns4:solidFill><ns4:srgbClr val="1E293B"/></ns4:solidFill><ns4:latin typeface="Calibri"/><ns4:ea typeface="Calibri"/></ns4:defRPr></ns4:lvl8pPr><ns4:lvl9pPr algn="l"><ns4:buNone/><ns4:defRPr sz="1400" dirty="0"><ns4:solidFill><ns4:srgbClr val="1E293B"/></ns4:solidFill><ns4:latin typeface="Calibri"/><ns4:ea typeface="Calibri"/></ns4:defRPr></ns4:lvl9pPr></ns4:lstStyle/><ns5:p xmlns:ns5="http://schemas.openxmlformats.org/drawingml/2006/main"><ns5:pPr algn="l"><ns5:buNone/></ns5:pPr><ns5:r><ns5:rPr lang="ja-JP"/><ns5:t>ステップ 2：タイトル
+説明テキスト</ns5:t></ns5:r></ns5:p></ns0:txBody></ns0:sp><ns0:sp><ns0:nvSpPr><ns0:cNvPr id="22" name="Step3.Bottom"/><ns0:cNvSpPr><ns1:spLocks xmlns:ns1="http://schemas.openxmlformats.org/drawingml/2006/main" noGrp="1"/></ns0:cNvSpPr><ns0:nvPr><ns0:ph idx="3" type="body"/></ns0:nvPr></ns0:nvSpPr><ns0:spPr><ns2:xfrm xmlns:ns2="http://schemas.openxmlformats.org/drawingml/2006/main"><ns2:off x="2560320" y="4480560"/><ns2:ext cx="8686800" cy="1097280"/></ns2:xfrm></ns0:spPr><ns0:txBody><ns3:bodyPr xmlns:ns3="http://schemas.openxmlformats.org/drawingml/2006/main" wrap="square" anchor="t" anchorCtr="0"/><ns4:lstStyle/><ns4:defPPr algn="l"><ns4:buNone/><ns4:defRPr sz="1400" dirty="0"><ns4:solidFill><ns4:srgbClr val="1E293B"/></ns4:solidFill><ns4:latin typeface="Calibri"/><ns4:ea typeface="Calibri"/></ns4:defRPr></ns4:defPPr><ns4:lvl1pPr algn="l"><ns4:buNone/><ns4:defRPr sz="1400" dirty="0"><ns4:solidFill><ns4:srgbClr val="1E293B"/></ns4:solidFill><ns4:latin typeface="Calibri"/><ns4:ea typeface="Calibri"/></ns4:defRPr></ns4:lvl1pPr><ns4:lvl2pPr algn="l"><ns4:buNone/><ns4:defRPr sz="1400" dirty="0"><ns4:solidFill><ns4:srgbClr val="1E293B"/></ns4:solidFill><ns4:latin typeface="Calibri"/><ns4:ea typeface="Calibri"/></ns4:defRPr></ns4:lvl2pPr><ns4:lvl3pPr algn="l"><ns4:buNone/><ns4:defRPr sz="1400" dirty="0"><ns4:solidFill><ns4:srgbClr val="1E293B"/></ns4:solidFill><ns4:latin typeface="Calibri"/><ns4:ea typeface="Calibri"/></ns4:defRPr></ns4:lvl3pPr><ns4:lvl4pPr algn="l"><ns4:buNone/><ns4:defRPr sz="1400" dirty="0"><ns4:solidFill><ns4:srgbClr val="1E293B"/></ns4:solidFill><ns4:latin typeface="Calibri"/><ns4:ea typeface="Calibri"/></ns4:defRPr></ns4:lvl4pPr><ns4:lvl5pPr algn="l"><ns4:buNone/><ns4:defRPr sz="1400" dirty="0"><ns4:solidFill><ns4:srgbClr val="1E293B"/></ns4:solidFill><ns4:latin typeface="Calibri"/><ns4:ea typeface="Calibri"/></ns4:defRPr></ns4:lvl5pPr><ns4:lvl6pPr algn="l"><ns4:buNone/><ns4:defRPr sz="1400" dirty="0"><ns4:solidFill><ns4:srgbClr val="1E293B"/></ns4:solidFill><ns4:latin typeface="Calibri"/><ns4:ea typeface="Calibri"/></ns4:defRPr></ns4:lvl6pPr><ns4:lvl7pPr algn="l"><ns4:buNone/><ns4:defRPr sz="1400" dirty="0"><ns4:solidFill><ns4:srgbClr val="1E293B"/></ns4:solidFill><ns4:latin typeface="Calibri"/><ns4:ea typeface="Calibri"/></ns4:defRPr></ns4:lvl7pPr><ns4:lvl8pPr algn="l"><ns4:buNone/><ns4:defRPr sz="1400" dirty="0"><ns4:solidFill><ns4:srgbClr val="1E293B"/></ns4:solidFill><ns4:latin typeface="Calibri"/><ns4:ea typeface="Calibri"/></ns4:defRPr></ns4:lvl8pPr><ns4:lvl9pPr algn="l"><ns4:buNone/><ns4:defRPr sz="1400" dirty="0"><ns4:solidFill><ns4:srgbClr val="1E293B"/></ns4:solidFill><ns4:latin typeface="Calibri"/><ns4:ea typeface="Calibri"/></ns4:defRPr></ns4:lvl9pPr></ns4:lstStyle/><ns5:p xmlns:ns5="http://schemas.openxmlformats.org/drawingml/2006/main"><ns5:pPr algn="r"><ns5:buNone/></ns5:pPr><ns5:r><ns5:rPr lang="ja-JP"/><ns5:t>&lt;#&gt;</ns5:t></ns5:r></ns5:p></ns0:txBody></ns0:sp></ns0:spTree></ns0:cSld><ns0:clrMapOvr/></ns0:sldLayout>
 </file>
 
 <file path=ppt/slideLayouts/slideLayout27.xml><?xml version='1.0' encoding='UTF-8' standalone='yes'?>
-<ns0:sldLayout xmlns:ns0="http://schemas.openxmlformats.org/presentationml/2006/main" type="blank" preserve="1"><ns0:cSld name="Summary.1Agenda.Single"><ns0:spTree><ns0:nvGrpSpPr><ns0:cNvPr id="1" name=""/><ns0:cNvGrpSpPr/><ns0:nvPr/></ns0:nvGrpSpPr><ns0:grpSpPr><ns1:xfrm xmlns:ns1="http://schemas.openxmlformats.org/drawingml/2006/main"><ns1:off x="0" y="0"/><ns1:ext cx="0" cy="0"/><ns1:chOff x="0" y="0"/><ns1:chExt cx="0" cy="0"/></ns1:xfrm></ns0:grpSpPr><ns0:sp><ns0:nvSpPr><ns0:cNvPr id="2" name="BG"/><ns0:cNvSpPr><ns1:spLocks xmlns:ns1="http://schemas.openxmlformats.org/drawingml/2006/main" noGrp="1" noSelect="0" noRot="1" noMove="1"/></ns0:cNvSpPr><ns0:nvPr/></ns0:nvSpPr><ns0:spPr><ns2:xfrm xmlns:ns2="http://schemas.openxmlformats.org/drawingml/2006/main"><ns2:off x="0" y="0"/><ns2:ext cx="12192000" cy="6858000"/></ns2:xfrm><ns3:prstGeom xmlns:ns3="http://schemas.openxmlformats.org/drawingml/2006/main" prst="rect"/><ns4:solidFill xmlns:ns4="http://schemas.openxmlformats.org/drawingml/2006/main"><ns4:srgbClr val="FFFFFF"/></ns4:solidFill><ns5:ln xmlns:ns5="http://schemas.openxmlformats.org/drawingml/2006/main"><ns5:noFill/></ns5:ln></ns0:spPr></ns0:sp><ns0:sp><ns0:nvSpPr><ns0:cNvPr id="3" name="LeftPanel"/><ns0:cNvSpPr><ns1:spLocks xmlns:ns1="http://schemas.openxmlformats.org/drawingml/2006/main" noGrp="1" noSelect="0" noRot="1" noMove="1"/></ns0:cNvSpPr><ns0:nvPr/></ns0:nvSpPr><ns0:spPr><ns2:xfrm xmlns:ns2="http://schemas.openxmlformats.org/drawingml/2006/main"><ns2:off x="0" y="0"/><ns2:ext cx="4114800" cy="6858000"/></ns2:xfrm><ns3:prstGeom xmlns:ns3="http://schemas.openxmlformats.org/drawingml/2006/main" prst="rect"/><ns4:solidFill xmlns:ns4="http://schemas.openxmlformats.org/drawingml/2006/main"><ns4:srgbClr val="1E2761"/></ns4:solidFill><ns5:ln xmlns:ns5="http://schemas.openxmlformats.org/drawingml/2006/main"><ns5:noFill/></ns5:ln></ns0:spPr></ns0:sp><ns0:sp><ns0:nvSpPr><ns0:cNvPr id="4" name="AccentBar"/><ns0:cNvSpPr><ns1:spLocks xmlns:ns1="http://schemas.openxmlformats.org/drawingml/2006/main" noGrp="1" noSelect="0" noRot="1" noMove="1"/></ns0:cNvSpPr><ns0:nvPr/></ns0:nvSpPr><ns0:spPr><ns2:xfrm xmlns:ns2="http://schemas.openxmlformats.org/drawingml/2006/main"><ns2:off x="0" y="0"/><ns2:ext cx="164592" cy="6858000"/></ns2:xfrm><ns3:prstGeom xmlns:ns3="http://schemas.openxmlformats.org/drawingml/2006/main" prst="rect"/><ns4:solidFill xmlns:ns4="http://schemas.openxmlformats.org/drawingml/2006/main"><ns4:srgbClr val="3B82F6"/></ns4:solidFill><ns5:ln xmlns:ns5="http://schemas.openxmlformats.org/drawingml/2006/main"><ns5:noFill/></ns5:ln></ns0:spPr></ns0:sp><ns0:sp><ns0:nvSpPr><ns0:cNvPr id="10" name="Title.Left"/><ns0:cNvSpPr><ns1:spLocks xmlns:ns1="http://schemas.openxmlformats.org/drawingml/2006/main" noGrp="1"/></ns0:cNvSpPr><ns0:nvPr><ns0:ph idx="15" type="body"/></ns0:nvPr></ns0:nvSpPr><ns0:spPr><ns2:xfrm xmlns:ns2="http://schemas.openxmlformats.org/drawingml/2006/main"><ns2:off x="548640" y="914400"/><ns2:ext cx="3200400" cy="1371600"/></ns2:xfrm></ns0:spPr><ns0:txBody><ns3:bodyPr xmlns:ns3="http://schemas.openxmlformats.org/drawingml/2006/main" wrap="square" anchor="t" anchorCtr="0"/><ns4:lstStyle xmlns:ns4="http://schemas.openxmlformats.org/drawingml/2006/main"><ns4:defPPr algn="l"><ns4:buNone/><ns4:defRPr sz="3600" dirty="0" b="1"><ns4:solidFill><ns4:srgbClr val="FFFFFF"/></ns4:solidFill><ns4:latin typeface="Georgia"/><ns4:ea typeface="Georgia"/></ns4:defRPr></ns4:defPPr><ns4:lvl1pPr algn="l"><ns4:buNone/><ns4:defRPr sz="3600" dirty="0" b="1"><ns4:solidFill><ns4:srgbClr val="FFFFFF"/></ns4:solidFill><ns4:latin typeface="Georgia"/><ns4:ea typeface="Georgia"/></ns4:defRPr></ns4:lvl1pPr><ns4:lvl2pPr algn="l"><ns4:buNone/><ns4:defRPr sz="3600" dirty="0" b="1"><ns4:solidFill><ns4:srgbClr val="FFFFFF"/></ns4:solidFill><ns4:latin typeface="Georgia"/><ns4:ea typeface="Georgia"/></ns4:defRPr></ns4:lvl2pPr><ns4:lvl3pPr algn="l"><ns4:buNone/><ns4:defRPr sz="3600" dirty="0" b="1"><ns4:solidFill><ns4:srgbClr val="FFFFFF"/></ns4:solidFill><ns4:latin typeface="Georgia"/><ns4:ea typeface="Georgia"/></ns4:defRPr></ns4:lvl3pPr><ns4:lvl4pPr algn="l"><ns4:buNone/><ns4:defRPr sz="3600" dirty="0" b="1"><ns4:solidFill><ns4:srgbClr val="FFFFFF"/></ns4:solidFill><ns4:latin typeface="Georgia"/><ns4:ea typeface="Georgia"/></ns4:defRPr></ns4:lvl4pPr><ns4:lvl5pPr algn="l"><ns4:buNone/><ns4:defRPr sz="3600" dirty="0" b="1"><ns4:solidFill><ns4:srgbClr val="FFFFFF"/></ns4:solidFill><ns4:latin typeface="Georgia"/><ns4:ea typeface="Georgia"/></ns4:defRPr></ns4:lvl5pPr><ns4:lvl6pPr algn="l"><ns4:buNone/><ns4:defRPr sz="3600" dirty="0" b="1"><ns4:solidFill><ns4:srgbClr val="FFFFFF"/></ns4:solidFill><ns4:latin typeface="Georgia"/><ns4:ea typeface="Georgia"/></ns4:defRPr></ns4:lvl6pPr><ns4:lvl7pPr algn="l"><ns4:buNone/><ns4:defRPr sz="3600" dirty="0" b="1"><ns4:solidFill><ns4:srgbClr val="FFFFFF"/></ns4:solidFill><ns4:latin typeface="Georgia"/><ns4:ea typeface="Georgia"/></ns4:defRPr></ns4:lvl7pPr><ns4:lvl8pPr algn="l"><ns4:buNone/><ns4:defRPr sz="3600" dirty="0" b="1"><ns4:solidFill><ns4:srgbClr val="FFFFFF"/></ns4:solidFill><ns4:latin typeface="Georgia"/><ns4:ea typeface="Georgia"/></ns4:defRPr></ns4:lvl8pPr><ns4:lvl9pPr algn="l"><ns4:buNone/><ns4:defRPr sz="3600" dirty="0" b="1"><ns4:solidFill><ns4:srgbClr val="FFFFFF"/></ns4:solidFill><ns4:latin typeface="Georgia"/><ns4:ea typeface="Georgia"/></ns4:defRPr></ns4:lvl9pPr></ns4:lstStyle/><ns5:p xmlns:ns5="http://schemas.openxmlformats.org/drawingml/2006/main"><ns5:pPr algn="l"><ns5:buNone/></ns5:pPr><ns5:r><ns5:rPr lang="ja-JP"/><ns5:t>日時：
+<ns0:sldLayout xmlns:ns0="http://schemas.openxmlformats.org/presentationml/2006/main" type="blank" preserve="1"><ns0:cSld name="Summary.1Agenda.Single"><ns0:spTree><ns0:nvGrpSpPr><ns0:cNvPr id="1" name=""/><ns0:cNvGrpSpPr/><ns0:nvPr/></ns0:nvGrpSpPr><ns0:grpSpPr><ns1:xfrm xmlns:ns1="http://schemas.openxmlformats.org/drawingml/2006/main"><ns1:off x="0" y="0"/><ns1:ext cx="0" cy="0"/><ns1:chOff x="0" y="0"/><ns1:chExt cx="0" cy="0"/></ns1:xfrm></ns0:grpSpPr><ns0:sp><ns0:nvSpPr><ns0:cNvPr id="2" name="BG"/><ns0:cNvSpPr><ns1:spLocks xmlns:ns1="http://schemas.openxmlformats.org/drawingml/2006/main" noGrp="1" noSelect="0" noRot="1" noMove="1"/></ns0:cNvSpPr><ns0:nvPr/></ns0:nvSpPr><ns0:spPr><ns2:xfrm xmlns:ns2="http://schemas.openxmlformats.org/drawingml/2006/main"><ns2:off x="0" y="0"/><ns2:ext cx="12192000" cy="6858000"/></ns2:xfrm><ns3:prstGeom xmlns:ns3="http://schemas.openxmlformats.org/drawingml/2006/main" prst="rect"/><ns4:solidFill xmlns:ns4="http://schemas.openxmlformats.org/drawingml/2006/main"><ns4:srgbClr val="FFFFFF"/></ns4:solidFill><ns5:ln xmlns:ns5="http://schemas.openxmlformats.org/drawingml/2006/main"><ns5:noFill/></ns5:ln></ns0:spPr></ns0:sp><ns0:sp><ns0:nvSpPr><ns0:cNvPr id="3" name="LeftPanel"/><ns0:cNvSpPr><ns1:spLocks xmlns:ns1="http://schemas.openxmlformats.org/drawingml/2006/main" noGrp="1" noSelect="0" noRot="1" noMove="1"/></ns0:cNvSpPr><ns0:nvPr/></ns0:nvSpPr><ns0:spPr><ns2:xfrm xmlns:ns2="http://schemas.openxmlformats.org/drawingml/2006/main"><ns2:off x="0" y="0"/><ns2:ext cx="4114800" cy="6858000"/></ns2:xfrm><ns3:prstGeom xmlns:ns3="http://schemas.openxmlformats.org/drawingml/2006/main" prst="rect"/><ns4:solidFill xmlns:ns4="http://schemas.openxmlformats.org/drawingml/2006/main"><ns4:srgbClr val="1E2761"/></ns4:solidFill><ns5:ln xmlns:ns5="http://schemas.openxmlformats.org/drawingml/2006/main"><ns5:noFill/></ns5:ln></ns0:spPr></ns0:sp><ns0:sp><ns0:nvSpPr><ns0:cNvPr id="4" name="AccentBar"/><ns0:cNvSpPr><ns1:spLocks xmlns:ns1="http://schemas.openxmlformats.org/drawingml/2006/main" noGrp="1" noSelect="0" noRot="1" noMove="1"/></ns0:cNvSpPr><ns0:nvPr/></ns0:nvSpPr><ns0:spPr><ns2:xfrm xmlns:ns2="http://schemas.openxmlformats.org/drawingml/2006/main"><ns2:off x="0" y="0"/><ns2:ext cx="164592" cy="6858000"/></ns2:xfrm><ns3:prstGeom xmlns:ns3="http://schemas.openxmlformats.org/drawingml/2006/main" prst="rect"/><ns4:solidFill xmlns:ns4="http://schemas.openxmlformats.org/drawingml/2006/main"><ns4:srgbClr val="3B82F6"/></ns4:solidFill><ns5:ln xmlns:ns5="http://schemas.openxmlformats.org/drawingml/2006/main"><ns5:noFill/></ns5:ln></ns0:spPr></ns0:sp><ns0:sp><ns0:nvSpPr><ns0:cNvPr id="10" name="Title.Left"/><ns0:cNvSpPr><ns1:spLocks xmlns:ns1="http://schemas.openxmlformats.org/drawingml/2006/main" noGrp="1"/></ns0:cNvSpPr><ns0:nvPr><ns0:ph idx="15" type="body"/></ns0:nvPr></ns0:nvSpPr><ns0:spPr><ns2:xfrm xmlns:ns2="http://schemas.openxmlformats.org/drawingml/2006/main"><ns2:off x="548640" y="914400"/><ns2:ext cx="3200400" cy="1371600"/></ns2:xfrm></ns0:spPr><ns0:txBody><ns3:bodyPr xmlns:ns3="http://schemas.openxmlformats.org/drawingml/2006/main" wrap="square" anchor="t" anchorCtr="0"/><ns4:lstStyle><ns4:defPPr><ns4:defRPr sz="3600" b="1"><ns4:solidFill><ns4:srgbClr val="FFFFFF"/></ns4:solidFill></ns4:defRPr></ns4:defPPr></ns4:lstStyle><ns4:defPPr algn="l"><ns4:buNone/><ns4:defRPr sz="3600" dirty="0" b="1"><ns4:solidFill><ns4:srgbClr val="FFFFFF"/></ns4:solidFill><ns4:latin typeface="Georgia"/><ns4:ea typeface="Georgia"/></ns4:defRPr></ns4:defPPr><ns4:lvl1pPr algn="l"><ns4:buNone/><ns4:defRPr sz="3600" dirty="0" b="1"><ns4:solidFill><ns4:srgbClr val="FFFFFF"/></ns4:solidFill><ns4:latin typeface="Georgia"/><ns4:ea typeface="Georgia"/></ns4:defRPr></ns4:lvl1pPr><ns4:lvl2pPr algn="l"><ns4:buNone/><ns4:defRPr sz="3600" dirty="0" b="1"><ns4:solidFill><ns4:srgbClr val="FFFFFF"/></ns4:solidFill><ns4:latin typeface="Georgia"/><ns4:ea typeface="Georgia"/></ns4:defRPr></ns4:lvl2pPr><ns4:lvl3pPr algn="l"><ns4:buNone/><ns4:defRPr sz="3600" dirty="0" b="1"><ns4:solidFill><ns4:srgbClr val="FFFFFF"/></ns4:solidFill><ns4:latin typeface="Georgia"/><ns4:ea typeface="Georgia"/></ns4:defRPr></ns4:lvl3pPr><ns4:lvl4pPr algn="l"><ns4:buNone/><ns4:defRPr sz="3600" dirty="0" b="1"><ns4:solidFill><ns4:srgbClr val="FFFFFF"/></ns4:solidFill><ns4:latin typeface="Georgia"/><ns4:ea typeface="Georgia"/></ns4:defRPr></ns4:lvl4pPr><ns4:lvl5pPr algn="l"><ns4:buNone/><ns4:defRPr sz="3600" dirty="0" b="1"><ns4:solidFill><ns4:srgbClr val="FFFFFF"/></ns4:solidFill><ns4:latin typeface="Georgia"/><ns4:ea typeface="Georgia"/></ns4:defRPr></ns4:lvl5pPr><ns4:lvl6pPr algn="l"><ns4:buNone/><ns4:defRPr sz="3600" dirty="0" b="1"><ns4:solidFill><ns4:srgbClr val="FFFFFF"/></ns4:solidFill><ns4:latin typeface="Georgia"/><ns4:ea typeface="Georgia"/></ns4:defRPr></ns4:lvl6pPr><ns4:lvl7pPr algn="l"><ns4:buNone/><ns4:defRPr sz="3600" dirty="0" b="1"><ns4:solidFill><ns4:srgbClr val="FFFFFF"/></ns4:solidFill><ns4:latin typeface="Georgia"/><ns4:ea typeface="Georgia"/></ns4:defRPr></ns4:lvl7pPr><ns4:lvl8pPr algn="l"><ns4:buNone/><ns4:defRPr sz="3600" dirty="0" b="1"><ns4:solidFill><ns4:srgbClr val="FFFFFF"/></ns4:solidFill><ns4:latin typeface="Georgia"/><ns4:ea typeface="Georgia"/></ns4:defRPr></ns4:lvl8pPr><ns4:lvl9pPr algn="l"><ns4:buNone/><ns4:defRPr sz="3600" dirty="0" b="1"><ns4:solidFill><ns4:srgbClr val="FFFFFF"/></ns4:solidFill><ns4:latin typeface="Georgia"/><ns4:ea typeface="Georgia"/></ns4:defRPr></ns4:lvl9pPr></ns4:lstStyle/><ns5:p xmlns:ns5="http://schemas.openxmlformats.org/drawingml/2006/main"><ns5:pPr algn="l"><ns5:buNone/></ns5:pPr><ns5:r><ns5:rPr lang="ja-JP"/><ns5:t>日時：
 場所：
-所要時間：</ns5:t></ns5:r></ns5:p></ns0:txBody></ns0:sp><ns0:sp><ns0:nvSpPr><ns0:cNvPr id="20" name="AgendaItems.Right"/><ns0:cNvSpPr><ns1:spLocks xmlns:ns1="http://schemas.openxmlformats.org/drawingml/2006/main" noGrp="1"/></ns0:cNvSpPr><ns0:nvPr><ns0:ph idx="1" type="body"/></ns0:nvPr></ns0:nvSpPr><ns0:spPr><ns2:xfrm xmlns:ns2="http://schemas.openxmlformats.org/drawingml/2006/main"><ns2:off x="4572000" y="731520"/><ns2:ext cx="6858000" cy="5486400"/></ns2:xfrm></ns0:spPr><ns0:txBody><ns3:bodyPr xmlns:ns3="http://schemas.openxmlformats.org/drawingml/2006/main" wrap="square" anchor="t" anchorCtr="0"/><ns4:lstStyle xmlns:ns4="http://schemas.openxmlformats.org/drawingml/2006/main"><ns4:defPPr algn="l"><ns4:buNone/><ns4:defRPr sz="1500" dirty="0"><ns4:solidFill><ns4:srgbClr val="1E293B"/></ns4:solidFill><ns4:latin typeface="Calibri"/><ns4:ea typeface="Calibri"/></ns4:defRPr></ns4:defPPr><ns4:lvl1pPr algn="l"><ns4:buNone/><ns4:defRPr sz="1500" dirty="0"><ns4:solidFill><ns4:srgbClr val="1E293B"/></ns4:solidFill><ns4:latin typeface="Calibri"/><ns4:ea typeface="Calibri"/></ns4:defRPr></ns4:lvl1pPr><ns4:lvl2pPr algn="l"><ns4:buNone/><ns4:defRPr sz="1500" dirty="0"><ns4:solidFill><ns4:srgbClr val="1E293B"/></ns4:solidFill><ns4:latin typeface="Calibri"/><ns4:ea typeface="Calibri"/></ns4:defRPr></ns4:lvl2pPr><ns4:lvl3pPr algn="l"><ns4:buNone/><ns4:defRPr sz="1500" dirty="0"><ns4:solidFill><ns4:srgbClr val="1E293B"/></ns4:solidFill><ns4:latin typeface="Calibri"/><ns4:ea typeface="Calibri"/></ns4:defRPr></ns4:lvl3pPr><ns4:lvl4pPr algn="l"><ns4:buNone/><ns4:defRPr sz="1500" dirty="0"><ns4:solidFill><ns4:srgbClr val="1E293B"/></ns4:solidFill><ns4:latin typeface="Calibri"/><ns4:ea typeface="Calibri"/></ns4:defRPr></ns4:lvl4pPr><ns4:lvl5pPr algn="l"><ns4:buNone/><ns4:defRPr sz="1500" dirty="0"><ns4:solidFill><ns4:srgbClr val="1E293B"/></ns4:solidFill><ns4:latin typeface="Calibri"/><ns4:ea typeface="Calibri"/></ns4:defRPr></ns4:lvl5pPr><ns4:lvl6pPr algn="l"><ns4:buNone/><ns4:defRPr sz="1500" dirty="0"><ns4:solidFill><ns4:srgbClr val="1E293B"/></ns4:solidFill><ns4:latin typeface="Calibri"/><ns4:ea typeface="Calibri"/></ns4:defRPr></ns4:lvl6pPr><ns4:lvl7pPr algn="l"><ns4:buNone/><ns4:defRPr sz="1500" dirty="0"><ns4:solidFill><ns4:srgbClr val="1E293B"/></ns4:solidFill><ns4:latin typeface="Calibri"/><ns4:ea typeface="Calibri"/></ns4:defRPr></ns4:lvl7pPr><ns4:lvl8pPr algn="l"><ns4:buNone/><ns4:defRPr sz="1500" dirty="0"><ns4:solidFill><ns4:srgbClr val="1E293B"/></ns4:solidFill><ns4:latin typeface="Calibri"/><ns4:ea typeface="Calibri"/></ns4:defRPr></ns4:lvl8pPr><ns4:lvl9pPr algn="l"><ns4:buNone/><ns4:defRPr sz="1500" dirty="0"><ns4:solidFill><ns4:srgbClr val="1E293B"/></ns4:solidFill><ns4:latin typeface="Calibri"/><ns4:ea typeface="Calibri"/></ns4:defRPr></ns4:lvl9pPr></ns4:lstStyle><ns5:p xmlns:ns5="http://schemas.openxmlformats.org/drawingml/2006/main"><ns5:pPr algn="l"><ns5:buNone/></ns5:pPr><ns5:r><ns5:rPr lang="ja-JP"/><ns5:t>01  議題タイトル
+所要時間：</ns5:t></ns5:r></ns5:p></ns0:txBody></ns0:sp><ns0:sp><ns0:nvSpPr><ns0:cNvPr id="20" name="AgendaItems.Right"/><ns0:cNvSpPr><ns1:spLocks xmlns:ns1="http://schemas.openxmlformats.org/drawingml/2006/main" noGrp="1"/></ns0:cNvSpPr><ns0:nvPr><ns0:ph idx="1" type="body"/></ns0:nvPr></ns0:nvSpPr><ns0:spPr><ns2:xfrm xmlns:ns2="http://schemas.openxmlformats.org/drawingml/2006/main"><ns2:off x="4572000" y="731520"/><ns2:ext cx="6858000" cy="5486400"/></ns2:xfrm></ns0:spPr><ns0:txBody><ns3:bodyPr xmlns:ns3="http://schemas.openxmlformats.org/drawingml/2006/main" wrap="square" anchor="t" anchorCtr="0"/><ns4:lstStyle><ns4:defPPr><ns4:defRPr sz="1500"></ns4:defRPr></ns4:defPPr></ns4:lstStyle><ns4:defPPr algn="l"><ns4:buNone/><ns4:defRPr sz="1500" dirty="0"><ns4:solidFill><ns4:srgbClr val="1E293B"/></ns4:solidFill><ns4:latin typeface="Calibri"/><ns4:ea typeface="Calibri"/></ns4:defRPr></ns4:defPPr><ns4:lvl1pPr algn="l"><ns4:buNone/><ns4:defRPr sz="1500" dirty="0"><ns4:solidFill><ns4:srgbClr val="1E293B"/></ns4:solidFill><ns4:latin typeface="Calibri"/><ns4:ea typeface="Calibri"/></ns4:defRPr></ns4:lvl1pPr><ns4:lvl2pPr algn="l"><ns4:buNone/><ns4:defRPr sz="1500" dirty="0"><ns4:solidFill><ns4:srgbClr val="1E293B"/></ns4:solidFill><ns4:latin typeface="Calibri"/><ns4:ea typeface="Calibri"/></ns4:defRPr></ns4:lvl2pPr><ns4:lvl3pPr algn="l"><ns4:buNone/><ns4:defRPr sz="1500" dirty="0"><ns4:solidFill><ns4:srgbClr val="1E293B"/></ns4:solidFill><ns4:latin typeface="Calibri"/><ns4:ea typeface="Calibri"/></ns4:defRPr></ns4:lvl3pPr><ns4:lvl4pPr algn="l"><ns4:buNone/><ns4:defRPr sz="1500" dirty="0"><ns4:solidFill><ns4:srgbClr val="1E293B"/></ns4:solidFill><ns4:latin typeface="Calibri"/><ns4:ea typeface="Calibri"/></ns4:defRPr></ns4:lvl4pPr><ns4:lvl5pPr algn="l"><ns4:buNone/><ns4:defRPr sz="1500" dirty="0"><ns4:solidFill><ns4:srgbClr val="1E293B"/></ns4:solidFill><ns4:latin typeface="Calibri"/><ns4:ea typeface="Calibri"/></ns4:defRPr></ns4:lvl5pPr><ns4:lvl6pPr algn="l"><ns4:buNone/><ns4:defRPr sz="1500" dirty="0"><ns4:solidFill><ns4:srgbClr val="1E293B"/></ns4:solidFill><ns4:latin typeface="Calibri"/><ns4:ea typeface="Calibri"/></ns4:defRPr></ns4:lvl6pPr><ns4:lvl7pPr algn="l"><ns4:buNone/><ns4:defRPr sz="1500" dirty="0"><ns4:solidFill><ns4:srgbClr val="1E293B"/></ns4:solidFill><ns4:latin typeface="Calibri"/><ns4:ea typeface="Calibri"/></ns4:defRPr></ns4:lvl7pPr><ns4:lvl8pPr algn="l"><ns4:buNone/><ns4:defRPr sz="1500" dirty="0"><ns4:solidFill><ns4:srgbClr val="1E293B"/></ns4:solidFill><ns4:latin typeface="Calibri"/><ns4:ea typeface="Calibri"/></ns4:defRPr></ns4:lvl8pPr><ns4:lvl9pPr algn="l"><ns4:buNone/><ns4:defRPr sz="1500" dirty="0"><ns4:solidFill><ns4:srgbClr val="1E293B"/></ns4:solidFill><ns4:latin typeface="Calibri"/><ns4:ea typeface="Calibri"/></ns4:defRPr></ns4:lvl9pPr></ns4:lstStyle><ns5:p xmlns:ns5="http://schemas.openxmlformats.org/drawingml/2006/main"><ns5:pPr algn="l"><ns5:buNone/></ns5:pPr><ns5:r><ns5:rPr lang="ja-JP"/><ns5:t>01  議題タイトル
 
 02  議題タイトル
 
@@ -1312,15 +1280,15 @@
 </file>
 
 <file path=ppt/slideLayouts/slideLayout28.xml><?xml version='1.0' encoding='UTF-8' standalone='yes'?>
-<ns0:sldLayout xmlns:ns0="http://schemas.openxmlformats.org/presentationml/2006/main" type="blank" preserve="1"><ns0:cSld name="Summary.2Block.Equal"><ns0:spTree><ns0:nvGrpSpPr><ns0:cNvPr id="1" name=""/><ns0:cNvGrpSpPr/><ns0:nvPr/></ns0:nvGrpSpPr><ns0:grpSpPr><ns1:xfrm xmlns:ns1="http://schemas.openxmlformats.org/drawingml/2006/main"><ns1:off x="0" y="0"/><ns1:ext cx="0" cy="0"/><ns1:chOff x="0" y="0"/><ns1:chExt cx="0" cy="0"/></ns1:xfrm></ns0:grpSpPr><ns0:sp><ns0:nvSpPr><ns0:cNvPr id="2" name="HeaderBar"/><ns0:cNvSpPr><ns1:spLocks xmlns:ns1="http://schemas.openxmlformats.org/drawingml/2006/main" noGrp="1" noSelect="0" noRot="1" noMove="1"/></ns0:cNvSpPr><ns0:nvPr/></ns0:nvSpPr><ns0:spPr><ns2:xfrm xmlns:ns2="http://schemas.openxmlformats.org/drawingml/2006/main"><ns2:off x="0" y="0"/><ns2:ext cx="12192000" cy="1051560"/></ns2:xfrm><ns3:prstGeom xmlns:ns3="http://schemas.openxmlformats.org/drawingml/2006/main" prst="rect"/><ns4:solidFill xmlns:ns4="http://schemas.openxmlformats.org/drawingml/2006/main"><ns4:srgbClr val="1E2761"/></ns4:solidFill><ns5:ln xmlns:ns5="http://schemas.openxmlformats.org/drawingml/2006/main"><ns5:noFill/></ns5:ln></ns0:spPr></ns0:sp><ns0:sp><ns0:nvSpPr><ns0:cNvPr id="10" name="SlideTitle.Header"/><ns0:cNvSpPr><ns1:spLocks xmlns:ns1="http://schemas.openxmlformats.org/drawingml/2006/main" noGrp="1"/></ns0:cNvSpPr><ns0:nvPr><ns0:ph idx="15" type="body"/></ns0:nvPr></ns0:nvSpPr><ns0:spPr><ns2:xfrm xmlns:ns2="http://schemas.openxmlformats.org/drawingml/2006/main"><ns2:off x="731520" y="91440"/><ns2:ext cx="9144000" cy="475488"/></ns2:xfrm></ns0:spPr><ns0:txBody><ns3:bodyPr xmlns:ns3="http://schemas.openxmlformats.org/drawingml/2006/main" wrap="square" anchor="t" anchorCtr="0"/><ns4:lstStyle xmlns:ns4="http://schemas.openxmlformats.org/drawingml/2006/main"><ns4:defPPr algn="l"><ns4:buNone/><ns4:defRPr sz="2800" dirty="0" b="1"><ns4:solidFill><ns4:srgbClr val="FFFFFF"/></ns4:solidFill><ns4:latin typeface="Georgia"/><ns4:ea typeface="Georgia"/></ns4:defRPr></ns4:defPPr><ns4:lvl1pPr algn="l"><ns4:buNone/><ns4:defRPr sz="2800" dirty="0" b="1"><ns4:solidFill><ns4:srgbClr val="FFFFFF"/></ns4:solidFill><ns4:latin typeface="Georgia"/><ns4:ea typeface="Georgia"/></ns4:defRPr></ns4:lvl1pPr><ns4:lvl2pPr algn="l"><ns4:buNone/><ns4:defRPr sz="2800" dirty="0" b="1"><ns4:solidFill><ns4:srgbClr val="FFFFFF"/></ns4:solidFill><ns4:latin typeface="Georgia"/><ns4:ea typeface="Georgia"/></ns4:defRPr></ns4:lvl2pPr><ns4:lvl3pPr algn="l"><ns4:buNone/><ns4:defRPr sz="2800" dirty="0" b="1"><ns4:solidFill><ns4:srgbClr val="FFFFFF"/></ns4:solidFill><ns4:latin typeface="Georgia"/><ns4:ea typeface="Georgia"/></ns4:defRPr></ns4:lvl3pPr><ns4:lvl4pPr algn="l"><ns4:buNone/><ns4:defRPr sz="2800" dirty="0" b="1"><ns4:solidFill><ns4:srgbClr val="FFFFFF"/></ns4:solidFill><ns4:latin typeface="Georgia"/><ns4:ea typeface="Georgia"/></ns4:defRPr></ns4:lvl4pPr><ns4:lvl5pPr algn="l"><ns4:buNone/><ns4:defRPr sz="2800" dirty="0" b="1"><ns4:solidFill><ns4:srgbClr val="FFFFFF"/></ns4:solidFill><ns4:latin typeface="Georgia"/><ns4:ea typeface="Georgia"/></ns4:defRPr></ns4:lvl5pPr><ns4:lvl6pPr algn="l"><ns4:buNone/><ns4:defRPr sz="2800" dirty="0" b="1"><ns4:solidFill><ns4:srgbClr val="FFFFFF"/></ns4:solidFill><ns4:latin typeface="Georgia"/><ns4:ea typeface="Georgia"/></ns4:defRPr></ns4:lvl6pPr><ns4:lvl7pPr algn="l"><ns4:buNone/><ns4:defRPr sz="2800" dirty="0" b="1"><ns4:solidFill><ns4:srgbClr val="FFFFFF"/></ns4:solidFill><ns4:latin typeface="Georgia"/><ns4:ea typeface="Georgia"/></ns4:defRPr></ns4:lvl7pPr><ns4:lvl8pPr algn="l"><ns4:buNone/><ns4:defRPr sz="2800" dirty="0" b="1"><ns4:solidFill><ns4:srgbClr val="FFFFFF"/></ns4:solidFill><ns4:latin typeface="Georgia"/><ns4:ea typeface="Georgia"/></ns4:defRPr></ns4:lvl8pPr><ns4:lvl9pPr algn="l"><ns4:buNone/><ns4:defRPr sz="2800" dirty="0" b="1"><ns4:solidFill><ns4:srgbClr val="FFFFFF"/></ns4:solidFill><ns4:latin typeface="Georgia"/><ns4:ea typeface="Georgia"/></ns4:defRPr></ns4:lvl9pPr></ns4:lstStyle/><ns5:p xmlns:ns5="http://schemas.openxmlformats.org/drawingml/2006/main"><ns5:pPr algn="l"><ns5:buNone/></ns5:pPr><ns5:r><ns5:rPr lang="ja-JP"/><ns5:t>サブタイトル</ns5:t></ns5:r></ns5:p></ns0:txBody></ns0:sp><ns0:sp><ns0:nvSpPr><ns0:cNvPr id="5" name="FindingsPanel"/><ns0:cNvSpPr><ns1:spLocks xmlns:ns1="http://schemas.openxmlformats.org/drawingml/2006/main" noGrp="1" noSelect="0" noRot="1" noMove="1"/></ns0:cNvSpPr><ns0:nvPr/></ns0:nvSpPr><ns0:spPr><ns2:xfrm xmlns:ns2="http://schemas.openxmlformats.org/drawingml/2006/main"><ns2:off x="457200" y="1280160"/><ns2:ext cx="7132320" cy="5029200"/></ns2:xfrm><ns3:prstGeom xmlns:ns3="http://schemas.openxmlformats.org/drawingml/2006/main" prst="roundRect"><ns3:avLst><ns3:gd name="adj" fmla="val 8000"/></ns3:avLst></ns3:prstGeom><ns4:solidFill xmlns:ns4="http://schemas.openxmlformats.org/drawingml/2006/main"><ns4:srgbClr val="EDF0F7"/></ns4:solidFill><ns5:ln xmlns:ns5="http://schemas.openxmlformats.org/drawingml/2006/main"><ns5:noFill/></ns5:ln></ns0:spPr></ns0:sp><ns0:sp><ns0:nvSpPr><ns0:cNvPr id="6" name="RecPanel"/><ns0:cNvSpPr><ns1:spLocks xmlns:ns1="http://schemas.openxmlformats.org/drawingml/2006/main" noGrp="1" noSelect="0" noRot="1" noMove="1"/></ns0:cNvSpPr><ns0:nvPr/></ns0:nvSpPr><ns0:spPr><ns2:xfrm xmlns:ns2="http://schemas.openxmlformats.org/drawingml/2006/main"><ns2:off x="7863840" y="1280160"/><ns2:ext cx="3749039" cy="5029200"/></ns2:xfrm><ns3:prstGeom xmlns:ns3="http://schemas.openxmlformats.org/drawingml/2006/main" prst="roundRect"><ns3:avLst><ns3:gd name="adj" fmla="val 8000"/></ns3:avLst></ns3:prstGeom><ns4:solidFill xmlns:ns4="http://schemas.openxmlformats.org/drawingml/2006/main"><ns4:srgbClr val="F0F4FF"/></ns4:solidFill><ns5:ln xmlns:ns5="http://schemas.openxmlformats.org/drawingml/2006/main"><ns5:noFill/></ns5:ln></ns0:spPr></ns0:sp><ns0:sp><ns0:nvSpPr><ns0:cNvPr id="7" name="RecAccent"/><ns0:cNvSpPr><ns1:spLocks xmlns:ns1="http://schemas.openxmlformats.org/drawingml/2006/main" noGrp="1" noSelect="0" noRot="1" noMove="1"/></ns0:cNvSpPr><ns0:nvPr/></ns0:nvSpPr><ns0:spPr><ns2:xfrm xmlns:ns2="http://schemas.openxmlformats.org/drawingml/2006/main"><ns2:off x="7863840" y="1280160"/><ns2:ext cx="54864" cy="5029200"/></ns2:xfrm><ns3:prstGeom xmlns:ns3="http://schemas.openxmlformats.org/drawingml/2006/main" prst="rect"/><ns4:solidFill xmlns:ns4="http://schemas.openxmlformats.org/drawingml/2006/main"><ns4:srgbClr val="3B82F6"/></ns4:solidFill><ns5:ln xmlns:ns5="http://schemas.openxmlformats.org/drawingml/2006/main"><ns5:noFill/></ns5:ln></ns0:spPr></ns0:sp><ns0:sp><ns0:nvSpPr><ns0:cNvPr id="20" name="Body1.Left"/><ns0:cNvSpPr><ns1:spLocks xmlns:ns1="http://schemas.openxmlformats.org/drawingml/2006/main" noGrp="1"/></ns0:cNvSpPr><ns0:nvPr><ns0:ph idx="1" type="body"/></ns0:nvPr></ns0:nvSpPr><ns0:spPr><ns2:xfrm xmlns:ns2="http://schemas.openxmlformats.org/drawingml/2006/main"><ns2:off x="822960" y="1554480"/><ns2:ext cx="6400800" cy="4572000"/></ns2:xfrm></ns0:spPr><ns0:txBody><ns3:bodyPr xmlns:ns3="http://schemas.openxmlformats.org/drawingml/2006/main" wrap="square" anchor="t" anchorCtr="0"/><ns4:lstStyle xmlns:ns4="http://schemas.openxmlformats.org/drawingml/2006/main"><ns4:defPPr algn="l"><ns4:buNone/><ns4:defRPr sz="1400" dirty="0"><ns4:solidFill><ns4:srgbClr val="1E293B"/></ns4:solidFill><ns4:latin typeface="Calibri"/><ns4:ea typeface="Calibri"/></ns4:defRPr></ns4:defPPr><ns4:lvl1pPr algn="l"><ns4:buNone/><ns4:defRPr sz="1400" dirty="0"><ns4:solidFill><ns4:srgbClr val="1E293B"/></ns4:solidFill><ns4:latin typeface="Calibri"/><ns4:ea typeface="Calibri"/></ns4:defRPr></ns4:lvl1pPr><ns4:lvl2pPr algn="l"><ns4:buNone/><ns4:defRPr sz="1400" dirty="0"><ns4:solidFill><ns4:srgbClr val="1E293B"/></ns4:solidFill><ns4:latin typeface="Calibri"/><ns4:ea typeface="Calibri"/></ns4:defRPr></ns4:lvl2pPr><ns4:lvl3pPr algn="l"><ns4:buNone/><ns4:defRPr sz="1400" dirty="0"><ns4:solidFill><ns4:srgbClr val="1E293B"/></ns4:solidFill><ns4:latin typeface="Calibri"/><ns4:ea typeface="Calibri"/></ns4:defRPr></ns4:lvl3pPr><ns4:lvl4pPr algn="l"><ns4:buNone/><ns4:defRPr sz="1400" dirty="0"><ns4:solidFill><ns4:srgbClr val="1E293B"/></ns4:solidFill><ns4:latin typeface="Calibri"/><ns4:ea typeface="Calibri"/></ns4:defRPr></ns4:lvl4pPr><ns4:lvl5pPr algn="l"><ns4:buNone/><ns4:defRPr sz="1400" dirty="0"><ns4:solidFill><ns4:srgbClr val="1E293B"/></ns4:solidFill><ns4:latin typeface="Calibri"/><ns4:ea typeface="Calibri"/></ns4:defRPr></ns4:lvl5pPr><ns4:lvl6pPr algn="l"><ns4:buNone/><ns4:defRPr sz="1400" dirty="0"><ns4:solidFill><ns4:srgbClr val="1E293B"/></ns4:solidFill><ns4:latin typeface="Calibri"/><ns4:ea typeface="Calibri"/></ns4:defRPr></ns4:lvl6pPr><ns4:lvl7pPr algn="l"><ns4:buNone/><ns4:defRPr sz="1400" dirty="0"><ns4:solidFill><ns4:srgbClr val="1E293B"/></ns4:solidFill><ns4:latin typeface="Calibri"/><ns4:ea typeface="Calibri"/></ns4:defRPr></ns4:lvl7pPr><ns4:lvl8pPr algn="l"><ns4:buNone/><ns4:defRPr sz="1400" dirty="0"><ns4:solidFill><ns4:srgbClr val="1E293B"/></ns4:solidFill><ns4:latin typeface="Calibri"/><ns4:ea typeface="Calibri"/></ns4:defRPr></ns4:lvl8pPr><ns4:lvl9pPr algn="l"><ns4:buNone/><ns4:defRPr sz="1400" dirty="0"><ns4:solidFill><ns4:srgbClr val="1E293B"/></ns4:solidFill><ns4:latin typeface="Calibri"/><ns4:ea typeface="Calibri"/></ns4:defRPr></ns4:lvl9pPr></ns4:lstStyle/><ns5:p xmlns:ns5="http://schemas.openxmlformats.org/drawingml/2006/main"><ns5:pPr algn="l"><ns5:buNone/></ns5:pPr><ns5:r><ns5:rPr lang="ja-JP"/><ns5:t>推奨アクション
+<ns0:sldLayout xmlns:ns0="http://schemas.openxmlformats.org/presentationml/2006/main" type="blank" preserve="1"><ns0:cSld name="Summary.2Block.Equal"><ns0:spTree><ns0:nvGrpSpPr><ns0:cNvPr id="1" name=""/><ns0:cNvGrpSpPr/><ns0:nvPr/></ns0:nvGrpSpPr><ns0:grpSpPr><ns1:xfrm xmlns:ns1="http://schemas.openxmlformats.org/drawingml/2006/main"><ns1:off x="0" y="0"/><ns1:ext cx="0" cy="0"/><ns1:chOff x="0" y="0"/><ns1:chExt cx="0" cy="0"/></ns1:xfrm></ns0:grpSpPr><ns0:sp><ns0:nvSpPr><ns0:cNvPr id="2" name="HeaderBar"/><ns0:cNvSpPr><ns1:spLocks xmlns:ns1="http://schemas.openxmlformats.org/drawingml/2006/main" noGrp="1" noSelect="0" noRot="1" noMove="1"/></ns0:cNvSpPr><ns0:nvPr/></ns0:nvSpPr><ns0:spPr><ns2:xfrm xmlns:ns2="http://schemas.openxmlformats.org/drawingml/2006/main"><ns2:off x="0" y="0"/><ns2:ext cx="12192000" cy="1051560"/></ns2:xfrm><ns3:prstGeom xmlns:ns3="http://schemas.openxmlformats.org/drawingml/2006/main" prst="rect"/><ns4:solidFill xmlns:ns4="http://schemas.openxmlformats.org/drawingml/2006/main"><ns4:srgbClr val="1E2761"/></ns4:solidFill><ns5:ln xmlns:ns5="http://schemas.openxmlformats.org/drawingml/2006/main"><ns5:noFill/></ns5:ln></ns0:spPr></ns0:sp><ns0:sp><ns0:nvSpPr><ns0:cNvPr id="10" name="SlideTitle.Header"/><ns0:cNvSpPr><ns1:spLocks xmlns:ns1="http://schemas.openxmlformats.org/drawingml/2006/main" noGrp="1"/></ns0:cNvSpPr><ns0:nvPr><ns0:ph idx="15" type="body"/></ns0:nvPr></ns0:nvSpPr><ns0:spPr><ns2:xfrm xmlns:ns2="http://schemas.openxmlformats.org/drawingml/2006/main"><ns2:off x="731520" y="91440"/><ns2:ext cx="9144000" cy="475488"/></ns2:xfrm></ns0:spPr><ns0:txBody><ns3:bodyPr xmlns:ns3="http://schemas.openxmlformats.org/drawingml/2006/main" wrap="square" anchor="t" anchorCtr="0"/><ns4:lstStyle><ns4:defPPr><ns4:defRPr sz="2800" b="1"><ns4:solidFill><ns4:srgbClr val="FFFFFF"/></ns4:solidFill></ns4:defRPr></ns4:defPPr></ns4:lstStyle><ns4:defPPr algn="l"><ns4:buNone/><ns4:defRPr sz="2800" dirty="0" b="1"><ns4:solidFill><ns4:srgbClr val="FFFFFF"/></ns4:solidFill><ns4:latin typeface="Georgia"/><ns4:ea typeface="Georgia"/></ns4:defRPr></ns4:defPPr><ns4:lvl1pPr algn="l"><ns4:buNone/><ns4:defRPr sz="2800" dirty="0" b="1"><ns4:solidFill><ns4:srgbClr val="FFFFFF"/></ns4:solidFill><ns4:latin typeface="Georgia"/><ns4:ea typeface="Georgia"/></ns4:defRPr></ns4:lvl1pPr><ns4:lvl2pPr algn="l"><ns4:buNone/><ns4:defRPr sz="2800" dirty="0" b="1"><ns4:solidFill><ns4:srgbClr val="FFFFFF"/></ns4:solidFill><ns4:latin typeface="Georgia"/><ns4:ea typeface="Georgia"/></ns4:defRPr></ns4:lvl2pPr><ns4:lvl3pPr algn="l"><ns4:buNone/><ns4:defRPr sz="2800" dirty="0" b="1"><ns4:solidFill><ns4:srgbClr val="FFFFFF"/></ns4:solidFill><ns4:latin typeface="Georgia"/><ns4:ea typeface="Georgia"/></ns4:defRPr></ns4:lvl3pPr><ns4:lvl4pPr algn="l"><ns4:buNone/><ns4:defRPr sz="2800" dirty="0" b="1"><ns4:solidFill><ns4:srgbClr val="FFFFFF"/></ns4:solidFill><ns4:latin typeface="Georgia"/><ns4:ea typeface="Georgia"/></ns4:defRPr></ns4:lvl4pPr><ns4:lvl5pPr algn="l"><ns4:buNone/><ns4:defRPr sz="2800" dirty="0" b="1"><ns4:solidFill><ns4:srgbClr val="FFFFFF"/></ns4:solidFill><ns4:latin typeface="Georgia"/><ns4:ea typeface="Georgia"/></ns4:defRPr></ns4:lvl5pPr><ns4:lvl6pPr algn="l"><ns4:buNone/><ns4:defRPr sz="2800" dirty="0" b="1"><ns4:solidFill><ns4:srgbClr val="FFFFFF"/></ns4:solidFill><ns4:latin typeface="Georgia"/><ns4:ea typeface="Georgia"/></ns4:defRPr></ns4:lvl6pPr><ns4:lvl7pPr algn="l"><ns4:buNone/><ns4:defRPr sz="2800" dirty="0" b="1"><ns4:solidFill><ns4:srgbClr val="FFFFFF"/></ns4:solidFill><ns4:latin typeface="Georgia"/><ns4:ea typeface="Georgia"/></ns4:defRPr></ns4:lvl7pPr><ns4:lvl8pPr algn="l"><ns4:buNone/><ns4:defRPr sz="2800" dirty="0" b="1"><ns4:solidFill><ns4:srgbClr val="FFFFFF"/></ns4:solidFill><ns4:latin typeface="Georgia"/><ns4:ea typeface="Georgia"/></ns4:defRPr></ns4:lvl8pPr><ns4:lvl9pPr algn="l"><ns4:buNone/><ns4:defRPr sz="2800" dirty="0" b="1"><ns4:solidFill><ns4:srgbClr val="FFFFFF"/></ns4:solidFill><ns4:latin typeface="Georgia"/><ns4:ea typeface="Georgia"/></ns4:defRPr></ns4:lvl9pPr></ns4:lstStyle/><ns5:p xmlns:ns5="http://schemas.openxmlformats.org/drawingml/2006/main"><ns5:pPr algn="l"><ns5:buNone/></ns5:pPr><ns5:r><ns5:rPr lang="ja-JP"/><ns5:t>サブタイトル</ns5:t></ns5:r></ns5:p></ns0:txBody></ns0:sp><ns0:sp><ns0:nvSpPr><ns0:cNvPr id="5" name="FindingsPanel"/><ns0:cNvSpPr><ns1:spLocks xmlns:ns1="http://schemas.openxmlformats.org/drawingml/2006/main" noGrp="1" noSelect="0" noRot="1" noMove="1"/></ns0:cNvSpPr><ns0:nvPr/></ns0:nvSpPr><ns0:spPr><ns2:xfrm xmlns:ns2="http://schemas.openxmlformats.org/drawingml/2006/main"><ns2:off x="457200" y="1280160"/><ns2:ext cx="7132320" cy="5029200"/></ns2:xfrm><ns3:prstGeom xmlns:ns3="http://schemas.openxmlformats.org/drawingml/2006/main" prst="roundRect"><ns3:avLst><ns3:gd name="adj" fmla="val 8000"/></ns3:avLst></ns3:prstGeom><ns4:solidFill xmlns:ns4="http://schemas.openxmlformats.org/drawingml/2006/main"><ns4:srgbClr val="EDF0F7"/></ns4:solidFill><ns5:ln xmlns:ns5="http://schemas.openxmlformats.org/drawingml/2006/main"><ns5:noFill/></ns5:ln></ns0:spPr></ns0:sp><ns0:sp><ns0:nvSpPr><ns0:cNvPr id="6" name="RecPanel"/><ns0:cNvSpPr><ns1:spLocks xmlns:ns1="http://schemas.openxmlformats.org/drawingml/2006/main" noGrp="1" noSelect="0" noRot="1" noMove="1"/></ns0:cNvSpPr><ns0:nvPr/></ns0:nvSpPr><ns0:spPr><ns2:xfrm xmlns:ns2="http://schemas.openxmlformats.org/drawingml/2006/main"><ns2:off x="7863840" y="1280160"/><ns2:ext cx="3749039" cy="5029200"/></ns2:xfrm><ns3:prstGeom xmlns:ns3="http://schemas.openxmlformats.org/drawingml/2006/main" prst="roundRect"><ns3:avLst><ns3:gd name="adj" fmla="val 8000"/></ns3:avLst></ns3:prstGeom><ns4:solidFill xmlns:ns4="http://schemas.openxmlformats.org/drawingml/2006/main"><ns4:srgbClr val="F0F4FF"/></ns4:solidFill><ns5:ln xmlns:ns5="http://schemas.openxmlformats.org/drawingml/2006/main"><ns5:noFill/></ns5:ln></ns0:spPr></ns0:sp><ns0:sp><ns0:nvSpPr><ns0:cNvPr id="7" name="RecAccent"/><ns0:cNvSpPr><ns1:spLocks xmlns:ns1="http://schemas.openxmlformats.org/drawingml/2006/main" noGrp="1" noSelect="0" noRot="1" noMove="1"/></ns0:cNvSpPr><ns0:nvPr/></ns0:nvSpPr><ns0:spPr><ns2:xfrm xmlns:ns2="http://schemas.openxmlformats.org/drawingml/2006/main"><ns2:off x="7863840" y="1280160"/><ns2:ext cx="54864" cy="5029200"/></ns2:xfrm><ns3:prstGeom xmlns:ns3="http://schemas.openxmlformats.org/drawingml/2006/main" prst="rect"/><ns4:solidFill xmlns:ns4="http://schemas.openxmlformats.org/drawingml/2006/main"><ns4:srgbClr val="3B82F6"/></ns4:solidFill><ns5:ln xmlns:ns5="http://schemas.openxmlformats.org/drawingml/2006/main"><ns5:noFill/></ns5:ln></ns0:spPr></ns0:sp><ns0:sp><ns0:nvSpPr><ns0:cNvPr id="20" name="Body1.Left"/><ns0:cNvSpPr><ns1:spLocks xmlns:ns1="http://schemas.openxmlformats.org/drawingml/2006/main" noGrp="1"/></ns0:cNvSpPr><ns0:nvPr><ns0:ph idx="1" type="body"/></ns0:nvPr></ns0:nvSpPr><ns0:spPr><ns2:xfrm xmlns:ns2="http://schemas.openxmlformats.org/drawingml/2006/main"><ns2:off x="822960" y="1554480"/><ns2:ext cx="6400800" cy="4572000"/></ns2:xfrm></ns0:spPr><ns0:txBody><ns3:bodyPr xmlns:ns3="http://schemas.openxmlformats.org/drawingml/2006/main" wrap="square" anchor="t" anchorCtr="0"/><ns4:lstStyle/><ns4:defPPr algn="l"><ns4:buNone/><ns4:defRPr sz="1400" dirty="0"><ns4:solidFill><ns4:srgbClr val="1E293B"/></ns4:solidFill><ns4:latin typeface="Calibri"/><ns4:ea typeface="Calibri"/></ns4:defRPr></ns4:defPPr><ns4:lvl1pPr algn="l"><ns4:buNone/><ns4:defRPr sz="1400" dirty="0"><ns4:solidFill><ns4:srgbClr val="1E293B"/></ns4:solidFill><ns4:latin typeface="Calibri"/><ns4:ea typeface="Calibri"/></ns4:defRPr></ns4:lvl1pPr><ns4:lvl2pPr algn="l"><ns4:buNone/><ns4:defRPr sz="1400" dirty="0"><ns4:solidFill><ns4:srgbClr val="1E293B"/></ns4:solidFill><ns4:latin typeface="Calibri"/><ns4:ea typeface="Calibri"/></ns4:defRPr></ns4:lvl2pPr><ns4:lvl3pPr algn="l"><ns4:buNone/><ns4:defRPr sz="1400" dirty="0"><ns4:solidFill><ns4:srgbClr val="1E293B"/></ns4:solidFill><ns4:latin typeface="Calibri"/><ns4:ea typeface="Calibri"/></ns4:defRPr></ns4:lvl3pPr><ns4:lvl4pPr algn="l"><ns4:buNone/><ns4:defRPr sz="1400" dirty="0"><ns4:solidFill><ns4:srgbClr val="1E293B"/></ns4:solidFill><ns4:latin typeface="Calibri"/><ns4:ea typeface="Calibri"/></ns4:defRPr></ns4:lvl4pPr><ns4:lvl5pPr algn="l"><ns4:buNone/><ns4:defRPr sz="1400" dirty="0"><ns4:solidFill><ns4:srgbClr val="1E293B"/></ns4:solidFill><ns4:latin typeface="Calibri"/><ns4:ea typeface="Calibri"/></ns4:defRPr></ns4:lvl5pPr><ns4:lvl6pPr algn="l"><ns4:buNone/><ns4:defRPr sz="1400" dirty="0"><ns4:solidFill><ns4:srgbClr val="1E293B"/></ns4:solidFill><ns4:latin typeface="Calibri"/><ns4:ea typeface="Calibri"/></ns4:defRPr></ns4:lvl6pPr><ns4:lvl7pPr algn="l"><ns4:buNone/><ns4:defRPr sz="1400" dirty="0"><ns4:solidFill><ns4:srgbClr val="1E293B"/></ns4:solidFill><ns4:latin typeface="Calibri"/><ns4:ea typeface="Calibri"/></ns4:defRPr></ns4:lvl7pPr><ns4:lvl8pPr algn="l"><ns4:buNone/><ns4:defRPr sz="1400" dirty="0"><ns4:solidFill><ns4:srgbClr val="1E293B"/></ns4:solidFill><ns4:latin typeface="Calibri"/><ns4:ea typeface="Calibri"/></ns4:defRPr></ns4:lvl8pPr><ns4:lvl9pPr algn="l"><ns4:buNone/><ns4:defRPr sz="1400" dirty="0"><ns4:solidFill><ns4:srgbClr val="1E293B"/></ns4:solidFill><ns4:latin typeface="Calibri"/><ns4:ea typeface="Calibri"/></ns4:defRPr></ns4:lvl9pPr></ns4:lstStyle/><ns5:p xmlns:ns5="http://schemas.openxmlformats.org/drawingml/2006/main"><ns5:pPr algn="l"><ns5:buNone/></ns5:pPr><ns5:r><ns5:rPr lang="ja-JP"/><ns5:t>推奨アクション
 
 優先度：高
 
-対応策を記入</ns5:t></ns5:r></ns5:p></ns0:txBody></ns0:sp><ns0:sp><ns0:nvSpPr><ns0:cNvPr id="30" name="SlideNum.Footer"/><ns0:cNvSpPr><ns1:spLocks xmlns:ns1="http://schemas.openxmlformats.org/drawingml/2006/main" noGrp="1"/></ns0:cNvSpPr><ns0:nvPr><ns0:ph idx="50" type="sldNum"/></ns0:nvPr></ns0:nvSpPr><ns0:spPr><ns2:xfrm xmlns:ns2="http://schemas.openxmlformats.org/drawingml/2006/main"><ns2:off x="10972800" y="6446520"/><ns2:ext cx="1097280" cy="274320"/></ns2:xfrm></ns0:spPr><ns0:txBody><ns3:bodyPr xmlns:ns3="http://schemas.openxmlformats.org/drawingml/2006/main" wrap="square" anchor="t" anchorCtr="0"/><ns4:lstStyle xmlns:ns4="http://schemas.openxmlformats.org/drawingml/2006/main"><ns4:defPPr algn="r"><ns4:buNone/><ns4:defRPr sz="1000" dirty="0"><ns4:solidFill><ns4:srgbClr val="94A3B8"/></ns4:solidFill><ns4:latin typeface="Calibri"/><ns4:ea typeface="Calibri"/></ns4:defRPr></ns4:defPPr><ns4:lvl1pPr algn="r"><ns4:buNone/><ns4:defRPr sz="1000" dirty="0"><ns4:solidFill><ns4:srgbClr val="94A3B8"/></ns4:solidFill><ns4:latin typeface="Calibri"/><ns4:ea typeface="Calibri"/></ns4:defRPr></ns4:lvl1pPr><ns4:lvl2pPr algn="r"><ns4:buNone/><ns4:defRPr sz="1000" dirty="0"><ns4:solidFill><ns4:srgbClr val="94A3B8"/></ns4:solidFill><ns4:latin typeface="Calibri"/><ns4:ea typeface="Calibri"/></ns4:defRPr></ns4:lvl2pPr><ns4:lvl3pPr algn="r"><ns4:buNone/><ns4:defRPr sz="1000" dirty="0"><ns4:solidFill><ns4:srgbClr val="94A3B8"/></ns4:solidFill><ns4:latin typeface="Calibri"/><ns4:ea typeface="Calibri"/></ns4:defRPr></ns4:lvl3pPr><ns4:lvl4pPr algn="r"><ns4:buNone/><ns4:defRPr sz="1000" dirty="0"><ns4:solidFill><ns4:srgbClr val="94A3B8"/></ns4:solidFill><ns4:latin typeface="Calibri"/><ns4:ea typeface="Calibri"/></ns4:defRPr></ns4:lvl4pPr><ns4:lvl5pPr algn="r"><ns4:buNone/><ns4:defRPr sz="1000" dirty="0"><ns4:solidFill><ns4:srgbClr val="94A3B8"/></ns4:solidFill><ns4:latin typeface="Calibri"/><ns4:ea typeface="Calibri"/></ns4:defRPr></ns4:lvl5pPr><ns4:lvl6pPr algn="r"><ns4:buNone/><ns4:defRPr sz="1000" dirty="0"><ns4:solidFill><ns4:srgbClr val="94A3B8"/></ns4:solidFill><ns4:latin typeface="Calibri"/><ns4:ea typeface="Calibri"/></ns4:defRPr></ns4:lvl6pPr><ns4:lvl7pPr algn="r"><ns4:buNone/><ns4:defRPr sz="1000" dirty="0"><ns4:solidFill><ns4:srgbClr val="94A3B8"/></ns4:solidFill><ns4:latin typeface="Calibri"/><ns4:ea typeface="Calibri"/></ns4:defRPr></ns4:lvl7pPr><ns4:lvl8pPr algn="r"><ns4:buNone/><ns4:defRPr sz="1000" dirty="0"><ns4:solidFill><ns4:srgbClr val="94A3B8"/></ns4:solidFill><ns4:latin typeface="Calibri"/><ns4:ea typeface="Calibri"/></ns4:defRPr></ns4:lvl8pPr><ns4:lvl9pPr algn="r"><ns4:buNone/><ns4:defRPr sz="1000" dirty="0"><ns4:solidFill><ns4:srgbClr val="94A3B8"/></ns4:solidFill><ns4:latin typeface="Calibri"/><ns4:ea typeface="Calibri"/></ns4:defRPr></ns4:lvl9pPr></ns4:lstStyle><ns5:p xmlns:ns5="http://schemas.openxmlformats.org/drawingml/2006/main"><ns5:pPr algn="r"><ns5:buNone/></ns5:pPr><ns5:r><ns5:rPr lang="ja-JP"/><ns5:t>&lt;#&gt;</ns5:t></ns5:r></ns5:p></ns0:txBody></ns0:sp></ns0:spTree></ns0:cSld><ns0:clrMapOvr/></ns0:sldLayout>
+対応策を記入</ns5:t></ns5:r></ns5:p></ns0:txBody></ns0:sp><ns0:sp><ns0:nvSpPr><ns0:cNvPr id="30" name="SlideNum.Footer"/><ns0:cNvSpPr><ns1:spLocks xmlns:ns1="http://schemas.openxmlformats.org/drawingml/2006/main" noGrp="1"/></ns0:cNvSpPr><ns0:nvPr><ns0:ph idx="50" type="sldNum"/></ns0:nvPr></ns0:nvSpPr><ns0:spPr><ns2:xfrm xmlns:ns2="http://schemas.openxmlformats.org/drawingml/2006/main"><ns2:off x="10972800" y="6446520"/><ns2:ext cx="1097280" cy="274320"/></ns2:xfrm></ns0:spPr><ns0:txBody><ns3:bodyPr xmlns:ns3="http://schemas.openxmlformats.org/drawingml/2006/main" wrap="square" anchor="t" anchorCtr="0"/><ns4:lstStyle><ns4:defPPr algn="r"><ns4:defRPr sz="1000"><ns4:solidFill><ns4:srgbClr val="94A3B8"/></ns4:solidFill></ns4:defRPr></ns4:defPPr></ns4:lstStyle><ns4:defPPr algn="r"><ns4:buNone/><ns4:defRPr sz="1000" dirty="0"><ns4:solidFill><ns4:srgbClr val="94A3B8"/></ns4:solidFill><ns4:latin typeface="Calibri"/><ns4:ea typeface="Calibri"/></ns4:defRPr></ns4:defPPr><ns4:lvl1pPr algn="r"><ns4:buNone/><ns4:defRPr sz="1000" dirty="0"><ns4:solidFill><ns4:srgbClr val="94A3B8"/></ns4:solidFill><ns4:latin typeface="Calibri"/><ns4:ea typeface="Calibri"/></ns4:defRPr></ns4:lvl1pPr><ns4:lvl2pPr algn="r"><ns4:buNone/><ns4:defRPr sz="1000" dirty="0"><ns4:solidFill><ns4:srgbClr val="94A3B8"/></ns4:solidFill><ns4:latin typeface="Calibri"/><ns4:ea typeface="Calibri"/></ns4:defRPr></ns4:lvl2pPr><ns4:lvl3pPr algn="r"><ns4:buNone/><ns4:defRPr sz="1000" dirty="0"><ns4:solidFill><ns4:srgbClr val="94A3B8"/></ns4:solidFill><ns4:latin typeface="Calibri"/><ns4:ea typeface="Calibri"/></ns4:defRPr></ns4:lvl3pPr><ns4:lvl4pPr algn="r"><ns4:buNone/><ns4:defRPr sz="1000" dirty="0"><ns4:solidFill><ns4:srgbClr val="94A3B8"/></ns4:solidFill><ns4:latin typeface="Calibri"/><ns4:ea typeface="Calibri"/></ns4:defRPr></ns4:lvl4pPr><ns4:lvl5pPr algn="r"><ns4:buNone/><ns4:defRPr sz="1000" dirty="0"><ns4:solidFill><ns4:srgbClr val="94A3B8"/></ns4:solidFill><ns4:latin typeface="Calibri"/><ns4:ea typeface="Calibri"/></ns4:defRPr></ns4:lvl5pPr><ns4:lvl6pPr algn="r"><ns4:buNone/><ns4:defRPr sz="1000" dirty="0"><ns4:solidFill><ns4:srgbClr val="94A3B8"/></ns4:solidFill><ns4:latin typeface="Calibri"/><ns4:ea typeface="Calibri"/></ns4:defRPr></ns4:lvl6pPr><ns4:lvl7pPr algn="r"><ns4:buNone/><ns4:defRPr sz="1000" dirty="0"><ns4:solidFill><ns4:srgbClr val="94A3B8"/></ns4:solidFill><ns4:latin typeface="Calibri"/><ns4:ea typeface="Calibri"/></ns4:defRPr></ns4:lvl7pPr><ns4:lvl8pPr algn="r"><ns4:buNone/><ns4:defRPr sz="1000" dirty="0"><ns4:solidFill><ns4:srgbClr val="94A3B8"/></ns4:solidFill><ns4:latin typeface="Calibri"/><ns4:ea typeface="Calibri"/></ns4:defRPr></ns4:lvl8pPr><ns4:lvl9pPr algn="r"><ns4:buNone/><ns4:defRPr sz="1000" dirty="0"><ns4:solidFill><ns4:srgbClr val="94A3B8"/></ns4:solidFill><ns4:latin typeface="Calibri"/><ns4:ea typeface="Calibri"/></ns4:defRPr></ns4:lvl9pPr></ns4:lstStyle><ns5:p xmlns:ns5="http://schemas.openxmlformats.org/drawingml/2006/main"><ns5:pPr algn="r"><ns5:buNone/></ns5:pPr><ns5:r><ns5:rPr lang="ja-JP"/><ns5:t>&lt;#&gt;</ns5:t></ns5:r></ns5:p></ns0:txBody></ns0:sp></ns0:spTree></ns0:cSld><ns0:clrMapOvr/></ns0:sldLayout>
 </file>
 
 <file path=ppt/slideLayouts/slideLayout29.xml><?xml version='1.0' encoding='UTF-8' standalone='yes'?>
-<ns0:sldLayout xmlns:ns0="http://schemas.openxmlformats.org/presentationml/2006/main" type="blank" preserve="1"><ns0:cSld name="Closing.1Message.Single"><ns0:spTree><ns0:nvGrpSpPr><ns0:cNvPr id="1" name=""/><ns0:cNvGrpSpPr/><ns0:nvPr/></ns0:nvGrpSpPr><ns0:grpSpPr><ns1:xfrm xmlns:ns1="http://schemas.openxmlformats.org/drawingml/2006/main"><ns1:off x="0" y="0"/><ns1:ext cx="0" cy="0"/><ns1:chOff x="0" y="0"/><ns1:chExt cx="0" cy="0"/></ns1:xfrm></ns0:grpSpPr><ns0:sp><ns0:nvSpPr><ns0:cNvPr id="2" name="BG"/><ns0:cNvSpPr><ns1:spLocks xmlns:ns1="http://schemas.openxmlformats.org/drawingml/2006/main" noGrp="1" noSelect="0" noRot="1" noMove="1"/></ns0:cNvSpPr><ns0:nvPr/></ns0:nvSpPr><ns0:spPr><ns2:xfrm xmlns:ns2="http://schemas.openxmlformats.org/drawingml/2006/main"><ns2:off x="0" y="0"/><ns2:ext cx="12192000" cy="6858000"/></ns2:xfrm><ns3:prstGeom xmlns:ns3="http://schemas.openxmlformats.org/drawingml/2006/main" prst="rect"/><ns4:solidFill xmlns:ns4="http://schemas.openxmlformats.org/drawingml/2006/main"><ns4:srgbClr val="1E2761"/></ns4:solidFill><ns5:ln xmlns:ns5="http://schemas.openxmlformats.org/drawingml/2006/main"><ns5:noFill/></ns5:ln></ns0:spPr></ns0:sp><ns0:sp><ns0:nvSpPr><ns0:cNvPr id="3" name="AccentBar"/><ns0:cNvSpPr><ns1:spLocks xmlns:ns1="http://schemas.openxmlformats.org/drawingml/2006/main" noGrp="1" noSelect="0" noRot="1" noMove="1"/></ns0:cNvSpPr><ns0:nvPr/></ns0:nvSpPr><ns0:spPr><ns2:xfrm xmlns:ns2="http://schemas.openxmlformats.org/drawingml/2006/main"><ns2:off x="0" y="0"/><ns2:ext cx="164592" cy="6858000"/></ns2:xfrm><ns3:prstGeom xmlns:ns3="http://schemas.openxmlformats.org/drawingml/2006/main" prst="rect"/><ns4:solidFill xmlns:ns4="http://schemas.openxmlformats.org/drawingml/2006/main"><ns4:srgbClr val="3B82F6"/></ns4:solidFill><ns5:ln xmlns:ns5="http://schemas.openxmlformats.org/drawingml/2006/main"><ns5:noFill/></ns5:ln></ns0:spPr></ns0:sp><ns0:sp><ns0:nvSpPr><ns0:cNvPr id="4" name="BottomPanel"/><ns0:cNvSpPr><ns1:spLocks xmlns:ns1="http://schemas.openxmlformats.org/drawingml/2006/main" noGrp="1" noSelect="0" noRot="1" noMove="1"/></ns0:cNvSpPr><ns0:nvPr/></ns0:nvSpPr><ns0:spPr><ns2:xfrm xmlns:ns2="http://schemas.openxmlformats.org/drawingml/2006/main"><ns2:off x="0" y="4389120"/><ns2:ext cx="12192000" cy="2468880"/></ns2:xfrm><ns3:prstGeom xmlns:ns3="http://schemas.openxmlformats.org/drawingml/2006/main" prst="rect"/><ns4:solidFill xmlns:ns4="http://schemas.openxmlformats.org/drawingml/2006/main"><ns4:srgbClr val="141B41"/></ns4:solidFill><ns5:ln xmlns:ns5="http://schemas.openxmlformats.org/drawingml/2006/main"><ns5:noFill/></ns5:ln></ns0:spPr></ns0:sp><ns0:sp><ns0:nvSpPr><ns0:cNvPr id="10" name="CategoryLabel.Top"/><ns0:cNvSpPr><ns1:spLocks xmlns:ns1="http://schemas.openxmlformats.org/drawingml/2006/main" noGrp="1"/></ns0:cNvSpPr><ns0:nvPr><ns0:ph idx="10" type="body"/></ns0:nvPr></ns0:nvSpPr><ns0:spPr><ns2:xfrm xmlns:ns2="http://schemas.openxmlformats.org/drawingml/2006/main"><ns2:off x="1097280" y="1371600"/><ns2:ext cx="9144000" cy="457200"/></ns2:xfrm></ns0:spPr><ns0:txBody><ns3:bodyPr xmlns:ns3="http://schemas.openxmlformats.org/drawingml/2006/main" wrap="square" anchor="t" anchorCtr="0"/><ns4:lstStyle xmlns:ns4="http://schemas.openxmlformats.org/drawingml/2006/main"><ns4:defPPr algn="l"><ns4:buNone/><ns4:defRPr sz="1800" dirty="0" b="1"><ns4:solidFill><ns4:srgbClr val="3B82F6"/></ns4:solidFill><ns4:latin typeface="Calibri"/><ns4:ea typeface="Calibri"/></ns4:defRPr></ns4:defPPr><ns4:lvl1pPr algn="l"><ns4:buNone/><ns4:defRPr sz="1800" dirty="0" b="1"><ns4:solidFill><ns4:srgbClr val="3B82F6"/></ns4:solidFill><ns4:latin typeface="Calibri"/><ns4:ea typeface="Calibri"/></ns4:defRPr></ns4:lvl1pPr><ns4:lvl2pPr algn="l"><ns4:buNone/><ns4:defRPr sz="1800" dirty="0" b="1"><ns4:solidFill><ns4:srgbClr val="3B82F6"/></ns4:solidFill><ns4:latin typeface="Calibri"/><ns4:ea typeface="Calibri"/></ns4:defRPr></ns4:lvl2pPr><ns4:lvl3pPr algn="l"><ns4:buNone/><ns4:defRPr sz="1800" dirty="0" b="1"><ns4:solidFill><ns4:srgbClr val="3B82F6"/></ns4:solidFill><ns4:latin typeface="Calibri"/><ns4:ea typeface="Calibri"/></ns4:defRPr></ns4:lvl3pPr><ns4:lvl4pPr algn="l"><ns4:buNone/><ns4:defRPr sz="1800" dirty="0" b="1"><ns4:solidFill><ns4:srgbClr val="3B82F6"/></ns4:solidFill><ns4:latin typeface="Calibri"/><ns4:ea typeface="Calibri"/></ns4:defRPr></ns4:lvl4pPr><ns4:lvl5pPr algn="l"><ns4:buNone/><ns4:defRPr sz="1800" dirty="0" b="1"><ns4:solidFill><ns4:srgbClr val="3B82F6"/></ns4:solidFill><ns4:latin typeface="Calibri"/><ns4:ea typeface="Calibri"/></ns4:defRPr></ns4:lvl5pPr><ns4:lvl6pPr algn="l"><ns4:buNone/><ns4:defRPr sz="1800" dirty="0" b="1"><ns4:solidFill><ns4:srgbClr val="3B82F6"/></ns4:solidFill><ns4:latin typeface="Calibri"/><ns4:ea typeface="Calibri"/></ns4:defRPr></ns4:lvl6pPr><ns4:lvl7pPr algn="l"><ns4:buNone/><ns4:defRPr sz="1800" dirty="0" b="1"><ns4:solidFill><ns4:srgbClr val="3B82F6"/></ns4:solidFill><ns4:latin typeface="Calibri"/><ns4:ea typeface="Calibri"/></ns4:defRPr></ns4:lvl7pPr><ns4:lvl8pPr algn="l"><ns4:buNone/><ns4:defRPr sz="1800" dirty="0" b="1"><ns4:solidFill><ns4:srgbClr val="3B82F6"/></ns4:solidFill><ns4:latin typeface="Calibri"/><ns4:ea typeface="Calibri"/></ns4:defRPr></ns4:lvl8pPr><ns4:lvl9pPr algn="l"><ns4:buNone/><ns4:defRPr sz="1800" dirty="0" b="1"><ns4:solidFill><ns4:srgbClr val="3B82F6"/></ns4:solidFill><ns4:latin typeface="Calibri"/><ns4:ea typeface="Calibri"/></ns4:defRPr></ns4:lvl9pPr></ns4:lstStyle/><ns5:p xmlns:ns5="http://schemas.openxmlformats.org/drawingml/2006/main"><ns5:pPr algn="l"><ns5:buNone/></ns5:pPr><ns5:r><ns5:rPr lang="ja-JP"/><ns5:t>ご質問をお待ちしています</ns5:t></ns5:r></ns5:p></ns0:txBody></ns0:sp><ns0:sp><ns0:nvSpPr><ns0:cNvPr id="12" name="PresenterName.Bottom"/><ns0:cNvSpPr><ns1:spLocks xmlns:ns1="http://schemas.openxmlformats.org/drawingml/2006/main" noGrp="1"/></ns0:cNvSpPr><ns0:nvPr><ns0:ph idx="11" type="body"/></ns0:nvPr></ns0:nvSpPr><ns0:spPr><ns2:xfrm xmlns:ns2="http://schemas.openxmlformats.org/drawingml/2006/main"><ns2:off x="1097280" y="4754880"/><ns2:ext cx="7315200" cy="457200"/></ns2:xfrm></ns0:spPr><ns0:txBody><ns3:bodyPr xmlns:ns3="http://schemas.openxmlformats.org/drawingml/2006/main" wrap="square" anchor="t" anchorCtr="0"/><ns4:lstStyle xmlns:ns4="http://schemas.openxmlformats.org/drawingml/2006/main"><ns4:defPPr algn="l"><ns4:buNone/><ns4:defRPr sz="1600" dirty="0"><ns4:solidFill><ns4:srgbClr val="CADCFC"/></ns4:solidFill><ns4:latin typeface="Calibri"/><ns4:ea typeface="Calibri"/></ns4:defRPr></ns4:defPPr><ns4:lvl1pPr algn="l"><ns4:buNone/><ns4:defRPr sz="1600" dirty="0"><ns4:solidFill><ns4:srgbClr val="CADCFC"/></ns4:solidFill><ns4:latin typeface="Calibri"/><ns4:ea typeface="Calibri"/></ns4:defRPr></ns4:lvl1pPr><ns4:lvl2pPr algn="l"><ns4:buNone/><ns4:defRPr sz="1600" dirty="0"><ns4:solidFill><ns4:srgbClr val="CADCFC"/></ns4:solidFill><ns4:latin typeface="Calibri"/><ns4:ea typeface="Calibri"/></ns4:defRPr></ns4:lvl2pPr><ns4:lvl3pPr algn="l"><ns4:buNone/><ns4:defRPr sz="1600" dirty="0"><ns4:solidFill><ns4:srgbClr val="CADCFC"/></ns4:solidFill><ns4:latin typeface="Calibri"/><ns4:ea typeface="Calibri"/></ns4:defRPr></ns4:lvl3pPr><ns4:lvl4pPr algn="l"><ns4:buNone/><ns4:defRPr sz="1600" dirty="0"><ns4:solidFill><ns4:srgbClr val="CADCFC"/></ns4:solidFill><ns4:latin typeface="Calibri"/><ns4:ea typeface="Calibri"/></ns4:defRPr></ns4:lvl4pPr><ns4:lvl5pPr algn="l"><ns4:buNone/><ns4:defRPr sz="1600" dirty="0"><ns4:solidFill><ns4:srgbClr val="CADCFC"/></ns4:solidFill><ns4:latin typeface="Calibri"/><ns4:ea typeface="Calibri"/></ns4:defRPr></ns4:lvl5pPr><ns4:lvl6pPr algn="l"><ns4:buNone/><ns4:defRPr sz="1600" dirty="0"><ns4:solidFill><ns4:srgbClr val="CADCFC"/></ns4:solidFill><ns4:latin typeface="Calibri"/><ns4:ea typeface="Calibri"/></ns4:defRPr></ns4:lvl6pPr><ns4:lvl7pPr algn="l"><ns4:buNone/><ns4:defRPr sz="1600" dirty="0"><ns4:solidFill><ns4:srgbClr val="CADCFC"/></ns4:solidFill><ns4:latin typeface="Calibri"/><ns4:ea typeface="Calibri"/></ns4:defRPr></ns4:lvl7pPr><ns4:lvl8pPr algn="l"><ns4:buNone/><ns4:defRPr sz="1600" dirty="0"><ns4:solidFill><ns4:srgbClr val="CADCFC"/></ns4:solidFill><ns4:latin typeface="Calibri"/><ns4:ea typeface="Calibri"/></ns4:defRPr></ns4:lvl8pPr><ns4:lvl9pPr algn="l"><ns4:buNone/><ns4:defRPr sz="1600" dirty="0"><ns4:solidFill><ns4:srgbClr val="CADCFC"/></ns4:solidFill><ns4:latin typeface="Calibri"/><ns4:ea typeface="Calibri"/></ns4:defRPr></ns4:lvl9pPr></ns4:lstStyle/><ns5:p xmlns:ns5="http://schemas.openxmlformats.org/drawingml/2006/main"><ns5:pPr algn="l"><ns5:buNone/></ns5:pPr><ns5:r><ns5:rPr lang="ja-JP"/><ns5:t>email@example.com  |  内線: 0000
+<ns0:sldLayout xmlns:ns0="http://schemas.openxmlformats.org/presentationml/2006/main" type="blank" preserve="1"><ns0:cSld name="Closing.1Message.Single"><ns0:spTree><ns0:nvGrpSpPr><ns0:cNvPr id="1" name=""/><ns0:cNvGrpSpPr/><ns0:nvPr/></ns0:nvGrpSpPr><ns0:grpSpPr><ns1:xfrm xmlns:ns1="http://schemas.openxmlformats.org/drawingml/2006/main"><ns1:off x="0" y="0"/><ns1:ext cx="0" cy="0"/><ns1:chOff x="0" y="0"/><ns1:chExt cx="0" cy="0"/></ns1:xfrm></ns0:grpSpPr><ns0:sp><ns0:nvSpPr><ns0:cNvPr id="2" name="BG"/><ns0:cNvSpPr><ns1:spLocks xmlns:ns1="http://schemas.openxmlformats.org/drawingml/2006/main" noGrp="1" noSelect="0" noRot="1" noMove="1"/></ns0:cNvSpPr><ns0:nvPr/></ns0:nvSpPr><ns0:spPr><ns2:xfrm xmlns:ns2="http://schemas.openxmlformats.org/drawingml/2006/main"><ns2:off x="0" y="0"/><ns2:ext cx="12192000" cy="6858000"/></ns2:xfrm><ns3:prstGeom xmlns:ns3="http://schemas.openxmlformats.org/drawingml/2006/main" prst="rect"/><ns4:solidFill xmlns:ns4="http://schemas.openxmlformats.org/drawingml/2006/main"><ns4:srgbClr val="1E2761"/></ns4:solidFill><ns5:ln xmlns:ns5="http://schemas.openxmlformats.org/drawingml/2006/main"><ns5:noFill/></ns5:ln></ns0:spPr></ns0:sp><ns0:sp><ns0:nvSpPr><ns0:cNvPr id="3" name="AccentBar"/><ns0:cNvSpPr><ns1:spLocks xmlns:ns1="http://schemas.openxmlformats.org/drawingml/2006/main" noGrp="1" noSelect="0" noRot="1" noMove="1"/></ns0:cNvSpPr><ns0:nvPr/></ns0:nvSpPr><ns0:spPr><ns2:xfrm xmlns:ns2="http://schemas.openxmlformats.org/drawingml/2006/main"><ns2:off x="0" y="0"/><ns2:ext cx="164592" cy="6858000"/></ns2:xfrm><ns3:prstGeom xmlns:ns3="http://schemas.openxmlformats.org/drawingml/2006/main" prst="rect"/><ns4:solidFill xmlns:ns4="http://schemas.openxmlformats.org/drawingml/2006/main"><ns4:srgbClr val="3B82F6"/></ns4:solidFill><ns5:ln xmlns:ns5="http://schemas.openxmlformats.org/drawingml/2006/main"><ns5:noFill/></ns5:ln></ns0:spPr></ns0:sp><ns0:sp><ns0:nvSpPr><ns0:cNvPr id="4" name="BottomPanel"/><ns0:cNvSpPr><ns1:spLocks xmlns:ns1="http://schemas.openxmlformats.org/drawingml/2006/main" noGrp="1" noSelect="0" noRot="1" noMove="1"/></ns0:cNvSpPr><ns0:nvPr/></ns0:nvSpPr><ns0:spPr><ns2:xfrm xmlns:ns2="http://schemas.openxmlformats.org/drawingml/2006/main"><ns2:off x="0" y="4389120"/><ns2:ext cx="12192000" cy="2468880"/></ns2:xfrm><ns3:prstGeom xmlns:ns3="http://schemas.openxmlformats.org/drawingml/2006/main" prst="rect"/><ns4:solidFill xmlns:ns4="http://schemas.openxmlformats.org/drawingml/2006/main"><ns4:srgbClr val="141B41"/></ns4:solidFill><ns5:ln xmlns:ns5="http://schemas.openxmlformats.org/drawingml/2006/main"><ns5:noFill/></ns5:ln></ns0:spPr></ns0:sp><ns0:sp><ns0:nvSpPr><ns0:cNvPr id="10" name="CategoryLabel.Top"/><ns0:cNvSpPr><ns1:spLocks xmlns:ns1="http://schemas.openxmlformats.org/drawingml/2006/main" noGrp="1"/></ns0:cNvSpPr><ns0:nvPr><ns0:ph idx="10" type="body"/></ns0:nvPr></ns0:nvSpPr><ns0:spPr><ns2:xfrm xmlns:ns2="http://schemas.openxmlformats.org/drawingml/2006/main"><ns2:off x="1097280" y="1371600"/><ns2:ext cx="9144000" cy="457200"/></ns2:xfrm></ns0:spPr><ns0:txBody><ns3:bodyPr xmlns:ns3="http://schemas.openxmlformats.org/drawingml/2006/main" wrap="square" anchor="t" anchorCtr="0"/><ns4:lstStyle><ns4:defPPr><ns4:defRPr sz="1800" b="1"><ns4:solidFill><ns4:srgbClr val="3B82F6"/></ns4:solidFill></ns4:defRPr></ns4:defPPr></ns4:lstStyle><ns4:defPPr algn="l"><ns4:buNone/><ns4:defRPr sz="1800" dirty="0" b="1"><ns4:solidFill><ns4:srgbClr val="3B82F6"/></ns4:solidFill><ns4:latin typeface="Calibri"/><ns4:ea typeface="Calibri"/></ns4:defRPr></ns4:defPPr><ns4:lvl1pPr algn="l"><ns4:buNone/><ns4:defRPr sz="1800" dirty="0" b="1"><ns4:solidFill><ns4:srgbClr val="3B82F6"/></ns4:solidFill><ns4:latin typeface="Calibri"/><ns4:ea typeface="Calibri"/></ns4:defRPr></ns4:lvl1pPr><ns4:lvl2pPr algn="l"><ns4:buNone/><ns4:defRPr sz="1800" dirty="0" b="1"><ns4:solidFill><ns4:srgbClr val="3B82F6"/></ns4:solidFill><ns4:latin typeface="Calibri"/><ns4:ea typeface="Calibri"/></ns4:defRPr></ns4:lvl2pPr><ns4:lvl3pPr algn="l"><ns4:buNone/><ns4:defRPr sz="1800" dirty="0" b="1"><ns4:solidFill><ns4:srgbClr val="3B82F6"/></ns4:solidFill><ns4:latin typeface="Calibri"/><ns4:ea typeface="Calibri"/></ns4:defRPr></ns4:lvl3pPr><ns4:lvl4pPr algn="l"><ns4:buNone/><ns4:defRPr sz="1800" dirty="0" b="1"><ns4:solidFill><ns4:srgbClr val="3B82F6"/></ns4:solidFill><ns4:latin typeface="Calibri"/><ns4:ea typeface="Calibri"/></ns4:defRPr></ns4:lvl4pPr><ns4:lvl5pPr algn="l"><ns4:buNone/><ns4:defRPr sz="1800" dirty="0" b="1"><ns4:solidFill><ns4:srgbClr val="3B82F6"/></ns4:solidFill><ns4:latin typeface="Calibri"/><ns4:ea typeface="Calibri"/></ns4:defRPr></ns4:lvl5pPr><ns4:lvl6pPr algn="l"><ns4:buNone/><ns4:defRPr sz="1800" dirty="0" b="1"><ns4:solidFill><ns4:srgbClr val="3B82F6"/></ns4:solidFill><ns4:latin typeface="Calibri"/><ns4:ea typeface="Calibri"/></ns4:defRPr></ns4:lvl6pPr><ns4:lvl7pPr algn="l"><ns4:buNone/><ns4:defRPr sz="1800" dirty="0" b="1"><ns4:solidFill><ns4:srgbClr val="3B82F6"/></ns4:solidFill><ns4:latin typeface="Calibri"/><ns4:ea typeface="Calibri"/></ns4:defRPr></ns4:lvl7pPr><ns4:lvl8pPr algn="l"><ns4:buNone/><ns4:defRPr sz="1800" dirty="0" b="1"><ns4:solidFill><ns4:srgbClr val="3B82F6"/></ns4:solidFill><ns4:latin typeface="Calibri"/><ns4:ea typeface="Calibri"/></ns4:defRPr></ns4:lvl8pPr><ns4:lvl9pPr algn="l"><ns4:buNone/><ns4:defRPr sz="1800" dirty="0" b="1"><ns4:solidFill><ns4:srgbClr val="3B82F6"/></ns4:solidFill><ns4:latin typeface="Calibri"/><ns4:ea typeface="Calibri"/></ns4:defRPr></ns4:lvl9pPr></ns4:lstStyle/><ns5:p xmlns:ns5="http://schemas.openxmlformats.org/drawingml/2006/main"><ns5:pPr algn="l"><ns5:buNone/></ns5:pPr><ns5:r><ns5:rPr lang="ja-JP"/><ns5:t>ご質問をお待ちしています</ns5:t></ns5:r></ns5:p></ns0:txBody></ns0:sp><ns0:sp><ns0:nvSpPr><ns0:cNvPr id="12" name="PresenterName.Bottom"/><ns0:cNvSpPr><ns1:spLocks xmlns:ns1="http://schemas.openxmlformats.org/drawingml/2006/main" noGrp="1"/></ns0:cNvSpPr><ns0:nvPr><ns0:ph idx="11" type="body"/></ns0:nvPr></ns0:nvSpPr><ns0:spPr><ns2:xfrm xmlns:ns2="http://schemas.openxmlformats.org/drawingml/2006/main"><ns2:off x="1097280" y="4754880"/><ns2:ext cx="7315200" cy="457200"/></ns2:xfrm></ns0:spPr><ns0:txBody><ns3:bodyPr xmlns:ns3="http://schemas.openxmlformats.org/drawingml/2006/main" wrap="square" anchor="t" anchorCtr="0"/><ns4:lstStyle><ns4:defPPr><ns4:defRPr sz="1600"><ns4:solidFill><ns4:srgbClr val="CADCFC"/></ns4:solidFill></ns4:defRPr></ns4:defPPr></ns4:lstStyle><ns4:defPPr algn="l"><ns4:buNone/><ns4:defRPr sz="1600" dirty="0"><ns4:solidFill><ns4:srgbClr val="CADCFC"/></ns4:solidFill><ns4:latin typeface="Calibri"/><ns4:ea typeface="Calibri"/></ns4:defRPr></ns4:defPPr><ns4:lvl1pPr algn="l"><ns4:buNone/><ns4:defRPr sz="1600" dirty="0"><ns4:solidFill><ns4:srgbClr val="CADCFC"/></ns4:solidFill><ns4:latin typeface="Calibri"/><ns4:ea typeface="Calibri"/></ns4:defRPr></ns4:lvl1pPr><ns4:lvl2pPr algn="l"><ns4:buNone/><ns4:defRPr sz="1600" dirty="0"><ns4:solidFill><ns4:srgbClr val="CADCFC"/></ns4:solidFill><ns4:latin typeface="Calibri"/><ns4:ea typeface="Calibri"/></ns4:defRPr></ns4:lvl2pPr><ns4:lvl3pPr algn="l"><ns4:buNone/><ns4:defRPr sz="1600" dirty="0"><ns4:solidFill><ns4:srgbClr val="CADCFC"/></ns4:solidFill><ns4:latin typeface="Calibri"/><ns4:ea typeface="Calibri"/></ns4:defRPr></ns4:lvl3pPr><ns4:lvl4pPr algn="l"><ns4:buNone/><ns4:defRPr sz="1600" dirty="0"><ns4:solidFill><ns4:srgbClr val="CADCFC"/></ns4:solidFill><ns4:latin typeface="Calibri"/><ns4:ea typeface="Calibri"/></ns4:defRPr></ns4:lvl4pPr><ns4:lvl5pPr algn="l"><ns4:buNone/><ns4:defRPr sz="1600" dirty="0"><ns4:solidFill><ns4:srgbClr val="CADCFC"/></ns4:solidFill><ns4:latin typeface="Calibri"/><ns4:ea typeface="Calibri"/></ns4:defRPr></ns4:lvl5pPr><ns4:lvl6pPr algn="l"><ns4:buNone/><ns4:defRPr sz="1600" dirty="0"><ns4:solidFill><ns4:srgbClr val="CADCFC"/></ns4:solidFill><ns4:latin typeface="Calibri"/><ns4:ea typeface="Calibri"/></ns4:defRPr></ns4:lvl6pPr><ns4:lvl7pPr algn="l"><ns4:buNone/><ns4:defRPr sz="1600" dirty="0"><ns4:solidFill><ns4:srgbClr val="CADCFC"/></ns4:solidFill><ns4:latin typeface="Calibri"/><ns4:ea typeface="Calibri"/></ns4:defRPr></ns4:lvl7pPr><ns4:lvl8pPr algn="l"><ns4:buNone/><ns4:defRPr sz="1600" dirty="0"><ns4:solidFill><ns4:srgbClr val="CADCFC"/></ns4:solidFill><ns4:latin typeface="Calibri"/><ns4:ea typeface="Calibri"/></ns4:defRPr></ns4:lvl8pPr><ns4:lvl9pPr algn="l"><ns4:buNone/><ns4:defRPr sz="1600" dirty="0"><ns4:solidFill><ns4:srgbClr val="CADCFC"/></ns4:solidFill><ns4:latin typeface="Calibri"/><ns4:ea typeface="Calibri"/></ns4:defRPr></ns4:lvl9pPr></ns4:lstStyle/><ns5:p xmlns:ns5="http://schemas.openxmlformats.org/drawingml/2006/main"><ns5:pPr algn="l"><ns5:buNone/></ns5:pPr><ns5:r><ns5:rPr lang="ja-JP"/><ns5:t>email@example.com  |  内線: 0000
 Slack: #channel</ns5:t></ns5:r></ns5:p></ns0:txBody></ns0:sp></ns0:spTree></ns0:cSld><ns0:clrMapOvr/></ns0:sldLayout>
 </file>
 
@@ -1449,9 +1417,9 @@
           <a:bodyPr wrap="square" anchor="t" anchorCtr="0"/>
           <a:lstStyle>
             <a:defPPr>
-              <a:defRPr>
+              <a:defRPr sz="1400" b="1">
                 <a:solidFill>
-                  <a:srgbClr val="FFFFFF"/>
+                  <a:srgbClr val="3B82F6"/>
                 </a:solidFill>
               </a:defRPr>
             </a:defPPr>
@@ -1487,11 +1455,7 @@
           <a:bodyPr wrap="square" anchor="t" anchorCtr="0"/>
           <a:lstStyle>
             <a:defPPr>
-              <a:defRPr>
-                <a:solidFill>
-                  <a:srgbClr val="FFFFFF"/>
-                </a:solidFill>
-              </a:defRPr>
+              <a:defRPr sz="4200"/>
             </a:defPPr>
           </a:lstStyle>
           <a:p>
@@ -1525,7 +1489,7 @@
           <a:bodyPr wrap="square" anchor="t" anchorCtr="0"/>
           <a:lstStyle>
             <a:defPPr>
-              <a:defRPr>
+              <a:defRPr sz="1600">
                 <a:solidFill>
                   <a:srgbClr val="CADCFC"/>
                 </a:solidFill>
@@ -1565,7 +1529,7 @@
             <a:defPPr>
               <a:defRPr>
                 <a:solidFill>
-                  <a:srgbClr val="CADCFC"/>
+                  <a:srgbClr val="1E293B"/>
                 </a:solidFill>
               </a:defRPr>
             </a:defPPr>
@@ -1602,7 +1566,7 @@
           <a:bodyPr wrap="square" anchor="t" anchorCtr="0"/>
           <a:lstStyle>
             <a:defPPr>
-              <a:defRPr>
+              <a:defRPr sz="1100">
                 <a:solidFill>
                   <a:srgbClr val="CADCFC"/>
                 </a:solidFill>
@@ -1627,11 +1591,11 @@
 </file>
 
 <file path=ppt/slideLayouts/slideLayout30.xml><?xml version='1.0' encoding='UTF-8' standalone='yes'?>
-<ns0:sldLayout xmlns:ns0="http://schemas.openxmlformats.org/presentationml/2006/main" type="blank" preserve="1"><ns0:cSld name="Closing.1Steps.Single+1Notes"><ns0:spTree><ns0:nvGrpSpPr><ns0:cNvPr id="1" name=""/><ns0:cNvGrpSpPr/><ns0:nvPr/></ns0:nvGrpSpPr><ns0:grpSpPr><ns1:xfrm xmlns:ns1="http://schemas.openxmlformats.org/drawingml/2006/main"><ns1:off x="0" y="0"/><ns1:ext cx="0" cy="0"/><ns1:chOff x="0" y="0"/><ns1:chExt cx="0" cy="0"/></ns1:xfrm></ns0:grpSpPr><ns0:sp><ns0:nvSpPr><ns0:cNvPr id="2" name="BG"/><ns0:cNvSpPr><ns1:spLocks xmlns:ns1="http://schemas.openxmlformats.org/drawingml/2006/main" noGrp="1" noSelect="0" noRot="1" noMove="1"/></ns0:cNvSpPr><ns0:nvPr/></ns0:nvSpPr><ns0:spPr><ns2:xfrm xmlns:ns2="http://schemas.openxmlformats.org/drawingml/2006/main"><ns2:off x="0" y="0"/><ns2:ext cx="12192000" cy="6858000"/></ns2:xfrm><ns3:prstGeom xmlns:ns3="http://schemas.openxmlformats.org/drawingml/2006/main" prst="rect"/><ns4:solidFill xmlns:ns4="http://schemas.openxmlformats.org/drawingml/2006/main"><ns4:srgbClr val="1E2761"/></ns4:solidFill><ns5:ln xmlns:ns5="http://schemas.openxmlformats.org/drawingml/2006/main"><ns5:noFill/></ns5:ln></ns0:spPr></ns0:sp><ns0:sp><ns0:nvSpPr><ns0:cNvPr id="3" name="AccentBar"/><ns0:cNvSpPr><ns1:spLocks xmlns:ns1="http://schemas.openxmlformats.org/drawingml/2006/main" noGrp="1" noSelect="0" noRot="1" noMove="1"/></ns0:cNvSpPr><ns0:nvPr/></ns0:nvSpPr><ns0:spPr><ns2:xfrm xmlns:ns2="http://schemas.openxmlformats.org/drawingml/2006/main"><ns2:off x="0" y="0"/><ns2:ext cx="164592" cy="6858000"/></ns2:xfrm><ns3:prstGeom xmlns:ns3="http://schemas.openxmlformats.org/drawingml/2006/main" prst="rect"/><ns4:solidFill xmlns:ns4="http://schemas.openxmlformats.org/drawingml/2006/main"><ns4:srgbClr val="3B82F6"/></ns4:solidFill><ns5:ln xmlns:ns5="http://schemas.openxmlformats.org/drawingml/2006/main"><ns5:noFill/></ns5:ln></ns0:spPr></ns0:sp><ns0:sp><ns0:nvSpPr><ns0:cNvPr id="4" name="StepsPanel"/><ns0:cNvSpPr><ns1:spLocks xmlns:ns1="http://schemas.openxmlformats.org/drawingml/2006/main" noGrp="1" noSelect="0" noRot="1" noMove="1"/></ns0:cNvSpPr><ns0:nvPr/></ns0:nvSpPr><ns0:spPr><ns2:xfrm xmlns:ns2="http://schemas.openxmlformats.org/drawingml/2006/main"><ns2:off x="731520" y="914400"/><ns2:ext cx="6858000" cy="5029200"/></ns2:xfrm><ns3:prstGeom xmlns:ns3="http://schemas.openxmlformats.org/drawingml/2006/main" prst="roundRect"><ns3:avLst><ns3:gd name="adj" fmla="val 10000"/></ns3:avLst></ns3:prstGeom><ns4:solidFill xmlns:ns4="http://schemas.openxmlformats.org/drawingml/2006/main"><ns4:srgbClr val="141B41"/></ns4:solidFill><ns5:ln xmlns:ns5="http://schemas.openxmlformats.org/drawingml/2006/main"><ns5:noFill/></ns5:ln></ns0:spPr></ns0:sp><ns0:sp><ns0:nvSpPr><ns0:cNvPr id="5" name="CTAPanel"/><ns0:cNvSpPr><ns1:spLocks xmlns:ns1="http://schemas.openxmlformats.org/drawingml/2006/main" noGrp="1" noSelect="0" noRot="1" noMove="1"/></ns0:cNvSpPr><ns0:nvPr/></ns0:nvSpPr><ns0:spPr><ns2:xfrm xmlns:ns2="http://schemas.openxmlformats.org/drawingml/2006/main"><ns2:off x="8046720" y="914400"/><ns2:ext cx="3657600" cy="5029200"/></ns2:xfrm><ns3:prstGeom xmlns:ns3="http://schemas.openxmlformats.org/drawingml/2006/main" prst="roundRect"><ns3:avLst><ns3:gd name="adj" fmla="val 10000"/></ns3:avLst></ns3:prstGeom><ns4:solidFill xmlns:ns4="http://schemas.openxmlformats.org/drawingml/2006/main"><ns4:srgbClr val="2D3A6E"/></ns4:solidFill><ns5:ln xmlns:ns5="http://schemas.openxmlformats.org/drawingml/2006/main"><ns5:noFill/></ns5:ln></ns0:spPr></ns0:sp><ns0:sp><ns0:nvSpPr><ns0:cNvPr id="10" name="Title.Left"/><ns0:cNvSpPr><ns1:spLocks xmlns:ns1="http://schemas.openxmlformats.org/drawingml/2006/main" noGrp="1"/></ns0:cNvSpPr><ns0:nvPr><ns0:ph idx="15" type="body"/></ns0:nvPr></ns0:nvSpPr><ns0:spPr><ns2:xfrm xmlns:ns2="http://schemas.openxmlformats.org/drawingml/2006/main"><ns2:off x="1097280" y="1188720"/><ns2:ext cx="6217920" cy="640080"/></ns2:xfrm></ns0:spPr><ns0:txBody><ns3:bodyPr xmlns:ns3="http://schemas.openxmlformats.org/drawingml/2006/main" wrap="square" anchor="t" anchorCtr="0"/><ns4:lstStyle xmlns:ns4="http://schemas.openxmlformats.org/drawingml/2006/main"><ns4:defPPr algn="l"><ns4:buNone/><ns4:defRPr sz="2800" dirty="0" b="1"><ns4:solidFill><ns4:srgbClr val="FFFFFF"/></ns4:solidFill><ns4:latin typeface="Georgia"/><ns4:ea typeface="Georgia"/></ns4:defRPr></ns4:defPPr><ns4:lvl1pPr algn="l"><ns4:buNone/><ns4:defRPr sz="2800" dirty="0" b="1"><ns4:solidFill><ns4:srgbClr val="FFFFFF"/></ns4:solidFill><ns4:latin typeface="Georgia"/><ns4:ea typeface="Georgia"/></ns4:defRPr></ns4:lvl1pPr><ns4:lvl2pPr algn="l"><ns4:buNone/><ns4:defRPr sz="2800" dirty="0" b="1"><ns4:solidFill><ns4:srgbClr val="FFFFFF"/></ns4:solidFill><ns4:latin typeface="Georgia"/><ns4:ea typeface="Georgia"/></ns4:defRPr></ns4:lvl2pPr><ns4:lvl3pPr algn="l"><ns4:buNone/><ns4:defRPr sz="2800" dirty="0" b="1"><ns4:solidFill><ns4:srgbClr val="FFFFFF"/></ns4:solidFill><ns4:latin typeface="Georgia"/><ns4:ea typeface="Georgia"/></ns4:defRPr></ns4:lvl3pPr><ns4:lvl4pPr algn="l"><ns4:buNone/><ns4:defRPr sz="2800" dirty="0" b="1"><ns4:solidFill><ns4:srgbClr val="FFFFFF"/></ns4:solidFill><ns4:latin typeface="Georgia"/><ns4:ea typeface="Georgia"/></ns4:defRPr></ns4:lvl4pPr><ns4:lvl5pPr algn="l"><ns4:buNone/><ns4:defRPr sz="2800" dirty="0" b="1"><ns4:solidFill><ns4:srgbClr val="FFFFFF"/></ns4:solidFill><ns4:latin typeface="Georgia"/><ns4:ea typeface="Georgia"/></ns4:defRPr></ns4:lvl5pPr><ns4:lvl6pPr algn="l"><ns4:buNone/><ns4:defRPr sz="2800" dirty="0" b="1"><ns4:solidFill><ns4:srgbClr val="FFFFFF"/></ns4:solidFill><ns4:latin typeface="Georgia"/><ns4:ea typeface="Georgia"/></ns4:defRPr></ns4:lvl6pPr><ns4:lvl7pPr algn="l"><ns4:buNone/><ns4:defRPr sz="2800" dirty="0" b="1"><ns4:solidFill><ns4:srgbClr val="FFFFFF"/></ns4:solidFill><ns4:latin typeface="Georgia"/><ns4:ea typeface="Georgia"/></ns4:defRPr></ns4:lvl7pPr><ns4:lvl8pPr algn="l"><ns4:buNone/><ns4:defRPr sz="2800" dirty="0" b="1"><ns4:solidFill><ns4:srgbClr val="FFFFFF"/></ns4:solidFill><ns4:latin typeface="Georgia"/><ns4:ea typeface="Georgia"/></ns4:defRPr></ns4:lvl8pPr><ns4:lvl9pPr algn="l"><ns4:buNone/><ns4:defRPr sz="2800" dirty="0" b="1"><ns4:solidFill><ns4:srgbClr val="FFFFFF"/></ns4:solidFill><ns4:latin typeface="Georgia"/><ns4:ea typeface="Georgia"/></ns4:defRPr></ns4:lvl9pPr></ns4:lstStyle/><ns5:p xmlns:ns5="http://schemas.openxmlformats.org/drawingml/2006/main"><ns5:pPr algn="l"><ns5:buNone/></ns5:pPr><ns5:r><ns5:rPr lang="ja-JP"/><ns5:t>1. アクション項目
+<ns0:sldLayout xmlns:ns0="http://schemas.openxmlformats.org/presentationml/2006/main" type="blank" preserve="1"><ns0:cSld name="Closing.1Steps.Single+1Notes"><ns0:spTree><ns0:nvGrpSpPr><ns0:cNvPr id="1" name=""/><ns0:cNvGrpSpPr/><ns0:nvPr/></ns0:nvGrpSpPr><ns0:grpSpPr><ns1:xfrm xmlns:ns1="http://schemas.openxmlformats.org/drawingml/2006/main"><ns1:off x="0" y="0"/><ns1:ext cx="0" cy="0"/><ns1:chOff x="0" y="0"/><ns1:chExt cx="0" cy="0"/></ns1:xfrm></ns0:grpSpPr><ns0:sp><ns0:nvSpPr><ns0:cNvPr id="2" name="BG"/><ns0:cNvSpPr><ns1:spLocks xmlns:ns1="http://schemas.openxmlformats.org/drawingml/2006/main" noGrp="1" noSelect="0" noRot="1" noMove="1"/></ns0:cNvSpPr><ns0:nvPr/></ns0:nvSpPr><ns0:spPr><ns2:xfrm xmlns:ns2="http://schemas.openxmlformats.org/drawingml/2006/main"><ns2:off x="0" y="0"/><ns2:ext cx="12192000" cy="6858000"/></ns2:xfrm><ns3:prstGeom xmlns:ns3="http://schemas.openxmlformats.org/drawingml/2006/main" prst="rect"/><ns4:solidFill xmlns:ns4="http://schemas.openxmlformats.org/drawingml/2006/main"><ns4:srgbClr val="1E2761"/></ns4:solidFill><ns5:ln xmlns:ns5="http://schemas.openxmlformats.org/drawingml/2006/main"><ns5:noFill/></ns5:ln></ns0:spPr></ns0:sp><ns0:sp><ns0:nvSpPr><ns0:cNvPr id="3" name="AccentBar"/><ns0:cNvSpPr><ns1:spLocks xmlns:ns1="http://schemas.openxmlformats.org/drawingml/2006/main" noGrp="1" noSelect="0" noRot="1" noMove="1"/></ns0:cNvSpPr><ns0:nvPr/></ns0:nvSpPr><ns0:spPr><ns2:xfrm xmlns:ns2="http://schemas.openxmlformats.org/drawingml/2006/main"><ns2:off x="0" y="0"/><ns2:ext cx="164592" cy="6858000"/></ns2:xfrm><ns3:prstGeom xmlns:ns3="http://schemas.openxmlformats.org/drawingml/2006/main" prst="rect"/><ns4:solidFill xmlns:ns4="http://schemas.openxmlformats.org/drawingml/2006/main"><ns4:srgbClr val="3B82F6"/></ns4:solidFill><ns5:ln xmlns:ns5="http://schemas.openxmlformats.org/drawingml/2006/main"><ns5:noFill/></ns5:ln></ns0:spPr></ns0:sp><ns0:sp><ns0:nvSpPr><ns0:cNvPr id="4" name="StepsPanel"/><ns0:cNvSpPr><ns1:spLocks xmlns:ns1="http://schemas.openxmlformats.org/drawingml/2006/main" noGrp="1" noSelect="0" noRot="1" noMove="1"/></ns0:cNvSpPr><ns0:nvPr/></ns0:nvSpPr><ns0:spPr><ns2:xfrm xmlns:ns2="http://schemas.openxmlformats.org/drawingml/2006/main"><ns2:off x="731520" y="914400"/><ns2:ext cx="6858000" cy="5029200"/></ns2:xfrm><ns3:prstGeom xmlns:ns3="http://schemas.openxmlformats.org/drawingml/2006/main" prst="roundRect"><ns3:avLst><ns3:gd name="adj" fmla="val 10000"/></ns3:avLst></ns3:prstGeom><ns4:solidFill xmlns:ns4="http://schemas.openxmlformats.org/drawingml/2006/main"><ns4:srgbClr val="141B41"/></ns4:solidFill><ns5:ln xmlns:ns5="http://schemas.openxmlformats.org/drawingml/2006/main"><ns5:noFill/></ns5:ln></ns0:spPr></ns0:sp><ns0:sp><ns0:nvSpPr><ns0:cNvPr id="5" name="CTAPanel"/><ns0:cNvSpPr><ns1:spLocks xmlns:ns1="http://schemas.openxmlformats.org/drawingml/2006/main" noGrp="1" noSelect="0" noRot="1" noMove="1"/></ns0:cNvSpPr><ns0:nvPr/></ns0:nvSpPr><ns0:spPr><ns2:xfrm xmlns:ns2="http://schemas.openxmlformats.org/drawingml/2006/main"><ns2:off x="8046720" y="914400"/><ns2:ext cx="3657600" cy="5029200"/></ns2:xfrm><ns3:prstGeom xmlns:ns3="http://schemas.openxmlformats.org/drawingml/2006/main" prst="roundRect"><ns3:avLst><ns3:gd name="adj" fmla="val 10000"/></ns3:avLst></ns3:prstGeom><ns4:solidFill xmlns:ns4="http://schemas.openxmlformats.org/drawingml/2006/main"><ns4:srgbClr val="2D3A6E"/></ns4:solidFill><ns5:ln xmlns:ns5="http://schemas.openxmlformats.org/drawingml/2006/main"><ns5:noFill/></ns5:ln></ns0:spPr></ns0:sp><ns0:sp><ns0:nvSpPr><ns0:cNvPr id="10" name="Title.Left"/><ns0:cNvSpPr><ns1:spLocks xmlns:ns1="http://schemas.openxmlformats.org/drawingml/2006/main" noGrp="1"/></ns0:cNvSpPr><ns0:nvPr><ns0:ph idx="15" type="body"/></ns0:nvPr></ns0:nvSpPr><ns0:spPr><ns2:xfrm xmlns:ns2="http://schemas.openxmlformats.org/drawingml/2006/main"><ns2:off x="1097280" y="1188720"/><ns2:ext cx="6217920" cy="640080"/></ns2:xfrm></ns0:spPr><ns0:txBody><ns3:bodyPr xmlns:ns3="http://schemas.openxmlformats.org/drawingml/2006/main" wrap="square" anchor="t" anchorCtr="0"/><ns4:lstStyle><ns4:defPPr><ns4:defRPr sz="2800" b="1"><ns4:solidFill><ns4:srgbClr val="FFFFFF"/></ns4:solidFill></ns4:defRPr></ns4:defPPr></ns4:lstStyle><ns4:defPPr algn="l"><ns4:buNone/><ns4:defRPr sz="2800" dirty="0" b="1"><ns4:solidFill><ns4:srgbClr val="FFFFFF"/></ns4:solidFill><ns4:latin typeface="Georgia"/><ns4:ea typeface="Georgia"/></ns4:defRPr></ns4:defPPr><ns4:lvl1pPr algn="l"><ns4:buNone/><ns4:defRPr sz="2800" dirty="0" b="1"><ns4:solidFill><ns4:srgbClr val="FFFFFF"/></ns4:solidFill><ns4:latin typeface="Georgia"/><ns4:ea typeface="Georgia"/></ns4:defRPr></ns4:lvl1pPr><ns4:lvl2pPr algn="l"><ns4:buNone/><ns4:defRPr sz="2800" dirty="0" b="1"><ns4:solidFill><ns4:srgbClr val="FFFFFF"/></ns4:solidFill><ns4:latin typeface="Georgia"/><ns4:ea typeface="Georgia"/></ns4:defRPr></ns4:lvl2pPr><ns4:lvl3pPr algn="l"><ns4:buNone/><ns4:defRPr sz="2800" dirty="0" b="1"><ns4:solidFill><ns4:srgbClr val="FFFFFF"/></ns4:solidFill><ns4:latin typeface="Georgia"/><ns4:ea typeface="Georgia"/></ns4:defRPr></ns4:lvl3pPr><ns4:lvl4pPr algn="l"><ns4:buNone/><ns4:defRPr sz="2800" dirty="0" b="1"><ns4:solidFill><ns4:srgbClr val="FFFFFF"/></ns4:solidFill><ns4:latin typeface="Georgia"/><ns4:ea typeface="Georgia"/></ns4:defRPr></ns4:lvl4pPr><ns4:lvl5pPr algn="l"><ns4:buNone/><ns4:defRPr sz="2800" dirty="0" b="1"><ns4:solidFill><ns4:srgbClr val="FFFFFF"/></ns4:solidFill><ns4:latin typeface="Georgia"/><ns4:ea typeface="Georgia"/></ns4:defRPr></ns4:lvl5pPr><ns4:lvl6pPr algn="l"><ns4:buNone/><ns4:defRPr sz="2800" dirty="0" b="1"><ns4:solidFill><ns4:srgbClr val="FFFFFF"/></ns4:solidFill><ns4:latin typeface="Georgia"/><ns4:ea typeface="Georgia"/></ns4:defRPr></ns4:lvl6pPr><ns4:lvl7pPr algn="l"><ns4:buNone/><ns4:defRPr sz="2800" dirty="0" b="1"><ns4:solidFill><ns4:srgbClr val="FFFFFF"/></ns4:solidFill><ns4:latin typeface="Georgia"/><ns4:ea typeface="Georgia"/></ns4:defRPr></ns4:lvl7pPr><ns4:lvl8pPr algn="l"><ns4:buNone/><ns4:defRPr sz="2800" dirty="0" b="1"><ns4:solidFill><ns4:srgbClr val="FFFFFF"/></ns4:solidFill><ns4:latin typeface="Georgia"/><ns4:ea typeface="Georgia"/></ns4:defRPr></ns4:lvl8pPr><ns4:lvl9pPr algn="l"><ns4:buNone/><ns4:defRPr sz="2800" dirty="0" b="1"><ns4:solidFill><ns4:srgbClr val="FFFFFF"/></ns4:solidFill><ns4:latin typeface="Georgia"/><ns4:ea typeface="Georgia"/></ns4:defRPr></ns4:lvl9pPr></ns4:lstStyle/><ns5:p xmlns:ns5="http://schemas.openxmlformats.org/drawingml/2006/main"><ns5:pPr algn="l"><ns5:buNone/></ns5:pPr><ns5:r><ns5:rPr lang="ja-JP"/><ns5:t>1. アクション項目
 
 2. アクション項目
 
-3. アクション項目</ns5:t></ns5:r></ns5:p></ns0:txBody></ns0:sp><ns0:sp><ns0:nvSpPr><ns0:cNvPr id="21" name="Notes.Right"/><ns0:cNvSpPr><ns1:spLocks xmlns:ns1="http://schemas.openxmlformats.org/drawingml/2006/main" noGrp="1"/></ns0:cNvSpPr><ns0:nvPr><ns0:ph idx="2" type="body"/></ns0:nvPr></ns0:nvSpPr><ns0:spPr><ns2:xfrm xmlns:ns2="http://schemas.openxmlformats.org/drawingml/2006/main"><ns2:off x="8321040" y="1188720"/><ns2:ext cx="3108960" cy="4572000"/></ns2:xfrm></ns0:spPr><ns0:txBody><ns3:bodyPr xmlns:ns3="http://schemas.openxmlformats.org/drawingml/2006/main" wrap="square" anchor="t" anchorCtr="0"/><ns4:lstStyle xmlns:ns4="http://schemas.openxmlformats.org/drawingml/2006/main"><ns4:defPPr algn="l"><ns4:buNone/><ns4:defRPr sz="1400" dirty="0"><ns4:solidFill><ns4:srgbClr val="FFFFFF"/></ns4:solidFill><ns4:latin typeface="Calibri"/><ns4:ea typeface="Calibri"/></ns4:defRPr></ns4:defPPr><ns4:lvl1pPr algn="l"><ns4:buNone/><ns4:defRPr sz="1400" dirty="0"><ns4:solidFill><ns4:srgbClr val="FFFFFF"/></ns4:solidFill><ns4:latin typeface="Calibri"/><ns4:ea typeface="Calibri"/></ns4:defRPr></ns4:lvl1pPr><ns4:lvl2pPr algn="l"><ns4:buNone/><ns4:defRPr sz="1400" dirty="0"><ns4:solidFill><ns4:srgbClr val="FFFFFF"/></ns4:solidFill><ns4:latin typeface="Calibri"/><ns4:ea typeface="Calibri"/></ns4:defRPr></ns4:lvl2pPr><ns4:lvl3pPr algn="l"><ns4:buNone/><ns4:defRPr sz="1400" dirty="0"><ns4:solidFill><ns4:srgbClr val="FFFFFF"/></ns4:solidFill><ns4:latin typeface="Calibri"/><ns4:ea typeface="Calibri"/></ns4:defRPr></ns4:lvl3pPr><ns4:lvl4pPr algn="l"><ns4:buNone/><ns4:defRPr sz="1400" dirty="0"><ns4:solidFill><ns4:srgbClr val="FFFFFF"/></ns4:solidFill><ns4:latin typeface="Calibri"/><ns4:ea typeface="Calibri"/></ns4:defRPr></ns4:lvl4pPr><ns4:lvl5pPr algn="l"><ns4:buNone/><ns4:defRPr sz="1400" dirty="0"><ns4:solidFill><ns4:srgbClr val="FFFFFF"/></ns4:solidFill><ns4:latin typeface="Calibri"/><ns4:ea typeface="Calibri"/></ns4:defRPr></ns4:lvl5pPr><ns4:lvl6pPr algn="l"><ns4:buNone/><ns4:defRPr sz="1400" dirty="0"><ns4:solidFill><ns4:srgbClr val="FFFFFF"/></ns4:solidFill><ns4:latin typeface="Calibri"/><ns4:ea typeface="Calibri"/></ns4:defRPr></ns4:lvl6pPr><ns4:lvl7pPr algn="l"><ns4:buNone/><ns4:defRPr sz="1400" dirty="0"><ns4:solidFill><ns4:srgbClr val="FFFFFF"/></ns4:solidFill><ns4:latin typeface="Calibri"/><ns4:ea typeface="Calibri"/></ns4:defRPr></ns4:lvl7pPr><ns4:lvl8pPr algn="l"><ns4:buNone/><ns4:defRPr sz="1400" dirty="0"><ns4:solidFill><ns4:srgbClr val="FFFFFF"/></ns4:solidFill><ns4:latin typeface="Calibri"/><ns4:ea typeface="Calibri"/></ns4:defRPr></ns4:lvl8pPr><ns4:lvl9pPr algn="l"><ns4:buNone/><ns4:defRPr sz="1400" dirty="0"><ns4:solidFill><ns4:srgbClr val="FFFFFF"/></ns4:solidFill><ns4:latin typeface="Calibri"/><ns4:ea typeface="Calibri"/></ns4:defRPr></ns4:lvl9pPr></ns4:lstStyle><ns5:p xmlns:ns5="http://schemas.openxmlformats.org/drawingml/2006/main"><ns5:pPr algn="l"><ns5:buNone/></ns5:pPr><ns5:r><ns5:rPr lang="ja-JP"/><ns5:t>期限
+3. アクション項目</ns5:t></ns5:r></ns5:p></ns0:txBody></ns0:sp><ns0:sp><ns0:nvSpPr><ns0:cNvPr id="21" name="Notes.Right"/><ns0:cNvSpPr><ns1:spLocks xmlns:ns1="http://schemas.openxmlformats.org/drawingml/2006/main" noGrp="1"/></ns0:cNvSpPr><ns0:nvPr><ns0:ph idx="2" type="body"/></ns0:nvPr></ns0:nvSpPr><ns0:spPr><ns2:xfrm xmlns:ns2="http://schemas.openxmlformats.org/drawingml/2006/main"><ns2:off x="8321040" y="1188720"/><ns2:ext cx="3108960" cy="4572000"/></ns2:xfrm></ns0:spPr><ns0:txBody><ns3:bodyPr xmlns:ns3="http://schemas.openxmlformats.org/drawingml/2006/main" wrap="square" anchor="t" anchorCtr="0"/><ns4:lstStyle><ns4:defPPr><ns4:defRPr><ns4:solidFill><ns4:srgbClr val="FFFFFF"/></ns4:solidFill></ns4:defRPr></ns4:defPPr></ns4:lstStyle><ns4:defPPr algn="l"><ns4:buNone/><ns4:defRPr sz="1400" dirty="0"><ns4:solidFill><ns4:srgbClr val="FFFFFF"/></ns4:solidFill><ns4:latin typeface="Calibri"/><ns4:ea typeface="Calibri"/></ns4:defRPr></ns4:defPPr><ns4:lvl1pPr algn="l"><ns4:buNone/><ns4:defRPr sz="1400" dirty="0"><ns4:solidFill><ns4:srgbClr val="FFFFFF"/></ns4:solidFill><ns4:latin typeface="Calibri"/><ns4:ea typeface="Calibri"/></ns4:defRPr></ns4:lvl1pPr><ns4:lvl2pPr algn="l"><ns4:buNone/><ns4:defRPr sz="1400" dirty="0"><ns4:solidFill><ns4:srgbClr val="FFFFFF"/></ns4:solidFill><ns4:latin typeface="Calibri"/><ns4:ea typeface="Calibri"/></ns4:defRPr></ns4:lvl2pPr><ns4:lvl3pPr algn="l"><ns4:buNone/><ns4:defRPr sz="1400" dirty="0"><ns4:solidFill><ns4:srgbClr val="FFFFFF"/></ns4:solidFill><ns4:latin typeface="Calibri"/><ns4:ea typeface="Calibri"/></ns4:defRPr></ns4:lvl3pPr><ns4:lvl4pPr algn="l"><ns4:buNone/><ns4:defRPr sz="1400" dirty="0"><ns4:solidFill><ns4:srgbClr val="FFFFFF"/></ns4:solidFill><ns4:latin typeface="Calibri"/><ns4:ea typeface="Calibri"/></ns4:defRPr></ns4:lvl4pPr><ns4:lvl5pPr algn="l"><ns4:buNone/><ns4:defRPr sz="1400" dirty="0"><ns4:solidFill><ns4:srgbClr val="FFFFFF"/></ns4:solidFill><ns4:latin typeface="Calibri"/><ns4:ea typeface="Calibri"/></ns4:defRPr></ns4:lvl5pPr><ns4:lvl6pPr algn="l"><ns4:buNone/><ns4:defRPr sz="1400" dirty="0"><ns4:solidFill><ns4:srgbClr val="FFFFFF"/></ns4:solidFill><ns4:latin typeface="Calibri"/><ns4:ea typeface="Calibri"/></ns4:defRPr></ns4:lvl6pPr><ns4:lvl7pPr algn="l"><ns4:buNone/><ns4:defRPr sz="1400" dirty="0"><ns4:solidFill><ns4:srgbClr val="FFFFFF"/></ns4:solidFill><ns4:latin typeface="Calibri"/><ns4:ea typeface="Calibri"/></ns4:defRPr></ns4:lvl7pPr><ns4:lvl8pPr algn="l"><ns4:buNone/><ns4:defRPr sz="1400" dirty="0"><ns4:solidFill><ns4:srgbClr val="FFFFFF"/></ns4:solidFill><ns4:latin typeface="Calibri"/><ns4:ea typeface="Calibri"/></ns4:defRPr></ns4:lvl8pPr><ns4:lvl9pPr algn="l"><ns4:buNone/><ns4:defRPr sz="1400" dirty="0"><ns4:solidFill><ns4:srgbClr val="FFFFFF"/></ns4:solidFill><ns4:latin typeface="Calibri"/><ns4:ea typeface="Calibri"/></ns4:defRPr></ns4:lvl9pPr></ns4:lstStyle><ns5:p xmlns:ns5="http://schemas.openxmlformats.org/drawingml/2006/main"><ns5:pPr algn="l"><ns5:buNone/></ns5:pPr><ns5:r><ns5:rPr lang="ja-JP"/><ns5:t>期限
 
 担当者
 
@@ -1743,7 +1707,7 @@
           <a:bodyPr wrap="square" anchor="t" anchorCtr="0"/>
           <a:lstStyle>
             <a:defPPr>
-              <a:defRPr>
+              <a:defRPr sz="1300" b="1">
                 <a:solidFill>
                   <a:srgbClr val="3B82F6"/>
                 </a:solidFill>
@@ -1781,7 +1745,7 @@
           <a:bodyPr wrap="square" anchor="t" anchorCtr="0"/>
           <a:lstStyle>
             <a:defPPr>
-              <a:defRPr>
+              <a:defRPr sz="4000" b="1">
                 <a:solidFill>
                   <a:srgbClr val="FFFFFF"/>
                 </a:solidFill>
@@ -1819,7 +1783,7 @@
           <a:bodyPr wrap="square" anchor="t" anchorCtr="0"/>
           <a:lstStyle>
             <a:defPPr>
-              <a:defRPr>
+              <a:defRPr sz="1600">
                 <a:solidFill>
                   <a:srgbClr val="CADCFC"/>
                 </a:solidFill>
@@ -1927,8 +1891,8 @@
         <p:txBody>
           <a:bodyPr wrap="square" anchor="t" anchorCtr="0"/>
           <a:lstStyle>
-            <a:defPPr>
-              <a:defRPr>
+            <a:defPPr algn="ctr">
+              <a:defRPr sz="8000" b="1">
                 <a:solidFill>
                   <a:srgbClr val="3B82F6"/>
                 </a:solidFill>
@@ -1965,8 +1929,8 @@
         <p:txBody>
           <a:bodyPr wrap="square" anchor="t" anchorCtr="0"/>
           <a:lstStyle>
-            <a:defPPr>
-              <a:defRPr>
+            <a:defPPr algn="ctr">
+              <a:defRPr sz="1200">
                 <a:solidFill>
                   <a:srgbClr val="CADCFC"/>
                 </a:solidFill>
@@ -2004,7 +1968,7 @@
           <a:bodyPr wrap="square" anchor="t" anchorCtr="0"/>
           <a:lstStyle>
             <a:defPPr>
-              <a:defRPr>
+              <a:defRPr sz="3800" b="1">
                 <a:solidFill>
                   <a:srgbClr val="FFFFFF"/>
                 </a:solidFill>
@@ -2042,7 +2006,7 @@
           <a:bodyPr wrap="square" anchor="t" anchorCtr="0"/>
           <a:lstStyle>
             <a:defPPr>
-              <a:defRPr>
+              <a:defRPr sz="1600">
                 <a:solidFill>
                   <a:srgbClr val="CADCFC"/>
                 </a:solidFill>
@@ -2213,7 +2177,7 @@
           <a:bodyPr wrap="square" anchor="t" anchorCtr="0"/>
           <a:lstStyle>
             <a:defPPr>
-              <a:defRPr>
+              <a:defRPr sz="1300" b="1">
                 <a:solidFill>
                   <a:srgbClr val="3B82F6"/>
                 </a:solidFill>
@@ -2251,7 +2215,7 @@
           <a:bodyPr wrap="square" anchor="t" anchorCtr="0"/>
           <a:lstStyle>
             <a:defPPr>
-              <a:defRPr>
+              <a:defRPr sz="4400" b="1">
                 <a:solidFill>
                   <a:srgbClr val="FFFFFF"/>
                 </a:solidFill>
@@ -2289,7 +2253,7 @@
           <a:bodyPr wrap="square" anchor="t" anchorCtr="0"/>
           <a:lstStyle>
             <a:defPPr>
-              <a:defRPr>
+              <a:defRPr sz="1500">
                 <a:solidFill>
                   <a:srgbClr val="CADCFC"/>
                 </a:solidFill>
@@ -2372,7 +2336,7 @@
           <a:bodyPr wrap="square" anchor="t" anchorCtr="0"/>
           <a:lstStyle>
             <a:defPPr>
-              <a:defRPr>
+              <a:defRPr sz="2800" b="1">
                 <a:solidFill>
                   <a:srgbClr val="FFFFFF"/>
                 </a:solidFill>
@@ -2410,7 +2374,7 @@
           <a:bodyPr wrap="square" anchor="t" anchorCtr="0"/>
           <a:lstStyle>
             <a:defPPr>
-              <a:defRPr>
+              <a:defRPr sz="1200">
                 <a:solidFill>
                   <a:srgbClr val="CADCFC"/>
                 </a:solidFill>
@@ -2446,15 +2410,7 @@
         </p:spPr>
         <p:txBody>
           <a:bodyPr wrap="square" anchor="t" anchorCtr="0"/>
-          <a:lstStyle>
-            <a:defPPr>
-              <a:defRPr>
-                <a:solidFill>
-                  <a:srgbClr val="1E293B"/>
-                </a:solidFill>
-              </a:defRPr>
-            </a:defPPr>
-          </a:lstStyle>
+          <a:lstStyle/>
           <a:p>
             <a:pPr algn="l">
               <a:buNone/>
@@ -2485,8 +2441,8 @@
         <p:txBody>
           <a:bodyPr wrap="square" anchor="t" anchorCtr="0"/>
           <a:lstStyle>
-            <a:defPPr>
-              <a:defRPr>
+            <a:defPPr algn="r">
+              <a:defRPr sz="1000">
                 <a:solidFill>
                   <a:srgbClr val="94A3B8"/>
                 </a:solidFill>
@@ -2569,7 +2525,7 @@
           <a:bodyPr wrap="square" anchor="t" anchorCtr="0"/>
           <a:lstStyle>
             <a:defPPr>
-              <a:defRPr>
+              <a:defRPr sz="2800" b="1">
                 <a:solidFill>
                   <a:srgbClr val="FFFFFF"/>
                 </a:solidFill>
@@ -2607,7 +2563,7 @@
           <a:bodyPr wrap="square" anchor="t" anchorCtr="0"/>
           <a:lstStyle>
             <a:defPPr>
-              <a:defRPr>
+              <a:defRPr sz="1200">
                 <a:solidFill>
                   <a:srgbClr val="CADCFC"/>
                 </a:solidFill>
@@ -2669,15 +2625,7 @@
         </p:spPr>
         <p:txBody>
           <a:bodyPr wrap="square" anchor="t" anchorCtr="0"/>
-          <a:lstStyle>
-            <a:defPPr>
-              <a:defRPr>
-                <a:solidFill>
-                  <a:srgbClr val="1E293B"/>
-                </a:solidFill>
-              </a:defRPr>
-            </a:defPPr>
-          </a:lstStyle>
+          <a:lstStyle/>
           <a:p>
             <a:pPr algn="l">
               <a:buNone/>
@@ -2709,11 +2657,7 @@
           <a:bodyPr wrap="square" anchor="t" anchorCtr="0"/>
           <a:lstStyle>
             <a:defPPr>
-              <a:defRPr>
-                <a:solidFill>
-                  <a:srgbClr val="1E293B"/>
-                </a:solidFill>
-              </a:defRPr>
+              <a:defRPr sz="1200"/>
             </a:defPPr>
           </a:lstStyle>
           <a:p>
@@ -2748,8 +2692,8 @@
         <p:txBody>
           <a:bodyPr wrap="square" anchor="t" anchorCtr="0"/>
           <a:lstStyle>
-            <a:defPPr>
-              <a:defRPr>
+            <a:defPPr algn="r">
+              <a:defRPr sz="1000">
                 <a:solidFill>
                   <a:srgbClr val="94A3B8"/>
                 </a:solidFill>
@@ -2832,7 +2776,7 @@
           <a:bodyPr wrap="square" anchor="t" anchorCtr="0"/>
           <a:lstStyle>
             <a:defPPr>
-              <a:defRPr>
+              <a:defRPr sz="2800" b="1">
                 <a:solidFill>
                   <a:srgbClr val="FFFFFF"/>
                 </a:solidFill>
@@ -2870,7 +2814,7 @@
           <a:bodyPr wrap="square" anchor="t" anchorCtr="0"/>
           <a:lstStyle>
             <a:defPPr>
-              <a:defRPr>
+              <a:defRPr sz="1200">
                 <a:solidFill>
                   <a:srgbClr val="CADCFC"/>
                 </a:solidFill>
@@ -2928,15 +2872,7 @@
         </p:spPr>
         <p:txBody>
           <a:bodyPr wrap="square" anchor="t" anchorCtr="0"/>
-          <a:lstStyle>
-            <a:defPPr>
-              <a:defRPr>
-                <a:solidFill>
-                  <a:srgbClr val="1E293B"/>
-                </a:solidFill>
-              </a:defRPr>
-            </a:defPPr>
-          </a:lstStyle>
+          <a:lstStyle/>
           <a:p>
             <a:pPr algn="l">
               <a:buNone/>
@@ -2968,9 +2904,9 @@
           <a:bodyPr wrap="square" anchor="t" anchorCtr="0"/>
           <a:lstStyle>
             <a:defPPr>
-              <a:defRPr>
+              <a:defRPr sz="1000">
                 <a:solidFill>
-                  <a:srgbClr val="1E293B"/>
+                  <a:srgbClr val="94A3B8"/>
                 </a:solidFill>
               </a:defRPr>
             </a:defPPr>
@@ -3005,8 +2941,8 @@
         <p:txBody>
           <a:bodyPr wrap="square" anchor="t" anchorCtr="0"/>
           <a:lstStyle>
-            <a:defPPr>
-              <a:defRPr>
+            <a:defPPr algn="r">
+              <a:defRPr sz="1000">
                 <a:solidFill>
                   <a:srgbClr val="94A3B8"/>
                 </a:solidFill>
@@ -3308,34 +3244,26 @@
   </p:sldLayoutIdLst>
   <p:txStyles>
     <p:titleStyle>
-      <a:lvl1pPr algn="l" defTabSz="457200" rtl="0" eaLnBrk="1" latinLnBrk="0" hangingPunct="1">
-        <a:spcBef>
-          <a:spcPct val="0"/>
-        </a:spcBef>
+      <a:lvl1pPr algn="l">
         <a:buNone/>
-        <a:defRPr sz="4400" kern="1200" b="1">
+        <a:defRPr sz="4400" b="1">
           <a:solidFill>
             <a:srgbClr val="FFFFFF"/>
           </a:solidFill>
-          <a:latin typeface="Georgia"/>
-          <a:ea typeface="Georgia"/>
-          <a:cs typeface="Georgia"/>
+          <a:latin typeface="+mj-lt"/>
+          <a:ea typeface="+mj-ea"/>
         </a:defRPr>
       </a:lvl1pPr>
     </p:titleStyle>
     <p:bodyStyle>
-      <a:lvl1pPr marL="342900" indent="-342900" algn="l" defTabSz="457200" rtl="0" eaLnBrk="1" latinLnBrk="0" hangingPunct="1">
-        <a:spcBef>
-          <a:spcPct val="20000"/>
-        </a:spcBef>
+      <a:lvl1pPr algn="l">
         <a:buNone/>
-        <a:defRPr sz="1400" kern="1200">
+        <a:defRPr sz="1400">
           <a:solidFill>
             <a:srgbClr val="1E293B"/>
           </a:solidFill>
-          <a:latin typeface="Calibri"/>
-          <a:ea typeface="Calibri"/>
-          <a:cs typeface="Calibri"/>
+          <a:latin typeface="+mn-lt"/>
+          <a:ea typeface="+mn-ea"/>
         </a:defRPr>
       </a:lvl1pPr>
     </p:bodyStyle>
@@ -8788,7 +8716,7 @@
     </a:clrScheme>
     <a:fontScheme name="Office">
       <a:majorFont>
-        <a:latin typeface="Calibri"/>
+        <a:latin typeface="Georgia"/>
         <a:ea typeface=""/>
         <a:cs typeface=""/>
         <a:font script="Jpan" typeface="ＭＳ Ｐゴシック"/>
